--- a/~sasano/lecture/proglang/26/proglang11.pptx
+++ b/~sasano/lecture/proglang/26/proglang11.pptx
@@ -127,6 +127,22 @@
       </a:defRPr>
     </a:lvl9pPr>
   </p:defaultTextStyle>
+  <p:extLst>
+    <p:ext uri="{EFAFB233-063F-42B5-8137-9DF3F51BA10A}">
+      <p15:sldGuideLst xmlns:p15="http://schemas.microsoft.com/office/powerpoint/2012/main">
+        <p15:guide id="1" orient="horz" pos="2160">
+          <p15:clr>
+            <a:srgbClr val="A4A3A4"/>
+          </p15:clr>
+        </p15:guide>
+        <p15:guide id="2" pos="2880">
+          <p15:clr>
+            <a:srgbClr val="A4A3A4"/>
+          </p15:clr>
+        </p15:guide>
+      </p15:sldGuideLst>
+    </p:ext>
+  </p:extLst>
 </p:presentation>
 </file>
 
@@ -168,10 +184,9 @@
           <a:lstStyle/>
           <a:p>
             <a:r>
-              <a:rPr kumimoji="1" lang="ja-JP" altLang="en-US" smtClean="0"/>
+              <a:rPr kumimoji="1" lang="ja-JP" altLang="en-US"/>
               <a:t>マスター タイトルの書式設定</a:t>
             </a:r>
-            <a:endParaRPr kumimoji="1" lang="ja-JP" altLang="en-US"/>
           </a:p>
         </p:txBody>
       </p:sp>
@@ -287,10 +302,9 @@
           </a:lstStyle>
           <a:p>
             <a:r>
-              <a:rPr kumimoji="1" lang="ja-JP" altLang="en-US" smtClean="0"/>
+              <a:rPr kumimoji="1" lang="ja-JP" altLang="en-US"/>
               <a:t>マスター サブタイトルの書式設定</a:t>
             </a:r>
-            <a:endParaRPr kumimoji="1" lang="ja-JP" altLang="en-US"/>
           </a:p>
         </p:txBody>
       </p:sp>
@@ -311,7 +325,7 @@
           <a:p>
             <a:fld id="{01AC0B91-4105-FC41-AF23-562AED5B73ED}" type="datetimeFigureOut">
               <a:rPr kumimoji="1" lang="ja-JP" altLang="en-US" smtClean="0"/>
-              <a:t>17/09/18</a:t>
+              <a:t>2026/9/28</a:t>
             </a:fld>
             <a:endParaRPr kumimoji="1" lang="ja-JP" altLang="en-US"/>
           </a:p>
@@ -405,10 +419,9 @@
           <a:lstStyle/>
           <a:p>
             <a:r>
-              <a:rPr kumimoji="1" lang="ja-JP" altLang="en-US" smtClean="0"/>
+              <a:rPr kumimoji="1" lang="ja-JP" altLang="en-US"/>
               <a:t>マスター タイトルの書式設定</a:t>
             </a:r>
-            <a:endParaRPr kumimoji="1" lang="ja-JP" altLang="en-US"/>
           </a:p>
         </p:txBody>
       </p:sp>
@@ -429,70 +442,69 @@
           <a:p>
             <a:pPr lvl="0"/>
             <a:r>
-              <a:rPr kumimoji="1" lang="ja-JP" altLang="en-US" smtClean="0"/>
+              <a:rPr kumimoji="1" lang="ja-JP" altLang="en-US"/>
               <a:t>マスター テキストの書式設定</a:t>
             </a:r>
           </a:p>
           <a:p>
             <a:pPr lvl="1"/>
             <a:r>
-              <a:rPr kumimoji="1" lang="ja-JP" altLang="en-US" smtClean="0"/>
+              <a:rPr kumimoji="1" lang="ja-JP" altLang="en-US"/>
               <a:t>第 </a:t>
             </a:r>
             <a:r>
-              <a:rPr kumimoji="1" lang="en-US" altLang="ja-JP" smtClean="0"/>
+              <a:rPr kumimoji="1" lang="en-US" altLang="ja-JP"/>
               <a:t>2 </a:t>
             </a:r>
             <a:r>
-              <a:rPr kumimoji="1" lang="ja-JP" altLang="en-US" smtClean="0"/>
+              <a:rPr kumimoji="1" lang="ja-JP" altLang="en-US"/>
               <a:t>レベル</a:t>
             </a:r>
           </a:p>
           <a:p>
             <a:pPr lvl="2"/>
             <a:r>
-              <a:rPr kumimoji="1" lang="ja-JP" altLang="en-US" smtClean="0"/>
+              <a:rPr kumimoji="1" lang="ja-JP" altLang="en-US"/>
               <a:t>第 </a:t>
             </a:r>
             <a:r>
-              <a:rPr kumimoji="1" lang="en-US" altLang="ja-JP" smtClean="0"/>
+              <a:rPr kumimoji="1" lang="en-US" altLang="ja-JP"/>
               <a:t>3 </a:t>
             </a:r>
             <a:r>
-              <a:rPr kumimoji="1" lang="ja-JP" altLang="en-US" smtClean="0"/>
+              <a:rPr kumimoji="1" lang="ja-JP" altLang="en-US"/>
               <a:t>レベル</a:t>
             </a:r>
           </a:p>
           <a:p>
             <a:pPr lvl="3"/>
             <a:r>
-              <a:rPr kumimoji="1" lang="ja-JP" altLang="en-US" smtClean="0"/>
+              <a:rPr kumimoji="1" lang="ja-JP" altLang="en-US"/>
               <a:t>第 </a:t>
             </a:r>
             <a:r>
-              <a:rPr kumimoji="1" lang="en-US" altLang="ja-JP" smtClean="0"/>
+              <a:rPr kumimoji="1" lang="en-US" altLang="ja-JP"/>
               <a:t>4 </a:t>
             </a:r>
             <a:r>
-              <a:rPr kumimoji="1" lang="ja-JP" altLang="en-US" smtClean="0"/>
+              <a:rPr kumimoji="1" lang="ja-JP" altLang="en-US"/>
               <a:t>レベル</a:t>
             </a:r>
           </a:p>
           <a:p>
             <a:pPr lvl="4"/>
             <a:r>
-              <a:rPr kumimoji="1" lang="ja-JP" altLang="en-US" smtClean="0"/>
+              <a:rPr kumimoji="1" lang="ja-JP" altLang="en-US"/>
               <a:t>第 </a:t>
             </a:r>
             <a:r>
-              <a:rPr kumimoji="1" lang="en-US" altLang="ja-JP" smtClean="0"/>
+              <a:rPr kumimoji="1" lang="en-US" altLang="ja-JP"/>
               <a:t>5 </a:t>
             </a:r>
             <a:r>
-              <a:rPr kumimoji="1" lang="ja-JP" altLang="en-US" smtClean="0"/>
+              <a:rPr kumimoji="1" lang="ja-JP" altLang="en-US"/>
               <a:t>レベル</a:t>
             </a:r>
-            <a:endParaRPr kumimoji="1" lang="ja-JP" altLang="en-US"/>
           </a:p>
         </p:txBody>
       </p:sp>
@@ -513,7 +525,7 @@
           <a:p>
             <a:fld id="{01AC0B91-4105-FC41-AF23-562AED5B73ED}" type="datetimeFigureOut">
               <a:rPr kumimoji="1" lang="ja-JP" altLang="en-US" smtClean="0"/>
-              <a:t>17/09/18</a:t>
+              <a:t>2026/9/28</a:t>
             </a:fld>
             <a:endParaRPr kumimoji="1" lang="ja-JP" altLang="en-US"/>
           </a:p>
@@ -612,10 +624,9 @@
           <a:lstStyle/>
           <a:p>
             <a:r>
-              <a:rPr kumimoji="1" lang="ja-JP" altLang="en-US" smtClean="0"/>
+              <a:rPr kumimoji="1" lang="ja-JP" altLang="en-US"/>
               <a:t>マスター タイトルの書式設定</a:t>
             </a:r>
-            <a:endParaRPr kumimoji="1" lang="ja-JP" altLang="en-US"/>
           </a:p>
         </p:txBody>
       </p:sp>
@@ -641,70 +652,69 @@
           <a:p>
             <a:pPr lvl="0"/>
             <a:r>
-              <a:rPr kumimoji="1" lang="ja-JP" altLang="en-US" smtClean="0"/>
+              <a:rPr kumimoji="1" lang="ja-JP" altLang="en-US"/>
               <a:t>マスター テキストの書式設定</a:t>
             </a:r>
           </a:p>
           <a:p>
             <a:pPr lvl="1"/>
             <a:r>
-              <a:rPr kumimoji="1" lang="ja-JP" altLang="en-US" smtClean="0"/>
+              <a:rPr kumimoji="1" lang="ja-JP" altLang="en-US"/>
               <a:t>第 </a:t>
             </a:r>
             <a:r>
-              <a:rPr kumimoji="1" lang="en-US" altLang="ja-JP" smtClean="0"/>
+              <a:rPr kumimoji="1" lang="en-US" altLang="ja-JP"/>
               <a:t>2 </a:t>
             </a:r>
             <a:r>
-              <a:rPr kumimoji="1" lang="ja-JP" altLang="en-US" smtClean="0"/>
+              <a:rPr kumimoji="1" lang="ja-JP" altLang="en-US"/>
               <a:t>レベル</a:t>
             </a:r>
           </a:p>
           <a:p>
             <a:pPr lvl="2"/>
             <a:r>
-              <a:rPr kumimoji="1" lang="ja-JP" altLang="en-US" smtClean="0"/>
+              <a:rPr kumimoji="1" lang="ja-JP" altLang="en-US"/>
               <a:t>第 </a:t>
             </a:r>
             <a:r>
-              <a:rPr kumimoji="1" lang="en-US" altLang="ja-JP" smtClean="0"/>
+              <a:rPr kumimoji="1" lang="en-US" altLang="ja-JP"/>
               <a:t>3 </a:t>
             </a:r>
             <a:r>
-              <a:rPr kumimoji="1" lang="ja-JP" altLang="en-US" smtClean="0"/>
+              <a:rPr kumimoji="1" lang="ja-JP" altLang="en-US"/>
               <a:t>レベル</a:t>
             </a:r>
           </a:p>
           <a:p>
             <a:pPr lvl="3"/>
             <a:r>
-              <a:rPr kumimoji="1" lang="ja-JP" altLang="en-US" smtClean="0"/>
+              <a:rPr kumimoji="1" lang="ja-JP" altLang="en-US"/>
               <a:t>第 </a:t>
             </a:r>
             <a:r>
-              <a:rPr kumimoji="1" lang="en-US" altLang="ja-JP" smtClean="0"/>
+              <a:rPr kumimoji="1" lang="en-US" altLang="ja-JP"/>
               <a:t>4 </a:t>
             </a:r>
             <a:r>
-              <a:rPr kumimoji="1" lang="ja-JP" altLang="en-US" smtClean="0"/>
+              <a:rPr kumimoji="1" lang="ja-JP" altLang="en-US"/>
               <a:t>レベル</a:t>
             </a:r>
           </a:p>
           <a:p>
             <a:pPr lvl="4"/>
             <a:r>
-              <a:rPr kumimoji="1" lang="ja-JP" altLang="en-US" smtClean="0"/>
+              <a:rPr kumimoji="1" lang="ja-JP" altLang="en-US"/>
               <a:t>第 </a:t>
             </a:r>
             <a:r>
-              <a:rPr kumimoji="1" lang="en-US" altLang="ja-JP" smtClean="0"/>
+              <a:rPr kumimoji="1" lang="en-US" altLang="ja-JP"/>
               <a:t>5 </a:t>
             </a:r>
             <a:r>
-              <a:rPr kumimoji="1" lang="ja-JP" altLang="en-US" smtClean="0"/>
+              <a:rPr kumimoji="1" lang="ja-JP" altLang="en-US"/>
               <a:t>レベル</a:t>
             </a:r>
-            <a:endParaRPr kumimoji="1" lang="ja-JP" altLang="en-US"/>
           </a:p>
         </p:txBody>
       </p:sp>
@@ -725,7 +735,7 @@
           <a:p>
             <a:fld id="{01AC0B91-4105-FC41-AF23-562AED5B73ED}" type="datetimeFigureOut">
               <a:rPr kumimoji="1" lang="ja-JP" altLang="en-US" smtClean="0"/>
-              <a:t>17/09/18</a:t>
+              <a:t>2026/9/28</a:t>
             </a:fld>
             <a:endParaRPr kumimoji="1" lang="ja-JP" altLang="en-US"/>
           </a:p>
@@ -819,10 +829,9 @@
           <a:lstStyle/>
           <a:p>
             <a:r>
-              <a:rPr kumimoji="1" lang="ja-JP" altLang="en-US" smtClean="0"/>
+              <a:rPr kumimoji="1" lang="ja-JP" altLang="en-US"/>
               <a:t>マスター タイトルの書式設定</a:t>
             </a:r>
-            <a:endParaRPr kumimoji="1" lang="ja-JP" altLang="en-US"/>
           </a:p>
         </p:txBody>
       </p:sp>
@@ -843,70 +852,69 @@
           <a:p>
             <a:pPr lvl="0"/>
             <a:r>
-              <a:rPr kumimoji="1" lang="ja-JP" altLang="en-US" smtClean="0"/>
+              <a:rPr kumimoji="1" lang="ja-JP" altLang="en-US"/>
               <a:t>マスター テキストの書式設定</a:t>
             </a:r>
           </a:p>
           <a:p>
             <a:pPr lvl="1"/>
             <a:r>
-              <a:rPr kumimoji="1" lang="ja-JP" altLang="en-US" smtClean="0"/>
+              <a:rPr kumimoji="1" lang="ja-JP" altLang="en-US"/>
               <a:t>第 </a:t>
             </a:r>
             <a:r>
-              <a:rPr kumimoji="1" lang="en-US" altLang="ja-JP" smtClean="0"/>
+              <a:rPr kumimoji="1" lang="en-US" altLang="ja-JP"/>
               <a:t>2 </a:t>
             </a:r>
             <a:r>
-              <a:rPr kumimoji="1" lang="ja-JP" altLang="en-US" smtClean="0"/>
+              <a:rPr kumimoji="1" lang="ja-JP" altLang="en-US"/>
               <a:t>レベル</a:t>
             </a:r>
           </a:p>
           <a:p>
             <a:pPr lvl="2"/>
             <a:r>
-              <a:rPr kumimoji="1" lang="ja-JP" altLang="en-US" smtClean="0"/>
+              <a:rPr kumimoji="1" lang="ja-JP" altLang="en-US"/>
               <a:t>第 </a:t>
             </a:r>
             <a:r>
-              <a:rPr kumimoji="1" lang="en-US" altLang="ja-JP" smtClean="0"/>
+              <a:rPr kumimoji="1" lang="en-US" altLang="ja-JP"/>
               <a:t>3 </a:t>
             </a:r>
             <a:r>
-              <a:rPr kumimoji="1" lang="ja-JP" altLang="en-US" smtClean="0"/>
+              <a:rPr kumimoji="1" lang="ja-JP" altLang="en-US"/>
               <a:t>レベル</a:t>
             </a:r>
           </a:p>
           <a:p>
             <a:pPr lvl="3"/>
             <a:r>
-              <a:rPr kumimoji="1" lang="ja-JP" altLang="en-US" smtClean="0"/>
+              <a:rPr kumimoji="1" lang="ja-JP" altLang="en-US"/>
               <a:t>第 </a:t>
             </a:r>
             <a:r>
-              <a:rPr kumimoji="1" lang="en-US" altLang="ja-JP" smtClean="0"/>
+              <a:rPr kumimoji="1" lang="en-US" altLang="ja-JP"/>
               <a:t>4 </a:t>
             </a:r>
             <a:r>
-              <a:rPr kumimoji="1" lang="ja-JP" altLang="en-US" smtClean="0"/>
+              <a:rPr kumimoji="1" lang="ja-JP" altLang="en-US"/>
               <a:t>レベル</a:t>
             </a:r>
           </a:p>
           <a:p>
             <a:pPr lvl="4"/>
             <a:r>
-              <a:rPr kumimoji="1" lang="ja-JP" altLang="en-US" smtClean="0"/>
+              <a:rPr kumimoji="1" lang="ja-JP" altLang="en-US"/>
               <a:t>第 </a:t>
             </a:r>
             <a:r>
-              <a:rPr kumimoji="1" lang="en-US" altLang="ja-JP" smtClean="0"/>
+              <a:rPr kumimoji="1" lang="en-US" altLang="ja-JP"/>
               <a:t>5 </a:t>
             </a:r>
             <a:r>
-              <a:rPr kumimoji="1" lang="ja-JP" altLang="en-US" smtClean="0"/>
+              <a:rPr kumimoji="1" lang="ja-JP" altLang="en-US"/>
               <a:t>レベル</a:t>
             </a:r>
-            <a:endParaRPr kumimoji="1" lang="ja-JP" altLang="en-US"/>
           </a:p>
         </p:txBody>
       </p:sp>
@@ -927,7 +935,7 @@
           <a:p>
             <a:fld id="{01AC0B91-4105-FC41-AF23-562AED5B73ED}" type="datetimeFigureOut">
               <a:rPr kumimoji="1" lang="ja-JP" altLang="en-US" smtClean="0"/>
-              <a:t>17/09/18</a:t>
+              <a:t>2026/9/28</a:t>
             </a:fld>
             <a:endParaRPr kumimoji="1" lang="ja-JP" altLang="en-US"/>
           </a:p>
@@ -1030,10 +1038,9 @@
           </a:lstStyle>
           <a:p>
             <a:r>
-              <a:rPr kumimoji="1" lang="ja-JP" altLang="en-US" smtClean="0"/>
+              <a:rPr kumimoji="1" lang="ja-JP" altLang="en-US"/>
               <a:t>マスター タイトルの書式設定</a:t>
             </a:r>
-            <a:endParaRPr kumimoji="1" lang="ja-JP" altLang="en-US"/>
           </a:p>
         </p:txBody>
       </p:sp>
@@ -1150,7 +1157,7 @@
           <a:p>
             <a:pPr lvl="0"/>
             <a:r>
-              <a:rPr kumimoji="1" lang="ja-JP" altLang="en-US" smtClean="0"/>
+              <a:rPr kumimoji="1" lang="ja-JP" altLang="en-US"/>
               <a:t>マスター テキストの書式設定</a:t>
             </a:r>
           </a:p>
@@ -1173,7 +1180,7 @@
           <a:p>
             <a:fld id="{01AC0B91-4105-FC41-AF23-562AED5B73ED}" type="datetimeFigureOut">
               <a:rPr kumimoji="1" lang="ja-JP" altLang="en-US" smtClean="0"/>
-              <a:t>17/09/18</a:t>
+              <a:t>2026/9/28</a:t>
             </a:fld>
             <a:endParaRPr kumimoji="1" lang="ja-JP" altLang="en-US"/>
           </a:p>
@@ -1267,10 +1274,9 @@
           <a:lstStyle/>
           <a:p>
             <a:r>
-              <a:rPr kumimoji="1" lang="ja-JP" altLang="en-US" smtClean="0"/>
+              <a:rPr kumimoji="1" lang="ja-JP" altLang="en-US"/>
               <a:t>マスター タイトルの書式設定</a:t>
             </a:r>
-            <a:endParaRPr kumimoji="1" lang="ja-JP" altLang="en-US"/>
           </a:p>
         </p:txBody>
       </p:sp>
@@ -1324,70 +1330,69 @@
           <a:p>
             <a:pPr lvl="0"/>
             <a:r>
-              <a:rPr kumimoji="1" lang="ja-JP" altLang="en-US" smtClean="0"/>
+              <a:rPr kumimoji="1" lang="ja-JP" altLang="en-US"/>
               <a:t>マスター テキストの書式設定</a:t>
             </a:r>
           </a:p>
           <a:p>
             <a:pPr lvl="1"/>
             <a:r>
-              <a:rPr kumimoji="1" lang="ja-JP" altLang="en-US" smtClean="0"/>
+              <a:rPr kumimoji="1" lang="ja-JP" altLang="en-US"/>
               <a:t>第 </a:t>
             </a:r>
             <a:r>
-              <a:rPr kumimoji="1" lang="en-US" altLang="ja-JP" smtClean="0"/>
+              <a:rPr kumimoji="1" lang="en-US" altLang="ja-JP"/>
               <a:t>2 </a:t>
             </a:r>
             <a:r>
-              <a:rPr kumimoji="1" lang="ja-JP" altLang="en-US" smtClean="0"/>
+              <a:rPr kumimoji="1" lang="ja-JP" altLang="en-US"/>
               <a:t>レベル</a:t>
             </a:r>
           </a:p>
           <a:p>
             <a:pPr lvl="2"/>
             <a:r>
-              <a:rPr kumimoji="1" lang="ja-JP" altLang="en-US" smtClean="0"/>
+              <a:rPr kumimoji="1" lang="ja-JP" altLang="en-US"/>
               <a:t>第 </a:t>
             </a:r>
             <a:r>
-              <a:rPr kumimoji="1" lang="en-US" altLang="ja-JP" smtClean="0"/>
+              <a:rPr kumimoji="1" lang="en-US" altLang="ja-JP"/>
               <a:t>3 </a:t>
             </a:r>
             <a:r>
-              <a:rPr kumimoji="1" lang="ja-JP" altLang="en-US" smtClean="0"/>
+              <a:rPr kumimoji="1" lang="ja-JP" altLang="en-US"/>
               <a:t>レベル</a:t>
             </a:r>
           </a:p>
           <a:p>
             <a:pPr lvl="3"/>
             <a:r>
-              <a:rPr kumimoji="1" lang="ja-JP" altLang="en-US" smtClean="0"/>
+              <a:rPr kumimoji="1" lang="ja-JP" altLang="en-US"/>
               <a:t>第 </a:t>
             </a:r>
             <a:r>
-              <a:rPr kumimoji="1" lang="en-US" altLang="ja-JP" smtClean="0"/>
+              <a:rPr kumimoji="1" lang="en-US" altLang="ja-JP"/>
               <a:t>4 </a:t>
             </a:r>
             <a:r>
-              <a:rPr kumimoji="1" lang="ja-JP" altLang="en-US" smtClean="0"/>
+              <a:rPr kumimoji="1" lang="ja-JP" altLang="en-US"/>
               <a:t>レベル</a:t>
             </a:r>
           </a:p>
           <a:p>
             <a:pPr lvl="4"/>
             <a:r>
-              <a:rPr kumimoji="1" lang="ja-JP" altLang="en-US" smtClean="0"/>
+              <a:rPr kumimoji="1" lang="ja-JP" altLang="en-US"/>
               <a:t>第 </a:t>
             </a:r>
             <a:r>
-              <a:rPr kumimoji="1" lang="en-US" altLang="ja-JP" smtClean="0"/>
+              <a:rPr kumimoji="1" lang="en-US" altLang="ja-JP"/>
               <a:t>5 </a:t>
             </a:r>
             <a:r>
-              <a:rPr kumimoji="1" lang="ja-JP" altLang="en-US" smtClean="0"/>
+              <a:rPr kumimoji="1" lang="ja-JP" altLang="en-US"/>
               <a:t>レベル</a:t>
             </a:r>
-            <a:endParaRPr kumimoji="1" lang="ja-JP" altLang="en-US"/>
           </a:p>
         </p:txBody>
       </p:sp>
@@ -1441,70 +1446,69 @@
           <a:p>
             <a:pPr lvl="0"/>
             <a:r>
-              <a:rPr kumimoji="1" lang="ja-JP" altLang="en-US" smtClean="0"/>
+              <a:rPr kumimoji="1" lang="ja-JP" altLang="en-US"/>
               <a:t>マスター テキストの書式設定</a:t>
             </a:r>
           </a:p>
           <a:p>
             <a:pPr lvl="1"/>
             <a:r>
-              <a:rPr kumimoji="1" lang="ja-JP" altLang="en-US" smtClean="0"/>
+              <a:rPr kumimoji="1" lang="ja-JP" altLang="en-US"/>
               <a:t>第 </a:t>
             </a:r>
             <a:r>
-              <a:rPr kumimoji="1" lang="en-US" altLang="ja-JP" smtClean="0"/>
+              <a:rPr kumimoji="1" lang="en-US" altLang="ja-JP"/>
               <a:t>2 </a:t>
             </a:r>
             <a:r>
-              <a:rPr kumimoji="1" lang="ja-JP" altLang="en-US" smtClean="0"/>
+              <a:rPr kumimoji="1" lang="ja-JP" altLang="en-US"/>
               <a:t>レベル</a:t>
             </a:r>
           </a:p>
           <a:p>
             <a:pPr lvl="2"/>
             <a:r>
-              <a:rPr kumimoji="1" lang="ja-JP" altLang="en-US" smtClean="0"/>
+              <a:rPr kumimoji="1" lang="ja-JP" altLang="en-US"/>
               <a:t>第 </a:t>
             </a:r>
             <a:r>
-              <a:rPr kumimoji="1" lang="en-US" altLang="ja-JP" smtClean="0"/>
+              <a:rPr kumimoji="1" lang="en-US" altLang="ja-JP"/>
               <a:t>3 </a:t>
             </a:r>
             <a:r>
-              <a:rPr kumimoji="1" lang="ja-JP" altLang="en-US" smtClean="0"/>
+              <a:rPr kumimoji="1" lang="ja-JP" altLang="en-US"/>
               <a:t>レベル</a:t>
             </a:r>
           </a:p>
           <a:p>
             <a:pPr lvl="3"/>
             <a:r>
-              <a:rPr kumimoji="1" lang="ja-JP" altLang="en-US" smtClean="0"/>
+              <a:rPr kumimoji="1" lang="ja-JP" altLang="en-US"/>
               <a:t>第 </a:t>
             </a:r>
             <a:r>
-              <a:rPr kumimoji="1" lang="en-US" altLang="ja-JP" smtClean="0"/>
+              <a:rPr kumimoji="1" lang="en-US" altLang="ja-JP"/>
               <a:t>4 </a:t>
             </a:r>
             <a:r>
-              <a:rPr kumimoji="1" lang="ja-JP" altLang="en-US" smtClean="0"/>
+              <a:rPr kumimoji="1" lang="ja-JP" altLang="en-US"/>
               <a:t>レベル</a:t>
             </a:r>
           </a:p>
           <a:p>
             <a:pPr lvl="4"/>
             <a:r>
-              <a:rPr kumimoji="1" lang="ja-JP" altLang="en-US" smtClean="0"/>
+              <a:rPr kumimoji="1" lang="ja-JP" altLang="en-US"/>
               <a:t>第 </a:t>
             </a:r>
             <a:r>
-              <a:rPr kumimoji="1" lang="en-US" altLang="ja-JP" smtClean="0"/>
+              <a:rPr kumimoji="1" lang="en-US" altLang="ja-JP"/>
               <a:t>5 </a:t>
             </a:r>
             <a:r>
-              <a:rPr kumimoji="1" lang="ja-JP" altLang="en-US" smtClean="0"/>
+              <a:rPr kumimoji="1" lang="ja-JP" altLang="en-US"/>
               <a:t>レベル</a:t>
             </a:r>
-            <a:endParaRPr kumimoji="1" lang="ja-JP" altLang="en-US"/>
           </a:p>
         </p:txBody>
       </p:sp>
@@ -1525,7 +1529,7 @@
           <a:p>
             <a:fld id="{01AC0B91-4105-FC41-AF23-562AED5B73ED}" type="datetimeFigureOut">
               <a:rPr kumimoji="1" lang="ja-JP" altLang="en-US" smtClean="0"/>
-              <a:t>17/09/18</a:t>
+              <a:t>2026/9/28</a:t>
             </a:fld>
             <a:endParaRPr kumimoji="1" lang="ja-JP" altLang="en-US"/>
           </a:p>
@@ -1623,10 +1627,9 @@
           </a:lstStyle>
           <a:p>
             <a:r>
-              <a:rPr kumimoji="1" lang="ja-JP" altLang="en-US" smtClean="0"/>
+              <a:rPr kumimoji="1" lang="ja-JP" altLang="en-US"/>
               <a:t>マスター タイトルの書式設定</a:t>
             </a:r>
-            <a:endParaRPr kumimoji="1" lang="ja-JP" altLang="en-US"/>
           </a:p>
         </p:txBody>
       </p:sp>
@@ -1689,7 +1692,7 @@
           <a:p>
             <a:pPr lvl="0"/>
             <a:r>
-              <a:rPr kumimoji="1" lang="ja-JP" altLang="en-US" smtClean="0"/>
+              <a:rPr kumimoji="1" lang="ja-JP" altLang="en-US"/>
               <a:t>マスター テキストの書式設定</a:t>
             </a:r>
           </a:p>
@@ -1745,70 +1748,69 @@
           <a:p>
             <a:pPr lvl="0"/>
             <a:r>
-              <a:rPr kumimoji="1" lang="ja-JP" altLang="en-US" smtClean="0"/>
+              <a:rPr kumimoji="1" lang="ja-JP" altLang="en-US"/>
               <a:t>マスター テキストの書式設定</a:t>
             </a:r>
           </a:p>
           <a:p>
             <a:pPr lvl="1"/>
             <a:r>
-              <a:rPr kumimoji="1" lang="ja-JP" altLang="en-US" smtClean="0"/>
+              <a:rPr kumimoji="1" lang="ja-JP" altLang="en-US"/>
               <a:t>第 </a:t>
             </a:r>
             <a:r>
-              <a:rPr kumimoji="1" lang="en-US" altLang="ja-JP" smtClean="0"/>
+              <a:rPr kumimoji="1" lang="en-US" altLang="ja-JP"/>
               <a:t>2 </a:t>
             </a:r>
             <a:r>
-              <a:rPr kumimoji="1" lang="ja-JP" altLang="en-US" smtClean="0"/>
+              <a:rPr kumimoji="1" lang="ja-JP" altLang="en-US"/>
               <a:t>レベル</a:t>
             </a:r>
           </a:p>
           <a:p>
             <a:pPr lvl="2"/>
             <a:r>
-              <a:rPr kumimoji="1" lang="ja-JP" altLang="en-US" smtClean="0"/>
+              <a:rPr kumimoji="1" lang="ja-JP" altLang="en-US"/>
               <a:t>第 </a:t>
             </a:r>
             <a:r>
-              <a:rPr kumimoji="1" lang="en-US" altLang="ja-JP" smtClean="0"/>
+              <a:rPr kumimoji="1" lang="en-US" altLang="ja-JP"/>
               <a:t>3 </a:t>
             </a:r>
             <a:r>
-              <a:rPr kumimoji="1" lang="ja-JP" altLang="en-US" smtClean="0"/>
+              <a:rPr kumimoji="1" lang="ja-JP" altLang="en-US"/>
               <a:t>レベル</a:t>
             </a:r>
           </a:p>
           <a:p>
             <a:pPr lvl="3"/>
             <a:r>
-              <a:rPr kumimoji="1" lang="ja-JP" altLang="en-US" smtClean="0"/>
+              <a:rPr kumimoji="1" lang="ja-JP" altLang="en-US"/>
               <a:t>第 </a:t>
             </a:r>
             <a:r>
-              <a:rPr kumimoji="1" lang="en-US" altLang="ja-JP" smtClean="0"/>
+              <a:rPr kumimoji="1" lang="en-US" altLang="ja-JP"/>
               <a:t>4 </a:t>
             </a:r>
             <a:r>
-              <a:rPr kumimoji="1" lang="ja-JP" altLang="en-US" smtClean="0"/>
+              <a:rPr kumimoji="1" lang="ja-JP" altLang="en-US"/>
               <a:t>レベル</a:t>
             </a:r>
           </a:p>
           <a:p>
             <a:pPr lvl="4"/>
             <a:r>
-              <a:rPr kumimoji="1" lang="ja-JP" altLang="en-US" smtClean="0"/>
+              <a:rPr kumimoji="1" lang="ja-JP" altLang="en-US"/>
               <a:t>第 </a:t>
             </a:r>
             <a:r>
-              <a:rPr kumimoji="1" lang="en-US" altLang="ja-JP" smtClean="0"/>
+              <a:rPr kumimoji="1" lang="en-US" altLang="ja-JP"/>
               <a:t>5 </a:t>
             </a:r>
             <a:r>
-              <a:rPr kumimoji="1" lang="ja-JP" altLang="en-US" smtClean="0"/>
+              <a:rPr kumimoji="1" lang="ja-JP" altLang="en-US"/>
               <a:t>レベル</a:t>
             </a:r>
-            <a:endParaRPr kumimoji="1" lang="ja-JP" altLang="en-US"/>
           </a:p>
         </p:txBody>
       </p:sp>
@@ -1871,7 +1873,7 @@
           <a:p>
             <a:pPr lvl="0"/>
             <a:r>
-              <a:rPr kumimoji="1" lang="ja-JP" altLang="en-US" smtClean="0"/>
+              <a:rPr kumimoji="1" lang="ja-JP" altLang="en-US"/>
               <a:t>マスター テキストの書式設定</a:t>
             </a:r>
           </a:p>
@@ -1927,70 +1929,69 @@
           <a:p>
             <a:pPr lvl="0"/>
             <a:r>
-              <a:rPr kumimoji="1" lang="ja-JP" altLang="en-US" smtClean="0"/>
+              <a:rPr kumimoji="1" lang="ja-JP" altLang="en-US"/>
               <a:t>マスター テキストの書式設定</a:t>
             </a:r>
           </a:p>
           <a:p>
             <a:pPr lvl="1"/>
             <a:r>
-              <a:rPr kumimoji="1" lang="ja-JP" altLang="en-US" smtClean="0"/>
+              <a:rPr kumimoji="1" lang="ja-JP" altLang="en-US"/>
               <a:t>第 </a:t>
             </a:r>
             <a:r>
-              <a:rPr kumimoji="1" lang="en-US" altLang="ja-JP" smtClean="0"/>
+              <a:rPr kumimoji="1" lang="en-US" altLang="ja-JP"/>
               <a:t>2 </a:t>
             </a:r>
             <a:r>
-              <a:rPr kumimoji="1" lang="ja-JP" altLang="en-US" smtClean="0"/>
+              <a:rPr kumimoji="1" lang="ja-JP" altLang="en-US"/>
               <a:t>レベル</a:t>
             </a:r>
           </a:p>
           <a:p>
             <a:pPr lvl="2"/>
             <a:r>
-              <a:rPr kumimoji="1" lang="ja-JP" altLang="en-US" smtClean="0"/>
+              <a:rPr kumimoji="1" lang="ja-JP" altLang="en-US"/>
               <a:t>第 </a:t>
             </a:r>
             <a:r>
-              <a:rPr kumimoji="1" lang="en-US" altLang="ja-JP" smtClean="0"/>
+              <a:rPr kumimoji="1" lang="en-US" altLang="ja-JP"/>
               <a:t>3 </a:t>
             </a:r>
             <a:r>
-              <a:rPr kumimoji="1" lang="ja-JP" altLang="en-US" smtClean="0"/>
+              <a:rPr kumimoji="1" lang="ja-JP" altLang="en-US"/>
               <a:t>レベル</a:t>
             </a:r>
           </a:p>
           <a:p>
             <a:pPr lvl="3"/>
             <a:r>
-              <a:rPr kumimoji="1" lang="ja-JP" altLang="en-US" smtClean="0"/>
+              <a:rPr kumimoji="1" lang="ja-JP" altLang="en-US"/>
               <a:t>第 </a:t>
             </a:r>
             <a:r>
-              <a:rPr kumimoji="1" lang="en-US" altLang="ja-JP" smtClean="0"/>
+              <a:rPr kumimoji="1" lang="en-US" altLang="ja-JP"/>
               <a:t>4 </a:t>
             </a:r>
             <a:r>
-              <a:rPr kumimoji="1" lang="ja-JP" altLang="en-US" smtClean="0"/>
+              <a:rPr kumimoji="1" lang="ja-JP" altLang="en-US"/>
               <a:t>レベル</a:t>
             </a:r>
           </a:p>
           <a:p>
             <a:pPr lvl="4"/>
             <a:r>
-              <a:rPr kumimoji="1" lang="ja-JP" altLang="en-US" smtClean="0"/>
+              <a:rPr kumimoji="1" lang="ja-JP" altLang="en-US"/>
               <a:t>第 </a:t>
             </a:r>
             <a:r>
-              <a:rPr kumimoji="1" lang="en-US" altLang="ja-JP" smtClean="0"/>
+              <a:rPr kumimoji="1" lang="en-US" altLang="ja-JP"/>
               <a:t>5 </a:t>
             </a:r>
             <a:r>
-              <a:rPr kumimoji="1" lang="ja-JP" altLang="en-US" smtClean="0"/>
+              <a:rPr kumimoji="1" lang="ja-JP" altLang="en-US"/>
               <a:t>レベル</a:t>
             </a:r>
-            <a:endParaRPr kumimoji="1" lang="ja-JP" altLang="en-US"/>
           </a:p>
         </p:txBody>
       </p:sp>
@@ -2011,7 +2012,7 @@
           <a:p>
             <a:fld id="{01AC0B91-4105-FC41-AF23-562AED5B73ED}" type="datetimeFigureOut">
               <a:rPr kumimoji="1" lang="ja-JP" altLang="en-US" smtClean="0"/>
-              <a:t>17/09/18</a:t>
+              <a:t>2026/9/28</a:t>
             </a:fld>
             <a:endParaRPr kumimoji="1" lang="ja-JP" altLang="en-US"/>
           </a:p>
@@ -2105,10 +2106,9 @@
           <a:lstStyle/>
           <a:p>
             <a:r>
-              <a:rPr kumimoji="1" lang="ja-JP" altLang="en-US" smtClean="0"/>
+              <a:rPr kumimoji="1" lang="ja-JP" altLang="en-US"/>
               <a:t>マスター タイトルの書式設定</a:t>
             </a:r>
-            <a:endParaRPr kumimoji="1" lang="ja-JP" altLang="en-US"/>
           </a:p>
         </p:txBody>
       </p:sp>
@@ -2129,7 +2129,7 @@
           <a:p>
             <a:fld id="{01AC0B91-4105-FC41-AF23-562AED5B73ED}" type="datetimeFigureOut">
               <a:rPr kumimoji="1" lang="ja-JP" altLang="en-US" smtClean="0"/>
-              <a:t>17/09/18</a:t>
+              <a:t>2026/9/28</a:t>
             </a:fld>
             <a:endParaRPr kumimoji="1" lang="ja-JP" altLang="en-US"/>
           </a:p>
@@ -2224,7 +2224,7 @@
           <a:p>
             <a:fld id="{01AC0B91-4105-FC41-AF23-562AED5B73ED}" type="datetimeFigureOut">
               <a:rPr kumimoji="1" lang="ja-JP" altLang="en-US" smtClean="0"/>
-              <a:t>17/09/18</a:t>
+              <a:t>2026/9/28</a:t>
             </a:fld>
             <a:endParaRPr kumimoji="1" lang="ja-JP" altLang="en-US"/>
           </a:p>
@@ -2327,10 +2327,9 @@
           </a:lstStyle>
           <a:p>
             <a:r>
-              <a:rPr kumimoji="1" lang="ja-JP" altLang="en-US" smtClean="0"/>
+              <a:rPr kumimoji="1" lang="ja-JP" altLang="en-US"/>
               <a:t>マスター タイトルの書式設定</a:t>
             </a:r>
-            <a:endParaRPr kumimoji="1" lang="ja-JP" altLang="en-US"/>
           </a:p>
         </p:txBody>
       </p:sp>
@@ -2384,70 +2383,69 @@
           <a:p>
             <a:pPr lvl="0"/>
             <a:r>
-              <a:rPr kumimoji="1" lang="ja-JP" altLang="en-US" smtClean="0"/>
+              <a:rPr kumimoji="1" lang="ja-JP" altLang="en-US"/>
               <a:t>マスター テキストの書式設定</a:t>
             </a:r>
           </a:p>
           <a:p>
             <a:pPr lvl="1"/>
             <a:r>
-              <a:rPr kumimoji="1" lang="ja-JP" altLang="en-US" smtClean="0"/>
+              <a:rPr kumimoji="1" lang="ja-JP" altLang="en-US"/>
               <a:t>第 </a:t>
             </a:r>
             <a:r>
-              <a:rPr kumimoji="1" lang="en-US" altLang="ja-JP" smtClean="0"/>
+              <a:rPr kumimoji="1" lang="en-US" altLang="ja-JP"/>
               <a:t>2 </a:t>
             </a:r>
             <a:r>
-              <a:rPr kumimoji="1" lang="ja-JP" altLang="en-US" smtClean="0"/>
+              <a:rPr kumimoji="1" lang="ja-JP" altLang="en-US"/>
               <a:t>レベル</a:t>
             </a:r>
           </a:p>
           <a:p>
             <a:pPr lvl="2"/>
             <a:r>
-              <a:rPr kumimoji="1" lang="ja-JP" altLang="en-US" smtClean="0"/>
+              <a:rPr kumimoji="1" lang="ja-JP" altLang="en-US"/>
               <a:t>第 </a:t>
             </a:r>
             <a:r>
-              <a:rPr kumimoji="1" lang="en-US" altLang="ja-JP" smtClean="0"/>
+              <a:rPr kumimoji="1" lang="en-US" altLang="ja-JP"/>
               <a:t>3 </a:t>
             </a:r>
             <a:r>
-              <a:rPr kumimoji="1" lang="ja-JP" altLang="en-US" smtClean="0"/>
+              <a:rPr kumimoji="1" lang="ja-JP" altLang="en-US"/>
               <a:t>レベル</a:t>
             </a:r>
           </a:p>
           <a:p>
             <a:pPr lvl="3"/>
             <a:r>
-              <a:rPr kumimoji="1" lang="ja-JP" altLang="en-US" smtClean="0"/>
+              <a:rPr kumimoji="1" lang="ja-JP" altLang="en-US"/>
               <a:t>第 </a:t>
             </a:r>
             <a:r>
-              <a:rPr kumimoji="1" lang="en-US" altLang="ja-JP" smtClean="0"/>
+              <a:rPr kumimoji="1" lang="en-US" altLang="ja-JP"/>
               <a:t>4 </a:t>
             </a:r>
             <a:r>
-              <a:rPr kumimoji="1" lang="ja-JP" altLang="en-US" smtClean="0"/>
+              <a:rPr kumimoji="1" lang="ja-JP" altLang="en-US"/>
               <a:t>レベル</a:t>
             </a:r>
           </a:p>
           <a:p>
             <a:pPr lvl="4"/>
             <a:r>
-              <a:rPr kumimoji="1" lang="ja-JP" altLang="en-US" smtClean="0"/>
+              <a:rPr kumimoji="1" lang="ja-JP" altLang="en-US"/>
               <a:t>第 </a:t>
             </a:r>
             <a:r>
-              <a:rPr kumimoji="1" lang="en-US" altLang="ja-JP" smtClean="0"/>
+              <a:rPr kumimoji="1" lang="en-US" altLang="ja-JP"/>
               <a:t>5 </a:t>
             </a:r>
             <a:r>
-              <a:rPr kumimoji="1" lang="ja-JP" altLang="en-US" smtClean="0"/>
+              <a:rPr kumimoji="1" lang="ja-JP" altLang="en-US"/>
               <a:t>レベル</a:t>
             </a:r>
-            <a:endParaRPr kumimoji="1" lang="ja-JP" altLang="en-US"/>
           </a:p>
         </p:txBody>
       </p:sp>
@@ -2510,7 +2508,7 @@
           <a:p>
             <a:pPr lvl="0"/>
             <a:r>
-              <a:rPr kumimoji="1" lang="ja-JP" altLang="en-US" smtClean="0"/>
+              <a:rPr kumimoji="1" lang="ja-JP" altLang="en-US"/>
               <a:t>マスター テキストの書式設定</a:t>
             </a:r>
           </a:p>
@@ -2533,7 +2531,7 @@
           <a:p>
             <a:fld id="{01AC0B91-4105-FC41-AF23-562AED5B73ED}" type="datetimeFigureOut">
               <a:rPr kumimoji="1" lang="ja-JP" altLang="en-US" smtClean="0"/>
-              <a:t>17/09/18</a:t>
+              <a:t>2026/9/28</a:t>
             </a:fld>
             <a:endParaRPr kumimoji="1" lang="ja-JP" altLang="en-US"/>
           </a:p>
@@ -2636,10 +2634,9 @@
           </a:lstStyle>
           <a:p>
             <a:r>
-              <a:rPr kumimoji="1" lang="ja-JP" altLang="en-US" smtClean="0"/>
+              <a:rPr kumimoji="1" lang="ja-JP" altLang="en-US"/>
               <a:t>マスター タイトルの書式設定</a:t>
             </a:r>
-            <a:endParaRPr kumimoji="1" lang="ja-JP" altLang="en-US"/>
           </a:p>
         </p:txBody>
       </p:sp>
@@ -2763,7 +2760,7 @@
           <a:p>
             <a:pPr lvl="0"/>
             <a:r>
-              <a:rPr kumimoji="1" lang="ja-JP" altLang="en-US" smtClean="0"/>
+              <a:rPr kumimoji="1" lang="ja-JP" altLang="en-US"/>
               <a:t>マスター テキストの書式設定</a:t>
             </a:r>
           </a:p>
@@ -2786,7 +2783,7 @@
           <a:p>
             <a:fld id="{01AC0B91-4105-FC41-AF23-562AED5B73ED}" type="datetimeFigureOut">
               <a:rPr kumimoji="1" lang="ja-JP" altLang="en-US" smtClean="0"/>
-              <a:t>17/09/18</a:t>
+              <a:t>2026/9/28</a:t>
             </a:fld>
             <a:endParaRPr kumimoji="1" lang="ja-JP" altLang="en-US"/>
           </a:p>
@@ -2895,10 +2892,9 @@
           <a:lstStyle/>
           <a:p>
             <a:r>
-              <a:rPr kumimoji="1" lang="ja-JP" altLang="en-US" smtClean="0"/>
+              <a:rPr kumimoji="1" lang="ja-JP" altLang="en-US"/>
               <a:t>マスター タイトルの書式設定</a:t>
             </a:r>
-            <a:endParaRPr kumimoji="1" lang="ja-JP" altLang="en-US"/>
           </a:p>
         </p:txBody>
       </p:sp>
@@ -2929,70 +2925,69 @@
           <a:p>
             <a:pPr lvl="0"/>
             <a:r>
-              <a:rPr kumimoji="1" lang="ja-JP" altLang="en-US" smtClean="0"/>
+              <a:rPr kumimoji="1" lang="ja-JP" altLang="en-US"/>
               <a:t>マスター テキストの書式設定</a:t>
             </a:r>
           </a:p>
           <a:p>
             <a:pPr lvl="1"/>
             <a:r>
-              <a:rPr kumimoji="1" lang="ja-JP" altLang="en-US" smtClean="0"/>
+              <a:rPr kumimoji="1" lang="ja-JP" altLang="en-US"/>
               <a:t>第 </a:t>
             </a:r>
             <a:r>
-              <a:rPr kumimoji="1" lang="en-US" altLang="ja-JP" smtClean="0"/>
+              <a:rPr kumimoji="1" lang="en-US" altLang="ja-JP"/>
               <a:t>2 </a:t>
             </a:r>
             <a:r>
-              <a:rPr kumimoji="1" lang="ja-JP" altLang="en-US" smtClean="0"/>
+              <a:rPr kumimoji="1" lang="ja-JP" altLang="en-US"/>
               <a:t>レベル</a:t>
             </a:r>
           </a:p>
           <a:p>
             <a:pPr lvl="2"/>
             <a:r>
-              <a:rPr kumimoji="1" lang="ja-JP" altLang="en-US" smtClean="0"/>
+              <a:rPr kumimoji="1" lang="ja-JP" altLang="en-US"/>
               <a:t>第 </a:t>
             </a:r>
             <a:r>
-              <a:rPr kumimoji="1" lang="en-US" altLang="ja-JP" smtClean="0"/>
+              <a:rPr kumimoji="1" lang="en-US" altLang="ja-JP"/>
               <a:t>3 </a:t>
             </a:r>
             <a:r>
-              <a:rPr kumimoji="1" lang="ja-JP" altLang="en-US" smtClean="0"/>
+              <a:rPr kumimoji="1" lang="ja-JP" altLang="en-US"/>
               <a:t>レベル</a:t>
             </a:r>
           </a:p>
           <a:p>
             <a:pPr lvl="3"/>
             <a:r>
-              <a:rPr kumimoji="1" lang="ja-JP" altLang="en-US" smtClean="0"/>
+              <a:rPr kumimoji="1" lang="ja-JP" altLang="en-US"/>
               <a:t>第 </a:t>
             </a:r>
             <a:r>
-              <a:rPr kumimoji="1" lang="en-US" altLang="ja-JP" smtClean="0"/>
+              <a:rPr kumimoji="1" lang="en-US" altLang="ja-JP"/>
               <a:t>4 </a:t>
             </a:r>
             <a:r>
-              <a:rPr kumimoji="1" lang="ja-JP" altLang="en-US" smtClean="0"/>
+              <a:rPr kumimoji="1" lang="ja-JP" altLang="en-US"/>
               <a:t>レベル</a:t>
             </a:r>
           </a:p>
           <a:p>
             <a:pPr lvl="4"/>
             <a:r>
-              <a:rPr kumimoji="1" lang="ja-JP" altLang="en-US" smtClean="0"/>
+              <a:rPr kumimoji="1" lang="ja-JP" altLang="en-US"/>
               <a:t>第 </a:t>
             </a:r>
             <a:r>
-              <a:rPr kumimoji="1" lang="en-US" altLang="ja-JP" smtClean="0"/>
+              <a:rPr kumimoji="1" lang="en-US" altLang="ja-JP"/>
               <a:t>5 </a:t>
             </a:r>
             <a:r>
-              <a:rPr kumimoji="1" lang="ja-JP" altLang="en-US" smtClean="0"/>
+              <a:rPr kumimoji="1" lang="ja-JP" altLang="en-US"/>
               <a:t>レベル</a:t>
             </a:r>
-            <a:endParaRPr kumimoji="1" lang="ja-JP" altLang="en-US"/>
           </a:p>
         </p:txBody>
       </p:sp>
@@ -3031,7 +3026,7 @@
           <a:p>
             <a:fld id="{01AC0B91-4105-FC41-AF23-562AED5B73ED}" type="datetimeFigureOut">
               <a:rPr kumimoji="1" lang="ja-JP" altLang="en-US" smtClean="0"/>
-              <a:t>17/09/18</a:t>
+              <a:t>2026/9/28</a:t>
             </a:fld>
             <a:endParaRPr kumimoji="1" lang="ja-JP" altLang="en-US"/>
           </a:p>
@@ -3427,10 +3422,9 @@
           <a:lstStyle/>
           <a:p>
             <a:r>
-              <a:rPr kumimoji="1" lang="ja-JP" altLang="en-US" dirty="0" smtClean="0"/>
+              <a:rPr kumimoji="1" lang="ja-JP" altLang="en-US" dirty="0"/>
               <a:t>プログラミング言語論</a:t>
             </a:r>
-            <a:endParaRPr kumimoji="1" lang="ja-JP" altLang="en-US" dirty="0"/>
           </a:p>
         </p:txBody>
       </p:sp>
@@ -3442,7 +3436,7 @@
         </p:nvSpPr>
         <p:spPr>
           <a:xfrm>
-            <a:off x="2373570" y="5116286"/>
+            <a:off x="2527524" y="5116286"/>
             <a:ext cx="4173985" cy="584776"/>
           </a:xfrm>
           <a:prstGeom prst="rect">
@@ -3458,16 +3452,12 @@
           <a:p>
             <a:pPr algn="ctr"/>
             <a:r>
-              <a:rPr kumimoji="1" lang="ja-JP" altLang="en-US" sz="3200" dirty="0" smtClean="0"/>
-              <a:t>情報工学科</a:t>
-            </a:r>
-            <a:r>
-              <a:rPr kumimoji="1" lang="en-US" altLang="ja-JP" sz="3200" dirty="0" smtClean="0"/>
-              <a:t>  </a:t>
-            </a:r>
-            <a:r>
-              <a:rPr lang="ja-JP" altLang="en-US" sz="3200" dirty="0" smtClean="0"/>
-              <a:t>篠埜　功</a:t>
+              <a:rPr lang="ja-JP" altLang="en-US" sz="3200"/>
+              <a:t>篠埜　</a:t>
+            </a:r>
+            <a:r>
+              <a:rPr lang="ja-JP" altLang="en-US" sz="3200" dirty="0"/>
+              <a:t>功</a:t>
             </a:r>
             <a:endParaRPr kumimoji="1" lang="ja-JP" altLang="en-US" sz="3200" dirty="0"/>
           </a:p>
@@ -3499,22 +3489,21 @@
               <a:t>第</a:t>
             </a:r>
             <a:r>
-              <a:rPr lang="en-US" altLang="ja-JP" sz="3200" dirty="0" smtClean="0"/>
+              <a:rPr lang="en-US" altLang="ja-JP" sz="3200" dirty="0"/>
               <a:t>11</a:t>
             </a:r>
             <a:r>
-              <a:rPr lang="ja-JP" altLang="en-US" sz="3200" dirty="0" smtClean="0"/>
+              <a:rPr lang="ja-JP" altLang="en-US" sz="3200" dirty="0"/>
               <a:t>回</a:t>
             </a:r>
             <a:r>
-              <a:rPr lang="en-US" altLang="ja-JP" sz="3200" dirty="0" smtClean="0"/>
+              <a:rPr lang="en-US" altLang="ja-JP" sz="3200" dirty="0"/>
               <a:t> </a:t>
             </a:r>
             <a:r>
-              <a:rPr lang="ja-JP" altLang="en-US" sz="3200" dirty="0" smtClean="0"/>
+              <a:rPr lang="ja-JP" altLang="en-US" sz="3200" dirty="0"/>
               <a:t>論理型プログラミング</a:t>
             </a:r>
-            <a:endParaRPr lang="ja-JP" altLang="en-US" sz="3200" dirty="0"/>
           </a:p>
         </p:txBody>
       </p:sp>
@@ -3528,13 +3517,6 @@
   <p:clrMapOvr>
     <a:masterClrMapping/>
   </p:clrMapOvr>
-  <p:timing>
-    <p:tnLst>
-      <p:par>
-        <p:cTn xmlns:p14="http://schemas.microsoft.com/office/powerpoint/2010/main" id="1" dur="indefinite" restart="never" nodeType="tmRoot"/>
-      </p:par>
-    </p:tnLst>
-  </p:timing>
 </p:sld>
 </file>
 
@@ -3571,14 +3553,13 @@
           <a:lstStyle/>
           <a:p>
             <a:r>
-              <a:rPr kumimoji="1" lang="en-US" altLang="ja-JP" dirty="0" smtClean="0"/>
+              <a:rPr kumimoji="1" lang="en-US" altLang="ja-JP" dirty="0"/>
               <a:t>Fact, rule</a:t>
             </a:r>
             <a:r>
-              <a:rPr kumimoji="1" lang="ja-JP" altLang="en-US" dirty="0" smtClean="0"/>
+              <a:rPr kumimoji="1" lang="ja-JP" altLang="en-US" dirty="0"/>
               <a:t>の例</a:t>
             </a:r>
-            <a:endParaRPr kumimoji="1" lang="ja-JP" altLang="en-US" dirty="0"/>
           </a:p>
         </p:txBody>
       </p:sp>
@@ -3605,117 +3586,113 @@
           <a:lstStyle/>
           <a:p>
             <a:r>
-              <a:rPr lang="en-US" altLang="ja-JP" sz="2800" dirty="0" smtClean="0"/>
+              <a:rPr lang="en-US" altLang="ja-JP" sz="2800" dirty="0"/>
               <a:t>l</a:t>
             </a:r>
             <a:r>
-              <a:rPr kumimoji="1" lang="en-US" altLang="ja-JP" sz="2800" dirty="0" smtClean="0"/>
+              <a:rPr kumimoji="1" lang="en-US" altLang="ja-JP" sz="2800" dirty="0"/>
               <a:t>ink(</a:t>
             </a:r>
             <a:r>
-              <a:rPr kumimoji="1" lang="en-US" altLang="ja-JP" sz="2800" dirty="0" err="1" smtClean="0"/>
+              <a:rPr kumimoji="1" lang="en-US" altLang="ja-JP" sz="2800" dirty="0" err="1"/>
               <a:t>fortran</a:t>
             </a:r>
             <a:r>
-              <a:rPr kumimoji="1" lang="en-US" altLang="ja-JP" sz="2800" dirty="0" smtClean="0"/>
+              <a:rPr kumimoji="1" lang="en-US" altLang="ja-JP" sz="2800" dirty="0"/>
               <a:t>, algol60).</a:t>
             </a:r>
           </a:p>
           <a:p>
             <a:r>
               <a:rPr lang="en-US" altLang="ja-JP" sz="2800" dirty="0"/>
+              <a:t>link(algol60, </a:t>
+            </a:r>
+            <a:r>
+              <a:rPr lang="en-US" altLang="ja-JP" sz="2800" dirty="0" err="1"/>
+              <a:t>cpl</a:t>
+            </a:r>
+            <a:r>
+              <a:rPr lang="en-US" altLang="ja-JP" sz="2800" dirty="0"/>
+              <a:t>).</a:t>
+            </a:r>
+          </a:p>
+          <a:p>
+            <a:r>
+              <a:rPr lang="en-US" altLang="ja-JP" sz="2800" dirty="0"/>
               <a:t>l</a:t>
             </a:r>
             <a:r>
-              <a:rPr lang="en-US" altLang="ja-JP" sz="2800" dirty="0" smtClean="0"/>
-              <a:t>ink(algol60, </a:t>
-            </a:r>
-            <a:r>
-              <a:rPr lang="en-US" altLang="ja-JP" sz="2800" dirty="0" err="1" smtClean="0"/>
+              <a:rPr kumimoji="1" lang="en-US" altLang="ja-JP" sz="2800" dirty="0"/>
+              <a:t>ink(</a:t>
+            </a:r>
+            <a:r>
+              <a:rPr kumimoji="1" lang="en-US" altLang="ja-JP" sz="2800" dirty="0" err="1"/>
               <a:t>cpl</a:t>
             </a:r>
             <a:r>
-              <a:rPr lang="en-US" altLang="ja-JP" sz="2800" dirty="0" smtClean="0"/>
+              <a:rPr kumimoji="1" lang="en-US" altLang="ja-JP" sz="2800" dirty="0"/>
+              <a:t>, </a:t>
+            </a:r>
+            <a:r>
+              <a:rPr kumimoji="1" lang="en-US" altLang="ja-JP" sz="2800" dirty="0" err="1"/>
+              <a:t>bcpl</a:t>
+            </a:r>
+            <a:r>
+              <a:rPr kumimoji="1" lang="en-US" altLang="ja-JP" sz="2800" dirty="0"/>
               <a:t>).</a:t>
             </a:r>
           </a:p>
           <a:p>
             <a:r>
               <a:rPr lang="en-US" altLang="ja-JP" sz="2800" dirty="0"/>
-              <a:t>l</a:t>
-            </a:r>
-            <a:r>
-              <a:rPr kumimoji="1" lang="en-US" altLang="ja-JP" sz="2800" dirty="0" smtClean="0"/>
-              <a:t>ink(</a:t>
-            </a:r>
-            <a:r>
-              <a:rPr kumimoji="1" lang="en-US" altLang="ja-JP" sz="2800" dirty="0" err="1" smtClean="0"/>
-              <a:t>cpl</a:t>
-            </a:r>
-            <a:r>
-              <a:rPr kumimoji="1" lang="en-US" altLang="ja-JP" sz="2800" dirty="0" smtClean="0"/>
-              <a:t>, </a:t>
-            </a:r>
-            <a:r>
-              <a:rPr kumimoji="1" lang="en-US" altLang="ja-JP" sz="2800" dirty="0" err="1" smtClean="0"/>
+              <a:t>link(</a:t>
+            </a:r>
+            <a:r>
+              <a:rPr lang="en-US" altLang="ja-JP" sz="2800" dirty="0" err="1"/>
               <a:t>bcpl</a:t>
             </a:r>
             <a:r>
-              <a:rPr kumimoji="1" lang="en-US" altLang="ja-JP" sz="2800" dirty="0" smtClean="0"/>
+              <a:rPr lang="en-US" altLang="ja-JP" sz="2800" dirty="0"/>
+              <a:t>, c).</a:t>
+            </a:r>
+          </a:p>
+          <a:p>
+            <a:r>
+              <a:rPr kumimoji="1" lang="en-US" altLang="ja-JP" sz="2800" dirty="0"/>
+              <a:t>link(c, </a:t>
+            </a:r>
+            <a:r>
+              <a:rPr kumimoji="1" lang="en-US" altLang="ja-JP" sz="2800" dirty="0" err="1"/>
+              <a:t>cplusplus</a:t>
+            </a:r>
+            <a:r>
+              <a:rPr kumimoji="1" lang="en-US" altLang="ja-JP" sz="2800" dirty="0"/>
               <a:t>).</a:t>
             </a:r>
           </a:p>
           <a:p>
             <a:r>
-              <a:rPr lang="en-US" altLang="ja-JP" sz="2800" dirty="0" smtClean="0"/>
-              <a:t>link(</a:t>
-            </a:r>
-            <a:r>
-              <a:rPr lang="en-US" altLang="ja-JP" sz="2800" dirty="0" err="1" smtClean="0"/>
-              <a:t>bcpl</a:t>
-            </a:r>
-            <a:r>
-              <a:rPr lang="en-US" altLang="ja-JP" sz="2800" dirty="0" smtClean="0"/>
-              <a:t>, c).</a:t>
-            </a:r>
-          </a:p>
-          <a:p>
-            <a:r>
-              <a:rPr kumimoji="1" lang="en-US" altLang="ja-JP" sz="2800" dirty="0" smtClean="0"/>
-              <a:t>link(c, </a:t>
-            </a:r>
-            <a:r>
-              <a:rPr kumimoji="1" lang="en-US" altLang="ja-JP" sz="2800" dirty="0" err="1" smtClean="0"/>
+              <a:rPr lang="en-US" altLang="ja-JP" sz="2800" dirty="0"/>
+              <a:t>link(algol60, simula67).</a:t>
+            </a:r>
+          </a:p>
+          <a:p>
+            <a:r>
+              <a:rPr kumimoji="1" lang="en-US" altLang="ja-JP" sz="2800" dirty="0"/>
+              <a:t>link(simula67, </a:t>
+            </a:r>
+            <a:r>
+              <a:rPr kumimoji="1" lang="en-US" altLang="ja-JP" sz="2800" dirty="0" err="1"/>
               <a:t>cplusplus</a:t>
             </a:r>
             <a:r>
-              <a:rPr kumimoji="1" lang="en-US" altLang="ja-JP" sz="2800" dirty="0" smtClean="0"/>
+              <a:rPr kumimoji="1" lang="en-US" altLang="ja-JP" sz="2800" dirty="0"/>
               <a:t>).</a:t>
             </a:r>
           </a:p>
           <a:p>
             <a:r>
-              <a:rPr lang="en-US" altLang="ja-JP" sz="2800" dirty="0" smtClean="0"/>
-              <a:t>link(algol60, simula67).</a:t>
-            </a:r>
-          </a:p>
-          <a:p>
-            <a:r>
-              <a:rPr kumimoji="1" lang="en-US" altLang="ja-JP" sz="2800" dirty="0" smtClean="0"/>
-              <a:t>link(simula67, </a:t>
-            </a:r>
-            <a:r>
-              <a:rPr kumimoji="1" lang="en-US" altLang="ja-JP" sz="2800" dirty="0" err="1" smtClean="0"/>
-              <a:t>cplusplus</a:t>
-            </a:r>
-            <a:r>
-              <a:rPr kumimoji="1" lang="en-US" altLang="ja-JP" sz="2800" dirty="0" smtClean="0"/>
-              <a:t>).</a:t>
-            </a:r>
-          </a:p>
-          <a:p>
-            <a:r>
-              <a:rPr lang="en-US" altLang="ja-JP" sz="2800" dirty="0" smtClean="0"/>
+              <a:rPr lang="en-US" altLang="ja-JP" sz="2800" dirty="0"/>
               <a:t>link(simula67, smalltalk80).</a:t>
             </a:r>
           </a:p>
@@ -3725,20 +3702,16 @@
           <a:p>
             <a:r>
               <a:rPr lang="en-US" altLang="ja-JP" sz="2800" dirty="0"/>
+              <a:t>path(L,L).</a:t>
+            </a:r>
+          </a:p>
+          <a:p>
+            <a:r>
+              <a:rPr lang="en-US" altLang="ja-JP" sz="2800" dirty="0"/>
               <a:t>p</a:t>
             </a:r>
             <a:r>
-              <a:rPr lang="en-US" altLang="ja-JP" sz="2800" dirty="0" smtClean="0"/>
-              <a:t>ath(L,L).</a:t>
-            </a:r>
-          </a:p>
-          <a:p>
-            <a:r>
-              <a:rPr lang="en-US" altLang="ja-JP" sz="2800" dirty="0"/>
-              <a:t>p</a:t>
-            </a:r>
-            <a:r>
-              <a:rPr kumimoji="1" lang="en-US" altLang="ja-JP" sz="2800" dirty="0" smtClean="0"/>
+              <a:rPr kumimoji="1" lang="en-US" altLang="ja-JP" sz="2800" dirty="0"/>
               <a:t>ath(L,M) :- link(L,X), path(X,M) .</a:t>
             </a:r>
             <a:endParaRPr kumimoji="1" lang="ja-JP" altLang="en-US" sz="2800" dirty="0"/>
@@ -3755,13 +3728,6 @@
   <p:clrMapOvr>
     <a:masterClrMapping/>
   </p:clrMapOvr>
-  <p:timing>
-    <p:tnLst>
-      <p:par>
-        <p:cTn xmlns:p14="http://schemas.microsoft.com/office/powerpoint/2010/main" id="1" dur="indefinite" restart="never" nodeType="tmRoot"/>
-      </p:par>
-    </p:tnLst>
-  </p:timing>
 </p:sld>
 </file>
 
@@ -3803,7 +3769,7 @@
           <a:lstStyle/>
           <a:p>
             <a:r>
-              <a:rPr kumimoji="1" lang="en-US" altLang="ja-JP" dirty="0" smtClean="0"/>
+              <a:rPr kumimoji="1" lang="en-US" altLang="ja-JP" dirty="0"/>
               <a:t>Existential queries</a:t>
             </a:r>
             <a:endParaRPr kumimoji="1" lang="ja-JP" altLang="en-US" dirty="0"/>
@@ -3833,210 +3799,210 @@
           <a:lstStyle/>
           <a:p>
             <a:r>
-              <a:rPr kumimoji="1" lang="en-US" altLang="ja-JP" sz="2800" dirty="0" smtClean="0"/>
+              <a:rPr kumimoji="1" lang="en-US" altLang="ja-JP" sz="2800" dirty="0"/>
               <a:t>Query    </a:t>
             </a:r>
             <a:r>
-              <a:rPr lang="en-US" altLang="ja-JP" sz="2800" dirty="0" smtClean="0"/>
+              <a:rPr lang="en-US" altLang="ja-JP" sz="2800" dirty="0"/>
               <a:t>&lt;</a:t>
             </a:r>
             <a:r>
-              <a:rPr lang="en-US" altLang="ja-JP" sz="2800" i="1" dirty="0" smtClean="0"/>
+              <a:rPr lang="en-US" altLang="ja-JP" sz="2800" i="1" dirty="0"/>
               <a:t>term</a:t>
             </a:r>
             <a:r>
-              <a:rPr lang="en-US" altLang="ja-JP" sz="2800" dirty="0" smtClean="0"/>
+              <a:rPr lang="en-US" altLang="ja-JP" sz="2800" dirty="0"/>
               <a:t>&gt;</a:t>
             </a:r>
             <a:r>
-              <a:rPr lang="en-US" altLang="ja-JP" sz="2800" baseline="-25000" dirty="0" smtClean="0"/>
+              <a:rPr lang="en-US" altLang="ja-JP" sz="2800" baseline="-25000" dirty="0"/>
               <a:t>1</a:t>
             </a:r>
             <a:r>
-              <a:rPr lang="en-US" altLang="ja-JP" sz="2800" dirty="0" smtClean="0"/>
+              <a:rPr lang="en-US" altLang="ja-JP" sz="2800" dirty="0"/>
               <a:t>, &lt;</a:t>
             </a:r>
             <a:r>
-              <a:rPr lang="en-US" altLang="ja-JP" sz="2800" i="1" dirty="0" smtClean="0"/>
+              <a:rPr lang="en-US" altLang="ja-JP" sz="2800" i="1" dirty="0"/>
               <a:t>term</a:t>
             </a:r>
             <a:r>
-              <a:rPr lang="en-US" altLang="ja-JP" sz="2800" dirty="0" smtClean="0"/>
+              <a:rPr lang="en-US" altLang="ja-JP" sz="2800" dirty="0"/>
               <a:t>&gt;</a:t>
             </a:r>
             <a:r>
-              <a:rPr lang="en-US" altLang="ja-JP" sz="2800" baseline="-25000" dirty="0" smtClean="0"/>
+              <a:rPr lang="en-US" altLang="ja-JP" sz="2800" baseline="-25000" dirty="0"/>
               <a:t>2</a:t>
             </a:r>
             <a:r>
-              <a:rPr lang="en-US" altLang="ja-JP" sz="2800" dirty="0" smtClean="0"/>
+              <a:rPr lang="en-US" altLang="ja-JP" sz="2800" dirty="0"/>
               <a:t>, …. &lt;</a:t>
             </a:r>
             <a:r>
-              <a:rPr lang="en-US" altLang="ja-JP" sz="2800" i="1" dirty="0" smtClean="0"/>
+              <a:rPr lang="en-US" altLang="ja-JP" sz="2800" i="1" dirty="0"/>
               <a:t>term</a:t>
             </a:r>
             <a:r>
-              <a:rPr lang="en-US" altLang="ja-JP" sz="2800" dirty="0" smtClean="0"/>
+              <a:rPr lang="en-US" altLang="ja-JP" sz="2800" dirty="0"/>
               <a:t>&gt;</a:t>
             </a:r>
             <a:r>
-              <a:rPr lang="en-US" altLang="ja-JP" sz="2800" i="1" baseline="-25000" dirty="0" smtClean="0"/>
+              <a:rPr lang="en-US" altLang="ja-JP" sz="2800" i="1" baseline="-25000" dirty="0"/>
               <a:t>k</a:t>
             </a:r>
             <a:r>
-              <a:rPr lang="en-US" altLang="ja-JP" sz="2800" dirty="0" smtClean="0"/>
+              <a:rPr lang="en-US" altLang="ja-JP" sz="2800" dirty="0"/>
               <a:t> .</a:t>
             </a:r>
           </a:p>
           <a:p>
             <a:r>
-              <a:rPr kumimoji="1" lang="ja-JP" altLang="en-US" sz="2800" dirty="0" smtClean="0"/>
+              <a:rPr kumimoji="1" lang="ja-JP" altLang="en-US" sz="2800" dirty="0"/>
               <a:t>は、</a:t>
             </a:r>
             <a:r>
-              <a:rPr lang="en-US" altLang="ja-JP" sz="2800" dirty="0" smtClean="0"/>
+              <a:rPr lang="en-US" altLang="ja-JP" sz="2800" dirty="0"/>
               <a:t>      &lt;</a:t>
             </a:r>
             <a:r>
-              <a:rPr lang="en-US" altLang="ja-JP" sz="2800" i="1" dirty="0" smtClean="0"/>
+              <a:rPr lang="en-US" altLang="ja-JP" sz="2800" i="1" dirty="0"/>
               <a:t>term</a:t>
             </a:r>
             <a:r>
-              <a:rPr lang="en-US" altLang="ja-JP" sz="2800" dirty="0" smtClean="0"/>
+              <a:rPr lang="en-US" altLang="ja-JP" sz="2800" dirty="0"/>
               <a:t>&gt;</a:t>
             </a:r>
             <a:r>
-              <a:rPr lang="en-US" altLang="ja-JP" sz="2800" baseline="-25000" dirty="0" smtClean="0"/>
+              <a:rPr lang="en-US" altLang="ja-JP" sz="2800" baseline="-25000" dirty="0"/>
               <a:t>1</a:t>
             </a:r>
             <a:r>
-              <a:rPr lang="en-US" altLang="ja-JP" sz="2800" dirty="0" smtClean="0"/>
+              <a:rPr lang="en-US" altLang="ja-JP" sz="2800" dirty="0"/>
               <a:t> </a:t>
             </a:r>
             <a:r>
-              <a:rPr lang="en-US" altLang="ja-JP" sz="2800" b="1" dirty="0" smtClean="0"/>
+              <a:rPr lang="en-US" altLang="ja-JP" sz="2800" b="1" dirty="0"/>
               <a:t>and</a:t>
             </a:r>
             <a:r>
-              <a:rPr lang="en-US" altLang="ja-JP" sz="2800" dirty="0" smtClean="0"/>
+              <a:rPr lang="en-US" altLang="ja-JP" sz="2800" dirty="0"/>
               <a:t> &lt;</a:t>
             </a:r>
             <a:r>
-              <a:rPr lang="en-US" altLang="ja-JP" sz="2800" i="1" dirty="0" smtClean="0"/>
+              <a:rPr lang="en-US" altLang="ja-JP" sz="2800" i="1" dirty="0"/>
               <a:t>term</a:t>
             </a:r>
             <a:r>
-              <a:rPr lang="en-US" altLang="ja-JP" sz="2800" dirty="0" smtClean="0"/>
+              <a:rPr lang="en-US" altLang="ja-JP" sz="2800" dirty="0"/>
               <a:t>&gt;</a:t>
             </a:r>
             <a:r>
-              <a:rPr lang="en-US" altLang="ja-JP" sz="2800" baseline="-25000" dirty="0" smtClean="0"/>
+              <a:rPr lang="en-US" altLang="ja-JP" sz="2800" baseline="-25000" dirty="0"/>
               <a:t>2</a:t>
             </a:r>
             <a:r>
-              <a:rPr lang="en-US" altLang="ja-JP" sz="2800" dirty="0" smtClean="0"/>
+              <a:rPr lang="en-US" altLang="ja-JP" sz="2800" dirty="0"/>
               <a:t> </a:t>
             </a:r>
             <a:r>
-              <a:rPr lang="en-US" altLang="ja-JP" sz="2800" b="1" dirty="0" smtClean="0"/>
+              <a:rPr lang="en-US" altLang="ja-JP" sz="2800" b="1" dirty="0"/>
               <a:t>and</a:t>
             </a:r>
             <a:r>
-              <a:rPr lang="en-US" altLang="ja-JP" sz="2800" dirty="0" smtClean="0"/>
+              <a:rPr lang="en-US" altLang="ja-JP" sz="2800" dirty="0"/>
               <a:t> … </a:t>
             </a:r>
             <a:r>
-              <a:rPr lang="en-US" altLang="ja-JP" sz="2800" b="1" dirty="0" smtClean="0"/>
+              <a:rPr lang="en-US" altLang="ja-JP" sz="2800" b="1" dirty="0"/>
               <a:t>and</a:t>
             </a:r>
             <a:r>
-              <a:rPr lang="en-US" altLang="ja-JP" sz="2800" dirty="0" smtClean="0"/>
+              <a:rPr lang="en-US" altLang="ja-JP" sz="2800" dirty="0"/>
               <a:t> &lt;</a:t>
             </a:r>
             <a:r>
-              <a:rPr lang="en-US" altLang="ja-JP" sz="2800" i="1" dirty="0" smtClean="0"/>
+              <a:rPr lang="en-US" altLang="ja-JP" sz="2800" i="1" dirty="0"/>
               <a:t>term</a:t>
             </a:r>
             <a:r>
-              <a:rPr lang="en-US" altLang="ja-JP" sz="2800" dirty="0" smtClean="0"/>
+              <a:rPr lang="en-US" altLang="ja-JP" sz="2800" dirty="0"/>
               <a:t>&gt;</a:t>
             </a:r>
             <a:r>
-              <a:rPr lang="en-US" altLang="ja-JP" sz="2800" i="1" baseline="-25000" dirty="0" smtClean="0"/>
+              <a:rPr lang="en-US" altLang="ja-JP" sz="2800" i="1" baseline="-25000" dirty="0"/>
               <a:t>k</a:t>
             </a:r>
             <a:r>
-              <a:rPr lang="en-US" altLang="ja-JP" sz="2800" dirty="0" smtClean="0"/>
+              <a:rPr lang="en-US" altLang="ja-JP" sz="2800" dirty="0"/>
               <a:t> ?</a:t>
             </a:r>
           </a:p>
           <a:p>
             <a:r>
-              <a:rPr kumimoji="1" lang="ja-JP" altLang="en-US" sz="2800" dirty="0" smtClean="0"/>
+              <a:rPr kumimoji="1" lang="ja-JP" altLang="en-US" sz="2800" dirty="0"/>
               <a:t>という疑似コードに対応する。</a:t>
             </a:r>
             <a:r>
-              <a:rPr lang="en-US" altLang="ja-JP" sz="2800" dirty="0" smtClean="0"/>
+              <a:rPr lang="en-US" altLang="ja-JP" sz="2800" dirty="0"/>
               <a:t>Query</a:t>
             </a:r>
             <a:r>
-              <a:rPr lang="ja-JP" altLang="en-US" sz="2800" dirty="0" smtClean="0"/>
+              <a:rPr lang="ja-JP" altLang="en-US" sz="2800" dirty="0"/>
               <a:t>は</a:t>
             </a:r>
             <a:r>
-              <a:rPr lang="en-US" altLang="ja-JP" sz="2800" dirty="0" smtClean="0"/>
+              <a:rPr lang="en-US" altLang="ja-JP" sz="2800" dirty="0"/>
               <a:t>goal</a:t>
             </a:r>
             <a:r>
-              <a:rPr lang="ja-JP" altLang="en-US" sz="2800" dirty="0" smtClean="0"/>
+              <a:rPr lang="ja-JP" altLang="en-US" sz="2800" dirty="0"/>
               <a:t>とも呼ばれる。</a:t>
             </a:r>
             <a:r>
-              <a:rPr lang="en-US" altLang="ja-JP" sz="2800" dirty="0" smtClean="0"/>
+              <a:rPr lang="en-US" altLang="ja-JP" sz="2800" dirty="0"/>
               <a:t>Query</a:t>
             </a:r>
             <a:r>
-              <a:rPr lang="ja-JP" altLang="en-US" sz="2800" dirty="0" smtClean="0"/>
+              <a:rPr lang="ja-JP" altLang="en-US" sz="2800" dirty="0"/>
               <a:t>中の各</a:t>
             </a:r>
             <a:r>
-              <a:rPr lang="en-US" altLang="ja-JP" sz="2800" dirty="0" smtClean="0"/>
+              <a:rPr lang="en-US" altLang="ja-JP" sz="2800" dirty="0"/>
               <a:t>term</a:t>
             </a:r>
             <a:r>
-              <a:rPr lang="ja-JP" altLang="en-US" sz="2800" dirty="0" smtClean="0"/>
+              <a:rPr lang="ja-JP" altLang="en-US" sz="2800" dirty="0"/>
               <a:t>は</a:t>
             </a:r>
             <a:r>
-              <a:rPr lang="en-US" altLang="ja-JP" sz="2800" dirty="0" err="1" smtClean="0"/>
+              <a:rPr lang="en-US" altLang="ja-JP" sz="2800" dirty="0" err="1"/>
               <a:t>subgoal</a:t>
             </a:r>
             <a:r>
-              <a:rPr lang="ja-JP" altLang="en-US" sz="2800" dirty="0" smtClean="0"/>
+              <a:rPr lang="ja-JP" altLang="en-US" sz="2800" dirty="0"/>
               <a:t>とも呼ばれる。</a:t>
             </a:r>
-            <a:endParaRPr lang="en-US" altLang="ja-JP" sz="2800" dirty="0" smtClean="0"/>
-          </a:p>
-          <a:p>
-            <a:r>
-              <a:rPr kumimoji="1" lang="ja-JP" altLang="en-US" sz="2800" dirty="0" smtClean="0"/>
+            <a:endParaRPr lang="en-US" altLang="ja-JP" sz="2800" dirty="0"/>
+          </a:p>
+          <a:p>
+            <a:r>
+              <a:rPr kumimoji="1" lang="ja-JP" altLang="en-US" sz="2800" dirty="0"/>
               <a:t>（例）</a:t>
             </a:r>
             <a:r>
-              <a:rPr kumimoji="1" lang="en-US" altLang="ja-JP" sz="2800" dirty="0" smtClean="0"/>
+              <a:rPr kumimoji="1" lang="en-US" altLang="ja-JP" sz="2800" dirty="0"/>
               <a:t> </a:t>
             </a:r>
             <a:r>
-              <a:rPr kumimoji="1" lang="en-US" altLang="ja-JP" sz="2800" i="1" dirty="0" smtClean="0"/>
+              <a:rPr kumimoji="1" lang="en-US" altLang="ja-JP" sz="2800" i="1" dirty="0"/>
               <a:t>?-</a:t>
             </a:r>
             <a:r>
-              <a:rPr kumimoji="1" lang="en-US" altLang="ja-JP" sz="2800" dirty="0" smtClean="0"/>
+              <a:rPr kumimoji="1" lang="en-US" altLang="ja-JP" sz="2800" dirty="0"/>
               <a:t> </a:t>
             </a:r>
             <a:r>
-              <a:rPr kumimoji="1" lang="en-US" altLang="ja-JP" sz="2800" dirty="0" smtClean="0">
+              <a:rPr kumimoji="1" lang="en-US" altLang="ja-JP" sz="2800" dirty="0">
                 <a:solidFill>
                   <a:srgbClr val="FF0000"/>
                 </a:solidFill>
@@ -4044,7 +4010,7 @@
               <a:t>link(</a:t>
             </a:r>
             <a:r>
-              <a:rPr kumimoji="1" lang="en-US" altLang="ja-JP" sz="2800" dirty="0" err="1" smtClean="0">
+              <a:rPr kumimoji="1" lang="en-US" altLang="ja-JP" sz="2800" dirty="0" err="1">
                 <a:solidFill>
                   <a:srgbClr val="FF0000"/>
                 </a:solidFill>
@@ -4052,7 +4018,7 @@
               <a:t>cpl</a:t>
             </a:r>
             <a:r>
-              <a:rPr lang="en-US" altLang="ja-JP" sz="2800" dirty="0" smtClean="0">
+              <a:rPr lang="en-US" altLang="ja-JP" sz="2800" dirty="0">
                 <a:solidFill>
                   <a:srgbClr val="FF0000"/>
                 </a:solidFill>
@@ -4060,7 +4026,7 @@
               <a:t>, </a:t>
             </a:r>
             <a:r>
-              <a:rPr lang="en-US" altLang="ja-JP" sz="2800" dirty="0" err="1" smtClean="0">
+              <a:rPr lang="en-US" altLang="ja-JP" sz="2800" dirty="0" err="1">
                 <a:solidFill>
                   <a:srgbClr val="FF0000"/>
                 </a:solidFill>
@@ -4068,7 +4034,7 @@
               <a:t>bcpl</a:t>
             </a:r>
             <a:r>
-              <a:rPr lang="en-US" altLang="ja-JP" sz="2800" dirty="0" smtClean="0">
+              <a:rPr lang="en-US" altLang="ja-JP" sz="2800" dirty="0">
                 <a:solidFill>
                   <a:srgbClr val="FF0000"/>
                 </a:solidFill>
@@ -4076,7 +4042,7 @@
               <a:t>), link(</a:t>
             </a:r>
             <a:r>
-              <a:rPr lang="en-US" altLang="ja-JP" sz="2800" dirty="0" err="1" smtClean="0">
+              <a:rPr lang="en-US" altLang="ja-JP" sz="2800" dirty="0" err="1">
                 <a:solidFill>
                   <a:srgbClr val="FF0000"/>
                 </a:solidFill>
@@ -4084,7 +4050,7 @@
               <a:t>bcpl</a:t>
             </a:r>
             <a:r>
-              <a:rPr lang="en-US" altLang="ja-JP" sz="2800" dirty="0" smtClean="0">
+              <a:rPr lang="en-US" altLang="ja-JP" sz="2800" dirty="0">
                 <a:solidFill>
                   <a:srgbClr val="FF0000"/>
                 </a:solidFill>
@@ -4095,36 +4061,28 @@
           <a:p>
             <a:r>
               <a:rPr kumimoji="1" lang="en-US" altLang="ja-JP" sz="2800" dirty="0"/>
+              <a:t>           </a:t>
+            </a:r>
+            <a:r>
+              <a:rPr kumimoji="1" lang="en-US" altLang="ja-JP" sz="2800" i="1" dirty="0"/>
+              <a:t>yes</a:t>
+            </a:r>
+          </a:p>
+          <a:p>
+            <a:r>
+              <a:rPr lang="en-US" altLang="ja-JP" sz="2800" dirty="0"/>
+              <a:t>          </a:t>
+            </a:r>
+            <a:r>
+              <a:rPr lang="en-US" altLang="ja-JP" sz="2800" i="1" dirty="0"/>
+              <a:t>?-</a:t>
+            </a:r>
+            <a:r>
+              <a:rPr lang="en-US" altLang="ja-JP" sz="2800" dirty="0"/>
               <a:t> </a:t>
             </a:r>
             <a:r>
-              <a:rPr kumimoji="1" lang="en-US" altLang="ja-JP" sz="2800" dirty="0" smtClean="0"/>
-              <a:t>          </a:t>
-            </a:r>
-            <a:r>
-              <a:rPr kumimoji="1" lang="en-US" altLang="ja-JP" sz="2800" i="1" dirty="0" smtClean="0"/>
-              <a:t>yes</a:t>
-            </a:r>
-          </a:p>
-          <a:p>
-            <a:r>
-              <a:rPr lang="en-US" altLang="ja-JP" sz="2800" dirty="0"/>
-              <a:t> </a:t>
-            </a:r>
-            <a:r>
-              <a:rPr lang="en-US" altLang="ja-JP" sz="2800" dirty="0" smtClean="0"/>
-              <a:t>         </a:t>
-            </a:r>
-            <a:r>
-              <a:rPr lang="en-US" altLang="ja-JP" sz="2800" i="1" dirty="0" smtClean="0"/>
-              <a:t>?-</a:t>
-            </a:r>
-            <a:r>
-              <a:rPr lang="en-US" altLang="ja-JP" sz="2800" dirty="0" smtClean="0"/>
-              <a:t> </a:t>
-            </a:r>
-            <a:r>
-              <a:rPr lang="en-US" altLang="ja-JP" sz="2800" dirty="0" smtClean="0">
+              <a:rPr lang="en-US" altLang="ja-JP" sz="2800" dirty="0">
                 <a:solidFill>
                   <a:srgbClr val="FF0000"/>
                 </a:solidFill>
@@ -4135,79 +4093,71 @@
           <a:p>
             <a:r>
               <a:rPr kumimoji="1" lang="en-US" altLang="ja-JP" sz="2800" dirty="0"/>
-              <a:t> </a:t>
-            </a:r>
-            <a:r>
-              <a:rPr kumimoji="1" lang="en-US" altLang="ja-JP" sz="2800" dirty="0" smtClean="0"/>
-              <a:t>         </a:t>
-            </a:r>
-            <a:r>
-              <a:rPr kumimoji="1" lang="en-US" altLang="ja-JP" sz="2800" i="1" dirty="0" smtClean="0"/>
+              <a:t>          </a:t>
+            </a:r>
+            <a:r>
+              <a:rPr kumimoji="1" lang="en-US" altLang="ja-JP" sz="2800" i="1" dirty="0"/>
               <a:t>L=</a:t>
             </a:r>
             <a:r>
-              <a:rPr kumimoji="1" lang="en-US" altLang="ja-JP" sz="2800" i="1" dirty="0" err="1" smtClean="0"/>
+              <a:rPr kumimoji="1" lang="en-US" altLang="ja-JP" sz="2800" i="1" dirty="0" err="1"/>
               <a:t>cpl</a:t>
             </a:r>
-            <a:endParaRPr kumimoji="1" lang="en-US" altLang="ja-JP" sz="2800" i="1" dirty="0" smtClean="0"/>
+            <a:endParaRPr kumimoji="1" lang="en-US" altLang="ja-JP" sz="2800" i="1" dirty="0"/>
           </a:p>
           <a:p>
             <a:r>
               <a:rPr lang="en-US" altLang="ja-JP" sz="2800" i="1" dirty="0"/>
-              <a:t> </a:t>
-            </a:r>
-            <a:r>
-              <a:rPr lang="en-US" altLang="ja-JP" sz="2800" i="1" dirty="0" smtClean="0"/>
-              <a:t>         M=</a:t>
-            </a:r>
-            <a:r>
-              <a:rPr lang="en-US" altLang="ja-JP" sz="2800" i="1" dirty="0" err="1" smtClean="0"/>
+              <a:t>          M=</a:t>
+            </a:r>
+            <a:r>
+              <a:rPr lang="en-US" altLang="ja-JP" sz="2800" i="1" dirty="0" err="1"/>
               <a:t>bcpl</a:t>
             </a:r>
-            <a:endParaRPr lang="en-US" altLang="ja-JP" sz="2800" i="1" dirty="0" smtClean="0"/>
-          </a:p>
-          <a:p>
-            <a:r>
-              <a:rPr kumimoji="1" lang="ja-JP" altLang="en-US" sz="2800" dirty="0" smtClean="0"/>
+            <a:endParaRPr lang="en-US" altLang="ja-JP" sz="2800" i="1" dirty="0"/>
+          </a:p>
+          <a:p>
+            <a:r>
+              <a:rPr kumimoji="1" lang="ja-JP" altLang="en-US" sz="2800" dirty="0"/>
               <a:t>こ</a:t>
             </a:r>
             <a:r>
-              <a:rPr lang="ja-JP" altLang="en-US" sz="2800" dirty="0" smtClean="0"/>
+              <a:rPr lang="ja-JP" altLang="en-US" sz="2800" dirty="0"/>
               <a:t>こで</a:t>
             </a:r>
             <a:r>
-              <a:rPr lang="en-US" altLang="ja-JP" sz="2800" dirty="0" smtClean="0"/>
+              <a:rPr lang="en-US" altLang="ja-JP" sz="2800" dirty="0"/>
               <a:t>return</a:t>
             </a:r>
             <a:r>
-              <a:rPr lang="ja-JP" altLang="en-US" sz="2800" dirty="0" smtClean="0"/>
+              <a:rPr lang="ja-JP" altLang="en-US" sz="2800" dirty="0"/>
               <a:t>キーを押すと</a:t>
             </a:r>
             <a:r>
-              <a:rPr lang="en-US" altLang="ja-JP" sz="2800" dirty="0" smtClean="0"/>
+              <a:rPr lang="en-US" altLang="ja-JP" sz="2800" dirty="0"/>
               <a:t>yes</a:t>
             </a:r>
             <a:r>
-              <a:rPr lang="ja-JP" altLang="en-US" sz="2800" dirty="0" smtClean="0"/>
+              <a:rPr lang="ja-JP" altLang="en-US" sz="2800" dirty="0"/>
               <a:t>と表示されて終了するが、</a:t>
             </a:r>
             <a:r>
-              <a:rPr lang="en-US" altLang="ja-JP" sz="2800" dirty="0" smtClean="0"/>
+              <a:rPr lang="en-US" altLang="ja-JP" sz="2800" dirty="0"/>
               <a:t>;</a:t>
             </a:r>
             <a:r>
-              <a:rPr lang="ja-JP" altLang="en-US" sz="2800" dirty="0" smtClean="0"/>
+              <a:rPr lang="ja-JP" altLang="en-US" sz="2800" dirty="0"/>
               <a:t>を打つと別の解が表示される（かあるいは解が見つからない場合は</a:t>
             </a:r>
             <a:r>
-              <a:rPr lang="en-US" altLang="ja-JP" sz="2800" dirty="0" smtClean="0"/>
+              <a:rPr lang="en-US" altLang="ja-JP" sz="2800" dirty="0"/>
               <a:t>no</a:t>
             </a:r>
             <a:r>
-              <a:rPr lang="ja-JP" altLang="en-US" sz="2800" dirty="0" smtClean="0"/>
+              <a:rPr lang="ja-JP" altLang="en-US" sz="2800" dirty="0"/>
               <a:t>が表示される）。</a:t>
             </a:r>
-            <a:endParaRPr kumimoji="1" lang="en-US" altLang="ja-JP" sz="2800" dirty="0" smtClean="0"/>
+            <a:endParaRPr kumimoji="1" lang="en-US" altLang="ja-JP" sz="2800" dirty="0"/>
           </a:p>
         </p:txBody>
       </p:sp>
@@ -4239,30 +4189,29 @@
           <a:lstStyle/>
           <a:p>
             <a:r>
-              <a:rPr kumimoji="1" lang="en-US" altLang="ja-JP" sz="2400" dirty="0" smtClean="0"/>
+              <a:rPr kumimoji="1" lang="en-US" altLang="ja-JP" sz="2400" dirty="0"/>
               <a:t>link(algol60,L) </a:t>
             </a:r>
             <a:r>
-              <a:rPr kumimoji="1" lang="ja-JP" altLang="en-US" sz="2400" dirty="0" smtClean="0"/>
+              <a:rPr kumimoji="1" lang="ja-JP" altLang="en-US" sz="2400" dirty="0"/>
               <a:t>と</a:t>
             </a:r>
             <a:r>
-              <a:rPr kumimoji="1" lang="en-US" altLang="ja-JP" sz="2400" dirty="0" smtClean="0"/>
+              <a:rPr kumimoji="1" lang="en-US" altLang="ja-JP" sz="2400" dirty="0"/>
               <a:t>link(L,M)</a:t>
             </a:r>
             <a:r>
-              <a:rPr kumimoji="1" lang="ja-JP" altLang="en-US" sz="2400" dirty="0" smtClean="0"/>
+              <a:rPr kumimoji="1" lang="ja-JP" altLang="en-US" sz="2400" dirty="0"/>
               <a:t>を満たす</a:t>
             </a:r>
             <a:r>
-              <a:rPr kumimoji="1" lang="en-US" altLang="ja-JP" sz="2400" dirty="0" smtClean="0"/>
+              <a:rPr kumimoji="1" lang="en-US" altLang="ja-JP" sz="2400" dirty="0"/>
               <a:t>L,M</a:t>
             </a:r>
             <a:r>
-              <a:rPr kumimoji="1" lang="ja-JP" altLang="en-US" sz="2400" dirty="0" smtClean="0"/>
+              <a:rPr kumimoji="1" lang="ja-JP" altLang="en-US" sz="2400" dirty="0"/>
               <a:t>はあるか？</a:t>
             </a:r>
-            <a:endParaRPr kumimoji="1" lang="ja-JP" altLang="en-US" sz="2400" dirty="0"/>
           </a:p>
         </p:txBody>
       </p:sp>
@@ -4276,13 +4225,6 @@
   <p:clrMapOvr>
     <a:masterClrMapping/>
   </p:clrMapOvr>
-  <p:timing>
-    <p:tnLst>
-      <p:par>
-        <p:cTn xmlns:p14="http://schemas.microsoft.com/office/powerpoint/2010/main" id="1" dur="indefinite" restart="never" nodeType="tmRoot"/>
-      </p:par>
-    </p:tnLst>
-  </p:timing>
 </p:sld>
 </file>
 
@@ -4319,10 +4261,9 @@
           <a:lstStyle/>
           <a:p>
             <a:r>
-              <a:rPr kumimoji="1" lang="ja-JP" altLang="en-US" dirty="0" smtClean="0"/>
+              <a:rPr kumimoji="1" lang="ja-JP" altLang="en-US" dirty="0"/>
               <a:t>（続き）</a:t>
             </a:r>
-            <a:endParaRPr kumimoji="1" lang="ja-JP" altLang="en-US" dirty="0"/>
           </a:p>
         </p:txBody>
       </p:sp>
@@ -4349,15 +4290,15 @@
           <a:lstStyle/>
           <a:p>
             <a:r>
-              <a:rPr lang="en-US" altLang="ja-JP" sz="2800" i="1" dirty="0" smtClean="0"/>
+              <a:rPr lang="en-US" altLang="ja-JP" sz="2800" i="1" dirty="0"/>
               <a:t>?-</a:t>
             </a:r>
             <a:r>
-              <a:rPr lang="en-US" altLang="ja-JP" sz="2800" dirty="0" smtClean="0"/>
+              <a:rPr lang="en-US" altLang="ja-JP" sz="2800" dirty="0"/>
               <a:t> </a:t>
             </a:r>
             <a:r>
-              <a:rPr lang="en-US" altLang="ja-JP" sz="2800" dirty="0" smtClean="0">
+              <a:rPr lang="en-US" altLang="ja-JP" sz="2800" dirty="0">
                 <a:solidFill>
                   <a:srgbClr val="FF0000"/>
                 </a:solidFill>
@@ -4368,41 +4309,33 @@
           <a:p>
             <a:r>
               <a:rPr kumimoji="1" lang="en-US" altLang="ja-JP" sz="2800" dirty="0"/>
-              <a:t> </a:t>
-            </a:r>
-            <a:r>
-              <a:rPr kumimoji="1" lang="en-US" altLang="ja-JP" sz="2800" dirty="0" smtClean="0"/>
-              <a:t>   </a:t>
-            </a:r>
-            <a:r>
-              <a:rPr kumimoji="1" lang="en-US" altLang="ja-JP" sz="2800" i="1" dirty="0" smtClean="0"/>
+              <a:t>    </a:t>
+            </a:r>
+            <a:r>
+              <a:rPr kumimoji="1" lang="en-US" altLang="ja-JP" sz="2800" i="1" dirty="0"/>
               <a:t>L=</a:t>
             </a:r>
             <a:r>
-              <a:rPr kumimoji="1" lang="en-US" altLang="ja-JP" sz="2800" i="1" dirty="0" err="1" smtClean="0"/>
+              <a:rPr kumimoji="1" lang="en-US" altLang="ja-JP" sz="2800" i="1" dirty="0" err="1"/>
               <a:t>cpl</a:t>
             </a:r>
-            <a:endParaRPr kumimoji="1" lang="en-US" altLang="ja-JP" sz="2800" i="1" dirty="0" smtClean="0"/>
+            <a:endParaRPr kumimoji="1" lang="en-US" altLang="ja-JP" sz="2800" i="1" dirty="0"/>
           </a:p>
           <a:p>
             <a:r>
               <a:rPr lang="en-US" altLang="ja-JP" sz="2800" i="1" dirty="0"/>
-              <a:t> </a:t>
-            </a:r>
-            <a:r>
-              <a:rPr lang="en-US" altLang="ja-JP" sz="2800" i="1" dirty="0" smtClean="0"/>
-              <a:t>   M=</a:t>
-            </a:r>
-            <a:r>
-              <a:rPr lang="en-US" altLang="ja-JP" sz="2800" i="1" dirty="0" err="1" smtClean="0"/>
+              <a:t>    M=</a:t>
+            </a:r>
+            <a:r>
+              <a:rPr lang="en-US" altLang="ja-JP" sz="2800" i="1" dirty="0" err="1"/>
               <a:t>bcpl</a:t>
             </a:r>
             <a:r>
-              <a:rPr lang="en-US" altLang="ja-JP" sz="2800" i="1" dirty="0" smtClean="0"/>
+              <a:rPr lang="en-US" altLang="ja-JP" sz="2800" i="1" dirty="0"/>
               <a:t>  </a:t>
             </a:r>
             <a:r>
-              <a:rPr lang="en-US" altLang="ja-JP" sz="2800" dirty="0" smtClean="0">
+              <a:rPr lang="en-US" altLang="ja-JP" sz="2800" dirty="0">
                 <a:solidFill>
                   <a:srgbClr val="FF0000"/>
                 </a:solidFill>
@@ -4412,33 +4345,29 @@
           </a:p>
           <a:p>
             <a:r>
-              <a:rPr lang="en-US" altLang="ja-JP" sz="2800" dirty="0" smtClean="0"/>
+              <a:rPr lang="en-US" altLang="ja-JP" sz="2800" dirty="0"/>
               <a:t>    </a:t>
             </a:r>
             <a:r>
-              <a:rPr lang="en-US" altLang="ja-JP" sz="2800" i="1" dirty="0" smtClean="0"/>
+              <a:rPr lang="en-US" altLang="ja-JP" sz="2800" i="1" dirty="0"/>
               <a:t>L=simula67</a:t>
             </a:r>
           </a:p>
           <a:p>
+            <a:r>
+              <a:rPr lang="en-US" altLang="ja-JP" sz="2800" i="1" dirty="0"/>
+              <a:t>    M=</a:t>
+            </a:r>
+            <a:r>
+              <a:rPr lang="en-US" altLang="ja-JP" sz="2800" i="1" dirty="0" err="1"/>
+              <a:t>cplusplus</a:t>
+            </a:r>
             <a:r>
               <a:rPr lang="en-US" altLang="ja-JP" sz="2800" i="1" dirty="0"/>
               <a:t> </a:t>
             </a:r>
             <a:r>
-              <a:rPr lang="en-US" altLang="ja-JP" sz="2800" i="1" dirty="0" smtClean="0"/>
-              <a:t>   M=</a:t>
-            </a:r>
-            <a:r>
-              <a:rPr lang="en-US" altLang="ja-JP" sz="2800" i="1" dirty="0" err="1" smtClean="0"/>
-              <a:t>cplusplus</a:t>
-            </a:r>
-            <a:r>
-              <a:rPr lang="en-US" altLang="ja-JP" sz="2800" i="1" dirty="0" smtClean="0"/>
-              <a:t> </a:t>
-            </a:r>
-            <a:r>
-              <a:rPr lang="en-US" altLang="ja-JP" sz="2800" dirty="0" smtClean="0">
+              <a:rPr lang="en-US" altLang="ja-JP" sz="2800" dirty="0">
                 <a:solidFill>
                   <a:srgbClr val="FF0000"/>
                 </a:solidFill>
@@ -4449,27 +4378,19 @@
           <a:p>
             <a:r>
               <a:rPr lang="en-US" altLang="ja-JP" sz="2800" dirty="0"/>
-              <a:t> </a:t>
-            </a:r>
-            <a:r>
-              <a:rPr lang="en-US" altLang="ja-JP" sz="2800" dirty="0" smtClean="0"/>
-              <a:t>  </a:t>
-            </a:r>
-            <a:r>
-              <a:rPr lang="en-US" altLang="ja-JP" sz="2800" i="1" dirty="0" smtClean="0"/>
+              <a:t>   </a:t>
+            </a:r>
+            <a:r>
+              <a:rPr lang="en-US" altLang="ja-JP" sz="2800" i="1" dirty="0"/>
               <a:t> L=simula67</a:t>
             </a:r>
           </a:p>
           <a:p>
             <a:r>
               <a:rPr lang="en-US" altLang="ja-JP" sz="2800" i="1" dirty="0"/>
-              <a:t> </a:t>
-            </a:r>
-            <a:r>
-              <a:rPr lang="en-US" altLang="ja-JP" sz="2800" i="1" dirty="0" smtClean="0"/>
-              <a:t>   M=smalltalk80</a:t>
-            </a:r>
-            <a:endParaRPr lang="en-US" altLang="ja-JP" sz="2800" dirty="0" smtClean="0">
+              <a:t>    M=smalltalk80</a:t>
+            </a:r>
+            <a:endParaRPr lang="en-US" altLang="ja-JP" sz="2800" dirty="0">
               <a:solidFill>
                 <a:srgbClr val="FF0000"/>
               </a:solidFill>
@@ -4478,19 +4399,11 @@
           <a:p>
             <a:r>
               <a:rPr lang="en-US" altLang="ja-JP" sz="2800" dirty="0"/>
-              <a:t> </a:t>
-            </a:r>
-            <a:r>
-              <a:rPr lang="en-US" altLang="ja-JP" sz="2800" dirty="0" smtClean="0"/>
-              <a:t>  </a:t>
+              <a:t>   </a:t>
             </a:r>
             <a:r>
               <a:rPr lang="en-US" altLang="ja-JP" sz="2800" i="1" dirty="0"/>
-              <a:t> </a:t>
-            </a:r>
-            <a:r>
-              <a:rPr lang="en-US" altLang="ja-JP" sz="2800" i="1" dirty="0" smtClean="0"/>
-              <a:t>yes</a:t>
+              <a:t> yes</a:t>
             </a:r>
           </a:p>
         </p:txBody>
@@ -4518,26 +4431,25 @@
           <a:lstStyle/>
           <a:p>
             <a:r>
-              <a:rPr kumimoji="1" lang="ja-JP" altLang="en-US" sz="2400" dirty="0" smtClean="0"/>
+              <a:rPr kumimoji="1" lang="ja-JP" altLang="en-US" sz="2400" dirty="0"/>
               <a:t>次の解がないことが分かった場合はこのように</a:t>
             </a:r>
             <a:r>
-              <a:rPr kumimoji="1" lang="en-US" altLang="ja-JP" sz="2400" dirty="0" smtClean="0"/>
+              <a:rPr kumimoji="1" lang="en-US" altLang="ja-JP" sz="2400" dirty="0"/>
               <a:t>;</a:t>
             </a:r>
             <a:r>
-              <a:rPr kumimoji="1" lang="ja-JP" altLang="en-US" sz="2400" dirty="0" smtClean="0"/>
+              <a:rPr kumimoji="1" lang="ja-JP" altLang="en-US" sz="2400" dirty="0"/>
               <a:t>の入力を待たずに</a:t>
             </a:r>
             <a:r>
-              <a:rPr kumimoji="1" lang="en-US" altLang="ja-JP" sz="2400" dirty="0" smtClean="0"/>
+              <a:rPr kumimoji="1" lang="en-US" altLang="ja-JP" sz="2400" dirty="0"/>
               <a:t>yes</a:t>
             </a:r>
             <a:r>
-              <a:rPr kumimoji="1" lang="ja-JP" altLang="en-US" sz="2400" dirty="0" smtClean="0"/>
+              <a:rPr kumimoji="1" lang="ja-JP" altLang="en-US" sz="2400" dirty="0"/>
               <a:t>が表示される。</a:t>
             </a:r>
-            <a:endParaRPr kumimoji="1" lang="ja-JP" altLang="en-US" sz="2400" dirty="0"/>
           </a:p>
         </p:txBody>
       </p:sp>
@@ -4551,13 +4463,6 @@
   <p:clrMapOvr>
     <a:masterClrMapping/>
   </p:clrMapOvr>
-  <p:timing>
-    <p:tnLst>
-      <p:par>
-        <p:cTn xmlns:p14="http://schemas.microsoft.com/office/powerpoint/2010/main" id="1" dur="indefinite" restart="never" nodeType="tmRoot"/>
-      </p:par>
-    </p:tnLst>
-  </p:timing>
 </p:sld>
 </file>
 
@@ -4599,7 +4504,7 @@
           <a:lstStyle/>
           <a:p>
             <a:r>
-              <a:rPr kumimoji="1" lang="en-US" altLang="ja-JP" dirty="0" smtClean="0"/>
+              <a:rPr kumimoji="1" lang="en-US" altLang="ja-JP" dirty="0"/>
               <a:t>Universal facts and rules</a:t>
             </a:r>
             <a:endParaRPr kumimoji="1" lang="ja-JP" altLang="en-US" dirty="0"/>
@@ -4629,23 +4534,23 @@
           <a:lstStyle/>
           <a:p>
             <a:r>
-              <a:rPr kumimoji="1" lang="en-US" altLang="ja-JP" sz="2800" dirty="0" smtClean="0"/>
+              <a:rPr kumimoji="1" lang="en-US" altLang="ja-JP" sz="2800" dirty="0"/>
               <a:t>Rule    </a:t>
             </a:r>
             <a:r>
-              <a:rPr lang="en-US" altLang="ja-JP" sz="2800" dirty="0" smtClean="0"/>
+              <a:rPr lang="en-US" altLang="ja-JP" sz="2800" dirty="0"/>
               <a:t>&lt;</a:t>
             </a:r>
             <a:r>
-              <a:rPr kumimoji="1" lang="en-US" altLang="ja-JP" sz="2800" i="1" dirty="0" smtClean="0"/>
+              <a:rPr kumimoji="1" lang="en-US" altLang="ja-JP" sz="2800" i="1" dirty="0"/>
               <a:t>term</a:t>
             </a:r>
             <a:r>
-              <a:rPr kumimoji="1" lang="en-US" altLang="ja-JP" sz="2800" dirty="0" smtClean="0"/>
+              <a:rPr kumimoji="1" lang="en-US" altLang="ja-JP" sz="2800" dirty="0"/>
               <a:t>&gt;  :-  </a:t>
             </a:r>
             <a:r>
-              <a:rPr lang="en-US" altLang="ja-JP" sz="2800" dirty="0" smtClean="0"/>
+              <a:rPr lang="en-US" altLang="ja-JP" sz="2800" dirty="0"/>
               <a:t>&lt;</a:t>
             </a:r>
             <a:r>
@@ -4704,26 +4609,22 @@
             </a:r>
             <a:r>
               <a:rPr lang="en-US" altLang="ja-JP" sz="2800" dirty="0"/>
-              <a:t> </a:t>
-            </a:r>
-            <a:r>
-              <a:rPr lang="en-US" altLang="ja-JP" sz="2800" dirty="0" smtClean="0"/>
-              <a:t>&lt;</a:t>
+              <a:t> &lt;</a:t>
             </a:r>
             <a:r>
               <a:rPr lang="en-US" altLang="ja-JP" sz="2800" i="1" dirty="0"/>
               <a:t>term</a:t>
             </a:r>
             <a:r>
-              <a:rPr lang="en-US" altLang="ja-JP" sz="2800" dirty="0" smtClean="0"/>
+              <a:rPr lang="en-US" altLang="ja-JP" sz="2800" dirty="0"/>
               <a:t>&gt; </a:t>
             </a:r>
             <a:r>
-              <a:rPr lang="en-US" altLang="ja-JP" sz="2800" b="1" dirty="0" smtClean="0"/>
+              <a:rPr lang="en-US" altLang="ja-JP" sz="2800" b="1" dirty="0"/>
               <a:t>if</a:t>
             </a:r>
             <a:r>
-              <a:rPr lang="en-US" altLang="ja-JP" sz="2800" dirty="0" smtClean="0"/>
+              <a:rPr lang="en-US" altLang="ja-JP" sz="2800" dirty="0"/>
               <a:t> &lt;</a:t>
             </a:r>
             <a:r>
@@ -4802,308 +4703,288 @@
           <a:p>
             <a:r>
               <a:rPr lang="ja-JP" altLang="en-US" sz="2800" dirty="0"/>
-              <a:t>という疑似コードに対応する</a:t>
-            </a:r>
-            <a:r>
-              <a:rPr lang="ja-JP" altLang="en-US" sz="2800" dirty="0" smtClean="0"/>
-              <a:t>。</a:t>
-            </a:r>
-            <a:r>
-              <a:rPr lang="en-US" altLang="ja-JP" sz="2800" dirty="0" smtClean="0"/>
+              <a:t>という疑似コードに対応する。</a:t>
+            </a:r>
+            <a:r>
+              <a:rPr lang="en-US" altLang="ja-JP" sz="2800" dirty="0"/>
               <a:t>Rule</a:t>
             </a:r>
             <a:r>
-              <a:rPr lang="ja-JP" altLang="en-US" sz="2800" dirty="0" smtClean="0"/>
+              <a:rPr lang="ja-JP" altLang="en-US" sz="2800" dirty="0"/>
               <a:t>の</a:t>
             </a:r>
             <a:r>
-              <a:rPr lang="en-US" altLang="ja-JP" sz="2800" dirty="0" smtClean="0"/>
+              <a:rPr lang="en-US" altLang="ja-JP" sz="2800" dirty="0"/>
               <a:t>:-</a:t>
             </a:r>
             <a:r>
-              <a:rPr lang="ja-JP" altLang="en-US" sz="2800" dirty="0" smtClean="0"/>
+              <a:rPr lang="ja-JP" altLang="en-US" sz="2800" dirty="0"/>
               <a:t>の左側は</a:t>
             </a:r>
             <a:r>
-              <a:rPr lang="en-US" altLang="ja-JP" sz="2800" dirty="0" smtClean="0"/>
+              <a:rPr lang="en-US" altLang="ja-JP" sz="2800" dirty="0"/>
               <a:t>head</a:t>
             </a:r>
             <a:r>
-              <a:rPr lang="ja-JP" altLang="en-US" sz="2800" dirty="0" smtClean="0"/>
+              <a:rPr lang="ja-JP" altLang="en-US" sz="2800" dirty="0"/>
               <a:t>、</a:t>
             </a:r>
             <a:r>
-              <a:rPr lang="en-US" altLang="ja-JP" sz="2800" dirty="0" smtClean="0"/>
+              <a:rPr lang="en-US" altLang="ja-JP" sz="2800" dirty="0"/>
               <a:t>:-</a:t>
             </a:r>
             <a:r>
-              <a:rPr lang="ja-JP" altLang="en-US" sz="2800" dirty="0" smtClean="0"/>
+              <a:rPr lang="ja-JP" altLang="en-US" sz="2800" dirty="0"/>
               <a:t>の右側は</a:t>
             </a:r>
             <a:r>
-              <a:rPr lang="en-US" altLang="ja-JP" sz="2800" dirty="0" smtClean="0"/>
+              <a:rPr lang="en-US" altLang="ja-JP" sz="2800" dirty="0"/>
               <a:t>condition</a:t>
             </a:r>
             <a:r>
-              <a:rPr lang="ja-JP" altLang="en-US" sz="2800" dirty="0" smtClean="0"/>
+              <a:rPr lang="ja-JP" altLang="en-US" sz="2800" dirty="0"/>
               <a:t>あるいは</a:t>
             </a:r>
             <a:r>
-              <a:rPr lang="en-US" altLang="ja-JP" sz="2800" dirty="0" smtClean="0"/>
+              <a:rPr lang="en-US" altLang="ja-JP" sz="2800" dirty="0"/>
               <a:t>body</a:t>
             </a:r>
             <a:r>
-              <a:rPr lang="ja-JP" altLang="en-US" sz="2800" dirty="0" smtClean="0"/>
+              <a:rPr lang="ja-JP" altLang="en-US" sz="2800" dirty="0"/>
               <a:t>と呼ばれる。</a:t>
             </a:r>
             <a:r>
-              <a:rPr lang="en-US" altLang="ja-JP" sz="2800" dirty="0" smtClean="0"/>
+              <a:rPr lang="en-US" altLang="ja-JP" sz="2800" dirty="0"/>
               <a:t>Fact</a:t>
             </a:r>
             <a:r>
-              <a:rPr lang="ja-JP" altLang="en-US" sz="2800" dirty="0" smtClean="0"/>
+              <a:rPr lang="ja-JP" altLang="en-US" sz="2800" dirty="0"/>
               <a:t>は</a:t>
             </a:r>
             <a:r>
-              <a:rPr lang="en-US" altLang="ja-JP" sz="2800" dirty="0" smtClean="0"/>
+              <a:rPr lang="en-US" altLang="ja-JP" sz="2800" dirty="0"/>
               <a:t>rule</a:t>
             </a:r>
             <a:r>
-              <a:rPr lang="ja-JP" altLang="en-US" sz="2800" dirty="0" smtClean="0"/>
+              <a:rPr lang="ja-JP" altLang="en-US" sz="2800" dirty="0"/>
               <a:t>の特別な場合で、</a:t>
             </a:r>
             <a:r>
-              <a:rPr lang="en-US" altLang="ja-JP" sz="2800" dirty="0" smtClean="0"/>
+              <a:rPr lang="en-US" altLang="ja-JP" sz="2800" dirty="0"/>
               <a:t>condition</a:t>
             </a:r>
             <a:r>
-              <a:rPr lang="ja-JP" altLang="en-US" sz="2800" dirty="0" smtClean="0"/>
+              <a:rPr lang="ja-JP" altLang="en-US" sz="2800" dirty="0"/>
               <a:t>がなく</a:t>
             </a:r>
             <a:r>
-              <a:rPr lang="en-US" altLang="ja-JP" sz="2800" dirty="0" smtClean="0"/>
+              <a:rPr lang="en-US" altLang="ja-JP" sz="2800" dirty="0"/>
               <a:t>head</a:t>
             </a:r>
             <a:r>
-              <a:rPr lang="ja-JP" altLang="en-US" sz="2800" dirty="0" smtClean="0"/>
+              <a:rPr lang="ja-JP" altLang="en-US" sz="2800" dirty="0"/>
               <a:t>だけの</a:t>
             </a:r>
             <a:r>
-              <a:rPr lang="en-US" altLang="ja-JP" sz="2800" dirty="0" smtClean="0"/>
+              <a:rPr lang="en-US" altLang="ja-JP" sz="2800" dirty="0"/>
               <a:t>rule</a:t>
             </a:r>
             <a:r>
-              <a:rPr lang="ja-JP" altLang="en-US" sz="2800" dirty="0" smtClean="0"/>
+              <a:rPr lang="ja-JP" altLang="en-US" sz="2800" dirty="0"/>
               <a:t>である。</a:t>
             </a:r>
-            <a:endParaRPr lang="en-US" altLang="ja-JP" sz="2800" dirty="0" smtClean="0"/>
-          </a:p>
-          <a:p>
-            <a:r>
-              <a:rPr lang="en-US" altLang="ja-JP" sz="2800" dirty="0" smtClean="0"/>
-              <a:t>    path</a:t>
-            </a:r>
-            <a:r>
-              <a:rPr lang="en-US" altLang="ja-JP" sz="2800" dirty="0"/>
-              <a:t>(L,L).</a:t>
-            </a:r>
-          </a:p>
-          <a:p>
-            <a:r>
-              <a:rPr lang="en-US" altLang="ja-JP" sz="2800" dirty="0" smtClean="0"/>
-              <a:t>    path</a:t>
-            </a:r>
-            <a:r>
-              <a:rPr lang="en-US" altLang="ja-JP" sz="2800" dirty="0"/>
-              <a:t>(L,M) :- link(L,X), path(X,M) .</a:t>
+            <a:endParaRPr lang="en-US" altLang="ja-JP" sz="2800" dirty="0"/>
+          </a:p>
+          <a:p>
+            <a:r>
+              <a:rPr lang="en-US" altLang="ja-JP" sz="2800" dirty="0"/>
+              <a:t>    path(L,L).</a:t>
+            </a:r>
+          </a:p>
+          <a:p>
+            <a:r>
+              <a:rPr lang="en-US" altLang="ja-JP" sz="2800" dirty="0"/>
+              <a:t>    path(L,M) :- link(L,X), path(X,M) .</a:t>
             </a:r>
             <a:endParaRPr lang="ja-JP" altLang="en-US" sz="2800" dirty="0"/>
           </a:p>
           <a:p>
             <a:r>
-              <a:rPr lang="ja-JP" altLang="en-US" sz="2800" dirty="0" smtClean="0"/>
+              <a:rPr lang="ja-JP" altLang="en-US" sz="2800" dirty="0"/>
               <a:t>は</a:t>
             </a:r>
             <a:r>
-              <a:rPr lang="en-US" altLang="ja-JP" sz="2800" i="1" dirty="0" smtClean="0"/>
+              <a:rPr lang="en-US" altLang="ja-JP" sz="2800" i="1" dirty="0"/>
               <a:t>path</a:t>
             </a:r>
             <a:r>
-              <a:rPr lang="ja-JP" altLang="en-US" sz="2800" dirty="0" smtClean="0"/>
+              <a:rPr lang="ja-JP" altLang="en-US" sz="2800" dirty="0"/>
               <a:t>という関係を定義している。</a:t>
             </a:r>
-            <a:endParaRPr lang="en-US" altLang="ja-JP" sz="2800" dirty="0" smtClean="0"/>
-          </a:p>
-          <a:p>
-            <a:r>
-              <a:rPr lang="en-US" altLang="ja-JP" sz="2800" dirty="0"/>
-              <a:t>p</a:t>
-            </a:r>
-            <a:r>
-              <a:rPr lang="en-US" altLang="ja-JP" sz="2800" dirty="0" smtClean="0"/>
-              <a:t>ath(L,L)</a:t>
-            </a:r>
-            <a:r>
-              <a:rPr lang="ja-JP" altLang="en-US" sz="2800" dirty="0" smtClean="0"/>
+            <a:endParaRPr lang="en-US" altLang="ja-JP" sz="2800" dirty="0"/>
+          </a:p>
+          <a:p>
+            <a:r>
+              <a:rPr lang="en-US" altLang="ja-JP" sz="2800" dirty="0"/>
+              <a:t>path(L,L)</a:t>
+            </a:r>
+            <a:r>
+              <a:rPr lang="ja-JP" altLang="en-US" sz="2800" dirty="0"/>
               <a:t>は、全ての</a:t>
             </a:r>
             <a:r>
-              <a:rPr lang="en-US" altLang="ja-JP" sz="2800" i="1" dirty="0" smtClean="0"/>
+              <a:rPr lang="en-US" altLang="ja-JP" sz="2800" i="1" dirty="0"/>
               <a:t>L</a:t>
             </a:r>
             <a:r>
-              <a:rPr lang="ja-JP" altLang="en-US" sz="2800" dirty="0" smtClean="0"/>
+              <a:rPr lang="ja-JP" altLang="en-US" sz="2800" dirty="0"/>
               <a:t>に対し、</a:t>
             </a:r>
             <a:r>
-              <a:rPr lang="en-US" altLang="ja-JP" sz="2800" i="1" dirty="0" smtClean="0"/>
+              <a:rPr lang="en-US" altLang="ja-JP" sz="2800" i="1" dirty="0"/>
               <a:t>path</a:t>
             </a:r>
             <a:r>
-              <a:rPr lang="en-US" altLang="ja-JP" sz="2800" dirty="0" smtClean="0"/>
+              <a:rPr lang="en-US" altLang="ja-JP" sz="2800" dirty="0"/>
               <a:t>(</a:t>
             </a:r>
             <a:r>
-              <a:rPr lang="en-US" altLang="ja-JP" sz="2800" i="1" dirty="0" smtClean="0"/>
+              <a:rPr lang="en-US" altLang="ja-JP" sz="2800" i="1" dirty="0"/>
               <a:t>L</a:t>
             </a:r>
             <a:r>
-              <a:rPr lang="en-US" altLang="ja-JP" sz="2800" dirty="0" smtClean="0"/>
+              <a:rPr lang="en-US" altLang="ja-JP" sz="2800" dirty="0"/>
               <a:t>,</a:t>
             </a:r>
             <a:r>
-              <a:rPr lang="en-US" altLang="ja-JP" sz="2800" i="1" dirty="0" smtClean="0"/>
+              <a:rPr lang="en-US" altLang="ja-JP" sz="2800" i="1" dirty="0"/>
               <a:t>L</a:t>
             </a:r>
             <a:r>
-              <a:rPr lang="en-US" altLang="ja-JP" sz="2800" dirty="0" smtClean="0"/>
+              <a:rPr lang="en-US" altLang="ja-JP" sz="2800" dirty="0"/>
               <a:t>)</a:t>
             </a:r>
             <a:r>
-              <a:rPr lang="ja-JP" altLang="en-US" sz="2800" dirty="0" smtClean="0"/>
+              <a:rPr lang="ja-JP" altLang="en-US" sz="2800" dirty="0"/>
               <a:t>が成り立つということを表す。</a:t>
             </a:r>
             <a:r>
               <a:rPr lang="en-US" altLang="ja-JP" sz="2800" dirty="0"/>
-              <a:t>path(L,M) :- link(L,X), path(X,M) </a:t>
-            </a:r>
-            <a:r>
-              <a:rPr lang="en-US" altLang="ja-JP" sz="2800" dirty="0" smtClean="0"/>
-              <a:t>. </a:t>
-            </a:r>
-            <a:r>
-              <a:rPr lang="ja-JP" altLang="en-US" sz="2800" dirty="0" smtClean="0"/>
+              <a:t>path(L,M) :- link(L,X), path(X,M) . </a:t>
+            </a:r>
+            <a:r>
+              <a:rPr lang="ja-JP" altLang="en-US" sz="2800" dirty="0"/>
               <a:t>は、すべての</a:t>
             </a:r>
             <a:r>
-              <a:rPr lang="en-US" altLang="ja-JP" sz="2800" i="1" dirty="0" smtClean="0"/>
+              <a:rPr lang="en-US" altLang="ja-JP" sz="2800" i="1" dirty="0"/>
               <a:t>L</a:t>
             </a:r>
             <a:r>
-              <a:rPr lang="ja-JP" altLang="en-US" sz="2800" dirty="0" smtClean="0"/>
+              <a:rPr lang="ja-JP" altLang="en-US" sz="2800" dirty="0"/>
               <a:t>と</a:t>
             </a:r>
             <a:r>
-              <a:rPr lang="en-US" altLang="ja-JP" sz="2800" i="1" dirty="0" smtClean="0"/>
+              <a:rPr lang="en-US" altLang="ja-JP" sz="2800" i="1" dirty="0"/>
               <a:t>M</a:t>
             </a:r>
             <a:r>
-              <a:rPr lang="ja-JP" altLang="en-US" sz="2800" dirty="0" smtClean="0"/>
+              <a:rPr lang="ja-JP" altLang="en-US" sz="2800" dirty="0"/>
               <a:t>に対し、もし</a:t>
             </a:r>
             <a:r>
-              <a:rPr lang="en-US" altLang="ja-JP" sz="2800" i="1" dirty="0" smtClean="0"/>
+              <a:rPr lang="en-US" altLang="ja-JP" sz="2800" i="1" dirty="0"/>
               <a:t>link</a:t>
             </a:r>
             <a:r>
-              <a:rPr lang="en-US" altLang="ja-JP" sz="2800" dirty="0" smtClean="0"/>
+              <a:rPr lang="en-US" altLang="ja-JP" sz="2800" dirty="0"/>
               <a:t>(</a:t>
             </a:r>
             <a:r>
-              <a:rPr lang="en-US" altLang="ja-JP" sz="2800" i="1" dirty="0" smtClean="0"/>
+              <a:rPr lang="en-US" altLang="ja-JP" sz="2800" i="1" dirty="0"/>
               <a:t>L</a:t>
             </a:r>
             <a:r>
-              <a:rPr lang="en-US" altLang="ja-JP" sz="2800" dirty="0" smtClean="0"/>
+              <a:rPr lang="en-US" altLang="ja-JP" sz="2800" dirty="0"/>
               <a:t>,</a:t>
             </a:r>
             <a:r>
-              <a:rPr lang="en-US" altLang="ja-JP" sz="2800" i="1" dirty="0" smtClean="0"/>
+              <a:rPr lang="en-US" altLang="ja-JP" sz="2800" i="1" dirty="0"/>
               <a:t>X</a:t>
             </a:r>
             <a:r>
-              <a:rPr lang="en-US" altLang="ja-JP" sz="2800" dirty="0" smtClean="0"/>
+              <a:rPr lang="en-US" altLang="ja-JP" sz="2800" dirty="0"/>
               <a:t>)</a:t>
             </a:r>
             <a:r>
-              <a:rPr lang="ja-JP" altLang="en-US" sz="2800" dirty="0" smtClean="0"/>
+              <a:rPr lang="ja-JP" altLang="en-US" sz="2800" dirty="0"/>
               <a:t>と</a:t>
             </a:r>
             <a:r>
-              <a:rPr lang="en-US" altLang="ja-JP" sz="2800" i="1" dirty="0" smtClean="0"/>
+              <a:rPr lang="en-US" altLang="ja-JP" sz="2800" i="1" dirty="0"/>
               <a:t>path</a:t>
             </a:r>
             <a:r>
-              <a:rPr lang="en-US" altLang="ja-JP" sz="2800" dirty="0" smtClean="0"/>
+              <a:rPr lang="en-US" altLang="ja-JP" sz="2800" dirty="0"/>
               <a:t>(</a:t>
             </a:r>
             <a:r>
-              <a:rPr lang="en-US" altLang="ja-JP" sz="2800" i="1" dirty="0" smtClean="0"/>
+              <a:rPr lang="en-US" altLang="ja-JP" sz="2800" i="1" dirty="0"/>
               <a:t>X</a:t>
             </a:r>
             <a:r>
-              <a:rPr lang="en-US" altLang="ja-JP" sz="2800" dirty="0" smtClean="0"/>
+              <a:rPr lang="en-US" altLang="ja-JP" sz="2800" dirty="0"/>
               <a:t>,</a:t>
             </a:r>
             <a:r>
-              <a:rPr lang="en-US" altLang="ja-JP" sz="2800" i="1" dirty="0" smtClean="0"/>
+              <a:rPr lang="en-US" altLang="ja-JP" sz="2800" i="1" dirty="0"/>
               <a:t>M</a:t>
             </a:r>
             <a:r>
-              <a:rPr lang="en-US" altLang="ja-JP" sz="2800" dirty="0" smtClean="0"/>
+              <a:rPr lang="en-US" altLang="ja-JP" sz="2800" dirty="0"/>
               <a:t>)</a:t>
             </a:r>
             <a:r>
-              <a:rPr lang="ja-JP" altLang="en-US" sz="2800" dirty="0" smtClean="0"/>
+              <a:rPr lang="ja-JP" altLang="en-US" sz="2800" dirty="0"/>
               <a:t>が成り立つような</a:t>
             </a:r>
             <a:r>
-              <a:rPr lang="en-US" altLang="ja-JP" sz="2800" i="1" dirty="0" smtClean="0"/>
+              <a:rPr lang="en-US" altLang="ja-JP" sz="2800" i="1" dirty="0"/>
               <a:t>X</a:t>
             </a:r>
             <a:r>
-              <a:rPr lang="ja-JP" altLang="en-US" sz="2800" dirty="0" smtClean="0"/>
+              <a:rPr lang="ja-JP" altLang="en-US" sz="2800" dirty="0"/>
               <a:t>が存在するなら、</a:t>
             </a:r>
             <a:r>
-              <a:rPr lang="en-US" altLang="ja-JP" sz="2800" i="1" dirty="0" smtClean="0"/>
+              <a:rPr lang="en-US" altLang="ja-JP" sz="2800" i="1" dirty="0"/>
               <a:t>path</a:t>
             </a:r>
             <a:r>
-              <a:rPr lang="en-US" altLang="ja-JP" sz="2800" dirty="0" smtClean="0"/>
+              <a:rPr lang="en-US" altLang="ja-JP" sz="2800" dirty="0"/>
               <a:t>(</a:t>
             </a:r>
             <a:r>
-              <a:rPr lang="en-US" altLang="ja-JP" sz="2800" i="1" dirty="0" smtClean="0"/>
+              <a:rPr lang="en-US" altLang="ja-JP" sz="2800" i="1" dirty="0"/>
               <a:t>L</a:t>
             </a:r>
             <a:r>
-              <a:rPr lang="en-US" altLang="ja-JP" sz="2800" dirty="0" smtClean="0"/>
+              <a:rPr lang="en-US" altLang="ja-JP" sz="2800" dirty="0"/>
               <a:t>,</a:t>
             </a:r>
             <a:r>
-              <a:rPr lang="en-US" altLang="ja-JP" sz="2800" i="1" dirty="0" smtClean="0"/>
+              <a:rPr lang="en-US" altLang="ja-JP" sz="2800" i="1" dirty="0"/>
               <a:t>M</a:t>
             </a:r>
             <a:r>
-              <a:rPr lang="en-US" altLang="ja-JP" sz="2800" dirty="0" smtClean="0"/>
+              <a:rPr lang="en-US" altLang="ja-JP" sz="2800" dirty="0"/>
               <a:t>)</a:t>
             </a:r>
             <a:r>
-              <a:rPr lang="ja-JP" altLang="en-US" sz="2800" dirty="0" smtClean="0"/>
+              <a:rPr lang="ja-JP" altLang="en-US" sz="2800" dirty="0"/>
               <a:t>が成り立つということを表す。</a:t>
             </a:r>
-            <a:endParaRPr lang="en-US" altLang="ja-JP" sz="2800" dirty="0" smtClean="0"/>
+            <a:endParaRPr lang="en-US" altLang="ja-JP" sz="2800" dirty="0"/>
           </a:p>
         </p:txBody>
       </p:sp>
@@ -5117,13 +4998,6 @@
   <p:clrMapOvr>
     <a:masterClrMapping/>
   </p:clrMapOvr>
-  <p:timing>
-    <p:tnLst>
-      <p:par>
-        <p:cTn xmlns:p14="http://schemas.microsoft.com/office/powerpoint/2010/main" id="1" dur="indefinite" restart="never" nodeType="tmRoot"/>
-      </p:par>
-    </p:tnLst>
-  </p:timing>
 </p:sld>
 </file>
 
@@ -5160,7 +5034,7 @@
           <a:lstStyle/>
           <a:p>
             <a:r>
-              <a:rPr lang="en-US" altLang="ja-JP" dirty="0" smtClean="0"/>
+              <a:rPr lang="en-US" altLang="ja-JP" dirty="0"/>
               <a:t>Negation as failure</a:t>
             </a:r>
             <a:endParaRPr kumimoji="1" lang="ja-JP" altLang="en-US" dirty="0"/>
@@ -5190,42 +5064,42 @@
           <a:lstStyle/>
           <a:p>
             <a:r>
-              <a:rPr kumimoji="1" lang="en-US" altLang="ja-JP" sz="2800" dirty="0" smtClean="0"/>
+              <a:rPr kumimoji="1" lang="en-US" altLang="ja-JP" sz="2800" dirty="0"/>
               <a:t>Prolog</a:t>
             </a:r>
             <a:r>
-              <a:rPr kumimoji="1" lang="ja-JP" altLang="en-US" sz="2800" dirty="0" smtClean="0"/>
+              <a:rPr kumimoji="1" lang="ja-JP" altLang="en-US" sz="2800" dirty="0"/>
               <a:t>は、</a:t>
             </a:r>
             <a:r>
-              <a:rPr kumimoji="1" lang="en-US" altLang="ja-JP" sz="2800" dirty="0" smtClean="0"/>
+              <a:rPr kumimoji="1" lang="en-US" altLang="ja-JP" sz="2800" dirty="0"/>
               <a:t>query</a:t>
             </a:r>
             <a:r>
-              <a:rPr kumimoji="1" lang="ja-JP" altLang="en-US" sz="2800" dirty="0" smtClean="0"/>
+              <a:rPr kumimoji="1" lang="ja-JP" altLang="en-US" sz="2800" dirty="0"/>
               <a:t>を満たすのに失敗したときに</a:t>
             </a:r>
             <a:r>
-              <a:rPr kumimoji="1" lang="en-US" altLang="ja-JP" sz="2800" i="1" dirty="0" smtClean="0"/>
+              <a:rPr kumimoji="1" lang="en-US" altLang="ja-JP" sz="2800" i="1" dirty="0"/>
               <a:t>no</a:t>
             </a:r>
             <a:r>
-              <a:rPr lang="ja-JP" altLang="en-US" sz="2800" dirty="0" smtClean="0"/>
+              <a:rPr lang="ja-JP" altLang="en-US" sz="2800" dirty="0"/>
               <a:t>と答える。</a:t>
             </a:r>
-            <a:endParaRPr lang="en-US" altLang="ja-JP" sz="2800" dirty="0" smtClean="0"/>
-          </a:p>
-          <a:p>
-            <a:r>
-              <a:rPr kumimoji="1" lang="en-US" altLang="ja-JP" sz="2800" i="1" dirty="0" smtClean="0"/>
+            <a:endParaRPr lang="en-US" altLang="ja-JP" sz="2800" dirty="0"/>
+          </a:p>
+          <a:p>
+            <a:r>
+              <a:rPr kumimoji="1" lang="en-US" altLang="ja-JP" sz="2800" i="1" dirty="0"/>
               <a:t>?-</a:t>
             </a:r>
             <a:r>
-              <a:rPr kumimoji="1" lang="en-US" altLang="ja-JP" sz="2800" dirty="0" smtClean="0"/>
+              <a:rPr kumimoji="1" lang="en-US" altLang="ja-JP" sz="2800" dirty="0"/>
               <a:t> </a:t>
             </a:r>
             <a:r>
-              <a:rPr kumimoji="1" lang="en-US" altLang="ja-JP" sz="2800" dirty="0" smtClean="0">
+              <a:rPr kumimoji="1" lang="en-US" altLang="ja-JP" sz="2800" dirty="0">
                 <a:solidFill>
                   <a:srgbClr val="FF0000"/>
                 </a:solidFill>
@@ -5233,7 +5107,7 @@
               <a:t>link(</a:t>
             </a:r>
             <a:r>
-              <a:rPr kumimoji="1" lang="en-US" altLang="ja-JP" sz="2800" dirty="0" err="1" smtClean="0">
+              <a:rPr kumimoji="1" lang="en-US" altLang="ja-JP" sz="2800" dirty="0" err="1">
                 <a:solidFill>
                   <a:srgbClr val="FF0000"/>
                 </a:solidFill>
@@ -5241,7 +5115,7 @@
               <a:t>lisp,scheme</a:t>
             </a:r>
             <a:r>
-              <a:rPr kumimoji="1" lang="en-US" altLang="ja-JP" sz="2800" dirty="0" smtClean="0">
+              <a:rPr kumimoji="1" lang="en-US" altLang="ja-JP" sz="2800" dirty="0">
                 <a:solidFill>
                   <a:srgbClr val="FF0000"/>
                 </a:solidFill>
@@ -5251,79 +5125,75 @@
           </a:p>
           <a:p>
             <a:r>
-              <a:rPr lang="en-US" altLang="ja-JP" sz="2800" i="1" dirty="0" smtClean="0"/>
+              <a:rPr lang="en-US" altLang="ja-JP" sz="2800" i="1" dirty="0"/>
               <a:t>    no</a:t>
             </a:r>
           </a:p>
           <a:p>
             <a:r>
-              <a:rPr kumimoji="1" lang="en-US" altLang="ja-JP" sz="2800" dirty="0" smtClean="0"/>
+              <a:rPr kumimoji="1" lang="en-US" altLang="ja-JP" sz="2800" dirty="0"/>
               <a:t>not</a:t>
             </a:r>
             <a:r>
-              <a:rPr kumimoji="1" lang="ja-JP" altLang="en-US" sz="2800" dirty="0" smtClean="0"/>
+              <a:rPr kumimoji="1" lang="ja-JP" altLang="en-US" sz="2800" dirty="0"/>
               <a:t>演算子</a:t>
             </a:r>
             <a:r>
               <a:rPr lang="en-US" altLang="ja-JP" sz="2800" dirty="0"/>
+              <a:t>(\+)</a:t>
+            </a:r>
+            <a:r>
+              <a:rPr kumimoji="1" lang="ja-JP" altLang="en-US" sz="2800" dirty="0"/>
+              <a:t>も</a:t>
+            </a:r>
+            <a:r>
+              <a:rPr kumimoji="1" lang="en-US" altLang="ja-JP" sz="2800" dirty="0"/>
+              <a:t>negation as failure</a:t>
+            </a:r>
+            <a:r>
+              <a:rPr kumimoji="1" lang="ja-JP" altLang="en-US" sz="2800" dirty="0"/>
+              <a:t>であり、</a:t>
+            </a:r>
+            <a:r>
+              <a:rPr lang="en-US" altLang="ja-JP" sz="2800" dirty="0"/>
+              <a:t>\+</a:t>
+            </a:r>
+            <a:r>
+              <a:rPr kumimoji="1" lang="en-US" altLang="ja-JP" sz="2800" dirty="0"/>
               <a:t>(</a:t>
             </a:r>
             <a:r>
-              <a:rPr lang="en-US" altLang="ja-JP" sz="2800" dirty="0" smtClean="0"/>
-              <a:t>\+)</a:t>
-            </a:r>
-            <a:r>
-              <a:rPr kumimoji="1" lang="ja-JP" altLang="en-US" sz="2800" dirty="0" smtClean="0"/>
-              <a:t>も</a:t>
-            </a:r>
-            <a:r>
-              <a:rPr kumimoji="1" lang="en-US" altLang="ja-JP" sz="2800" dirty="0" smtClean="0"/>
-              <a:t>negation as failure</a:t>
-            </a:r>
-            <a:r>
-              <a:rPr kumimoji="1" lang="ja-JP" altLang="en-US" sz="2800" dirty="0" smtClean="0"/>
-              <a:t>であり、</a:t>
-            </a:r>
-            <a:r>
-              <a:rPr lang="en-US" altLang="ja-JP" sz="2800" dirty="0" smtClean="0"/>
-              <a:t>\+</a:t>
-            </a:r>
-            <a:r>
-              <a:rPr kumimoji="1" lang="en-US" altLang="ja-JP" sz="2800" dirty="0" smtClean="0"/>
-              <a:t>(</a:t>
-            </a:r>
-            <a:r>
-              <a:rPr kumimoji="1" lang="en-US" altLang="ja-JP" sz="2800" i="1" dirty="0" smtClean="0"/>
+              <a:rPr kumimoji="1" lang="en-US" altLang="ja-JP" sz="2800" i="1" dirty="0"/>
               <a:t>P</a:t>
             </a:r>
             <a:r>
-              <a:rPr kumimoji="1" lang="en-US" altLang="ja-JP" sz="2800" dirty="0" smtClean="0"/>
+              <a:rPr kumimoji="1" lang="en-US" altLang="ja-JP" sz="2800" dirty="0"/>
               <a:t>)</a:t>
             </a:r>
             <a:r>
-              <a:rPr kumimoji="1" lang="ja-JP" altLang="en-US" sz="2800" dirty="0" smtClean="0"/>
+              <a:rPr kumimoji="1" lang="ja-JP" altLang="en-US" sz="2800" dirty="0"/>
               <a:t>は</a:t>
             </a:r>
             <a:r>
-              <a:rPr kumimoji="1" lang="en-US" altLang="ja-JP" sz="2800" i="1" dirty="0" smtClean="0"/>
+              <a:rPr kumimoji="1" lang="en-US" altLang="ja-JP" sz="2800" i="1" dirty="0"/>
               <a:t>P</a:t>
             </a:r>
             <a:r>
-              <a:rPr kumimoji="1" lang="ja-JP" altLang="en-US" sz="2800" dirty="0" smtClean="0"/>
+              <a:rPr kumimoji="1" lang="ja-JP" altLang="en-US" sz="2800" dirty="0"/>
               <a:t>を示すのに失敗したら</a:t>
             </a:r>
             <a:r>
-              <a:rPr kumimoji="1" lang="en-US" altLang="ja-JP" sz="2800" dirty="0" smtClean="0"/>
+              <a:rPr kumimoji="1" lang="en-US" altLang="ja-JP" sz="2800" dirty="0"/>
               <a:t>true</a:t>
             </a:r>
             <a:r>
-              <a:rPr kumimoji="1" lang="ja-JP" altLang="en-US" sz="2800" dirty="0" smtClean="0"/>
+              <a:rPr kumimoji="1" lang="ja-JP" altLang="en-US" sz="2800" dirty="0"/>
               <a:t>として扱われる。</a:t>
             </a:r>
-            <a:endParaRPr kumimoji="1" lang="en-US" altLang="ja-JP" sz="2800" dirty="0" smtClean="0"/>
-          </a:p>
-          <a:p>
-            <a:endParaRPr kumimoji="1" lang="en-US" altLang="ja-JP" sz="2800" dirty="0" smtClean="0"/>
+            <a:endParaRPr kumimoji="1" lang="en-US" altLang="ja-JP" sz="2800" dirty="0"/>
+          </a:p>
+          <a:p>
+            <a:endParaRPr kumimoji="1" lang="en-US" altLang="ja-JP" sz="2800" dirty="0"/>
           </a:p>
         </p:txBody>
       </p:sp>
@@ -5337,13 +5207,6 @@
   <p:clrMapOvr>
     <a:masterClrMapping/>
   </p:clrMapOvr>
-  <p:timing>
-    <p:tnLst>
-      <p:par>
-        <p:cTn xmlns:p14="http://schemas.microsoft.com/office/powerpoint/2010/main" id="1" dur="indefinite" restart="never" nodeType="tmRoot"/>
-      </p:par>
-    </p:tnLst>
-  </p:timing>
 </p:sld>
 </file>
 
@@ -5387,10 +5250,9 @@
           <a:lstStyle/>
           <a:p>
             <a:r>
-              <a:rPr kumimoji="1" lang="ja-JP" altLang="en-US" dirty="0" smtClean="0"/>
+              <a:rPr kumimoji="1" lang="ja-JP" altLang="en-US" dirty="0"/>
               <a:t>（続き）</a:t>
             </a:r>
-            <a:endParaRPr kumimoji="1" lang="ja-JP" altLang="en-US" dirty="0"/>
           </a:p>
         </p:txBody>
       </p:sp>
@@ -5443,22 +5305,18 @@
               <a:t>   L=</a:t>
             </a:r>
             <a:r>
-              <a:rPr lang="en-US" altLang="ja-JP" sz="2800" i="1" dirty="0" err="1" smtClean="0"/>
+              <a:rPr lang="en-US" altLang="ja-JP" sz="2800" i="1" dirty="0" err="1"/>
               <a:t>fortran</a:t>
             </a:r>
-            <a:endParaRPr lang="en-US" altLang="ja-JP" sz="2800" i="1" dirty="0" smtClean="0"/>
-          </a:p>
-          <a:p>
-            <a:r>
-              <a:rPr lang="en-US" altLang="ja-JP" sz="2800" i="1" dirty="0" smtClean="0"/>
-              <a:t>    M</a:t>
-            </a:r>
+            <a:endParaRPr lang="en-US" altLang="ja-JP" sz="2800" i="1" dirty="0"/>
+          </a:p>
+          <a:p>
             <a:r>
               <a:rPr lang="en-US" altLang="ja-JP" sz="2800" i="1" dirty="0"/>
-              <a:t>=</a:t>
-            </a:r>
-            <a:r>
-              <a:rPr lang="en-US" altLang="ja-JP" sz="2800" i="1" dirty="0" err="1" smtClean="0"/>
+              <a:t>    M=</a:t>
+            </a:r>
+            <a:r>
+              <a:rPr lang="en-US" altLang="ja-JP" sz="2800" i="1" dirty="0" err="1"/>
               <a:t>fortran</a:t>
             </a:r>
             <a:endParaRPr lang="en-US" altLang="ja-JP" sz="2800" i="1" dirty="0"/>
@@ -5466,25 +5324,20 @@
           <a:p>
             <a:r>
               <a:rPr lang="en-US" altLang="ja-JP" sz="2800" i="1" dirty="0"/>
-              <a:t>    N=</a:t>
-            </a:r>
-            <a:r>
-              <a:rPr lang="en-US" altLang="ja-JP" sz="2800" i="1" dirty="0" smtClean="0"/>
-              <a:t>algol60</a:t>
-            </a:r>
-            <a:endParaRPr lang="en-US" altLang="ja-JP" sz="2800" i="1" dirty="0"/>
-          </a:p>
-          <a:p>
-            <a:r>
-              <a:rPr lang="en-US" altLang="ja-JP" sz="2800" i="1" dirty="0" smtClean="0"/>
+              <a:t>    N=algol60</a:t>
+            </a:r>
+          </a:p>
+          <a:p>
+            <a:r>
+              <a:rPr lang="en-US" altLang="ja-JP" sz="2800" i="1" dirty="0"/>
               <a:t>?-</a:t>
             </a:r>
             <a:r>
-              <a:rPr lang="en-US" altLang="ja-JP" sz="2800" dirty="0" smtClean="0"/>
+              <a:rPr lang="en-US" altLang="ja-JP" sz="2800" dirty="0"/>
               <a:t> </a:t>
             </a:r>
             <a:r>
-              <a:rPr lang="en-US" altLang="ja-JP" sz="2800" dirty="0" smtClean="0">
+              <a:rPr lang="en-US" altLang="ja-JP" sz="2800" dirty="0">
                 <a:solidFill>
                   <a:srgbClr val="FF0000"/>
                 </a:solidFill>
@@ -5498,40 +5351,32 @@
               <a:t> </a:t>
             </a:r>
             <a:r>
-              <a:rPr kumimoji="1" lang="en-US" altLang="ja-JP" sz="2800" i="1" dirty="0" smtClean="0"/>
+              <a:rPr kumimoji="1" lang="en-US" altLang="ja-JP" sz="2800" i="1" dirty="0"/>
               <a:t>   L=c</a:t>
             </a:r>
           </a:p>
           <a:p>
             <a:r>
-              <a:rPr lang="en-US" altLang="ja-JP" sz="2800" i="1" dirty="0" smtClean="0"/>
-              <a:t>    M</a:t>
-            </a:r>
-            <a:r>
               <a:rPr lang="en-US" altLang="ja-JP" sz="2800" i="1" dirty="0"/>
-              <a:t>=simula67 </a:t>
-            </a:r>
-            <a:endParaRPr kumimoji="1" lang="en-US" altLang="ja-JP" sz="2800" i="1" dirty="0" smtClean="0"/>
-          </a:p>
-          <a:p>
+              <a:t>    M=simula67 </a:t>
+            </a:r>
+            <a:endParaRPr kumimoji="1" lang="en-US" altLang="ja-JP" sz="2800" i="1" dirty="0"/>
+          </a:p>
+          <a:p>
+            <a:r>
+              <a:rPr lang="en-US" altLang="ja-JP" sz="2800" i="1" dirty="0"/>
+              <a:t>    N=</a:t>
+            </a:r>
+            <a:r>
+              <a:rPr lang="en-US" altLang="ja-JP" sz="2800" i="1" dirty="0" err="1"/>
+              <a:t>cplusplus</a:t>
+            </a:r>
             <a:r>
               <a:rPr lang="en-US" altLang="ja-JP" sz="2800" i="1" dirty="0"/>
               <a:t> </a:t>
             </a:r>
             <a:r>
-              <a:rPr lang="en-US" altLang="ja-JP" sz="2800" i="1" dirty="0" smtClean="0"/>
-              <a:t>   N=</a:t>
-            </a:r>
-            <a:r>
-              <a:rPr lang="en-US" altLang="ja-JP" sz="2800" i="1" dirty="0" err="1" smtClean="0"/>
-              <a:t>cplusplus</a:t>
-            </a:r>
-            <a:r>
-              <a:rPr lang="en-US" altLang="ja-JP" sz="2800" i="1" dirty="0"/>
-              <a:t> </a:t>
-            </a:r>
-            <a:r>
-              <a:rPr kumimoji="1" lang="en-US" altLang="ja-JP" sz="2800" dirty="0" smtClean="0">
+              <a:rPr kumimoji="1" lang="en-US" altLang="ja-JP" sz="2800" dirty="0">
                 <a:solidFill>
                   <a:srgbClr val="FF0000"/>
                 </a:solidFill>
@@ -5542,39 +5387,26 @@
           <a:p>
             <a:r>
               <a:rPr lang="en-US" altLang="ja-JP" sz="2800" dirty="0"/>
-              <a:t> </a:t>
-            </a:r>
-            <a:r>
-              <a:rPr lang="en-US" altLang="ja-JP" sz="2800" dirty="0" smtClean="0"/>
-              <a:t>   </a:t>
-            </a:r>
-            <a:r>
-              <a:rPr lang="en-US" altLang="ja-JP" sz="2800" i="1" dirty="0" smtClean="0"/>
+              <a:t>    </a:t>
+            </a:r>
+            <a:r>
+              <a:rPr lang="en-US" altLang="ja-JP" sz="2800" i="1" dirty="0"/>
               <a:t>L=simula67</a:t>
             </a:r>
           </a:p>
           <a:p>
             <a:r>
-              <a:rPr lang="en-US" altLang="ja-JP" sz="2800" i="1" dirty="0" smtClean="0"/>
-              <a:t>    </a:t>
-            </a:r>
-            <a:r>
               <a:rPr lang="en-US" altLang="ja-JP" sz="2800" i="1" dirty="0"/>
-              <a:t>M=c </a:t>
-            </a:r>
-            <a:endParaRPr lang="en-US" altLang="ja-JP" sz="2800" i="1" dirty="0" smtClean="0"/>
+              <a:t>    M=c </a:t>
+            </a:r>
           </a:p>
           <a:p>
             <a:r>
               <a:rPr kumimoji="1" lang="en-US" altLang="ja-JP" sz="2800" i="1" dirty="0"/>
-              <a:t> </a:t>
-            </a:r>
-            <a:r>
-              <a:rPr kumimoji="1" lang="en-US" altLang="ja-JP" sz="2800" i="1" dirty="0" smtClean="0"/>
-              <a:t>   N=</a:t>
-            </a:r>
-            <a:r>
-              <a:rPr kumimoji="1" lang="en-US" altLang="ja-JP" sz="2800" i="1" dirty="0" err="1" smtClean="0"/>
+              <a:t>    N=</a:t>
+            </a:r>
+            <a:r>
+              <a:rPr kumimoji="1" lang="en-US" altLang="ja-JP" sz="2800" i="1" dirty="0" err="1"/>
               <a:t>cplusplus</a:t>
             </a:r>
             <a:r>
@@ -5582,7 +5414,7 @@
               <a:t> </a:t>
             </a:r>
             <a:r>
-              <a:rPr lang="en-US" altLang="ja-JP" sz="2800" dirty="0" smtClean="0">
+              <a:rPr lang="en-US" altLang="ja-JP" sz="2800" dirty="0">
                 <a:solidFill>
                   <a:srgbClr val="FF0000"/>
                 </a:solidFill>
@@ -5593,24 +5425,20 @@
           <a:p>
             <a:r>
               <a:rPr kumimoji="1" lang="en-US" altLang="ja-JP" sz="2800" dirty="0"/>
-              <a:t> </a:t>
-            </a:r>
-            <a:r>
-              <a:rPr kumimoji="1" lang="en-US" altLang="ja-JP" sz="2800" dirty="0" smtClean="0"/>
-              <a:t>   </a:t>
-            </a:r>
-            <a:r>
-              <a:rPr kumimoji="1" lang="en-US" altLang="ja-JP" sz="2800" i="1" dirty="0" smtClean="0"/>
+              <a:t>    </a:t>
+            </a:r>
+            <a:r>
+              <a:rPr kumimoji="1" lang="en-US" altLang="ja-JP" sz="2800" i="1" dirty="0"/>
               <a:t>no</a:t>
             </a:r>
           </a:p>
           <a:p>
             <a:r>
-              <a:rPr kumimoji="1" lang="en-US" altLang="ja-JP" sz="2800" i="1" dirty="0" smtClean="0"/>
+              <a:rPr kumimoji="1" lang="en-US" altLang="ja-JP" sz="2800" i="1" dirty="0"/>
               <a:t>?- </a:t>
             </a:r>
             <a:r>
-              <a:rPr kumimoji="1" lang="en-US" altLang="ja-JP" sz="2800" i="1" dirty="0" smtClean="0">
+              <a:rPr kumimoji="1" lang="en-US" altLang="ja-JP" sz="2800" i="1" dirty="0">
                 <a:solidFill>
                   <a:srgbClr val="FF0000"/>
                 </a:solidFill>
@@ -5618,7 +5446,7 @@
               <a:t>\</a:t>
             </a:r>
             <a:r>
-              <a:rPr lang="en-US" altLang="ja-JP" sz="2800" dirty="0" smtClean="0">
+              <a:rPr lang="en-US" altLang="ja-JP" sz="2800" dirty="0">
                 <a:solidFill>
                   <a:srgbClr val="FF0000"/>
                 </a:solidFill>
@@ -5626,7 +5454,7 @@
               <a:t>+</a:t>
             </a:r>
             <a:r>
-              <a:rPr kumimoji="1" lang="en-US" altLang="ja-JP" sz="2800" dirty="0" smtClean="0">
+              <a:rPr kumimoji="1" lang="en-US" altLang="ja-JP" sz="2800" dirty="0">
                 <a:solidFill>
                   <a:srgbClr val="FF0000"/>
                 </a:solidFill>
@@ -5637,11 +5465,7 @@
           <a:p>
             <a:r>
               <a:rPr lang="en-US" altLang="ja-JP" sz="2800" i="1" dirty="0"/>
-              <a:t> </a:t>
-            </a:r>
-            <a:r>
-              <a:rPr lang="en-US" altLang="ja-JP" sz="2800" i="1" dirty="0" smtClean="0"/>
-              <a:t>   no</a:t>
+              <a:t>    no</a:t>
             </a:r>
             <a:endParaRPr kumimoji="1" lang="ja-JP" altLang="en-US" sz="2800" i="1" dirty="0"/>
           </a:p>
@@ -5700,11 +5524,11 @@
           <a:lstStyle/>
           <a:p>
             <a:r>
-              <a:rPr kumimoji="1" lang="ja-JP" altLang="en-US" dirty="0" smtClean="0"/>
+              <a:rPr kumimoji="1" lang="ja-JP" altLang="en-US" dirty="0"/>
               <a:t>単一化</a:t>
             </a:r>
             <a:r>
-              <a:rPr kumimoji="1" lang="en-US" altLang="ja-JP" dirty="0" smtClean="0"/>
+              <a:rPr kumimoji="1" lang="en-US" altLang="ja-JP" dirty="0"/>
               <a:t>(unification)</a:t>
             </a:r>
             <a:endParaRPr kumimoji="1" lang="ja-JP" altLang="en-US" dirty="0"/>
@@ -5734,68 +5558,68 @@
           <a:lstStyle/>
           <a:p>
             <a:r>
-              <a:rPr kumimoji="1" lang="en-US" altLang="ja-JP" sz="2800" dirty="0" smtClean="0"/>
+              <a:rPr kumimoji="1" lang="en-US" altLang="ja-JP" sz="2800" dirty="0"/>
               <a:t>2</a:t>
             </a:r>
             <a:r>
-              <a:rPr kumimoji="1" lang="ja-JP" altLang="en-US" sz="2800" dirty="0" smtClean="0"/>
+              <a:rPr kumimoji="1" lang="ja-JP" altLang="en-US" sz="2800" dirty="0"/>
               <a:t>つの</a:t>
             </a:r>
             <a:r>
-              <a:rPr kumimoji="1" lang="en-US" altLang="ja-JP" sz="2800" dirty="0" smtClean="0"/>
+              <a:rPr kumimoji="1" lang="en-US" altLang="ja-JP" sz="2800" dirty="0"/>
               <a:t>term</a:t>
             </a:r>
             <a:r>
-              <a:rPr kumimoji="1" lang="ja-JP" altLang="en-US" sz="2800" dirty="0" smtClean="0"/>
+              <a:rPr kumimoji="1" lang="ja-JP" altLang="en-US" sz="2800" dirty="0"/>
               <a:t>を等しくするような変数への</a:t>
             </a:r>
             <a:r>
-              <a:rPr lang="ja-JP" altLang="en-US" sz="2800" dirty="0" smtClean="0"/>
+              <a:rPr lang="ja-JP" altLang="en-US" sz="2800" dirty="0"/>
               <a:t>最も一般的な</a:t>
             </a:r>
             <a:r>
-              <a:rPr kumimoji="1" lang="ja-JP" altLang="en-US" sz="2800" dirty="0" smtClean="0"/>
+              <a:rPr kumimoji="1" lang="ja-JP" altLang="en-US" sz="2800" dirty="0"/>
               <a:t>置換</a:t>
             </a:r>
             <a:r>
-              <a:rPr kumimoji="1" lang="en-US" altLang="ja-JP" sz="2800" dirty="0" smtClean="0"/>
+              <a:rPr kumimoji="1" lang="en-US" altLang="ja-JP" sz="2800" dirty="0"/>
               <a:t>(most general unifier)</a:t>
             </a:r>
             <a:r>
-              <a:rPr kumimoji="1" lang="ja-JP" altLang="en-US" sz="2800" dirty="0" smtClean="0"/>
+              <a:rPr kumimoji="1" lang="ja-JP" altLang="en-US" sz="2800" dirty="0"/>
               <a:t>を求めること</a:t>
             </a:r>
-            <a:endParaRPr kumimoji="1" lang="en-US" altLang="ja-JP" sz="2800" dirty="0" smtClean="0"/>
-          </a:p>
-          <a:p>
-            <a:r>
-              <a:rPr kumimoji="1" lang="en-US" altLang="ja-JP" sz="2800" dirty="0" smtClean="0"/>
+            <a:endParaRPr kumimoji="1" lang="en-US" altLang="ja-JP" sz="2800" dirty="0"/>
+          </a:p>
+          <a:p>
+            <a:r>
+              <a:rPr kumimoji="1" lang="en-US" altLang="ja-JP" sz="2800" dirty="0"/>
               <a:t>Unification</a:t>
             </a:r>
             <a:r>
-              <a:rPr kumimoji="1" lang="ja-JP" altLang="en-US" sz="2800" dirty="0" smtClean="0"/>
+              <a:rPr kumimoji="1" lang="ja-JP" altLang="en-US" sz="2800" dirty="0"/>
               <a:t>は規則の適用ができるかどうかを判定するために行われる。</a:t>
             </a:r>
-            <a:endParaRPr kumimoji="1" lang="en-US" altLang="ja-JP" sz="2800" dirty="0" smtClean="0"/>
-          </a:p>
-          <a:p>
-            <a:r>
-              <a:rPr lang="en-US" altLang="ja-JP" sz="2800" dirty="0" smtClean="0"/>
+            <a:endParaRPr kumimoji="1" lang="en-US" altLang="ja-JP" sz="2800" dirty="0"/>
+          </a:p>
+          <a:p>
+            <a:r>
+              <a:rPr lang="en-US" altLang="ja-JP" sz="2800" dirty="0"/>
               <a:t>Unification</a:t>
             </a:r>
             <a:r>
-              <a:rPr lang="ja-JP" altLang="en-US" sz="2800" dirty="0" smtClean="0"/>
+              <a:rPr lang="ja-JP" altLang="en-US" sz="2800" dirty="0"/>
               <a:t>を行う組み込みの述語として</a:t>
             </a:r>
             <a:r>
-              <a:rPr lang="en-US" altLang="ja-JP" sz="2800" dirty="0" smtClean="0"/>
+              <a:rPr lang="en-US" altLang="ja-JP" sz="2800" dirty="0"/>
               <a:t>=</a:t>
             </a:r>
             <a:r>
-              <a:rPr lang="ja-JP" altLang="en-US" sz="2800" dirty="0" smtClean="0"/>
+              <a:rPr lang="ja-JP" altLang="en-US" sz="2800" dirty="0"/>
               <a:t>がある。</a:t>
             </a:r>
-            <a:endParaRPr lang="en-US" altLang="ja-JP" sz="2800" dirty="0" smtClean="0"/>
+            <a:endParaRPr lang="en-US" altLang="ja-JP" sz="2800" dirty="0"/>
           </a:p>
         </p:txBody>
       </p:sp>
@@ -5914,7 +5738,7 @@
           <a:lstStyle/>
           <a:p>
             <a:r>
-              <a:rPr lang="ja-JP" altLang="en-US" sz="2400" dirty="0" smtClean="0"/>
+              <a:rPr lang="ja-JP" altLang="en-US" sz="2400" dirty="0"/>
               <a:t>（参考文献</a:t>
             </a:r>
             <a:r>
@@ -5922,28 +5746,12 @@
               <a:t>1</a:t>
             </a:r>
             <a:r>
-              <a:rPr lang="ja-JP" altLang="en-US" sz="2400" dirty="0" smtClean="0"/>
+              <a:rPr lang="ja-JP" altLang="en-US" sz="2400" dirty="0"/>
               <a:t>）</a:t>
             </a:r>
             <a:r>
-              <a:rPr lang="en-US" altLang="ja-JP" sz="2400" dirty="0" smtClean="0"/>
-              <a:t> John </a:t>
-            </a:r>
-            <a:r>
               <a:rPr lang="en-US" altLang="ja-JP" sz="2400" dirty="0"/>
-              <a:t>A. Robinson. </a:t>
-            </a:r>
-            <a:r>
-              <a:rPr lang="en-US" altLang="ja-JP" sz="2400" dirty="0" smtClean="0"/>
-              <a:t>“A </a:t>
-            </a:r>
-            <a:r>
-              <a:rPr lang="en-US" altLang="ja-JP" sz="2400" dirty="0"/>
-              <a:t>machine-oriented logic based on the resolution </a:t>
-            </a:r>
-            <a:r>
-              <a:rPr lang="en-US" altLang="ja-JP" sz="2400" dirty="0" smtClean="0"/>
-              <a:t>principle”. </a:t>
+              <a:t> John A. Robinson. “A machine-oriented logic based on the resolution principle”. </a:t>
             </a:r>
             <a:r>
               <a:rPr lang="en-US" altLang="ja-JP" sz="2400" i="1" dirty="0"/>
@@ -5951,16 +5759,12 @@
             </a:r>
             <a:r>
               <a:rPr lang="en-US" altLang="ja-JP" sz="2400" dirty="0"/>
-              <a:t>, 12(1):23–41, 1965</a:t>
-            </a:r>
-            <a:r>
-              <a:rPr lang="en-US" altLang="ja-JP" sz="2400" dirty="0" smtClean="0"/>
-              <a:t>.</a:t>
-            </a:r>
-          </a:p>
-          <a:p>
-            <a:r>
-              <a:rPr lang="ja-JP" altLang="en-US" sz="2400" dirty="0" smtClean="0"/>
+              <a:t>, 12(1):23–41, 1965.</a:t>
+            </a:r>
+          </a:p>
+          <a:p>
+            <a:r>
+              <a:rPr lang="ja-JP" altLang="en-US" sz="2400" dirty="0"/>
               <a:t>（参考文献</a:t>
             </a:r>
             <a:r>
@@ -5968,51 +5772,43 @@
               <a:t>2</a:t>
             </a:r>
             <a:r>
-              <a:rPr lang="ja-JP" altLang="en-US" sz="2400" dirty="0" smtClean="0"/>
+              <a:rPr lang="ja-JP" altLang="en-US" sz="2400" dirty="0"/>
               <a:t>）</a:t>
             </a:r>
             <a:r>
-              <a:rPr lang="en-US" altLang="ja-JP" sz="2400" dirty="0" smtClean="0"/>
+              <a:rPr lang="en-US" altLang="ja-JP" sz="2400" dirty="0"/>
               <a:t> Alberto </a:t>
             </a:r>
             <a:r>
-              <a:rPr lang="en-US" altLang="ja-JP" sz="2400" dirty="0" err="1" smtClean="0"/>
+              <a:rPr lang="en-US" altLang="ja-JP" sz="2400" dirty="0" err="1"/>
               <a:t>Martelli</a:t>
             </a:r>
             <a:r>
-              <a:rPr lang="en-US" altLang="ja-JP" sz="2400" dirty="0" smtClean="0"/>
+              <a:rPr lang="en-US" altLang="ja-JP" sz="2400" dirty="0"/>
               <a:t> and </a:t>
             </a:r>
             <a:r>
-              <a:rPr lang="en-US" altLang="ja-JP" sz="2400" dirty="0" err="1" smtClean="0"/>
+              <a:rPr lang="en-US" altLang="ja-JP" sz="2400" dirty="0" err="1"/>
               <a:t>Ugo</a:t>
             </a:r>
             <a:r>
-              <a:rPr lang="en-US" altLang="ja-JP" sz="2400" dirty="0" smtClean="0"/>
+              <a:rPr lang="en-US" altLang="ja-JP" sz="2400" dirty="0"/>
               <a:t> </a:t>
             </a:r>
             <a:r>
-              <a:rPr lang="en-US" altLang="ja-JP" sz="2400" dirty="0" err="1" smtClean="0"/>
+              <a:rPr lang="en-US" altLang="ja-JP" sz="2400" dirty="0" err="1"/>
               <a:t>Montanari</a:t>
             </a:r>
             <a:r>
-              <a:rPr lang="en-US" altLang="ja-JP" sz="2400" dirty="0" smtClean="0"/>
-              <a:t>, “An efficient unification </a:t>
-            </a:r>
-            <a:r>
               <a:rPr lang="en-US" altLang="ja-JP" sz="2400" dirty="0"/>
-              <a:t>a</a:t>
-            </a:r>
-            <a:r>
-              <a:rPr lang="en-US" altLang="ja-JP" sz="2400" dirty="0" smtClean="0"/>
-              <a:t>lgorithm”, </a:t>
-            </a:r>
-            <a:r>
-              <a:rPr lang="en-US" altLang="ja-JP" sz="2400" i="1" dirty="0" smtClean="0"/>
+              <a:t>, “An efficient unification algorithm”, </a:t>
+            </a:r>
+            <a:r>
+              <a:rPr lang="en-US" altLang="ja-JP" sz="2400" i="1" dirty="0"/>
               <a:t>ACM TOPLAS </a:t>
             </a:r>
             <a:r>
-              <a:rPr lang="en-US" altLang="ja-JP" sz="2400" dirty="0" smtClean="0"/>
+              <a:rPr lang="en-US" altLang="ja-JP" sz="2400" dirty="0"/>
               <a:t>4(2), pp. 258-282, 1982.</a:t>
             </a:r>
           </a:p>
@@ -6026,7 +5822,7 @@
               <a:t>(pattern matching)</a:t>
             </a:r>
             <a:r>
-              <a:rPr lang="ja-JP" altLang="en-US" sz="2400" dirty="0" smtClean="0"/>
+              <a:rPr lang="ja-JP" altLang="en-US" sz="2400" dirty="0"/>
               <a:t>。</a:t>
             </a:r>
             <a:endParaRPr lang="en-US" altLang="ja-JP" sz="2400" dirty="0"/>
@@ -6043,13 +5839,6 @@
   <p:clrMapOvr>
     <a:masterClrMapping/>
   </p:clrMapOvr>
-  <p:timing>
-    <p:tnLst>
-      <p:par>
-        <p:cTn xmlns:p14="http://schemas.microsoft.com/office/powerpoint/2010/main" id="1" dur="indefinite" restart="never" nodeType="tmRoot"/>
-      </p:par>
-    </p:tnLst>
-  </p:timing>
 </p:sld>
 </file>
 
@@ -6086,7 +5875,7 @@
           <a:lstStyle/>
           <a:p>
             <a:r>
-              <a:rPr kumimoji="1" lang="en-US" altLang="ja-JP" dirty="0" smtClean="0"/>
+              <a:rPr kumimoji="1" lang="en-US" altLang="ja-JP" dirty="0"/>
               <a:t>instance</a:t>
             </a:r>
             <a:endParaRPr kumimoji="1" lang="ja-JP" altLang="en-US" dirty="0"/>
@@ -6120,331 +5909,331 @@
               <a:t>t</a:t>
             </a:r>
             <a:r>
-              <a:rPr kumimoji="1" lang="en-US" altLang="ja-JP" sz="2800" dirty="0" smtClean="0"/>
+              <a:rPr kumimoji="1" lang="en-US" altLang="ja-JP" sz="2800" dirty="0"/>
               <a:t>erm </a:t>
             </a:r>
             <a:r>
-              <a:rPr kumimoji="1" lang="en-US" altLang="ja-JP" sz="2800" i="1" dirty="0" smtClean="0"/>
+              <a:rPr kumimoji="1" lang="en-US" altLang="ja-JP" sz="2800" i="1" dirty="0"/>
               <a:t>T</a:t>
             </a:r>
             <a:r>
-              <a:rPr kumimoji="1" lang="ja-JP" altLang="en-US" sz="2800" dirty="0" smtClean="0"/>
+              <a:rPr kumimoji="1" lang="ja-JP" altLang="en-US" sz="2800" dirty="0"/>
               <a:t>の中の変数を何らかの</a:t>
             </a:r>
             <a:r>
-              <a:rPr kumimoji="1" lang="en-US" altLang="ja-JP" sz="2800" dirty="0" smtClean="0"/>
+              <a:rPr kumimoji="1" lang="en-US" altLang="ja-JP" sz="2800" dirty="0"/>
               <a:t>term</a:t>
             </a:r>
             <a:r>
-              <a:rPr kumimoji="1" lang="ja-JP" altLang="en-US" sz="2800" dirty="0" smtClean="0"/>
+              <a:rPr kumimoji="1" lang="ja-JP" altLang="en-US" sz="2800" dirty="0"/>
               <a:t>で置き換え</a:t>
             </a:r>
             <a:r>
-              <a:rPr lang="ja-JP" altLang="en-US" sz="2800" dirty="0" smtClean="0"/>
+              <a:rPr lang="ja-JP" altLang="en-US" sz="2800" dirty="0"/>
               <a:t>て得られる</a:t>
             </a:r>
             <a:r>
-              <a:rPr lang="en-US" altLang="ja-JP" sz="2800" dirty="0" smtClean="0"/>
+              <a:rPr lang="en-US" altLang="ja-JP" sz="2800" dirty="0"/>
               <a:t>term</a:t>
             </a:r>
             <a:r>
-              <a:rPr lang="ja-JP" altLang="en-US" sz="2800" dirty="0" smtClean="0"/>
+              <a:rPr lang="ja-JP" altLang="en-US" sz="2800" dirty="0"/>
               <a:t>を</a:t>
             </a:r>
             <a:r>
-              <a:rPr lang="en-US" altLang="ja-JP" sz="2800" dirty="0" smtClean="0"/>
+              <a:rPr lang="en-US" altLang="ja-JP" sz="2800" dirty="0"/>
               <a:t>term </a:t>
             </a:r>
             <a:r>
-              <a:rPr lang="en-US" altLang="ja-JP" sz="2800" i="1" dirty="0" smtClean="0"/>
+              <a:rPr lang="en-US" altLang="ja-JP" sz="2800" i="1" dirty="0"/>
               <a:t>T</a:t>
             </a:r>
             <a:r>
-              <a:rPr lang="ja-JP" altLang="en-US" sz="2800" dirty="0" smtClean="0"/>
+              <a:rPr lang="ja-JP" altLang="en-US" sz="2800" dirty="0"/>
               <a:t>の</a:t>
             </a:r>
             <a:r>
-              <a:rPr lang="en-US" altLang="ja-JP" sz="2800" dirty="0" smtClean="0"/>
+              <a:rPr lang="en-US" altLang="ja-JP" sz="2800" dirty="0"/>
               <a:t>instance</a:t>
             </a:r>
             <a:r>
-              <a:rPr lang="ja-JP" altLang="en-US" sz="2800" dirty="0" smtClean="0"/>
+              <a:rPr lang="ja-JP" altLang="en-US" sz="2800" dirty="0"/>
               <a:t>という。（同じ変数に対しては同じ</a:t>
             </a:r>
             <a:r>
-              <a:rPr lang="en-US" altLang="ja-JP" sz="2800" dirty="0" smtClean="0"/>
+              <a:rPr lang="en-US" altLang="ja-JP" sz="2800" dirty="0"/>
               <a:t>term</a:t>
             </a:r>
             <a:r>
-              <a:rPr lang="ja-JP" altLang="en-US" sz="2800" dirty="0" smtClean="0"/>
+              <a:rPr lang="ja-JP" altLang="en-US" sz="2800" dirty="0"/>
               <a:t>で置き換えなければならない。）</a:t>
             </a:r>
-            <a:endParaRPr lang="en-US" altLang="ja-JP" sz="2800" dirty="0" smtClean="0"/>
-          </a:p>
-          <a:p>
-            <a:r>
-              <a:rPr lang="ja-JP" altLang="en-US" sz="2800" dirty="0" smtClean="0"/>
+            <a:endParaRPr lang="en-US" altLang="ja-JP" sz="2800" dirty="0"/>
+          </a:p>
+          <a:p>
+            <a:r>
+              <a:rPr lang="ja-JP" altLang="en-US" sz="2800" dirty="0"/>
               <a:t>（例１）</a:t>
             </a:r>
             <a:r>
-              <a:rPr lang="en-US" altLang="ja-JP" sz="2800" dirty="0" smtClean="0"/>
+              <a:rPr lang="en-US" altLang="ja-JP" sz="2800" dirty="0"/>
               <a:t> f(</a:t>
             </a:r>
             <a:r>
-              <a:rPr lang="en-US" altLang="ja-JP" sz="2800" dirty="0" err="1" smtClean="0"/>
+              <a:rPr lang="en-US" altLang="ja-JP" sz="2800" dirty="0" err="1"/>
               <a:t>a,b</a:t>
             </a:r>
             <a:r>
-              <a:rPr lang="en-US" altLang="ja-JP" sz="2800" dirty="0" smtClean="0"/>
+              <a:rPr lang="en-US" altLang="ja-JP" sz="2800" dirty="0"/>
               <a:t>)</a:t>
             </a:r>
             <a:r>
-              <a:rPr lang="ja-JP" altLang="en-US" sz="2800" dirty="0" smtClean="0"/>
+              <a:rPr lang="ja-JP" altLang="en-US" sz="2800" dirty="0"/>
               <a:t>は</a:t>
             </a:r>
             <a:r>
-              <a:rPr lang="en-US" altLang="ja-JP" sz="2800" dirty="0" smtClean="0"/>
+              <a:rPr lang="en-US" altLang="ja-JP" sz="2800" dirty="0"/>
               <a:t>f(</a:t>
             </a:r>
             <a:r>
-              <a:rPr lang="en-US" altLang="ja-JP" sz="2800" dirty="0" err="1" smtClean="0"/>
+              <a:rPr lang="en-US" altLang="ja-JP" sz="2800" dirty="0" err="1"/>
               <a:t>X,b</a:t>
             </a:r>
             <a:r>
-              <a:rPr lang="en-US" altLang="ja-JP" sz="2800" dirty="0" smtClean="0"/>
+              <a:rPr lang="en-US" altLang="ja-JP" sz="2800" dirty="0"/>
               <a:t>)</a:t>
             </a:r>
             <a:r>
-              <a:rPr lang="ja-JP" altLang="en-US" sz="2800" dirty="0" smtClean="0"/>
+              <a:rPr lang="ja-JP" altLang="en-US" sz="2800" dirty="0"/>
               <a:t>の</a:t>
             </a:r>
             <a:r>
-              <a:rPr lang="en-US" altLang="ja-JP" sz="2800" dirty="0" smtClean="0"/>
+              <a:rPr lang="en-US" altLang="ja-JP" sz="2800" dirty="0"/>
               <a:t>instance</a:t>
             </a:r>
             <a:r>
-              <a:rPr lang="ja-JP" altLang="en-US" sz="2800" dirty="0" smtClean="0"/>
+              <a:rPr lang="ja-JP" altLang="en-US" sz="2800" dirty="0"/>
               <a:t>。</a:t>
             </a:r>
-            <a:endParaRPr lang="en-US" altLang="ja-JP" sz="2800" dirty="0" smtClean="0"/>
-          </a:p>
-          <a:p>
-            <a:r>
-              <a:rPr lang="ja-JP" altLang="en-US" sz="2800" dirty="0" smtClean="0"/>
+            <a:endParaRPr lang="en-US" altLang="ja-JP" sz="2800" dirty="0"/>
+          </a:p>
+          <a:p>
+            <a:r>
+              <a:rPr lang="ja-JP" altLang="en-US" sz="2800" dirty="0"/>
               <a:t>（例２）</a:t>
             </a:r>
             <a:r>
-              <a:rPr lang="en-US" altLang="ja-JP" sz="2800" dirty="0" smtClean="0"/>
+              <a:rPr lang="en-US" altLang="ja-JP" sz="2800" dirty="0"/>
               <a:t> f(</a:t>
             </a:r>
             <a:r>
-              <a:rPr lang="en-US" altLang="ja-JP" sz="2800" dirty="0" err="1" smtClean="0"/>
+              <a:rPr lang="en-US" altLang="ja-JP" sz="2800" dirty="0" err="1"/>
               <a:t>a,b</a:t>
             </a:r>
             <a:r>
-              <a:rPr lang="en-US" altLang="ja-JP" sz="2800" dirty="0" smtClean="0"/>
+              <a:rPr lang="en-US" altLang="ja-JP" sz="2800" dirty="0"/>
               <a:t>)</a:t>
             </a:r>
             <a:r>
-              <a:rPr lang="ja-JP" altLang="en-US" sz="2800" dirty="0" smtClean="0"/>
+              <a:rPr lang="ja-JP" altLang="en-US" sz="2800" dirty="0"/>
               <a:t>は</a:t>
             </a:r>
             <a:r>
-              <a:rPr lang="en-US" altLang="ja-JP" sz="2800" dirty="0" smtClean="0"/>
+              <a:rPr lang="en-US" altLang="ja-JP" sz="2800" dirty="0"/>
               <a:t>f(</a:t>
             </a:r>
             <a:r>
-              <a:rPr lang="en-US" altLang="ja-JP" sz="2800" dirty="0" err="1" smtClean="0"/>
+              <a:rPr lang="en-US" altLang="ja-JP" sz="2800" dirty="0" err="1"/>
               <a:t>a,Y</a:t>
             </a:r>
             <a:r>
-              <a:rPr lang="en-US" altLang="ja-JP" sz="2800" dirty="0" smtClean="0"/>
+              <a:rPr lang="en-US" altLang="ja-JP" sz="2800" dirty="0"/>
               <a:t>)</a:t>
             </a:r>
             <a:r>
-              <a:rPr lang="ja-JP" altLang="en-US" sz="2800" dirty="0" smtClean="0"/>
+              <a:rPr lang="ja-JP" altLang="en-US" sz="2800" dirty="0"/>
               <a:t>の</a:t>
             </a:r>
             <a:r>
-              <a:rPr lang="en-US" altLang="ja-JP" sz="2800" dirty="0" smtClean="0"/>
+              <a:rPr lang="en-US" altLang="ja-JP" sz="2800" dirty="0"/>
               <a:t>instance</a:t>
             </a:r>
             <a:r>
-              <a:rPr lang="ja-JP" altLang="en-US" sz="2800" dirty="0" smtClean="0"/>
+              <a:rPr lang="ja-JP" altLang="en-US" sz="2800" dirty="0"/>
               <a:t>。</a:t>
             </a:r>
-            <a:endParaRPr lang="en-US" altLang="ja-JP" sz="2800" dirty="0" smtClean="0"/>
-          </a:p>
-          <a:p>
-            <a:r>
-              <a:rPr lang="ja-JP" altLang="en-US" sz="2800" dirty="0" smtClean="0"/>
+            <a:endParaRPr lang="en-US" altLang="ja-JP" sz="2800" dirty="0"/>
+          </a:p>
+          <a:p>
+            <a:r>
+              <a:rPr lang="ja-JP" altLang="en-US" sz="2800" dirty="0"/>
               <a:t>（例３）</a:t>
             </a:r>
             <a:r>
-              <a:rPr lang="en-US" altLang="ja-JP" sz="2800" dirty="0" smtClean="0"/>
+              <a:rPr lang="en-US" altLang="ja-JP" sz="2800" dirty="0"/>
               <a:t> g(</a:t>
             </a:r>
             <a:r>
-              <a:rPr lang="en-US" altLang="ja-JP" sz="2800" dirty="0" err="1" smtClean="0"/>
+              <a:rPr lang="en-US" altLang="ja-JP" sz="2800" dirty="0" err="1"/>
               <a:t>a,a</a:t>
             </a:r>
             <a:r>
-              <a:rPr lang="en-US" altLang="ja-JP" sz="2800" dirty="0" smtClean="0"/>
+              <a:rPr lang="en-US" altLang="ja-JP" sz="2800" dirty="0"/>
               <a:t>)</a:t>
             </a:r>
             <a:r>
-              <a:rPr lang="ja-JP" altLang="en-US" sz="2800" dirty="0" smtClean="0"/>
+              <a:rPr lang="ja-JP" altLang="en-US" sz="2800" dirty="0"/>
               <a:t>は</a:t>
             </a:r>
             <a:r>
-              <a:rPr lang="en-US" altLang="ja-JP" sz="2800" dirty="0" smtClean="0"/>
+              <a:rPr lang="en-US" altLang="ja-JP" sz="2800" dirty="0"/>
               <a:t>g(X,X)</a:t>
             </a:r>
             <a:r>
-              <a:rPr lang="ja-JP" altLang="en-US" sz="2800" dirty="0" smtClean="0"/>
+              <a:rPr lang="ja-JP" altLang="en-US" sz="2800" dirty="0"/>
               <a:t>の</a:t>
             </a:r>
             <a:r>
-              <a:rPr lang="en-US" altLang="ja-JP" sz="2800" dirty="0" smtClean="0"/>
+              <a:rPr lang="en-US" altLang="ja-JP" sz="2800" dirty="0"/>
               <a:t>instance</a:t>
             </a:r>
             <a:r>
-              <a:rPr lang="ja-JP" altLang="en-US" sz="2800" dirty="0" smtClean="0"/>
+              <a:rPr lang="ja-JP" altLang="en-US" sz="2800" dirty="0"/>
               <a:t>。</a:t>
             </a:r>
-            <a:endParaRPr lang="en-US" altLang="ja-JP" sz="2800" dirty="0" smtClean="0"/>
-          </a:p>
-          <a:p>
-            <a:r>
-              <a:rPr lang="ja-JP" altLang="en-US" sz="2800" dirty="0" smtClean="0"/>
+            <a:endParaRPr lang="en-US" altLang="ja-JP" sz="2800" dirty="0"/>
+          </a:p>
+          <a:p>
+            <a:r>
+              <a:rPr lang="ja-JP" altLang="en-US" sz="2800" dirty="0"/>
               <a:t>（例４）</a:t>
             </a:r>
             <a:r>
-              <a:rPr lang="en-US" altLang="ja-JP" sz="2800" dirty="0" smtClean="0"/>
+              <a:rPr lang="en-US" altLang="ja-JP" sz="2800" dirty="0"/>
               <a:t> g(h(b),h(b))</a:t>
             </a:r>
             <a:r>
-              <a:rPr lang="ja-JP" altLang="en-US" sz="2800" dirty="0" smtClean="0"/>
+              <a:rPr lang="ja-JP" altLang="en-US" sz="2800" dirty="0"/>
               <a:t>は</a:t>
             </a:r>
             <a:r>
-              <a:rPr lang="en-US" altLang="ja-JP" sz="2800" dirty="0" smtClean="0"/>
+              <a:rPr lang="en-US" altLang="ja-JP" sz="2800" dirty="0"/>
               <a:t>g(X,X)</a:t>
             </a:r>
             <a:r>
-              <a:rPr lang="ja-JP" altLang="en-US" sz="2800" dirty="0" smtClean="0"/>
+              <a:rPr lang="ja-JP" altLang="en-US" sz="2800" dirty="0"/>
               <a:t>の</a:t>
             </a:r>
             <a:r>
-              <a:rPr lang="en-US" altLang="ja-JP" sz="2800" dirty="0" smtClean="0"/>
+              <a:rPr lang="en-US" altLang="ja-JP" sz="2800" dirty="0"/>
               <a:t>instance</a:t>
             </a:r>
             <a:r>
-              <a:rPr lang="ja-JP" altLang="en-US" sz="2800" dirty="0" smtClean="0"/>
+              <a:rPr lang="ja-JP" altLang="en-US" sz="2800" dirty="0"/>
               <a:t>。</a:t>
             </a:r>
-            <a:endParaRPr lang="en-US" altLang="ja-JP" sz="2800" dirty="0" smtClean="0"/>
-          </a:p>
-          <a:p>
-            <a:r>
-              <a:rPr lang="ja-JP" altLang="en-US" sz="2800" dirty="0" smtClean="0"/>
+            <a:endParaRPr lang="en-US" altLang="ja-JP" sz="2800" dirty="0"/>
+          </a:p>
+          <a:p>
+            <a:r>
+              <a:rPr lang="ja-JP" altLang="en-US" sz="2800" dirty="0"/>
               <a:t>（例５）</a:t>
             </a:r>
             <a:r>
-              <a:rPr lang="en-US" altLang="ja-JP" sz="2800" dirty="0" smtClean="0"/>
+              <a:rPr lang="en-US" altLang="ja-JP" sz="2800" dirty="0"/>
               <a:t> g(</a:t>
             </a:r>
             <a:r>
-              <a:rPr lang="en-US" altLang="ja-JP" sz="2800" dirty="0" err="1" smtClean="0"/>
+              <a:rPr lang="en-US" altLang="ja-JP" sz="2800" dirty="0" err="1"/>
               <a:t>a,b</a:t>
             </a:r>
             <a:r>
-              <a:rPr lang="en-US" altLang="ja-JP" sz="2800" dirty="0" smtClean="0"/>
+              <a:rPr lang="en-US" altLang="ja-JP" sz="2800" dirty="0"/>
               <a:t>)</a:t>
             </a:r>
             <a:r>
-              <a:rPr lang="ja-JP" altLang="en-US" sz="2800" dirty="0" smtClean="0"/>
+              <a:rPr lang="ja-JP" altLang="en-US" sz="2800" dirty="0"/>
               <a:t>は</a:t>
             </a:r>
             <a:r>
-              <a:rPr lang="en-US" altLang="ja-JP" sz="2800" dirty="0" smtClean="0"/>
+              <a:rPr lang="en-US" altLang="ja-JP" sz="2800" dirty="0"/>
               <a:t>g(X,X)</a:t>
             </a:r>
             <a:r>
-              <a:rPr lang="ja-JP" altLang="en-US" sz="2800" dirty="0" smtClean="0"/>
+              <a:rPr lang="ja-JP" altLang="en-US" sz="2800" dirty="0"/>
               <a:t>の</a:t>
             </a:r>
             <a:r>
-              <a:rPr lang="en-US" altLang="ja-JP" sz="2800" dirty="0" smtClean="0"/>
+              <a:rPr lang="en-US" altLang="ja-JP" sz="2800" dirty="0"/>
               <a:t>instance</a:t>
             </a:r>
             <a:r>
-              <a:rPr lang="ja-JP" altLang="en-US" sz="2800" dirty="0" smtClean="0"/>
+              <a:rPr lang="ja-JP" altLang="en-US" sz="2800" dirty="0"/>
               <a:t>ではない。</a:t>
             </a:r>
-            <a:endParaRPr lang="en-US" altLang="ja-JP" sz="2800" dirty="0" smtClean="0"/>
-          </a:p>
-          <a:p>
             <a:endParaRPr lang="en-US" altLang="ja-JP" sz="2800" dirty="0"/>
           </a:p>
           <a:p>
-            <a:r>
-              <a:rPr lang="en-US" altLang="ja-JP" sz="2800" dirty="0" smtClean="0"/>
+            <a:endParaRPr lang="en-US" altLang="ja-JP" sz="2800" dirty="0"/>
+          </a:p>
+          <a:p>
+            <a:r>
+              <a:rPr lang="en-US" altLang="ja-JP" sz="2800" dirty="0"/>
               <a:t>2</a:t>
             </a:r>
             <a:r>
-              <a:rPr lang="ja-JP" altLang="en-US" sz="2800" dirty="0" smtClean="0"/>
+              <a:rPr lang="ja-JP" altLang="en-US" sz="2800" dirty="0"/>
               <a:t>つの</a:t>
             </a:r>
             <a:r>
-              <a:rPr lang="en-US" altLang="ja-JP" sz="2800" dirty="0" smtClean="0"/>
+              <a:rPr lang="en-US" altLang="ja-JP" sz="2800" dirty="0"/>
               <a:t>term </a:t>
             </a:r>
             <a:r>
-              <a:rPr lang="en-US" altLang="ja-JP" sz="2800" i="1" dirty="0" smtClean="0"/>
+              <a:rPr lang="en-US" altLang="ja-JP" sz="2800" i="1" dirty="0"/>
               <a:t>T</a:t>
             </a:r>
             <a:r>
-              <a:rPr lang="en-US" altLang="ja-JP" sz="2800" baseline="-25000" dirty="0" smtClean="0"/>
+              <a:rPr lang="en-US" altLang="ja-JP" sz="2800" baseline="-25000" dirty="0"/>
               <a:t>1</a:t>
             </a:r>
             <a:r>
-              <a:rPr lang="en-US" altLang="ja-JP" sz="2800" dirty="0" smtClean="0"/>
+              <a:rPr lang="en-US" altLang="ja-JP" sz="2800" dirty="0"/>
               <a:t>, </a:t>
             </a:r>
             <a:r>
-              <a:rPr lang="en-US" altLang="ja-JP" sz="2800" i="1" dirty="0" smtClean="0"/>
+              <a:rPr lang="en-US" altLang="ja-JP" sz="2800" i="1" dirty="0"/>
               <a:t>T</a:t>
             </a:r>
             <a:r>
-              <a:rPr lang="en-US" altLang="ja-JP" sz="2800" baseline="-25000" dirty="0" smtClean="0"/>
+              <a:rPr lang="en-US" altLang="ja-JP" sz="2800" baseline="-25000" dirty="0"/>
               <a:t>2</a:t>
             </a:r>
             <a:r>
-              <a:rPr lang="ja-JP" altLang="en-US" sz="2800" dirty="0" smtClean="0"/>
+              <a:rPr lang="ja-JP" altLang="en-US" sz="2800" dirty="0"/>
               <a:t>は共通の</a:t>
             </a:r>
             <a:r>
-              <a:rPr lang="en-US" altLang="ja-JP" sz="2800" dirty="0" smtClean="0"/>
+              <a:rPr lang="en-US" altLang="ja-JP" sz="2800" dirty="0"/>
               <a:t>instance </a:t>
             </a:r>
             <a:r>
-              <a:rPr lang="en-US" altLang="ja-JP" sz="2800" i="1" dirty="0" smtClean="0"/>
+              <a:rPr lang="en-US" altLang="ja-JP" sz="2800" i="1" dirty="0"/>
               <a:t>T </a:t>
             </a:r>
             <a:r>
-              <a:rPr lang="ja-JP" altLang="en-US" sz="2800" dirty="0" smtClean="0"/>
+              <a:rPr lang="ja-JP" altLang="en-US" sz="2800" dirty="0"/>
               <a:t>を持つとき単一化</a:t>
             </a:r>
             <a:r>
-              <a:rPr lang="en-US" altLang="ja-JP" sz="2800" dirty="0" smtClean="0"/>
+              <a:rPr lang="en-US" altLang="ja-JP" sz="2800" dirty="0"/>
               <a:t>(unify)</a:t>
             </a:r>
             <a:r>
-              <a:rPr lang="ja-JP" altLang="en-US" sz="2800" dirty="0" smtClean="0"/>
+              <a:rPr lang="ja-JP" altLang="en-US" sz="2800" dirty="0"/>
               <a:t>できるという。</a:t>
             </a:r>
-            <a:endParaRPr lang="en-US" altLang="ja-JP" sz="2800" dirty="0" smtClean="0"/>
+            <a:endParaRPr lang="en-US" altLang="ja-JP" sz="2800" dirty="0"/>
           </a:p>
         </p:txBody>
       </p:sp>
@@ -6471,11 +6260,11 @@
           <a:lstStyle/>
           <a:p>
             <a:r>
-              <a:rPr kumimoji="1" lang="ja-JP" altLang="en-US" sz="2400" dirty="0" smtClean="0"/>
+              <a:rPr kumimoji="1" lang="ja-JP" altLang="en-US" sz="2400" dirty="0"/>
               <a:t>（参考）</a:t>
             </a:r>
             <a:r>
-              <a:rPr lang="ja-JP" altLang="en-US" sz="2400" dirty="0" smtClean="0"/>
+              <a:rPr lang="ja-JP" altLang="en-US" sz="2400" dirty="0"/>
               <a:t>単一化は関数型言語の型推論においても用いられる。</a:t>
             </a:r>
             <a:endParaRPr kumimoji="1" lang="ja-JP" altLang="en-US" sz="2400" dirty="0"/>
@@ -6535,11 +6324,11 @@
           <a:lstStyle/>
           <a:p>
             <a:r>
-              <a:rPr kumimoji="1" lang="en-US" altLang="ja-JP" dirty="0" smtClean="0"/>
+              <a:rPr kumimoji="1" lang="en-US" altLang="ja-JP" dirty="0"/>
               <a:t>Occurs che</a:t>
             </a:r>
             <a:r>
-              <a:rPr lang="en-US" altLang="ja-JP" dirty="0" smtClean="0"/>
+              <a:rPr lang="en-US" altLang="ja-JP" dirty="0"/>
               <a:t>ck</a:t>
             </a:r>
             <a:endParaRPr kumimoji="1" lang="ja-JP" altLang="en-US" dirty="0"/>
@@ -6569,50 +6358,50 @@
           <a:lstStyle/>
           <a:p>
             <a:r>
-              <a:rPr kumimoji="1" lang="ja-JP" altLang="en-US" sz="2800" dirty="0" smtClean="0"/>
+              <a:rPr kumimoji="1" lang="ja-JP" altLang="en-US" sz="2800" dirty="0"/>
               <a:t>変数</a:t>
             </a:r>
             <a:r>
-              <a:rPr kumimoji="1" lang="en-US" altLang="ja-JP" sz="2800" dirty="0" smtClean="0"/>
+              <a:rPr kumimoji="1" lang="en-US" altLang="ja-JP" sz="2800" dirty="0"/>
               <a:t>X</a:t>
             </a:r>
             <a:r>
-              <a:rPr kumimoji="1" lang="ja-JP" altLang="en-US" sz="2800" dirty="0" smtClean="0"/>
+              <a:rPr kumimoji="1" lang="ja-JP" altLang="en-US" sz="2800" dirty="0"/>
               <a:t>と</a:t>
             </a:r>
             <a:r>
-              <a:rPr kumimoji="1" lang="en-US" altLang="ja-JP" sz="2800" dirty="0" smtClean="0"/>
+              <a:rPr kumimoji="1" lang="en-US" altLang="ja-JP" sz="2800" dirty="0"/>
               <a:t>term T</a:t>
             </a:r>
             <a:r>
-              <a:rPr kumimoji="1" lang="ja-JP" altLang="en-US" sz="2800" dirty="0" smtClean="0"/>
+              <a:rPr kumimoji="1" lang="ja-JP" altLang="en-US" sz="2800" dirty="0"/>
               <a:t>を単一化する際に、</a:t>
             </a:r>
             <a:r>
-              <a:rPr kumimoji="1" lang="en-US" altLang="ja-JP" sz="2800" dirty="0" smtClean="0"/>
+              <a:rPr kumimoji="1" lang="en-US" altLang="ja-JP" sz="2800" dirty="0"/>
               <a:t>T</a:t>
             </a:r>
             <a:r>
-              <a:rPr kumimoji="1" lang="ja-JP" altLang="en-US" sz="2800" dirty="0" smtClean="0"/>
+              <a:rPr kumimoji="1" lang="ja-JP" altLang="en-US" sz="2800" dirty="0"/>
               <a:t>の中に</a:t>
             </a:r>
             <a:r>
-              <a:rPr kumimoji="1" lang="en-US" altLang="ja-JP" sz="2800" dirty="0" smtClean="0"/>
+              <a:rPr kumimoji="1" lang="en-US" altLang="ja-JP" sz="2800" dirty="0"/>
               <a:t>X</a:t>
             </a:r>
             <a:r>
-              <a:rPr kumimoji="1" lang="ja-JP" altLang="en-US" sz="2800" dirty="0" smtClean="0"/>
+              <a:rPr kumimoji="1" lang="ja-JP" altLang="en-US" sz="2800" dirty="0"/>
               <a:t>があるかどうかを確認することを</a:t>
             </a:r>
             <a:r>
-              <a:rPr kumimoji="1" lang="en-US" altLang="ja-JP" sz="2800" dirty="0" smtClean="0"/>
+              <a:rPr kumimoji="1" lang="en-US" altLang="ja-JP" sz="2800" dirty="0"/>
               <a:t>occurs check</a:t>
             </a:r>
             <a:r>
-              <a:rPr kumimoji="1" lang="ja-JP" altLang="en-US" sz="2800" dirty="0" smtClean="0"/>
+              <a:rPr kumimoji="1" lang="ja-JP" altLang="en-US" sz="2800" dirty="0"/>
               <a:t>という。</a:t>
             </a:r>
-            <a:endParaRPr kumimoji="1" lang="en-US" altLang="ja-JP" sz="2800" dirty="0" smtClean="0"/>
+            <a:endParaRPr kumimoji="1" lang="en-US" altLang="ja-JP" sz="2800" dirty="0"/>
           </a:p>
         </p:txBody>
       </p:sp>
@@ -6663,15 +6452,7 @@
                   <a:srgbClr val="FF0000"/>
                 </a:solidFill>
               </a:rPr>
-              <a:t>])</a:t>
-            </a:r>
-            <a:r>
-              <a:rPr lang="en-US" altLang="ja-JP" sz="2800" dirty="0" smtClean="0">
-                <a:solidFill>
-                  <a:srgbClr val="FF0000"/>
-                </a:solidFill>
-              </a:rPr>
-              <a:t>.</a:t>
+              <a:t>]).</a:t>
             </a:r>
           </a:p>
           <a:p>
@@ -6681,152 +6462,140 @@
                   <a:srgbClr val="FF0000"/>
                 </a:solidFill>
               </a:rPr>
-              <a:t> </a:t>
-            </a:r>
-            <a:r>
-              <a:rPr lang="en-US" altLang="ja-JP" sz="2800" dirty="0" smtClean="0">
-                <a:solidFill>
-                  <a:srgbClr val="FF0000"/>
-                </a:solidFill>
-              </a:rPr>
-              <a:t>   </a:t>
-            </a:r>
-            <a:r>
-              <a:rPr lang="en-US" altLang="ja-JP" sz="2800" i="1" dirty="0" smtClean="0"/>
+              <a:t>    </a:t>
+            </a:r>
+            <a:r>
+              <a:rPr lang="en-US" altLang="ja-JP" sz="2800" i="1" dirty="0"/>
               <a:t>E = [</a:t>
             </a:r>
             <a:r>
-              <a:rPr lang="en-US" altLang="ja-JP" sz="2800" i="1" dirty="0" err="1" smtClean="0"/>
+              <a:rPr lang="en-US" altLang="ja-JP" sz="2800" i="1" dirty="0" err="1"/>
               <a:t>a,b,a,b,a,b,a,b,a,b</a:t>
             </a:r>
             <a:r>
-              <a:rPr lang="en-US" altLang="ja-JP" sz="2800" i="1" dirty="0" smtClean="0"/>
+              <a:rPr lang="en-US" altLang="ja-JP" sz="2800" i="1" dirty="0"/>
               <a:t>,…]</a:t>
             </a:r>
           </a:p>
           <a:p>
             <a:r>
               <a:rPr lang="en-US" altLang="ja-JP" sz="2800" dirty="0"/>
-              <a:t>a</a:t>
-            </a:r>
-            <a:r>
-              <a:rPr lang="en-US" altLang="ja-JP" sz="2800" dirty="0" smtClean="0"/>
-              <a:t>ppend([ ], Y, Y)</a:t>
-            </a:r>
-            <a:r>
-              <a:rPr lang="ja-JP" altLang="en-US" sz="2800" dirty="0" smtClean="0"/>
+              <a:t>append([ ], Y, Y)</a:t>
+            </a:r>
+            <a:r>
+              <a:rPr lang="ja-JP" altLang="en-US" sz="2800" dirty="0"/>
               <a:t>と単一化が成功するためには、</a:t>
             </a:r>
             <a:r>
-              <a:rPr lang="en-US" altLang="ja-JP" sz="2800" dirty="0" smtClean="0"/>
+              <a:rPr lang="en-US" altLang="ja-JP" sz="2800" dirty="0"/>
               <a:t>Y</a:t>
             </a:r>
             <a:r>
-              <a:rPr lang="ja-JP" altLang="en-US" sz="2800" dirty="0" smtClean="0"/>
+              <a:rPr lang="ja-JP" altLang="en-US" sz="2800" dirty="0"/>
               <a:t>が</a:t>
             </a:r>
             <a:r>
-              <a:rPr lang="en-US" altLang="ja-JP" sz="2800" dirty="0" smtClean="0"/>
+              <a:rPr lang="en-US" altLang="ja-JP" sz="2800" dirty="0"/>
               <a:t>E</a:t>
             </a:r>
             <a:r>
-              <a:rPr lang="ja-JP" altLang="en-US" sz="2800" dirty="0" smtClean="0"/>
+              <a:rPr lang="ja-JP" altLang="en-US" sz="2800" dirty="0"/>
               <a:t>と</a:t>
             </a:r>
             <a:r>
-              <a:rPr lang="en-US" altLang="ja-JP" sz="2800" dirty="0" smtClean="0"/>
+              <a:rPr lang="en-US" altLang="ja-JP" sz="2800" dirty="0"/>
               <a:t>[</a:t>
             </a:r>
             <a:r>
-              <a:rPr lang="en-US" altLang="ja-JP" sz="2800" dirty="0" err="1" smtClean="0"/>
+              <a:rPr lang="en-US" altLang="ja-JP" sz="2800" dirty="0" err="1"/>
               <a:t>a,b|E</a:t>
             </a:r>
             <a:r>
-              <a:rPr lang="en-US" altLang="ja-JP" sz="2800" dirty="0" smtClean="0"/>
+              <a:rPr lang="en-US" altLang="ja-JP" sz="2800" dirty="0"/>
               <a:t>]</a:t>
             </a:r>
             <a:r>
-              <a:rPr lang="ja-JP" altLang="en-US" sz="2800" dirty="0" smtClean="0"/>
+              <a:rPr lang="ja-JP" altLang="en-US" sz="2800" dirty="0"/>
               <a:t>の両方と単一化が成功しなければならない。</a:t>
             </a:r>
             <a:r>
-              <a:rPr lang="en-US" altLang="ja-JP" sz="2800" dirty="0" smtClean="0"/>
+              <a:rPr lang="en-US" altLang="ja-JP" sz="2800" dirty="0"/>
               <a:t>E</a:t>
             </a:r>
             <a:r>
-              <a:rPr lang="ja-JP" altLang="en-US" sz="2800" dirty="0" smtClean="0"/>
+              <a:rPr lang="ja-JP" altLang="en-US" sz="2800" dirty="0"/>
               <a:t>を</a:t>
             </a:r>
             <a:r>
-              <a:rPr lang="en-US" altLang="ja-JP" sz="2800" dirty="0" smtClean="0"/>
+              <a:rPr lang="en-US" altLang="ja-JP" sz="2800" dirty="0"/>
               <a:t>[</a:t>
             </a:r>
             <a:r>
-              <a:rPr lang="en-US" altLang="ja-JP" sz="2800" dirty="0" err="1" smtClean="0"/>
+              <a:rPr lang="en-US" altLang="ja-JP" sz="2800" dirty="0" err="1"/>
               <a:t>a,b|E</a:t>
             </a:r>
             <a:r>
-              <a:rPr lang="en-US" altLang="ja-JP" sz="2800" dirty="0" smtClean="0"/>
+              <a:rPr lang="en-US" altLang="ja-JP" sz="2800" dirty="0"/>
               <a:t>]</a:t>
             </a:r>
             <a:r>
-              <a:rPr lang="ja-JP" altLang="en-US" sz="2800" dirty="0" smtClean="0"/>
+              <a:rPr lang="ja-JP" altLang="en-US" sz="2800" dirty="0"/>
               <a:t>で置き換えようとすると、</a:t>
             </a:r>
-            <a:endParaRPr lang="en-US" altLang="ja-JP" sz="2800" dirty="0" smtClean="0"/>
-          </a:p>
-          <a:p>
-            <a:r>
-              <a:rPr lang="en-US" altLang="ja-JP" sz="2800" dirty="0" smtClean="0"/>
+            <a:endParaRPr lang="en-US" altLang="ja-JP" sz="2800" dirty="0"/>
+          </a:p>
+          <a:p>
+            <a:r>
+              <a:rPr lang="en-US" altLang="ja-JP" sz="2800" dirty="0"/>
               <a:t>E = [</a:t>
             </a:r>
             <a:r>
-              <a:rPr lang="en-US" altLang="ja-JP" sz="2800" dirty="0" err="1" smtClean="0"/>
+              <a:rPr lang="en-US" altLang="ja-JP" sz="2800" dirty="0" err="1"/>
               <a:t>a,b|E</a:t>
             </a:r>
             <a:r>
-              <a:rPr lang="en-US" altLang="ja-JP" sz="2800" dirty="0" smtClean="0"/>
+              <a:rPr lang="en-US" altLang="ja-JP" sz="2800" dirty="0"/>
               <a:t>] = [</a:t>
             </a:r>
             <a:r>
-              <a:rPr lang="en-US" altLang="ja-JP" sz="2800" dirty="0" err="1" smtClean="0"/>
+              <a:rPr lang="en-US" altLang="ja-JP" sz="2800" dirty="0" err="1"/>
               <a:t>a,b,a,b|E</a:t>
             </a:r>
             <a:r>
-              <a:rPr lang="en-US" altLang="ja-JP" sz="2800" dirty="0" smtClean="0"/>
+              <a:rPr lang="en-US" altLang="ja-JP" sz="2800" dirty="0"/>
               <a:t>] = [</a:t>
             </a:r>
             <a:r>
-              <a:rPr lang="en-US" altLang="ja-JP" sz="2800" dirty="0" err="1" smtClean="0"/>
+              <a:rPr lang="en-US" altLang="ja-JP" sz="2800" dirty="0" err="1"/>
               <a:t>a,b,a,b,a,b|E</a:t>
             </a:r>
             <a:r>
-              <a:rPr lang="en-US" altLang="ja-JP" sz="2800" dirty="0" smtClean="0"/>
+              <a:rPr lang="en-US" altLang="ja-JP" sz="2800" dirty="0"/>
               <a:t>] = …</a:t>
             </a:r>
           </a:p>
           <a:p>
             <a:r>
-              <a:rPr lang="ja-JP" altLang="en-US" sz="2800" dirty="0" smtClean="0"/>
+              <a:rPr lang="ja-JP" altLang="en-US" sz="2800" dirty="0"/>
               <a:t>のようになる。</a:t>
             </a:r>
             <a:r>
-              <a:rPr lang="en-US" altLang="ja-JP" sz="2800" dirty="0" smtClean="0"/>
+              <a:rPr lang="en-US" altLang="ja-JP" sz="2800" dirty="0"/>
               <a:t>GNU prolog</a:t>
             </a:r>
             <a:r>
-              <a:rPr lang="ja-JP" altLang="en-US" sz="2800" dirty="0" smtClean="0"/>
+              <a:rPr lang="ja-JP" altLang="en-US" sz="2800" dirty="0"/>
               <a:t>など、</a:t>
             </a:r>
             <a:r>
-              <a:rPr lang="en-US" altLang="ja-JP" sz="2800" dirty="0" smtClean="0"/>
+              <a:rPr lang="en-US" altLang="ja-JP" sz="2800" dirty="0"/>
               <a:t>cyclic term</a:t>
             </a:r>
             <a:r>
-              <a:rPr lang="ja-JP" altLang="en-US" sz="2800" dirty="0" smtClean="0"/>
+              <a:rPr lang="ja-JP" altLang="en-US" sz="2800" dirty="0"/>
               <a:t>を構築するものもある。</a:t>
             </a:r>
-            <a:endParaRPr lang="en-US" altLang="ja-JP" sz="2800" dirty="0" smtClean="0"/>
+            <a:endParaRPr lang="en-US" altLang="ja-JP" sz="2800" dirty="0"/>
           </a:p>
         </p:txBody>
       </p:sp>
@@ -6853,7 +6622,7 @@
           <a:lstStyle/>
           <a:p>
             <a:r>
-              <a:rPr kumimoji="1" lang="en-US" altLang="ja-JP" sz="2800" dirty="0" smtClean="0"/>
+              <a:rPr kumimoji="1" lang="en-US" altLang="ja-JP" sz="2800" dirty="0"/>
               <a:t>a</a:t>
             </a:r>
             <a:endParaRPr kumimoji="1" lang="ja-JP" altLang="en-US" sz="2800" dirty="0"/>
@@ -6883,7 +6652,7 @@
           <a:lstStyle/>
           <a:p>
             <a:r>
-              <a:rPr kumimoji="1" lang="en-US" altLang="ja-JP" sz="2800" dirty="0" smtClean="0"/>
+              <a:rPr kumimoji="1" lang="en-US" altLang="ja-JP" sz="2800" dirty="0"/>
               <a:t>b</a:t>
             </a:r>
             <a:endParaRPr kumimoji="1" lang="ja-JP" altLang="en-US" sz="2800" dirty="0"/>
@@ -6913,7 +6682,7 @@
           <a:lstStyle/>
           <a:p>
             <a:r>
-              <a:rPr kumimoji="1" lang="en-US" altLang="ja-JP" sz="2800" dirty="0" smtClean="0"/>
+              <a:rPr kumimoji="1" lang="en-US" altLang="ja-JP" sz="2800" dirty="0"/>
               <a:t>•</a:t>
             </a:r>
             <a:endParaRPr kumimoji="1" lang="ja-JP" altLang="en-US" sz="2800" dirty="0"/>
@@ -6943,7 +6712,7 @@
           <a:lstStyle/>
           <a:p>
             <a:r>
-              <a:rPr kumimoji="1" lang="en-US" altLang="ja-JP" sz="2800" dirty="0" smtClean="0"/>
+              <a:rPr kumimoji="1" lang="en-US" altLang="ja-JP" sz="2800" dirty="0"/>
               <a:t>•</a:t>
             </a:r>
             <a:endParaRPr kumimoji="1" lang="ja-JP" altLang="en-US" sz="2800" dirty="0"/>
@@ -7516,10 +7285,9 @@
           <a:lstStyle/>
           <a:p>
             <a:r>
-              <a:rPr kumimoji="1" lang="ja-JP" altLang="en-US" dirty="0" smtClean="0"/>
+              <a:rPr kumimoji="1" lang="ja-JP" altLang="en-US" dirty="0"/>
               <a:t>算術演算</a:t>
             </a:r>
-            <a:endParaRPr kumimoji="1" lang="ja-JP" altLang="en-US" dirty="0"/>
           </a:p>
         </p:txBody>
       </p:sp>
@@ -7546,15 +7314,15 @@
           <a:lstStyle/>
           <a:p>
             <a:r>
-              <a:rPr kumimoji="1" lang="en-US" altLang="ja-JP" sz="2800" dirty="0" smtClean="0"/>
+              <a:rPr kumimoji="1" lang="en-US" altLang="ja-JP" sz="2800" dirty="0"/>
               <a:t>=</a:t>
             </a:r>
             <a:r>
-              <a:rPr kumimoji="1" lang="ja-JP" altLang="en-US" sz="2800" dirty="0" smtClean="0"/>
+              <a:rPr kumimoji="1" lang="ja-JP" altLang="en-US" sz="2800" dirty="0"/>
               <a:t>演算子</a:t>
             </a:r>
             <a:r>
-              <a:rPr kumimoji="1" lang="en-US" altLang="ja-JP" sz="2800" dirty="0" smtClean="0"/>
+              <a:rPr kumimoji="1" lang="en-US" altLang="ja-JP" sz="2800" dirty="0"/>
               <a:t> --- term</a:t>
             </a:r>
             <a:r>
@@ -7562,27 +7330,27 @@
               <a:t>1</a:t>
             </a:r>
             <a:r>
-              <a:rPr kumimoji="1" lang="en-US" altLang="ja-JP" sz="2800" dirty="0" smtClean="0"/>
+              <a:rPr kumimoji="1" lang="en-US" altLang="ja-JP" sz="2800" dirty="0"/>
               <a:t>=term2</a:t>
             </a:r>
             <a:r>
-              <a:rPr kumimoji="1" lang="ja-JP" altLang="en-US" sz="2800" dirty="0" smtClean="0"/>
+              <a:rPr kumimoji="1" lang="ja-JP" altLang="en-US" sz="2800" dirty="0"/>
               <a:t>の形で用いられ、</a:t>
             </a:r>
             <a:r>
-              <a:rPr kumimoji="1" lang="en-US" altLang="ja-JP" sz="2800" dirty="0" smtClean="0"/>
+              <a:rPr kumimoji="1" lang="en-US" altLang="ja-JP" sz="2800" dirty="0"/>
               <a:t>term1</a:t>
             </a:r>
             <a:r>
-              <a:rPr kumimoji="1" lang="ja-JP" altLang="en-US" sz="2800" dirty="0" smtClean="0"/>
+              <a:rPr kumimoji="1" lang="ja-JP" altLang="en-US" sz="2800" dirty="0"/>
               <a:t>と</a:t>
             </a:r>
             <a:r>
-              <a:rPr kumimoji="1" lang="en-US" altLang="ja-JP" sz="2800" dirty="0" smtClean="0"/>
+              <a:rPr kumimoji="1" lang="en-US" altLang="ja-JP" sz="2800" dirty="0"/>
               <a:t>term2</a:t>
             </a:r>
             <a:r>
-              <a:rPr kumimoji="1" lang="ja-JP" altLang="en-US" sz="2800" dirty="0" smtClean="0"/>
+              <a:rPr kumimoji="1" lang="ja-JP" altLang="en-US" sz="2800" dirty="0"/>
               <a:t>の単一化を行う</a:t>
             </a:r>
             <a:endParaRPr lang="en-US" altLang="ja-JP" sz="2800" dirty="0"/>
@@ -7592,19 +7360,19 @@
               <a:buNone/>
             </a:pPr>
             <a:r>
-              <a:rPr lang="en-US" altLang="ja-JP" sz="2800" dirty="0" smtClean="0"/>
+              <a:rPr lang="en-US" altLang="ja-JP" sz="2800" dirty="0"/>
               <a:t>    </a:t>
             </a:r>
             <a:r>
-              <a:rPr lang="en-US" altLang="ja-JP" sz="2800" i="1" dirty="0" smtClean="0"/>
+              <a:rPr lang="en-US" altLang="ja-JP" sz="2800" i="1" dirty="0"/>
               <a:t>?-</a:t>
             </a:r>
             <a:r>
-              <a:rPr lang="en-US" altLang="ja-JP" sz="2800" dirty="0" smtClean="0"/>
+              <a:rPr lang="en-US" altLang="ja-JP" sz="2800" dirty="0"/>
               <a:t> </a:t>
             </a:r>
             <a:r>
-              <a:rPr lang="en-US" altLang="ja-JP" sz="2800" dirty="0" smtClean="0">
+              <a:rPr lang="en-US" altLang="ja-JP" sz="2800" dirty="0">
                 <a:solidFill>
                   <a:srgbClr val="FF0000"/>
                 </a:solidFill>
@@ -7618,14 +7386,10 @@
             </a:pPr>
             <a:r>
               <a:rPr lang="en-US" altLang="ja-JP" sz="2800" dirty="0"/>
-              <a:t> </a:t>
-            </a:r>
-            <a:r>
-              <a:rPr lang="en-US" altLang="ja-JP" sz="2800" dirty="0" smtClean="0"/>
-              <a:t>      </a:t>
-            </a:r>
-            <a:r>
-              <a:rPr lang="en-US" altLang="ja-JP" sz="2800" i="1" dirty="0" smtClean="0">
+              <a:t>       </a:t>
+            </a:r>
+            <a:r>
+              <a:rPr lang="en-US" altLang="ja-JP" sz="2800" i="1" dirty="0">
                 <a:solidFill>
                   <a:srgbClr val="FF0000"/>
                 </a:solidFill>
@@ -7633,49 +7397,49 @@
               <a:t>  </a:t>
             </a:r>
             <a:r>
-              <a:rPr lang="en-US" altLang="ja-JP" sz="2800" i="1" dirty="0" smtClean="0"/>
+              <a:rPr lang="en-US" altLang="ja-JP" sz="2800" i="1" dirty="0"/>
               <a:t>X=2+3</a:t>
             </a:r>
             <a:endParaRPr lang="en-US" altLang="ja-JP" sz="2800" dirty="0"/>
           </a:p>
           <a:p>
             <a:r>
-              <a:rPr lang="en-US" altLang="ja-JP" sz="2800" dirty="0" smtClean="0"/>
+              <a:rPr lang="en-US" altLang="ja-JP" sz="2800" dirty="0"/>
               <a:t>i</a:t>
             </a:r>
             <a:r>
-              <a:rPr kumimoji="1" lang="en-US" altLang="ja-JP" sz="2800" dirty="0" smtClean="0"/>
+              <a:rPr kumimoji="1" lang="en-US" altLang="ja-JP" sz="2800" dirty="0"/>
               <a:t>s</a:t>
             </a:r>
             <a:r>
-              <a:rPr kumimoji="1" lang="ja-JP" altLang="en-US" sz="2800" dirty="0" smtClean="0"/>
+              <a:rPr kumimoji="1" lang="ja-JP" altLang="en-US" sz="2800" dirty="0"/>
               <a:t>演算子</a:t>
             </a:r>
             <a:r>
-              <a:rPr kumimoji="1" lang="en-US" altLang="ja-JP" sz="2800" dirty="0" smtClean="0"/>
+              <a:rPr kumimoji="1" lang="en-US" altLang="ja-JP" sz="2800" dirty="0"/>
               <a:t> --- term is </a:t>
             </a:r>
             <a:r>
-              <a:rPr lang="ja-JP" altLang="en-US" sz="2800" dirty="0" smtClean="0"/>
+              <a:rPr lang="ja-JP" altLang="en-US" sz="2800" dirty="0"/>
               <a:t>式</a:t>
             </a:r>
             <a:r>
-              <a:rPr kumimoji="1" lang="ja-JP" altLang="en-US" sz="2800" dirty="0" smtClean="0"/>
+              <a:rPr kumimoji="1" lang="ja-JP" altLang="en-US" sz="2800" dirty="0"/>
               <a:t>の形で用いられ、</a:t>
             </a:r>
             <a:r>
-              <a:rPr lang="ja-JP" altLang="en-US" sz="2800" dirty="0" smtClean="0"/>
+              <a:rPr lang="ja-JP" altLang="en-US" sz="2800" dirty="0"/>
               <a:t>式の評価結果と</a:t>
             </a:r>
             <a:r>
-              <a:rPr lang="en-US" altLang="ja-JP" sz="2800" dirty="0" smtClean="0"/>
+              <a:rPr lang="en-US" altLang="ja-JP" sz="2800" dirty="0"/>
               <a:t>term</a:t>
             </a:r>
             <a:r>
-              <a:rPr lang="ja-JP" altLang="en-US" sz="2800" dirty="0" smtClean="0"/>
+              <a:rPr lang="ja-JP" altLang="en-US" sz="2800" dirty="0"/>
               <a:t>の単一化を行う</a:t>
             </a:r>
-            <a:endParaRPr kumimoji="1" lang="en-US" altLang="ja-JP" sz="2800" dirty="0" smtClean="0"/>
+            <a:endParaRPr kumimoji="1" lang="en-US" altLang="ja-JP" sz="2800" dirty="0"/>
           </a:p>
           <a:p>
             <a:pPr marL="0" indent="0">
@@ -7683,22 +7447,18 @@
             </a:pPr>
             <a:r>
               <a:rPr lang="en-US" altLang="ja-JP" sz="2800" dirty="0"/>
+              <a:t>    </a:t>
+            </a:r>
+            <a:r>
+              <a:rPr lang="en-US" altLang="ja-JP" sz="2800" i="1" dirty="0"/>
+              <a:t>?-</a:t>
+            </a:r>
+            <a:r>
+              <a:rPr lang="en-US" altLang="ja-JP" sz="2800" dirty="0"/>
               <a:t> </a:t>
             </a:r>
             <a:r>
-              <a:rPr lang="en-US" altLang="ja-JP" sz="2800" dirty="0" smtClean="0"/>
-              <a:t>   </a:t>
-            </a:r>
-            <a:r>
-              <a:rPr lang="en-US" altLang="ja-JP" sz="2800" i="1" dirty="0" smtClean="0"/>
-              <a:t>?-</a:t>
-            </a:r>
-            <a:r>
-              <a:rPr lang="en-US" altLang="ja-JP" sz="2800" dirty="0" smtClean="0"/>
-              <a:t> </a:t>
-            </a:r>
-            <a:r>
-              <a:rPr lang="en-US" altLang="ja-JP" sz="2800" dirty="0" smtClean="0">
+              <a:rPr lang="en-US" altLang="ja-JP" sz="2800" dirty="0">
                 <a:solidFill>
                   <a:srgbClr val="FF0000"/>
                 </a:solidFill>
@@ -7712,14 +7472,10 @@
             </a:pPr>
             <a:r>
               <a:rPr kumimoji="1" lang="en-US" altLang="ja-JP" sz="2800" dirty="0"/>
-              <a:t> </a:t>
-            </a:r>
-            <a:r>
-              <a:rPr kumimoji="1" lang="en-US" altLang="ja-JP" sz="2800" dirty="0" smtClean="0"/>
-              <a:t>      </a:t>
-            </a:r>
-            <a:r>
-              <a:rPr kumimoji="1" lang="en-US" altLang="ja-JP" sz="2800" i="1" dirty="0" smtClean="0"/>
+              <a:t>       </a:t>
+            </a:r>
+            <a:r>
+              <a:rPr kumimoji="1" lang="en-US" altLang="ja-JP" sz="2800" i="1" dirty="0"/>
               <a:t> X=5</a:t>
             </a:r>
           </a:p>
@@ -7729,14 +7485,10 @@
             </a:pPr>
             <a:r>
               <a:rPr lang="en-US" altLang="ja-JP" sz="2800" i="1" dirty="0"/>
-              <a:t> </a:t>
-            </a:r>
-            <a:r>
-              <a:rPr lang="en-US" altLang="ja-JP" sz="2800" i="1" dirty="0" smtClean="0"/>
-              <a:t>   ?- </a:t>
-            </a:r>
-            <a:r>
-              <a:rPr lang="en-US" altLang="ja-JP" sz="2800" dirty="0" smtClean="0">
+              <a:t>    ?- </a:t>
+            </a:r>
+            <a:r>
+              <a:rPr lang="en-US" altLang="ja-JP" sz="2800" dirty="0">
                 <a:solidFill>
                   <a:srgbClr val="FF0000"/>
                 </a:solidFill>
@@ -7750,11 +7502,7 @@
             </a:pPr>
             <a:r>
               <a:rPr kumimoji="1" lang="en-US" altLang="ja-JP" sz="2800" i="1" dirty="0"/>
-              <a:t> </a:t>
-            </a:r>
-            <a:r>
-              <a:rPr kumimoji="1" lang="en-US" altLang="ja-JP" sz="2800" i="1" dirty="0" smtClean="0"/>
-              <a:t>       X=5</a:t>
+              <a:t>        X=5</a:t>
             </a:r>
           </a:p>
           <a:p>
@@ -7763,14 +7511,10 @@
             </a:pPr>
             <a:r>
               <a:rPr lang="en-US" altLang="ja-JP" sz="2800" i="1" dirty="0"/>
-              <a:t> </a:t>
-            </a:r>
-            <a:r>
-              <a:rPr lang="en-US" altLang="ja-JP" sz="2800" i="1" dirty="0" smtClean="0"/>
-              <a:t>   ?- </a:t>
-            </a:r>
-            <a:r>
-              <a:rPr lang="en-US" altLang="ja-JP" sz="2800" dirty="0" smtClean="0">
+              <a:t>    ?- </a:t>
+            </a:r>
+            <a:r>
+              <a:rPr lang="en-US" altLang="ja-JP" sz="2800" dirty="0">
                 <a:solidFill>
                   <a:srgbClr val="FF0000"/>
                 </a:solidFill>
@@ -7784,11 +7528,7 @@
             </a:pPr>
             <a:r>
               <a:rPr kumimoji="1" lang="en-US" altLang="ja-JP" sz="2800" i="1" dirty="0"/>
-              <a:t> </a:t>
-            </a:r>
-            <a:r>
-              <a:rPr kumimoji="1" lang="en-US" altLang="ja-JP" sz="2800" i="1" dirty="0" smtClean="0"/>
-              <a:t>       no</a:t>
+              <a:t>        no</a:t>
             </a:r>
           </a:p>
         </p:txBody>
@@ -7841,18 +7581,14 @@
           <a:lstStyle/>
           <a:p>
             <a:r>
-              <a:rPr kumimoji="1" lang="ja-JP" altLang="en-US" dirty="0" smtClean="0"/>
+              <a:rPr kumimoji="1" lang="ja-JP" altLang="en-US" dirty="0"/>
               <a:t>論理型プログラミング</a:t>
             </a:r>
-            <a:r>
-              <a:rPr kumimoji="1" lang="en-US" altLang="ja-JP" dirty="0" smtClean="0"/>
-              <a:t/>
-            </a:r>
             <a:br>
-              <a:rPr kumimoji="1" lang="en-US" altLang="ja-JP" dirty="0" smtClean="0"/>
+              <a:rPr kumimoji="1" lang="en-US" altLang="ja-JP" dirty="0"/>
             </a:br>
             <a:r>
-              <a:rPr kumimoji="1" lang="en-US" altLang="ja-JP" dirty="0" smtClean="0"/>
+              <a:rPr kumimoji="1" lang="en-US" altLang="ja-JP" dirty="0"/>
               <a:t>(logic programming)</a:t>
             </a:r>
             <a:endParaRPr kumimoji="1" lang="ja-JP" altLang="en-US" dirty="0"/>
@@ -7882,96 +7618,88 @@
           <a:lstStyle/>
           <a:p>
             <a:r>
-              <a:rPr kumimoji="1" lang="ja-JP" altLang="en-US" dirty="0" smtClean="0"/>
+              <a:rPr kumimoji="1" lang="ja-JP" altLang="en-US" dirty="0"/>
               <a:t>自動定理証明がもとになっている</a:t>
             </a:r>
-            <a:endParaRPr kumimoji="1" lang="en-US" altLang="ja-JP" dirty="0" smtClean="0"/>
-          </a:p>
-          <a:p>
-            <a:r>
-              <a:rPr lang="ja-JP" altLang="en-US" dirty="0" smtClean="0"/>
+            <a:endParaRPr kumimoji="1" lang="en-US" altLang="ja-JP" dirty="0"/>
+          </a:p>
+          <a:p>
+            <a:r>
+              <a:rPr lang="ja-JP" altLang="en-US" dirty="0"/>
               <a:t>１階述語論理の構文が用いられる</a:t>
             </a:r>
           </a:p>
           <a:p>
             <a:r>
-              <a:rPr lang="en-US" altLang="ja-JP" dirty="0" smtClean="0"/>
+              <a:rPr lang="en-US" altLang="ja-JP" dirty="0"/>
               <a:t>Prolog (1973</a:t>
             </a:r>
             <a:r>
-              <a:rPr lang="ja-JP" altLang="en-US" dirty="0" smtClean="0"/>
+              <a:rPr lang="ja-JP" altLang="en-US" dirty="0"/>
               <a:t>年</a:t>
             </a:r>
             <a:r>
-              <a:rPr lang="en-US" altLang="ja-JP" dirty="0" smtClean="0"/>
+              <a:rPr lang="en-US" altLang="ja-JP" dirty="0"/>
               <a:t>) --- </a:t>
             </a:r>
             <a:r>
-              <a:rPr lang="ja-JP" altLang="en-US" dirty="0" smtClean="0"/>
-              <a:t>最初は</a:t>
-            </a:r>
-            <a:r>
               <a:rPr lang="ja-JP" altLang="en-US" dirty="0"/>
-              <a:t>自然言語</a:t>
-            </a:r>
-            <a:r>
-              <a:rPr lang="ja-JP" altLang="en-US" dirty="0" smtClean="0"/>
-              <a:t>処理に用いられた</a:t>
-            </a:r>
-            <a:endParaRPr lang="en-US" altLang="ja-JP" dirty="0" smtClean="0"/>
-          </a:p>
-          <a:p>
-            <a:r>
-              <a:rPr lang="en-US" altLang="ja-JP" dirty="0" smtClean="0"/>
+              <a:t>最初は自然言語処理に用いられた</a:t>
+            </a:r>
+            <a:endParaRPr lang="en-US" altLang="ja-JP" dirty="0"/>
+          </a:p>
+          <a:p>
+            <a:r>
+              <a:rPr lang="en-US" altLang="ja-JP" dirty="0"/>
               <a:t>Robert Kowalski: “algorithm=</a:t>
             </a:r>
             <a:r>
-              <a:rPr lang="en-US" altLang="ja-JP" dirty="0" err="1" smtClean="0"/>
+              <a:rPr lang="en-US" altLang="ja-JP" dirty="0" err="1"/>
               <a:t>logic+control</a:t>
             </a:r>
             <a:r>
-              <a:rPr lang="en-US" altLang="ja-JP" dirty="0" smtClean="0"/>
+              <a:rPr lang="en-US" altLang="ja-JP" dirty="0"/>
               <a:t>”</a:t>
             </a:r>
           </a:p>
           <a:p>
             <a:r>
-              <a:rPr lang="en-US" altLang="ja-JP" dirty="0" smtClean="0"/>
+              <a:rPr lang="en-US" altLang="ja-JP" dirty="0"/>
               <a:t>Alain </a:t>
             </a:r>
             <a:r>
-              <a:rPr lang="en-US" altLang="ja-JP" dirty="0" err="1" smtClean="0"/>
+              <a:rPr lang="en-US" altLang="ja-JP" dirty="0" err="1"/>
               <a:t>Colmerauer</a:t>
             </a:r>
             <a:r>
-              <a:rPr lang="ja-JP" altLang="en-US" dirty="0" smtClean="0"/>
+              <a:rPr lang="ja-JP" altLang="en-US" dirty="0"/>
               <a:t>と彼の</a:t>
             </a:r>
             <a:r>
-              <a:rPr lang="en-US" altLang="ja-JP" dirty="0" smtClean="0"/>
+              <a:rPr lang="en-US" altLang="ja-JP" dirty="0"/>
               <a:t>team</a:t>
             </a:r>
             <a:r>
-              <a:rPr lang="ja-JP" altLang="en-US" dirty="0" smtClean="0"/>
+              <a:rPr lang="ja-JP" altLang="en-US" dirty="0"/>
               <a:t>が自然言語処理用のプログラミング言語を開発しており、</a:t>
             </a:r>
             <a:r>
-              <a:rPr lang="en-US" altLang="ja-JP" dirty="0" smtClean="0"/>
+              <a:rPr lang="en-US" altLang="ja-JP" dirty="0"/>
               <a:t>Kowalski</a:t>
             </a:r>
             <a:r>
-              <a:rPr lang="ja-JP" altLang="en-US" dirty="0" smtClean="0"/>
+              <a:rPr lang="ja-JP" altLang="en-US" dirty="0"/>
               <a:t>と交流して</a:t>
             </a:r>
             <a:r>
-              <a:rPr lang="en-US" altLang="ja-JP" dirty="0" smtClean="0"/>
+              <a:rPr lang="en-US" altLang="ja-JP" dirty="0"/>
               <a:t>Prolog</a:t>
             </a:r>
             <a:r>
-              <a:rPr lang="ja-JP" altLang="en-US" dirty="0" smtClean="0"/>
+              <a:rPr lang="ja-JP" altLang="en-US" dirty="0"/>
               <a:t>の開発に繋がった。</a:t>
             </a:r>
-            <a:endParaRPr lang="en-US" altLang="ja-JP" dirty="0" smtClean="0"/>
+            <a:endParaRPr lang="en-US" altLang="ja-JP" dirty="0"/>
           </a:p>
         </p:txBody>
       </p:sp>
@@ -7985,13 +7713,6 @@
   <p:clrMapOvr>
     <a:masterClrMapping/>
   </p:clrMapOvr>
-  <p:timing>
-    <p:tnLst>
-      <p:par>
-        <p:cTn xmlns:p14="http://schemas.microsoft.com/office/powerpoint/2010/main" id="1" dur="indefinite" restart="never" nodeType="tmRoot"/>
-      </p:par>
-    </p:tnLst>
-  </p:timing>
 </p:sld>
 </file>
 
@@ -8028,14 +7749,13 @@
           <a:lstStyle/>
           <a:p>
             <a:r>
-              <a:rPr lang="en-US" altLang="ja-JP" dirty="0" smtClean="0"/>
+              <a:rPr lang="en-US" altLang="ja-JP" dirty="0"/>
               <a:t>Prolog</a:t>
             </a:r>
             <a:r>
-              <a:rPr kumimoji="1" lang="ja-JP" altLang="en-US" dirty="0" smtClean="0"/>
+              <a:rPr kumimoji="1" lang="ja-JP" altLang="en-US" dirty="0"/>
               <a:t>探索木</a:t>
             </a:r>
-            <a:endParaRPr kumimoji="1" lang="ja-JP" altLang="en-US" dirty="0"/>
           </a:p>
         </p:txBody>
       </p:sp>
@@ -8055,62 +7775,62 @@
           <a:lstStyle/>
           <a:p>
             <a:r>
-              <a:rPr kumimoji="1" lang="ja-JP" altLang="en-US" dirty="0" smtClean="0"/>
+              <a:rPr kumimoji="1" lang="ja-JP" altLang="en-US" dirty="0"/>
               <a:t>各ノードはゴール</a:t>
             </a:r>
             <a:r>
-              <a:rPr kumimoji="1" lang="en-US" altLang="ja-JP" dirty="0" smtClean="0"/>
+              <a:rPr kumimoji="1" lang="en-US" altLang="ja-JP" dirty="0"/>
               <a:t>(goal)</a:t>
             </a:r>
             <a:r>
-              <a:rPr kumimoji="1" lang="ja-JP" altLang="en-US" dirty="0" smtClean="0"/>
+              <a:rPr kumimoji="1" lang="ja-JP" altLang="en-US" dirty="0"/>
               <a:t>を表す</a:t>
             </a:r>
-            <a:endParaRPr kumimoji="1" lang="en-US" altLang="ja-JP" dirty="0" smtClean="0"/>
-          </a:p>
-          <a:p>
-            <a:r>
-              <a:rPr lang="ja-JP" altLang="en-US" dirty="0" smtClean="0"/>
+            <a:endParaRPr kumimoji="1" lang="en-US" altLang="ja-JP" dirty="0"/>
+          </a:p>
+          <a:p>
+            <a:r>
+              <a:rPr lang="ja-JP" altLang="en-US" dirty="0"/>
               <a:t>各ノードはそのノードの一番左のサブゴールに適用できるルールの数だけ子供を持つ</a:t>
             </a:r>
-            <a:endParaRPr lang="en-US" altLang="ja-JP" dirty="0" smtClean="0"/>
-          </a:p>
-          <a:p>
-            <a:r>
-              <a:rPr lang="ja-JP" altLang="en-US" dirty="0" smtClean="0"/>
+            <a:endParaRPr lang="en-US" altLang="ja-JP" dirty="0"/>
+          </a:p>
+          <a:p>
+            <a:r>
+              <a:rPr lang="ja-JP" altLang="en-US" dirty="0"/>
               <a:t>各ノードの子供の順番は規則の順番と同じ</a:t>
             </a:r>
-            <a:endParaRPr lang="en-US" altLang="ja-JP" dirty="0" smtClean="0"/>
-          </a:p>
-          <a:p>
-            <a:r>
-              <a:rPr lang="en-US" altLang="ja-JP" dirty="0" smtClean="0"/>
+            <a:endParaRPr lang="en-US" altLang="ja-JP" dirty="0"/>
+          </a:p>
+          <a:p>
+            <a:r>
+              <a:rPr lang="en-US" altLang="ja-JP" dirty="0"/>
               <a:t>Prolog</a:t>
             </a:r>
             <a:r>
-              <a:rPr lang="ja-JP" altLang="en-US" dirty="0" smtClean="0"/>
+              <a:rPr lang="ja-JP" altLang="en-US" dirty="0"/>
               <a:t>の計算は、</a:t>
             </a:r>
             <a:r>
-              <a:rPr lang="en-US" altLang="ja-JP" dirty="0" smtClean="0"/>
+              <a:rPr lang="en-US" altLang="ja-JP" dirty="0"/>
               <a:t>Prolog</a:t>
             </a:r>
             <a:r>
-              <a:rPr lang="ja-JP" altLang="en-US" dirty="0" smtClean="0"/>
+              <a:rPr lang="ja-JP" altLang="en-US" dirty="0"/>
               <a:t>探索木を深さ優先で探索することにより行われ、ゴールが空のノードに到達する度に答えを出力する</a:t>
             </a:r>
-            <a:endParaRPr lang="en-US" altLang="ja-JP" dirty="0" smtClean="0"/>
-          </a:p>
-          <a:p>
-            <a:r>
-              <a:rPr lang="en-US" altLang="ja-JP" dirty="0" smtClean="0"/>
+            <a:endParaRPr lang="en-US" altLang="ja-JP" dirty="0"/>
+          </a:p>
+          <a:p>
+            <a:r>
+              <a:rPr lang="en-US" altLang="ja-JP" dirty="0"/>
               <a:t>Backtrack</a:t>
             </a:r>
             <a:r>
-              <a:rPr lang="ja-JP" altLang="en-US" dirty="0" smtClean="0"/>
+              <a:rPr lang="ja-JP" altLang="en-US" dirty="0"/>
               <a:t>（バックトラック）が行われる</a:t>
             </a:r>
-            <a:endParaRPr lang="en-US" altLang="ja-JP" dirty="0" smtClean="0"/>
+            <a:endParaRPr lang="en-US" altLang="ja-JP" dirty="0"/>
           </a:p>
         </p:txBody>
       </p:sp>
@@ -8171,18 +7891,14 @@
               <a:t>a</a:t>
             </a:r>
             <a:r>
-              <a:rPr kumimoji="1" lang="en-US" altLang="ja-JP" sz="2400" dirty="0" smtClean="0"/>
+              <a:rPr kumimoji="1" lang="en-US" altLang="ja-JP" sz="2400" dirty="0"/>
               <a:t>(1) :- b.</a:t>
             </a:r>
           </a:p>
           <a:p>
             <a:r>
               <a:rPr lang="en-US" altLang="ja-JP" sz="2400" dirty="0"/>
-              <a:t>a</a:t>
-            </a:r>
-            <a:r>
-              <a:rPr lang="en-US" altLang="ja-JP" sz="2400" dirty="0" smtClean="0"/>
-              <a:t>(2) :- e.</a:t>
+              <a:t>a(2) :- e.</a:t>
             </a:r>
           </a:p>
           <a:p>
@@ -8191,39 +7907,31 @@
               <a:t>b</a:t>
             </a:r>
             <a:r>
-              <a:rPr kumimoji="1" lang="en-US" altLang="ja-JP" sz="2400" dirty="0" smtClean="0"/>
+              <a:rPr kumimoji="1" lang="en-US" altLang="ja-JP" sz="2400" dirty="0"/>
               <a:t> :- c.</a:t>
             </a:r>
           </a:p>
           <a:p>
             <a:r>
               <a:rPr lang="en-US" altLang="ja-JP" sz="2400" dirty="0"/>
-              <a:t>b</a:t>
-            </a:r>
-            <a:r>
-              <a:rPr lang="en-US" altLang="ja-JP" sz="2400" dirty="0" smtClean="0"/>
-              <a:t> :- d.</a:t>
+              <a:t>b :- d.</a:t>
             </a:r>
           </a:p>
           <a:p>
             <a:r>
               <a:rPr lang="en-US" altLang="ja-JP" sz="2400" dirty="0"/>
-              <a:t>c</a:t>
-            </a:r>
-            <a:r>
-              <a:rPr lang="en-US" altLang="ja-JP" sz="2400" dirty="0" smtClean="0"/>
-              <a:t> :- fail.</a:t>
-            </a:r>
-          </a:p>
-          <a:p>
-            <a:r>
-              <a:rPr kumimoji="1" lang="en-US" altLang="ja-JP" sz="2400" dirty="0" smtClean="0"/>
+              <a:t>c :- fail.</a:t>
+            </a:r>
+          </a:p>
+          <a:p>
+            <a:r>
+              <a:rPr kumimoji="1" lang="en-US" altLang="ja-JP" sz="2400" dirty="0"/>
               <a:t>d.</a:t>
             </a:r>
           </a:p>
           <a:p>
             <a:r>
-              <a:rPr lang="en-US" altLang="ja-JP" sz="2400" dirty="0" smtClean="0"/>
+              <a:rPr lang="en-US" altLang="ja-JP" sz="2400" dirty="0"/>
               <a:t>e.</a:t>
             </a:r>
             <a:endParaRPr kumimoji="1" lang="ja-JP" altLang="en-US" sz="2400" dirty="0"/>
@@ -8253,15 +7961,15 @@
           <a:lstStyle/>
           <a:p>
             <a:r>
-              <a:rPr lang="en-US" altLang="ja-JP" sz="2400" i="1" dirty="0" smtClean="0"/>
+              <a:rPr lang="en-US" altLang="ja-JP" sz="2400" i="1" dirty="0"/>
               <a:t>?-</a:t>
             </a:r>
             <a:r>
-              <a:rPr lang="en-US" altLang="ja-JP" sz="2400" dirty="0" smtClean="0"/>
+              <a:rPr lang="en-US" altLang="ja-JP" sz="2400" dirty="0"/>
               <a:t> </a:t>
             </a:r>
             <a:r>
-              <a:rPr lang="en-US" altLang="ja-JP" sz="2400" dirty="0" smtClean="0">
+              <a:rPr lang="en-US" altLang="ja-JP" sz="2400" dirty="0">
                 <a:solidFill>
                   <a:srgbClr val="FF0000"/>
                 </a:solidFill>
@@ -8272,18 +7980,14 @@
           <a:p>
             <a:r>
               <a:rPr kumimoji="1" lang="en-US" altLang="ja-JP" sz="2400" dirty="0"/>
-              <a:t> </a:t>
-            </a:r>
-            <a:r>
-              <a:rPr kumimoji="1" lang="en-US" altLang="ja-JP" sz="2400" dirty="0" smtClean="0"/>
-              <a:t>   </a:t>
-            </a:r>
-            <a:r>
-              <a:rPr kumimoji="1" lang="en-US" altLang="ja-JP" sz="2400" i="1" dirty="0" smtClean="0"/>
+              <a:t>    </a:t>
+            </a:r>
+            <a:r>
+              <a:rPr kumimoji="1" lang="en-US" altLang="ja-JP" sz="2400" i="1" dirty="0"/>
               <a:t>X=1</a:t>
             </a:r>
             <a:r>
-              <a:rPr kumimoji="1" lang="en-US" altLang="ja-JP" sz="2400" dirty="0" smtClean="0">
+              <a:rPr kumimoji="1" lang="en-US" altLang="ja-JP" sz="2400" dirty="0">
                 <a:solidFill>
                   <a:srgbClr val="FF0000"/>
                 </a:solidFill>
@@ -8294,21 +7998,13 @@
           <a:p>
             <a:r>
               <a:rPr lang="en-US" altLang="ja-JP" sz="2400" i="1" dirty="0"/>
-              <a:t> </a:t>
-            </a:r>
-            <a:r>
-              <a:rPr lang="en-US" altLang="ja-JP" sz="2400" i="1" dirty="0" smtClean="0"/>
-              <a:t>   X=2</a:t>
+              <a:t>    X=2</a:t>
             </a:r>
           </a:p>
           <a:p>
             <a:r>
               <a:rPr kumimoji="1" lang="en-US" altLang="ja-JP" sz="2400" i="1" dirty="0"/>
-              <a:t> </a:t>
-            </a:r>
-            <a:r>
-              <a:rPr kumimoji="1" lang="en-US" altLang="ja-JP" sz="2400" i="1" dirty="0" smtClean="0"/>
-              <a:t>   yes</a:t>
+              <a:t>    yes</a:t>
             </a:r>
             <a:endParaRPr kumimoji="1" lang="ja-JP" altLang="en-US" sz="2400" i="1" dirty="0"/>
           </a:p>
@@ -8335,10 +8031,9 @@
           <a:lstStyle/>
           <a:p>
             <a:r>
-              <a:rPr kumimoji="1" lang="ja-JP" altLang="en-US" dirty="0" smtClean="0"/>
+              <a:rPr kumimoji="1" lang="ja-JP" altLang="en-US" dirty="0"/>
               <a:t>例</a:t>
             </a:r>
-            <a:endParaRPr kumimoji="1" lang="ja-JP" altLang="en-US" dirty="0"/>
           </a:p>
         </p:txBody>
       </p:sp>
@@ -8365,15 +8060,15 @@
           <a:lstStyle/>
           <a:p>
             <a:r>
-              <a:rPr lang="ja-JP" altLang="en-US" sz="2400" dirty="0" smtClean="0"/>
+              <a:rPr lang="ja-JP" altLang="en-US" sz="2400" dirty="0"/>
               <a:t>（</a:t>
             </a:r>
             <a:r>
-              <a:rPr lang="en-US" altLang="ja-JP" sz="2400" dirty="0" smtClean="0"/>
+              <a:rPr lang="en-US" altLang="ja-JP" sz="2400" dirty="0"/>
               <a:t>fail</a:t>
             </a:r>
             <a:r>
-              <a:rPr lang="ja-JP" altLang="en-US" sz="2400" dirty="0" smtClean="0"/>
+              <a:rPr lang="ja-JP" altLang="en-US" sz="2400" dirty="0"/>
               <a:t>は常に失敗する述語）</a:t>
             </a:r>
             <a:endParaRPr kumimoji="1" lang="ja-JP" altLang="en-US" sz="2400" dirty="0"/>
@@ -8419,14 +8114,14 @@
           </a:lstStyle>
           <a:p>
             <a:r>
-              <a:rPr lang="en-US" altLang="ja-JP" sz="2800" dirty="0" smtClean="0"/>
+              <a:rPr lang="en-US" altLang="ja-JP" sz="2800" dirty="0"/>
               <a:t>Prolog</a:t>
             </a:r>
             <a:r>
-              <a:rPr lang="ja-JP" altLang="en-US" sz="2800" dirty="0" smtClean="0"/>
+              <a:rPr lang="ja-JP" altLang="en-US" sz="2800" dirty="0"/>
               <a:t>探索木</a:t>
             </a:r>
-            <a:endParaRPr lang="en-US" altLang="ja-JP" sz="2800" dirty="0" smtClean="0"/>
+            <a:endParaRPr lang="en-US" altLang="ja-JP" sz="2800" dirty="0"/>
           </a:p>
         </p:txBody>
       </p:sp>
@@ -8453,7 +8148,7 @@
           <a:lstStyle/>
           <a:p>
             <a:r>
-              <a:rPr lang="en-US" altLang="ja-JP" sz="2800" dirty="0" smtClean="0"/>
+              <a:rPr lang="en-US" altLang="ja-JP" sz="2800" dirty="0"/>
               <a:t>a(X)</a:t>
             </a:r>
             <a:endParaRPr kumimoji="1" lang="ja-JP" altLang="en-US" sz="2800" dirty="0"/>
@@ -8484,11 +8179,7 @@
           <a:p>
             <a:r>
               <a:rPr lang="en-US" altLang="ja-JP" sz="2800" dirty="0"/>
-              <a:t> </a:t>
-            </a:r>
-            <a:r>
-              <a:rPr lang="en-US" altLang="ja-JP" sz="2800" dirty="0" smtClean="0"/>
-              <a:t>b</a:t>
+              <a:t> b</a:t>
             </a:r>
             <a:endParaRPr kumimoji="1" lang="ja-JP" altLang="en-US" sz="2800" dirty="0"/>
           </a:p>
@@ -8558,15 +8249,7 @@
                   <a:srgbClr val="FF0000"/>
                 </a:solidFill>
               </a:rPr>
-              <a:t> </a:t>
-            </a:r>
-            <a:r>
-              <a:rPr lang="en-US" altLang="ja-JP" sz="2400" dirty="0" smtClean="0">
-                <a:solidFill>
-                  <a:srgbClr val="FF0000"/>
-                </a:solidFill>
-              </a:rPr>
-              <a:t>{X -&gt; 1}</a:t>
+              <a:t> {X -&gt; 1}</a:t>
             </a:r>
             <a:endParaRPr kumimoji="1" lang="ja-JP" altLang="en-US" sz="2400" dirty="0">
               <a:solidFill>
@@ -8636,11 +8319,7 @@
           <a:p>
             <a:r>
               <a:rPr lang="en-US" altLang="ja-JP" sz="2800" dirty="0"/>
-              <a:t> </a:t>
-            </a:r>
-            <a:r>
-              <a:rPr lang="en-US" altLang="ja-JP" sz="2800" dirty="0" smtClean="0"/>
-              <a:t>c</a:t>
+              <a:t> c</a:t>
             </a:r>
             <a:endParaRPr kumimoji="1" lang="ja-JP" altLang="en-US" sz="2800" dirty="0"/>
           </a:p>
@@ -8706,11 +8385,7 @@
           <a:p>
             <a:r>
               <a:rPr lang="en-US" altLang="ja-JP" sz="2800" dirty="0"/>
-              <a:t> </a:t>
-            </a:r>
-            <a:r>
-              <a:rPr lang="en-US" altLang="ja-JP" sz="2800" dirty="0" smtClean="0"/>
-              <a:t>fail</a:t>
+              <a:t> fail</a:t>
             </a:r>
             <a:endParaRPr kumimoji="1" lang="ja-JP" altLang="en-US" sz="2800" dirty="0"/>
           </a:p>
@@ -8739,22 +8414,22 @@
           <a:lstStyle/>
           <a:p>
             <a:r>
-              <a:rPr kumimoji="1" lang="en-US" altLang="ja-JP" sz="2400" dirty="0" smtClean="0"/>
+              <a:rPr kumimoji="1" lang="en-US" altLang="ja-JP" sz="2400" dirty="0"/>
               <a:t> </a:t>
             </a:r>
             <a:r>
-              <a:rPr kumimoji="1" lang="ja-JP" altLang="en-US" sz="2400" dirty="0" smtClean="0"/>
+              <a:rPr kumimoji="1" lang="ja-JP" altLang="en-US" sz="2400" dirty="0"/>
               <a:t>失敗し</a:t>
             </a:r>
             <a:r>
-              <a:rPr lang="ja-JP" altLang="en-US" sz="2400" dirty="0" smtClean="0"/>
+              <a:rPr lang="ja-JP" altLang="en-US" sz="2400" dirty="0"/>
               <a:t>、</a:t>
             </a:r>
-            <a:endParaRPr lang="en-US" altLang="ja-JP" sz="2400" dirty="0" smtClean="0"/>
-          </a:p>
-          <a:p>
-            <a:r>
-              <a:rPr kumimoji="1" lang="en-US" altLang="ja-JP" sz="2400" dirty="0" smtClean="0"/>
+            <a:endParaRPr lang="en-US" altLang="ja-JP" sz="2400" dirty="0"/>
+          </a:p>
+          <a:p>
+            <a:r>
+              <a:rPr kumimoji="1" lang="en-US" altLang="ja-JP" sz="2400" dirty="0"/>
               <a:t>backtrack</a:t>
             </a:r>
             <a:endParaRPr kumimoji="1" lang="ja-JP" altLang="en-US" sz="2400" dirty="0"/>
@@ -8821,11 +8496,7 @@
           <a:p>
             <a:r>
               <a:rPr lang="en-US" altLang="ja-JP" sz="2800" dirty="0"/>
-              <a:t> </a:t>
-            </a:r>
-            <a:r>
-              <a:rPr lang="en-US" altLang="ja-JP" sz="2800" dirty="0" smtClean="0"/>
-              <a:t>d</a:t>
+              <a:t> d</a:t>
             </a:r>
             <a:endParaRPr kumimoji="1" lang="ja-JP" altLang="en-US" sz="2800" dirty="0"/>
           </a:p>
@@ -8890,40 +8561,36 @@
           <a:lstStyle/>
           <a:p>
             <a:r>
-              <a:rPr lang="ja-JP" altLang="en-US" sz="2400" dirty="0" smtClean="0"/>
+              <a:rPr lang="ja-JP" altLang="en-US" sz="2400" dirty="0"/>
               <a:t>成功し、</a:t>
             </a:r>
-            <a:endParaRPr lang="en-US" altLang="ja-JP" sz="2400" dirty="0" smtClean="0"/>
-          </a:p>
-          <a:p>
-            <a:r>
-              <a:rPr lang="en-US" altLang="ja-JP" sz="2400" dirty="0" smtClean="0"/>
+            <a:endParaRPr lang="en-US" altLang="ja-JP" sz="2400" dirty="0"/>
+          </a:p>
+          <a:p>
+            <a:r>
+              <a:rPr lang="en-US" altLang="ja-JP" sz="2400" dirty="0"/>
               <a:t>X=1</a:t>
             </a:r>
             <a:r>
-              <a:rPr lang="ja-JP" altLang="en-US" sz="2400" dirty="0" smtClean="0"/>
+              <a:rPr lang="ja-JP" altLang="en-US" sz="2400" dirty="0"/>
               <a:t>を出力</a:t>
             </a:r>
-            <a:endParaRPr lang="en-US" altLang="ja-JP" sz="2400" dirty="0" smtClean="0"/>
-          </a:p>
-          <a:p>
-            <a:r>
-              <a:rPr lang="ja-JP" altLang="en-US" sz="2400" dirty="0" smtClean="0"/>
+            <a:endParaRPr lang="en-US" altLang="ja-JP" sz="2400" dirty="0"/>
+          </a:p>
+          <a:p>
+            <a:r>
+              <a:rPr lang="ja-JP" altLang="en-US" sz="2400" dirty="0"/>
               <a:t>（セミコロンを打つと</a:t>
             </a:r>
-            <a:endParaRPr lang="en-US" altLang="ja-JP" sz="2400" dirty="0" smtClean="0"/>
+            <a:endParaRPr lang="en-US" altLang="ja-JP" sz="2400" dirty="0"/>
           </a:p>
           <a:p>
             <a:r>
               <a:rPr lang="en-US" altLang="ja-JP" sz="2400" dirty="0"/>
-              <a:t>b</a:t>
-            </a:r>
-            <a:r>
-              <a:rPr lang="en-US" altLang="ja-JP" sz="2400" dirty="0" smtClean="0"/>
-              <a:t>acktrack</a:t>
-            </a:r>
-            <a:r>
-              <a:rPr lang="ja-JP" altLang="en-US" sz="2400" dirty="0" smtClean="0"/>
+              <a:t>backtrack</a:t>
+            </a:r>
+            <a:r>
+              <a:rPr lang="ja-JP" altLang="en-US" sz="2400" dirty="0"/>
               <a:t>）</a:t>
             </a:r>
             <a:endParaRPr lang="en-US" altLang="ja-JP" sz="2400" dirty="0"/>
@@ -8990,11 +8657,7 @@
           <a:p>
             <a:r>
               <a:rPr lang="en-US" altLang="ja-JP" sz="2800" dirty="0"/>
-              <a:t> </a:t>
-            </a:r>
-            <a:r>
-              <a:rPr lang="en-US" altLang="ja-JP" sz="2800" dirty="0" smtClean="0"/>
-              <a:t>e</a:t>
+              <a:t> e</a:t>
             </a:r>
             <a:endParaRPr kumimoji="1" lang="ja-JP" altLang="en-US" sz="2800" dirty="0"/>
           </a:p>
@@ -9028,15 +8691,7 @@
                   <a:srgbClr val="FF0000"/>
                 </a:solidFill>
               </a:rPr>
-              <a:t> </a:t>
-            </a:r>
-            <a:r>
-              <a:rPr lang="en-US" altLang="ja-JP" sz="2400" dirty="0" smtClean="0">
-                <a:solidFill>
-                  <a:srgbClr val="FF0000"/>
-                </a:solidFill>
-              </a:rPr>
-              <a:t>{X -&gt; 2}</a:t>
+              <a:t> {X -&gt; 2}</a:t>
             </a:r>
             <a:endParaRPr kumimoji="1" lang="ja-JP" altLang="en-US" sz="2400" dirty="0">
               <a:solidFill>
@@ -9105,40 +8760,40 @@
           <a:lstStyle/>
           <a:p>
             <a:r>
-              <a:rPr lang="ja-JP" altLang="en-US" sz="2400" dirty="0" smtClean="0"/>
+              <a:rPr lang="ja-JP" altLang="en-US" sz="2400" dirty="0"/>
               <a:t>成功し、</a:t>
             </a:r>
-            <a:endParaRPr lang="en-US" altLang="ja-JP" sz="2400" dirty="0" smtClean="0"/>
-          </a:p>
-          <a:p>
-            <a:r>
-              <a:rPr lang="en-US" altLang="ja-JP" sz="2400" dirty="0" smtClean="0"/>
+            <a:endParaRPr lang="en-US" altLang="ja-JP" sz="2400" dirty="0"/>
+          </a:p>
+          <a:p>
+            <a:r>
+              <a:rPr lang="en-US" altLang="ja-JP" sz="2400" dirty="0"/>
               <a:t>X=2</a:t>
             </a:r>
             <a:r>
-              <a:rPr lang="ja-JP" altLang="en-US" sz="2400" dirty="0" smtClean="0"/>
+              <a:rPr lang="ja-JP" altLang="en-US" sz="2400" dirty="0"/>
               <a:t>を出力</a:t>
             </a:r>
-            <a:endParaRPr lang="en-US" altLang="ja-JP" sz="2400" dirty="0" smtClean="0"/>
-          </a:p>
-          <a:p>
-            <a:r>
-              <a:rPr lang="ja-JP" altLang="en-US" sz="2400" dirty="0" smtClean="0"/>
+            <a:endParaRPr lang="en-US" altLang="ja-JP" sz="2400" dirty="0"/>
+          </a:p>
+          <a:p>
+            <a:r>
+              <a:rPr lang="ja-JP" altLang="en-US" sz="2400" dirty="0"/>
               <a:t>（</a:t>
             </a:r>
             <a:r>
-              <a:rPr lang="en-US" altLang="ja-JP" sz="2400" dirty="0" smtClean="0"/>
+              <a:rPr lang="en-US" altLang="ja-JP" sz="2400" dirty="0"/>
               <a:t>yes</a:t>
             </a:r>
             <a:r>
-              <a:rPr lang="ja-JP" altLang="en-US" sz="2400" dirty="0" smtClean="0"/>
+              <a:rPr lang="ja-JP" altLang="en-US" sz="2400" dirty="0"/>
               <a:t>を出力して</a:t>
             </a:r>
-            <a:endParaRPr lang="en-US" altLang="ja-JP" sz="2400" dirty="0" smtClean="0"/>
-          </a:p>
-          <a:p>
-            <a:r>
-              <a:rPr lang="ja-JP" altLang="en-US" sz="2400" dirty="0" smtClean="0"/>
+            <a:endParaRPr lang="en-US" altLang="ja-JP" sz="2400" dirty="0"/>
+          </a:p>
+          <a:p>
+            <a:r>
+              <a:rPr lang="ja-JP" altLang="en-US" sz="2400" dirty="0"/>
               <a:t>終了）</a:t>
             </a:r>
             <a:endParaRPr lang="en-US" altLang="ja-JP" sz="2400" dirty="0"/>
@@ -9196,7 +8851,7 @@
           <a:lstStyle/>
           <a:p>
             <a:r>
-              <a:rPr kumimoji="1" lang="en-US" altLang="ja-JP" dirty="0" smtClean="0"/>
+              <a:rPr kumimoji="1" lang="en-US" altLang="ja-JP" dirty="0"/>
               <a:t>Cut</a:t>
             </a:r>
             <a:endParaRPr kumimoji="1" lang="ja-JP" altLang="en-US" dirty="0"/>
@@ -9226,14 +8881,14 @@
           <a:lstStyle/>
           <a:p>
             <a:r>
-              <a:rPr kumimoji="1" lang="ja-JP" altLang="en-US" sz="2800" dirty="0" smtClean="0"/>
+              <a:rPr kumimoji="1" lang="ja-JP" altLang="en-US" sz="2800" dirty="0"/>
               <a:t>探索する部分を削減する効果を持ち、計算量が減少</a:t>
             </a:r>
-            <a:endParaRPr kumimoji="1" lang="en-US" altLang="ja-JP" sz="2800" dirty="0" smtClean="0"/>
-          </a:p>
-          <a:p>
-            <a:r>
-              <a:rPr lang="ja-JP" altLang="en-US" sz="2800" dirty="0" smtClean="0"/>
+            <a:endParaRPr kumimoji="1" lang="en-US" altLang="ja-JP" sz="2800" dirty="0"/>
+          </a:p>
+          <a:p>
+            <a:r>
+              <a:rPr lang="ja-JP" altLang="en-US" sz="2800" dirty="0"/>
               <a:t>純粋な論理式の意味からははずれる</a:t>
             </a:r>
             <a:endParaRPr kumimoji="1" lang="ja-JP" altLang="en-US" sz="2800" dirty="0"/>
@@ -9268,101 +8923,101 @@
           <a:lstStyle/>
           <a:p>
             <a:r>
-              <a:rPr kumimoji="1" lang="en-US" altLang="ja-JP" sz="2800" i="1" dirty="0" smtClean="0"/>
+              <a:rPr kumimoji="1" lang="en-US" altLang="ja-JP" sz="2800" i="1" dirty="0"/>
               <a:t>B</a:t>
             </a:r>
             <a:r>
-              <a:rPr kumimoji="1" lang="en-US" altLang="ja-JP" sz="2800" dirty="0" smtClean="0"/>
+              <a:rPr kumimoji="1" lang="en-US" altLang="ja-JP" sz="2800" dirty="0"/>
               <a:t> :- </a:t>
             </a:r>
             <a:r>
-              <a:rPr kumimoji="1" lang="en-US" altLang="ja-JP" sz="2800" i="1" dirty="0" smtClean="0"/>
+              <a:rPr kumimoji="1" lang="en-US" altLang="ja-JP" sz="2800" i="1" dirty="0"/>
               <a:t>C</a:t>
             </a:r>
             <a:r>
-              <a:rPr kumimoji="1" lang="en-US" altLang="ja-JP" sz="2800" baseline="-25000" dirty="0" smtClean="0"/>
+              <a:rPr kumimoji="1" lang="en-US" altLang="ja-JP" sz="2800" baseline="-25000" dirty="0"/>
               <a:t>1</a:t>
             </a:r>
             <a:r>
-              <a:rPr kumimoji="1" lang="en-US" altLang="ja-JP" sz="2800" dirty="0" smtClean="0"/>
+              <a:rPr kumimoji="1" lang="en-US" altLang="ja-JP" sz="2800" dirty="0"/>
               <a:t>, …, </a:t>
             </a:r>
             <a:r>
-              <a:rPr kumimoji="1" lang="en-US" altLang="ja-JP" sz="2800" i="1" dirty="0" smtClean="0"/>
+              <a:rPr kumimoji="1" lang="en-US" altLang="ja-JP" sz="2800" i="1" dirty="0"/>
               <a:t>C</a:t>
             </a:r>
             <a:r>
-              <a:rPr kumimoji="1" lang="en-US" altLang="ja-JP" sz="2800" i="1" baseline="-25000" dirty="0" smtClean="0"/>
+              <a:rPr kumimoji="1" lang="en-US" altLang="ja-JP" sz="2800" i="1" baseline="-25000" dirty="0"/>
               <a:t>j</a:t>
             </a:r>
             <a:r>
-              <a:rPr kumimoji="1" lang="en-US" altLang="ja-JP" sz="2800" baseline="-25000" dirty="0" smtClean="0"/>
+              <a:rPr kumimoji="1" lang="en-US" altLang="ja-JP" sz="2800" baseline="-25000" dirty="0"/>
               <a:t>-1</a:t>
             </a:r>
             <a:r>
-              <a:rPr kumimoji="1" lang="en-US" altLang="ja-JP" sz="2800" dirty="0" smtClean="0"/>
+              <a:rPr kumimoji="1" lang="en-US" altLang="ja-JP" sz="2800" dirty="0"/>
               <a:t>, !,</a:t>
             </a:r>
             <a:r>
-              <a:rPr kumimoji="1" lang="en-US" altLang="ja-JP" sz="2800" i="1" dirty="0" smtClean="0"/>
+              <a:rPr kumimoji="1" lang="en-US" altLang="ja-JP" sz="2800" i="1" dirty="0"/>
               <a:t> C</a:t>
             </a:r>
             <a:r>
-              <a:rPr kumimoji="1" lang="en-US" altLang="ja-JP" sz="2800" i="1" baseline="-25000" dirty="0" smtClean="0"/>
+              <a:rPr kumimoji="1" lang="en-US" altLang="ja-JP" sz="2800" i="1" baseline="-25000" dirty="0"/>
               <a:t>j</a:t>
             </a:r>
             <a:r>
-              <a:rPr kumimoji="1" lang="en-US" altLang="ja-JP" sz="2800" baseline="-25000" dirty="0" smtClean="0"/>
+              <a:rPr kumimoji="1" lang="en-US" altLang="ja-JP" sz="2800" baseline="-25000" dirty="0"/>
               <a:t>+1</a:t>
             </a:r>
             <a:r>
-              <a:rPr kumimoji="1" lang="en-US" altLang="ja-JP" sz="2800" dirty="0" smtClean="0"/>
+              <a:rPr kumimoji="1" lang="en-US" altLang="ja-JP" sz="2800" dirty="0"/>
               <a:t>, …, </a:t>
             </a:r>
             <a:r>
-              <a:rPr kumimoji="1" lang="en-US" altLang="ja-JP" sz="2800" i="1" dirty="0" err="1" smtClean="0"/>
+              <a:rPr kumimoji="1" lang="en-US" altLang="ja-JP" sz="2800" i="1" dirty="0" err="1"/>
               <a:t>C</a:t>
             </a:r>
             <a:r>
-              <a:rPr kumimoji="1" lang="en-US" altLang="ja-JP" sz="2800" i="1" baseline="-25000" dirty="0" err="1" smtClean="0"/>
+              <a:rPr kumimoji="1" lang="en-US" altLang="ja-JP" sz="2800" i="1" baseline="-25000" dirty="0" err="1"/>
               <a:t>k</a:t>
             </a:r>
-            <a:endParaRPr kumimoji="1" lang="en-US" altLang="ja-JP" sz="2800" i="1" baseline="-25000" dirty="0" smtClean="0"/>
-          </a:p>
-          <a:p>
-            <a:r>
-              <a:rPr kumimoji="1" lang="en-US" altLang="ja-JP" sz="2800" dirty="0" smtClean="0"/>
+            <a:endParaRPr kumimoji="1" lang="en-US" altLang="ja-JP" sz="2800" i="1" baseline="-25000" dirty="0"/>
+          </a:p>
+          <a:p>
+            <a:r>
+              <a:rPr kumimoji="1" lang="en-US" altLang="ja-JP" sz="2800" dirty="0"/>
               <a:t>!</a:t>
             </a:r>
             <a:r>
-              <a:rPr kumimoji="1" lang="ja-JP" altLang="en-US" sz="2800" dirty="0" smtClean="0"/>
+              <a:rPr kumimoji="1" lang="ja-JP" altLang="en-US" sz="2800" dirty="0"/>
               <a:t>自体は常に成功し、</a:t>
             </a:r>
             <a:r>
-              <a:rPr lang="en-US" altLang="ja-JP" sz="2800" dirty="0" smtClean="0"/>
+              <a:rPr lang="en-US" altLang="ja-JP" sz="2800" dirty="0"/>
               <a:t>backtrack</a:t>
             </a:r>
             <a:r>
-              <a:rPr lang="ja-JP" altLang="en-US" sz="2800" dirty="0" smtClean="0"/>
+              <a:rPr lang="ja-JP" altLang="en-US" sz="2800" dirty="0"/>
               <a:t>で</a:t>
             </a:r>
             <a:r>
-              <a:rPr lang="en-US" altLang="ja-JP" sz="2800" dirty="0" smtClean="0"/>
+              <a:rPr lang="en-US" altLang="ja-JP" sz="2800" dirty="0"/>
               <a:t>!</a:t>
             </a:r>
             <a:r>
-              <a:rPr lang="ja-JP" altLang="en-US" sz="2800" dirty="0" smtClean="0"/>
+              <a:rPr lang="ja-JP" altLang="en-US" sz="2800" dirty="0"/>
               <a:t>に戻ってきた際に、述語</a:t>
             </a:r>
             <a:r>
-              <a:rPr lang="en-US" altLang="ja-JP" sz="2800" i="1" dirty="0" smtClean="0"/>
+              <a:rPr lang="en-US" altLang="ja-JP" sz="2800" i="1" dirty="0"/>
               <a:t>B</a:t>
             </a:r>
             <a:r>
-              <a:rPr lang="ja-JP" altLang="en-US" sz="2800" dirty="0" smtClean="0"/>
+              <a:rPr lang="ja-JP" altLang="en-US" sz="2800" dirty="0"/>
               <a:t>は失敗するという副作用を持つ。</a:t>
             </a:r>
-            <a:endParaRPr lang="en-US" altLang="ja-JP" sz="2800" dirty="0" smtClean="0"/>
+            <a:endParaRPr lang="en-US" altLang="ja-JP" sz="2800" dirty="0"/>
           </a:p>
         </p:txBody>
       </p:sp>
@@ -9393,52 +9048,43 @@
               <a:t>a</a:t>
             </a:r>
             <a:r>
-              <a:rPr kumimoji="1" lang="en-US" altLang="ja-JP" sz="2400" dirty="0" smtClean="0"/>
+              <a:rPr kumimoji="1" lang="en-US" altLang="ja-JP" sz="2400" dirty="0"/>
               <a:t>(1) :- b.</a:t>
             </a:r>
           </a:p>
           <a:p>
             <a:r>
               <a:rPr lang="en-US" altLang="ja-JP" sz="2400" dirty="0"/>
-              <a:t>a</a:t>
-            </a:r>
-            <a:r>
-              <a:rPr lang="en-US" altLang="ja-JP" sz="2400" dirty="0" smtClean="0"/>
-              <a:t>(2) :- e.</a:t>
-            </a:r>
-          </a:p>
-          <a:p>
-            <a:r>
-              <a:rPr kumimoji="1" lang="en-US" altLang="ja-JP" sz="2400" dirty="0" smtClean="0"/>
+              <a:t>a(2) :- e.</a:t>
+            </a:r>
+          </a:p>
+          <a:p>
+            <a:r>
+              <a:rPr kumimoji="1" lang="en-US" altLang="ja-JP" sz="2400" dirty="0"/>
               <a:t>b :- !, c.</a:t>
             </a:r>
           </a:p>
           <a:p>
             <a:r>
-              <a:rPr lang="en-US" altLang="ja-JP" sz="2400" dirty="0" smtClean="0"/>
+              <a:rPr lang="en-US" altLang="ja-JP" sz="2400" dirty="0"/>
               <a:t>b :- d.</a:t>
             </a:r>
           </a:p>
           <a:p>
             <a:r>
               <a:rPr lang="en-US" altLang="ja-JP" sz="2400" dirty="0"/>
-              <a:t>c :- </a:t>
-            </a:r>
-            <a:r>
-              <a:rPr lang="en-US" altLang="ja-JP" sz="2400" dirty="0" smtClean="0"/>
-              <a:t>fail.</a:t>
-            </a:r>
-            <a:endParaRPr lang="en-US" altLang="ja-JP" sz="2400" dirty="0"/>
-          </a:p>
-          <a:p>
-            <a:r>
-              <a:rPr kumimoji="1" lang="en-US" altLang="ja-JP" sz="2400" dirty="0" smtClean="0"/>
+              <a:t>c :- fail.</a:t>
+            </a:r>
+          </a:p>
+          <a:p>
+            <a:r>
+              <a:rPr kumimoji="1" lang="en-US" altLang="ja-JP" sz="2400" dirty="0"/>
               <a:t>d.</a:t>
             </a:r>
           </a:p>
           <a:p>
             <a:r>
-              <a:rPr lang="en-US" altLang="ja-JP" sz="2400" dirty="0" smtClean="0"/>
+              <a:rPr lang="en-US" altLang="ja-JP" sz="2400" dirty="0"/>
               <a:t>e.</a:t>
             </a:r>
             <a:endParaRPr kumimoji="1" lang="ja-JP" altLang="en-US" sz="2400" dirty="0"/>
@@ -9468,15 +9114,15 @@
           <a:lstStyle/>
           <a:p>
             <a:r>
-              <a:rPr lang="en-US" altLang="ja-JP" sz="2400" i="1" dirty="0" smtClean="0"/>
+              <a:rPr lang="en-US" altLang="ja-JP" sz="2400" i="1" dirty="0"/>
               <a:t>?-</a:t>
             </a:r>
             <a:r>
-              <a:rPr lang="en-US" altLang="ja-JP" sz="2400" dirty="0" smtClean="0"/>
+              <a:rPr lang="en-US" altLang="ja-JP" sz="2400" dirty="0"/>
               <a:t> </a:t>
             </a:r>
             <a:r>
-              <a:rPr lang="en-US" altLang="ja-JP" sz="2400" dirty="0" smtClean="0">
+              <a:rPr lang="en-US" altLang="ja-JP" sz="2400" dirty="0">
                 <a:solidFill>
                   <a:srgbClr val="FF0000"/>
                 </a:solidFill>
@@ -9487,26 +9133,18 @@
           <a:p>
             <a:r>
               <a:rPr kumimoji="1" lang="en-US" altLang="ja-JP" sz="2400" dirty="0"/>
-              <a:t> </a:t>
-            </a:r>
-            <a:r>
-              <a:rPr kumimoji="1" lang="en-US" altLang="ja-JP" sz="2400" dirty="0" smtClean="0"/>
-              <a:t>   </a:t>
-            </a:r>
-            <a:r>
-              <a:rPr kumimoji="1" lang="en-US" altLang="ja-JP" sz="2400" i="1" dirty="0" smtClean="0"/>
+              <a:t>    </a:t>
+            </a:r>
+            <a:r>
+              <a:rPr kumimoji="1" lang="en-US" altLang="ja-JP" sz="2400" i="1" dirty="0"/>
               <a:t>X=2</a:t>
             </a:r>
-            <a:endParaRPr lang="en-US" altLang="ja-JP" sz="2400" i="1" dirty="0" smtClean="0"/>
+            <a:endParaRPr lang="en-US" altLang="ja-JP" sz="2400" i="1" dirty="0"/>
           </a:p>
           <a:p>
             <a:r>
               <a:rPr kumimoji="1" lang="en-US" altLang="ja-JP" sz="2400" i="1" dirty="0"/>
-              <a:t> </a:t>
-            </a:r>
-            <a:r>
-              <a:rPr kumimoji="1" lang="en-US" altLang="ja-JP" sz="2400" i="1" dirty="0" smtClean="0"/>
-              <a:t>   yes</a:t>
+              <a:t>    yes</a:t>
             </a:r>
             <a:endParaRPr kumimoji="1" lang="ja-JP" altLang="en-US" sz="2400" i="1" dirty="0"/>
           </a:p>
@@ -9535,7 +9173,7 @@
           <a:lstStyle/>
           <a:p>
             <a:r>
-              <a:rPr lang="en-US" altLang="ja-JP" sz="2800" dirty="0" smtClean="0"/>
+              <a:rPr lang="en-US" altLang="ja-JP" sz="2800" dirty="0"/>
               <a:t>a(X)</a:t>
             </a:r>
             <a:endParaRPr kumimoji="1" lang="ja-JP" altLang="en-US" sz="2800" dirty="0"/>
@@ -9566,11 +9204,7 @@
           <a:p>
             <a:r>
               <a:rPr lang="en-US" altLang="ja-JP" sz="2800" dirty="0"/>
-              <a:t> </a:t>
-            </a:r>
-            <a:r>
-              <a:rPr lang="en-US" altLang="ja-JP" sz="2800" dirty="0" smtClean="0"/>
-              <a:t>b</a:t>
+              <a:t> b</a:t>
             </a:r>
             <a:endParaRPr kumimoji="1" lang="ja-JP" altLang="en-US" sz="2800" dirty="0"/>
           </a:p>
@@ -9640,15 +9274,7 @@
                   <a:srgbClr val="FF0000"/>
                 </a:solidFill>
               </a:rPr>
-              <a:t> </a:t>
-            </a:r>
-            <a:r>
-              <a:rPr lang="en-US" altLang="ja-JP" sz="2400" dirty="0" smtClean="0">
-                <a:solidFill>
-                  <a:srgbClr val="FF0000"/>
-                </a:solidFill>
-              </a:rPr>
-              <a:t>{X -&gt; 1}</a:t>
+              <a:t> {X -&gt; 1}</a:t>
             </a:r>
             <a:endParaRPr kumimoji="1" lang="ja-JP" altLang="en-US" sz="2400" dirty="0">
               <a:solidFill>
@@ -9718,11 +9344,7 @@
           <a:p>
             <a:r>
               <a:rPr lang="en-US" altLang="ja-JP" sz="2800" dirty="0"/>
-              <a:t> </a:t>
-            </a:r>
-            <a:r>
-              <a:rPr lang="en-US" altLang="ja-JP" sz="2800" dirty="0" smtClean="0"/>
-              <a:t>e</a:t>
+              <a:t> e</a:t>
             </a:r>
             <a:endParaRPr kumimoji="1" lang="ja-JP" altLang="en-US" sz="2800" dirty="0"/>
           </a:p>
@@ -9756,15 +9378,7 @@
                   <a:srgbClr val="FF0000"/>
                 </a:solidFill>
               </a:rPr>
-              <a:t> </a:t>
-            </a:r>
-            <a:r>
-              <a:rPr lang="en-US" altLang="ja-JP" sz="2400" dirty="0" smtClean="0">
-                <a:solidFill>
-                  <a:srgbClr val="FF0000"/>
-                </a:solidFill>
-              </a:rPr>
-              <a:t>{X -&gt; 2}</a:t>
+              <a:t> {X -&gt; 2}</a:t>
             </a:r>
             <a:endParaRPr kumimoji="1" lang="ja-JP" altLang="en-US" sz="2400" dirty="0">
               <a:solidFill>
@@ -9834,11 +9448,7 @@
           <a:p>
             <a:r>
               <a:rPr lang="en-US" altLang="ja-JP" sz="2800" dirty="0"/>
-              <a:t> </a:t>
-            </a:r>
-            <a:r>
-              <a:rPr lang="en-US" altLang="ja-JP" sz="2800" dirty="0" smtClean="0"/>
-              <a:t>!, c</a:t>
+              <a:t> !, c</a:t>
             </a:r>
             <a:endParaRPr kumimoji="1" lang="ja-JP" altLang="en-US" sz="2800" dirty="0"/>
           </a:p>
@@ -9867,7 +9477,7 @@
           <a:lstStyle/>
           <a:p>
             <a:r>
-              <a:rPr lang="en-US" altLang="ja-JP" sz="2800" dirty="0" smtClean="0"/>
+              <a:rPr lang="en-US" altLang="ja-JP" sz="2800" dirty="0"/>
               <a:t>c</a:t>
             </a:r>
             <a:endParaRPr kumimoji="1" lang="ja-JP" altLang="en-US" sz="2800" dirty="0"/>
@@ -9969,7 +9579,7 @@
           <a:lstStyle/>
           <a:p>
             <a:r>
-              <a:rPr lang="en-US" altLang="ja-JP" sz="2800" dirty="0" smtClean="0"/>
+              <a:rPr lang="en-US" altLang="ja-JP" sz="2800" dirty="0"/>
               <a:t>fail</a:t>
             </a:r>
             <a:endParaRPr kumimoji="1" lang="ja-JP" altLang="en-US" sz="2800" dirty="0"/>
@@ -9999,19 +9609,19 @@
           <a:lstStyle/>
           <a:p>
             <a:r>
-              <a:rPr kumimoji="1" lang="en-US" altLang="ja-JP" sz="2400" dirty="0" smtClean="0"/>
+              <a:rPr kumimoji="1" lang="en-US" altLang="ja-JP" sz="2400" dirty="0"/>
               <a:t> </a:t>
             </a:r>
             <a:r>
-              <a:rPr kumimoji="1" lang="ja-JP" altLang="en-US" sz="2400" dirty="0" smtClean="0"/>
+              <a:rPr kumimoji="1" lang="ja-JP" altLang="en-US" sz="2400" dirty="0"/>
               <a:t>失敗し</a:t>
             </a:r>
             <a:r>
-              <a:rPr lang="ja-JP" altLang="en-US" sz="2400" dirty="0" smtClean="0"/>
+              <a:rPr lang="ja-JP" altLang="en-US" sz="2400" dirty="0"/>
               <a:t>、</a:t>
             </a:r>
             <a:r>
-              <a:rPr kumimoji="1" lang="en-US" altLang="ja-JP" sz="2400" dirty="0" smtClean="0"/>
+              <a:rPr kumimoji="1" lang="en-US" altLang="ja-JP" sz="2400" dirty="0"/>
               <a:t>backtrack</a:t>
             </a:r>
             <a:endParaRPr kumimoji="1" lang="ja-JP" altLang="en-US" sz="2400" dirty="0"/>
@@ -10114,40 +9724,40 @@
           <a:lstStyle/>
           <a:p>
             <a:r>
-              <a:rPr lang="ja-JP" altLang="en-US" sz="2400" dirty="0" smtClean="0"/>
+              <a:rPr lang="ja-JP" altLang="en-US" sz="2400" dirty="0"/>
               <a:t>成功し、</a:t>
             </a:r>
-            <a:endParaRPr lang="en-US" altLang="ja-JP" sz="2400" dirty="0" smtClean="0"/>
-          </a:p>
-          <a:p>
-            <a:r>
-              <a:rPr lang="en-US" altLang="ja-JP" sz="2400" dirty="0" smtClean="0"/>
+            <a:endParaRPr lang="en-US" altLang="ja-JP" sz="2400" dirty="0"/>
+          </a:p>
+          <a:p>
+            <a:r>
+              <a:rPr lang="en-US" altLang="ja-JP" sz="2400" dirty="0"/>
               <a:t>X=2</a:t>
             </a:r>
             <a:r>
-              <a:rPr lang="ja-JP" altLang="en-US" sz="2400" dirty="0" smtClean="0"/>
+              <a:rPr lang="ja-JP" altLang="en-US" sz="2400" dirty="0"/>
               <a:t>を出力</a:t>
             </a:r>
-            <a:endParaRPr lang="en-US" altLang="ja-JP" sz="2400" dirty="0" smtClean="0"/>
-          </a:p>
-          <a:p>
-            <a:r>
-              <a:rPr lang="ja-JP" altLang="en-US" sz="2400" dirty="0" smtClean="0"/>
+            <a:endParaRPr lang="en-US" altLang="ja-JP" sz="2400" dirty="0"/>
+          </a:p>
+          <a:p>
+            <a:r>
+              <a:rPr lang="ja-JP" altLang="en-US" sz="2400" dirty="0"/>
               <a:t>（</a:t>
             </a:r>
             <a:r>
-              <a:rPr lang="en-US" altLang="ja-JP" sz="2400" dirty="0" smtClean="0"/>
+              <a:rPr lang="en-US" altLang="ja-JP" sz="2400" dirty="0"/>
               <a:t>yes</a:t>
             </a:r>
             <a:r>
-              <a:rPr lang="ja-JP" altLang="en-US" sz="2400" dirty="0" smtClean="0"/>
+              <a:rPr lang="ja-JP" altLang="en-US" sz="2400" dirty="0"/>
               <a:t>を出力して</a:t>
             </a:r>
-            <a:endParaRPr lang="en-US" altLang="ja-JP" sz="2400" dirty="0" smtClean="0"/>
-          </a:p>
-          <a:p>
-            <a:r>
-              <a:rPr lang="ja-JP" altLang="en-US" sz="2400" dirty="0" smtClean="0"/>
+            <a:endParaRPr lang="en-US" altLang="ja-JP" sz="2400" dirty="0"/>
+          </a:p>
+          <a:p>
+            <a:r>
+              <a:rPr lang="ja-JP" altLang="en-US" sz="2400" dirty="0"/>
               <a:t>終了）</a:t>
             </a:r>
             <a:endParaRPr lang="en-US" altLang="ja-JP" sz="2400" dirty="0"/>
@@ -10183,14 +9793,13 @@
           <a:lstStyle/>
           <a:p>
             <a:r>
-              <a:rPr kumimoji="1" lang="en-US" altLang="ja-JP" sz="2400" dirty="0" smtClean="0"/>
+              <a:rPr kumimoji="1" lang="en-US" altLang="ja-JP" sz="2400" dirty="0"/>
               <a:t> </a:t>
             </a:r>
             <a:r>
-              <a:rPr kumimoji="1" lang="ja-JP" altLang="en-US" sz="2400" dirty="0" smtClean="0"/>
+              <a:rPr kumimoji="1" lang="ja-JP" altLang="en-US" sz="2400" dirty="0"/>
               <a:t>ここは探索しない</a:t>
             </a:r>
-            <a:endParaRPr kumimoji="1" lang="ja-JP" altLang="en-US" sz="2400" dirty="0"/>
           </a:p>
         </p:txBody>
       </p:sp>
@@ -10242,14 +9851,13 @@
           <a:lstStyle/>
           <a:p>
             <a:r>
-              <a:rPr kumimoji="1" lang="en-US" altLang="ja-JP" dirty="0" smtClean="0"/>
+              <a:rPr kumimoji="1" lang="en-US" altLang="ja-JP" dirty="0"/>
               <a:t>Cut</a:t>
             </a:r>
             <a:r>
-              <a:rPr kumimoji="1" lang="ja-JP" altLang="en-US" dirty="0" smtClean="0"/>
+              <a:rPr kumimoji="1" lang="ja-JP" altLang="en-US" dirty="0"/>
               <a:t>の例</a:t>
             </a:r>
-            <a:endParaRPr kumimoji="1" lang="ja-JP" altLang="en-US" dirty="0"/>
           </a:p>
         </p:txBody>
       </p:sp>
@@ -10316,27 +9924,23 @@
             </a:r>
             <a:r>
               <a:rPr lang="en-US" altLang="ja-JP" sz="2800" dirty="0"/>
-              <a:t>(K,T)</a:t>
-            </a:r>
-            <a:r>
-              <a:rPr lang="en-US" altLang="ja-JP" sz="2800" dirty="0" smtClean="0"/>
-              <a:t>.</a:t>
-            </a:r>
-          </a:p>
-          <a:p>
-            <a:r>
-              <a:rPr lang="ja-JP" altLang="en-US" sz="2800" dirty="0" smtClean="0"/>
+              <a:t>(K,T).</a:t>
+            </a:r>
+          </a:p>
+          <a:p>
+            <a:r>
+              <a:rPr lang="ja-JP" altLang="en-US" sz="2800" dirty="0"/>
               <a:t>この定義では、３つの規則が相互に重なり合わないので、以下のように</a:t>
             </a:r>
             <a:r>
-              <a:rPr lang="en-US" altLang="ja-JP" sz="2800" dirty="0" smtClean="0"/>
+              <a:rPr lang="en-US" altLang="ja-JP" sz="2800" dirty="0"/>
               <a:t>cut</a:t>
             </a:r>
             <a:r>
-              <a:rPr lang="ja-JP" altLang="en-US" sz="2800" dirty="0" smtClean="0"/>
+              <a:rPr lang="ja-JP" altLang="en-US" sz="2800" dirty="0"/>
               <a:t>を入れると効率が良くなる。</a:t>
             </a:r>
-            <a:endParaRPr lang="en-US" altLang="ja-JP" sz="2800" dirty="0" smtClean="0"/>
+            <a:endParaRPr lang="en-US" altLang="ja-JP" sz="2800" dirty="0"/>
           </a:p>
           <a:p>
             <a:r>
@@ -10381,59 +9985,54 @@
             </a:r>
             <a:r>
               <a:rPr lang="en-US" altLang="ja-JP" sz="2800" dirty="0"/>
-              <a:t>(K,T)</a:t>
-            </a:r>
-            <a:r>
-              <a:rPr lang="en-US" altLang="ja-JP" sz="2800" dirty="0" smtClean="0"/>
-              <a:t>.</a:t>
-            </a:r>
-          </a:p>
-          <a:p>
-            <a:r>
-              <a:rPr lang="ja-JP" altLang="en-US" sz="2800" dirty="0" smtClean="0"/>
+              <a:t>(K,T).</a:t>
+            </a:r>
+          </a:p>
+          <a:p>
+            <a:r>
+              <a:rPr lang="ja-JP" altLang="en-US" sz="2800" dirty="0"/>
               <a:t>この場合は、</a:t>
             </a:r>
             <a:r>
-              <a:rPr lang="en-US" altLang="ja-JP" sz="2800" dirty="0" smtClean="0"/>
+              <a:rPr lang="en-US" altLang="ja-JP" sz="2800" dirty="0"/>
               <a:t>Prolog</a:t>
             </a:r>
             <a:r>
-              <a:rPr lang="ja-JP" altLang="en-US" sz="2800" dirty="0" smtClean="0"/>
+              <a:rPr lang="ja-JP" altLang="en-US" sz="2800" dirty="0"/>
               <a:t>探索木の中で解に到達しない部分だけを探索範囲から除外している。このような</a:t>
             </a:r>
             <a:r>
-              <a:rPr lang="en-US" altLang="ja-JP" sz="2800" dirty="0" smtClean="0"/>
+              <a:rPr lang="en-US" altLang="ja-JP" sz="2800" dirty="0"/>
               <a:t>cut</a:t>
             </a:r>
             <a:r>
-              <a:rPr lang="ja-JP" altLang="en-US" sz="2800" dirty="0" smtClean="0"/>
+              <a:rPr lang="ja-JP" altLang="en-US" sz="2800" dirty="0"/>
               <a:t>を</a:t>
             </a:r>
             <a:r>
-              <a:rPr lang="en-US" altLang="ja-JP" sz="2800" dirty="0" smtClean="0"/>
+              <a:rPr lang="en-US" altLang="ja-JP" sz="2800" dirty="0"/>
               <a:t>green cut</a:t>
             </a:r>
             <a:r>
-              <a:rPr lang="ja-JP" altLang="en-US" sz="2800" dirty="0" smtClean="0"/>
+              <a:rPr lang="ja-JP" altLang="en-US" sz="2800" dirty="0"/>
               <a:t>という。それ以外の</a:t>
             </a:r>
             <a:r>
-              <a:rPr lang="en-US" altLang="ja-JP" sz="2800" dirty="0" smtClean="0"/>
+              <a:rPr lang="en-US" altLang="ja-JP" sz="2800" dirty="0"/>
               <a:t>cut</a:t>
             </a:r>
             <a:r>
-              <a:rPr lang="ja-JP" altLang="en-US" sz="2800" dirty="0" smtClean="0"/>
+              <a:rPr lang="ja-JP" altLang="en-US" sz="2800" dirty="0"/>
               <a:t>は</a:t>
             </a:r>
             <a:r>
-              <a:rPr lang="en-US" altLang="ja-JP" sz="2800" dirty="0" smtClean="0"/>
+              <a:rPr lang="en-US" altLang="ja-JP" sz="2800" dirty="0"/>
               <a:t>red cut</a:t>
             </a:r>
             <a:r>
-              <a:rPr lang="ja-JP" altLang="en-US" sz="2800" dirty="0" smtClean="0"/>
+              <a:rPr lang="ja-JP" altLang="en-US" sz="2800" dirty="0"/>
               <a:t>という。</a:t>
             </a:r>
-            <a:endParaRPr lang="ja-JP" altLang="en-US" sz="2800" dirty="0"/>
           </a:p>
         </p:txBody>
       </p:sp>
@@ -10494,14 +10093,13 @@
               <a:t>n</a:t>
             </a:r>
             <a:r>
-              <a:rPr kumimoji="1" lang="en-US" altLang="ja-JP" dirty="0" smtClean="0"/>
+              <a:rPr kumimoji="1" lang="en-US" altLang="ja-JP" dirty="0"/>
               <a:t>ot</a:t>
             </a:r>
             <a:r>
-              <a:rPr kumimoji="1" lang="ja-JP" altLang="en-US" dirty="0" smtClean="0"/>
+              <a:rPr kumimoji="1" lang="ja-JP" altLang="en-US" dirty="0"/>
               <a:t>演算子</a:t>
             </a:r>
-            <a:endParaRPr kumimoji="1" lang="ja-JP" altLang="en-US" dirty="0"/>
           </a:p>
         </p:txBody>
       </p:sp>
@@ -10527,56 +10125,48 @@
           <a:lstStyle/>
           <a:p>
             <a:r>
-              <a:rPr lang="en-US" altLang="ja-JP" sz="2800" dirty="0" smtClean="0"/>
+              <a:rPr lang="en-US" altLang="ja-JP" sz="2800" dirty="0"/>
               <a:t>[Prolog</a:t>
             </a:r>
             <a:r>
-              <a:rPr lang="ja-JP" altLang="en-US" sz="2800" dirty="0" smtClean="0"/>
+              <a:rPr lang="ja-JP" altLang="en-US" sz="2800" dirty="0"/>
               <a:t>の</a:t>
             </a:r>
             <a:r>
-              <a:rPr lang="en-US" altLang="ja-JP" sz="2800" dirty="0" smtClean="0"/>
+              <a:rPr lang="en-US" altLang="ja-JP" sz="2800" dirty="0"/>
               <a:t>not</a:t>
             </a:r>
             <a:r>
-              <a:rPr lang="ja-JP" altLang="en-US" sz="2800" dirty="0" smtClean="0"/>
+              <a:rPr lang="ja-JP" altLang="en-US" sz="2800" dirty="0"/>
               <a:t>演算子</a:t>
             </a:r>
             <a:r>
-              <a:rPr lang="en-US" altLang="ja-JP" sz="2800" dirty="0" smtClean="0"/>
+              <a:rPr lang="en-US" altLang="ja-JP" sz="2800" dirty="0"/>
               <a:t>]</a:t>
             </a:r>
           </a:p>
           <a:p>
             <a:r>
               <a:rPr lang="en-US" altLang="ja-JP" sz="2800" dirty="0"/>
-              <a:t>\</a:t>
-            </a:r>
-            <a:r>
-              <a:rPr lang="en-US" altLang="ja-JP" sz="2800" dirty="0" smtClean="0"/>
-              <a:t>+(Y) :- Y, !, fail.</a:t>
-            </a:r>
-          </a:p>
-          <a:p>
-            <a:r>
-              <a:rPr lang="en-US" altLang="ja-JP" sz="2800" dirty="0"/>
-              <a:t>\</a:t>
-            </a:r>
-            <a:r>
-              <a:rPr lang="en-US" altLang="ja-JP" sz="2800" dirty="0" smtClean="0"/>
-              <a:t>+(_).</a:t>
-            </a:r>
-          </a:p>
-          <a:p>
-            <a:endParaRPr lang="en-US" altLang="ja-JP" sz="2800" dirty="0" smtClean="0"/>
-          </a:p>
-          <a:p>
-            <a:r>
-              <a:rPr lang="en-US" altLang="ja-JP" sz="2800" i="1" dirty="0" smtClean="0"/>
+              <a:t>\+(Y) :- Y, !, fail.</a:t>
+            </a:r>
+          </a:p>
+          <a:p>
+            <a:r>
+              <a:rPr lang="en-US" altLang="ja-JP" sz="2800" dirty="0"/>
+              <a:t>\+(_).</a:t>
+            </a:r>
+          </a:p>
+          <a:p>
+            <a:endParaRPr lang="en-US" altLang="ja-JP" sz="2800" dirty="0"/>
+          </a:p>
+          <a:p>
+            <a:r>
+              <a:rPr lang="en-US" altLang="ja-JP" sz="2800" i="1" dirty="0"/>
               <a:t>?- </a:t>
             </a:r>
             <a:r>
-              <a:rPr lang="en-US" altLang="ja-JP" sz="2800" dirty="0" smtClean="0">
+              <a:rPr lang="en-US" altLang="ja-JP" sz="2800" dirty="0">
                 <a:solidFill>
                   <a:srgbClr val="FF0000"/>
                 </a:solidFill>
@@ -10587,26 +10177,18 @@
           <a:p>
             <a:r>
               <a:rPr lang="en-US" altLang="ja-JP" sz="2800" i="1" dirty="0"/>
-              <a:t> </a:t>
-            </a:r>
-            <a:r>
-              <a:rPr lang="en-US" altLang="ja-JP" sz="2800" i="1" dirty="0" smtClean="0"/>
-              <a:t>   X=2</a:t>
+              <a:t>    X=2</a:t>
             </a:r>
           </a:p>
           <a:p>
             <a:r>
               <a:rPr lang="en-US" altLang="ja-JP" sz="2800" i="1" dirty="0"/>
-              <a:t> </a:t>
-            </a:r>
-            <a:r>
-              <a:rPr lang="en-US" altLang="ja-JP" sz="2800" i="1" dirty="0" smtClean="0"/>
-              <a:t>   yes</a:t>
-            </a:r>
-          </a:p>
-          <a:p>
-            <a:r>
-              <a:rPr lang="en-US" altLang="ja-JP" sz="2800" i="1" dirty="0" smtClean="0"/>
+              <a:t>    yes</a:t>
+            </a:r>
+          </a:p>
+          <a:p>
+            <a:r>
+              <a:rPr lang="en-US" altLang="ja-JP" sz="2800" i="1" dirty="0"/>
               <a:t>?- </a:t>
             </a:r>
             <a:r>
@@ -10615,25 +10197,13 @@
                   <a:srgbClr val="FF0000"/>
                 </a:solidFill>
               </a:rPr>
-              <a:t>\</a:t>
-            </a:r>
-            <a:r>
-              <a:rPr lang="en-US" altLang="ja-JP" sz="2800" dirty="0" smtClean="0">
-                <a:solidFill>
-                  <a:srgbClr val="FF0000"/>
-                </a:solidFill>
-              </a:rPr>
-              <a:t>+(X=1), X=2.</a:t>
+              <a:t>\+(X=1), X=2.</a:t>
             </a:r>
           </a:p>
           <a:p>
             <a:r>
               <a:rPr lang="en-US" altLang="ja-JP" sz="2800" i="1" dirty="0"/>
-              <a:t> </a:t>
-            </a:r>
-            <a:r>
-              <a:rPr lang="en-US" altLang="ja-JP" sz="2800" i="1" dirty="0" smtClean="0"/>
-              <a:t>   no</a:t>
+              <a:t>    no</a:t>
             </a:r>
             <a:endParaRPr lang="ja-JP" altLang="en-US" sz="2800" i="1" dirty="0"/>
           </a:p>
@@ -10662,7 +10232,7 @@
           <a:lstStyle/>
           <a:p>
             <a:r>
-              <a:rPr lang="en-US" altLang="ja-JP" sz="2800" dirty="0" smtClean="0"/>
+              <a:rPr lang="en-US" altLang="ja-JP" sz="2800" dirty="0"/>
               <a:t>X=2, \+(X=1)</a:t>
             </a:r>
             <a:endParaRPr kumimoji="1" lang="ja-JP" altLang="en-US" sz="2800" dirty="0"/>
@@ -10693,11 +10263,7 @@
           <a:p>
             <a:r>
               <a:rPr lang="en-US" altLang="ja-JP" sz="2800" dirty="0"/>
-              <a:t> </a:t>
-            </a:r>
-            <a:r>
-              <a:rPr lang="en-US" altLang="ja-JP" sz="2800" dirty="0" smtClean="0"/>
-              <a:t>\+(2=1)</a:t>
+              <a:t> \+(2=1)</a:t>
             </a:r>
             <a:endParaRPr kumimoji="1" lang="ja-JP" altLang="en-US" sz="2800" dirty="0"/>
           </a:p>
@@ -10769,15 +10335,7 @@
                   <a:srgbClr val="FF0000"/>
                 </a:solidFill>
               </a:rPr>
-              <a:t> </a:t>
-            </a:r>
-            <a:r>
-              <a:rPr lang="en-US" altLang="ja-JP" sz="2400" dirty="0" smtClean="0">
-                <a:solidFill>
-                  <a:srgbClr val="FF0000"/>
-                </a:solidFill>
-              </a:rPr>
-              <a:t>{X -&gt; 2}</a:t>
+              <a:t> {X -&gt; 2}</a:t>
             </a:r>
             <a:endParaRPr kumimoji="1" lang="ja-JP" altLang="en-US" sz="2400" dirty="0">
               <a:solidFill>
@@ -10846,7 +10404,7 @@
           <a:lstStyle/>
           <a:p>
             <a:r>
-              <a:rPr lang="en-US" altLang="ja-JP" sz="2800" dirty="0" smtClean="0"/>
+              <a:rPr lang="en-US" altLang="ja-JP" sz="2800" dirty="0"/>
               <a:t>2=1, !, fail</a:t>
             </a:r>
             <a:endParaRPr kumimoji="1" lang="ja-JP" altLang="en-US" sz="2800" dirty="0"/>
@@ -10876,23 +10434,23 @@
           <a:lstStyle/>
           <a:p>
             <a:r>
-              <a:rPr kumimoji="1" lang="en-US" altLang="ja-JP" sz="2400" dirty="0" smtClean="0"/>
+              <a:rPr kumimoji="1" lang="en-US" altLang="ja-JP" sz="2400" dirty="0"/>
               <a:t>2=1</a:t>
             </a:r>
             <a:r>
-              <a:rPr lang="en-US" altLang="en-US" sz="2400" dirty="0" smtClean="0"/>
+              <a:rPr lang="en-US" altLang="en-US" sz="2400" dirty="0"/>
               <a:t>が</a:t>
             </a:r>
             <a:r>
-              <a:rPr kumimoji="1" lang="ja-JP" altLang="en-US" sz="2400" dirty="0" smtClean="0"/>
+              <a:rPr kumimoji="1" lang="ja-JP" altLang="en-US" sz="2400" dirty="0"/>
               <a:t>失敗し</a:t>
             </a:r>
             <a:r>
-              <a:rPr lang="ja-JP" altLang="en-US" sz="2400" dirty="0" smtClean="0"/>
+              <a:rPr lang="ja-JP" altLang="en-US" sz="2400" dirty="0"/>
               <a:t>、</a:t>
             </a:r>
             <a:r>
-              <a:rPr kumimoji="1" lang="en-US" altLang="ja-JP" sz="2400" dirty="0" smtClean="0"/>
+              <a:rPr kumimoji="1" lang="en-US" altLang="ja-JP" sz="2400" dirty="0"/>
               <a:t>backtrack</a:t>
             </a:r>
             <a:endParaRPr kumimoji="1" lang="ja-JP" altLang="en-US" sz="2400" dirty="0"/>
@@ -10958,30 +10516,30 @@
           <a:lstStyle/>
           <a:p>
             <a:r>
-              <a:rPr lang="ja-JP" altLang="en-US" sz="2400" dirty="0" smtClean="0"/>
+              <a:rPr lang="ja-JP" altLang="en-US" sz="2400" dirty="0"/>
               <a:t>成功し、</a:t>
             </a:r>
             <a:r>
-              <a:rPr lang="en-US" altLang="ja-JP" sz="2400" dirty="0" smtClean="0"/>
+              <a:rPr lang="en-US" altLang="ja-JP" sz="2400" dirty="0"/>
               <a:t>X=2</a:t>
             </a:r>
             <a:r>
-              <a:rPr lang="ja-JP" altLang="en-US" sz="2400" dirty="0" smtClean="0"/>
+              <a:rPr lang="ja-JP" altLang="en-US" sz="2400" dirty="0"/>
               <a:t>を出力</a:t>
             </a:r>
-            <a:endParaRPr lang="en-US" altLang="ja-JP" sz="2400" dirty="0" smtClean="0"/>
-          </a:p>
-          <a:p>
-            <a:r>
-              <a:rPr lang="ja-JP" altLang="en-US" sz="2400" dirty="0" smtClean="0"/>
+            <a:endParaRPr lang="en-US" altLang="ja-JP" sz="2400" dirty="0"/>
+          </a:p>
+          <a:p>
+            <a:r>
+              <a:rPr lang="ja-JP" altLang="en-US" sz="2400" dirty="0"/>
               <a:t>（</a:t>
             </a:r>
             <a:r>
-              <a:rPr lang="en-US" altLang="ja-JP" sz="2400" dirty="0" smtClean="0"/>
+              <a:rPr lang="en-US" altLang="ja-JP" sz="2400" dirty="0"/>
               <a:t>yes</a:t>
             </a:r>
             <a:r>
-              <a:rPr lang="ja-JP" altLang="en-US" sz="2400" dirty="0" smtClean="0"/>
+              <a:rPr lang="ja-JP" altLang="en-US" sz="2400" dirty="0"/>
               <a:t>を出力して終了）</a:t>
             </a:r>
             <a:endParaRPr lang="en-US" altLang="ja-JP" sz="2400" dirty="0"/>
@@ -11011,7 +10569,7 @@
           <a:lstStyle/>
           <a:p>
             <a:r>
-              <a:rPr lang="en-US" altLang="ja-JP" sz="2800" dirty="0" smtClean="0"/>
+              <a:rPr lang="en-US" altLang="ja-JP" sz="2800" dirty="0"/>
               <a:t>\+(X=1), X=2</a:t>
             </a:r>
             <a:endParaRPr kumimoji="1" lang="ja-JP" altLang="en-US" sz="2800" dirty="0"/>
@@ -11041,7 +10599,7 @@
           <a:lstStyle/>
           <a:p>
             <a:r>
-              <a:rPr lang="en-US" altLang="ja-JP" sz="2800" dirty="0" smtClean="0"/>
+              <a:rPr lang="en-US" altLang="ja-JP" sz="2800" dirty="0"/>
               <a:t>X=1, !, fail, X=2</a:t>
             </a:r>
             <a:endParaRPr kumimoji="1" lang="ja-JP" altLang="en-US" sz="2800" dirty="0"/>
@@ -11147,11 +10705,7 @@
           <a:p>
             <a:r>
               <a:rPr lang="en-US" altLang="ja-JP" sz="2800" dirty="0"/>
-              <a:t>!</a:t>
-            </a:r>
-            <a:r>
-              <a:rPr lang="en-US" altLang="ja-JP" sz="2800" dirty="0" smtClean="0"/>
-              <a:t>, fail, 1=2</a:t>
+              <a:t>!, fail, 1=2</a:t>
             </a:r>
             <a:endParaRPr kumimoji="1" lang="ja-JP" altLang="en-US" sz="2800" dirty="0"/>
           </a:p>
@@ -11185,15 +10739,7 @@
                   <a:srgbClr val="FF0000"/>
                 </a:solidFill>
               </a:rPr>
-              <a:t> </a:t>
-            </a:r>
-            <a:r>
-              <a:rPr lang="en-US" altLang="ja-JP" sz="2400" dirty="0" smtClean="0">
-                <a:solidFill>
-                  <a:srgbClr val="FF0000"/>
-                </a:solidFill>
-              </a:rPr>
-              <a:t>{Y -&gt; X=1}</a:t>
+              <a:t> {Y -&gt; X=1}</a:t>
             </a:r>
             <a:endParaRPr kumimoji="1" lang="ja-JP" altLang="en-US" sz="2400" dirty="0">
               <a:solidFill>
@@ -11231,15 +10777,7 @@
                   <a:srgbClr val="FF0000"/>
                 </a:solidFill>
               </a:rPr>
-              <a:t> </a:t>
-            </a:r>
-            <a:r>
-              <a:rPr lang="en-US" altLang="ja-JP" sz="2400" dirty="0" smtClean="0">
-                <a:solidFill>
-                  <a:srgbClr val="FF0000"/>
-                </a:solidFill>
-              </a:rPr>
-              <a:t>{X -&gt; 1}</a:t>
+              <a:t> {X -&gt; 1}</a:t>
             </a:r>
             <a:endParaRPr kumimoji="1" lang="ja-JP" altLang="en-US" sz="2400" dirty="0">
               <a:solidFill>
@@ -11308,7 +10846,7 @@
           <a:lstStyle/>
           <a:p>
             <a:r>
-              <a:rPr lang="en-US" altLang="ja-JP" sz="2800" dirty="0" smtClean="0"/>
+              <a:rPr lang="en-US" altLang="ja-JP" sz="2800" dirty="0"/>
               <a:t>fail, 1=2</a:t>
             </a:r>
             <a:endParaRPr kumimoji="1" lang="ja-JP" altLang="en-US" sz="2800" dirty="0"/>
@@ -11338,19 +10876,19 @@
           <a:lstStyle/>
           <a:p>
             <a:r>
-              <a:rPr kumimoji="1" lang="en-US" altLang="ja-JP" sz="2400" dirty="0" smtClean="0"/>
+              <a:rPr kumimoji="1" lang="en-US" altLang="ja-JP" sz="2400" dirty="0"/>
               <a:t> fail</a:t>
             </a:r>
             <a:r>
-              <a:rPr kumimoji="1" lang="ja-JP" altLang="en-US" sz="2400" dirty="0" smtClean="0"/>
+              <a:rPr kumimoji="1" lang="ja-JP" altLang="en-US" sz="2400" dirty="0"/>
               <a:t>が失敗し</a:t>
             </a:r>
             <a:r>
-              <a:rPr lang="ja-JP" altLang="en-US" sz="2400" dirty="0" smtClean="0"/>
+              <a:rPr lang="ja-JP" altLang="en-US" sz="2400" dirty="0"/>
               <a:t>、</a:t>
             </a:r>
             <a:r>
-              <a:rPr kumimoji="1" lang="en-US" altLang="ja-JP" sz="2400" dirty="0" smtClean="0"/>
+              <a:rPr kumimoji="1" lang="en-US" altLang="ja-JP" sz="2400" dirty="0"/>
               <a:t>backtrack</a:t>
             </a:r>
             <a:endParaRPr kumimoji="1" lang="ja-JP" altLang="en-US" sz="2400" dirty="0"/>
@@ -11423,14 +10961,13 @@
           <a:lstStyle/>
           <a:p>
             <a:r>
-              <a:rPr kumimoji="1" lang="en-US" altLang="ja-JP" sz="2400" dirty="0" smtClean="0"/>
+              <a:rPr kumimoji="1" lang="en-US" altLang="ja-JP" sz="2400" dirty="0"/>
               <a:t> </a:t>
             </a:r>
             <a:r>
-              <a:rPr kumimoji="1" lang="ja-JP" altLang="en-US" sz="2400" dirty="0" smtClean="0"/>
+              <a:rPr kumimoji="1" lang="ja-JP" altLang="en-US" sz="2400" dirty="0"/>
               <a:t>ここは探索しない</a:t>
             </a:r>
-            <a:endParaRPr kumimoji="1" lang="ja-JP" altLang="en-US" sz="2400" dirty="0"/>
           </a:p>
         </p:txBody>
       </p:sp>
@@ -11457,15 +10994,15 @@
           <a:lstStyle/>
           <a:p>
             <a:r>
-              <a:rPr lang="ja-JP" altLang="en-US" sz="2400" dirty="0" smtClean="0"/>
+              <a:rPr lang="ja-JP" altLang="en-US" sz="2400" dirty="0"/>
               <a:t>（</a:t>
             </a:r>
             <a:r>
-              <a:rPr lang="en-US" altLang="ja-JP" sz="2400" dirty="0" smtClean="0"/>
+              <a:rPr lang="en-US" altLang="ja-JP" sz="2400" dirty="0"/>
               <a:t>no</a:t>
             </a:r>
             <a:r>
-              <a:rPr lang="ja-JP" altLang="en-US" sz="2400" dirty="0" smtClean="0"/>
+              <a:rPr lang="ja-JP" altLang="en-US" sz="2400" dirty="0"/>
               <a:t>を出力して終了）</a:t>
             </a:r>
             <a:endParaRPr lang="en-US" altLang="ja-JP" sz="2400" dirty="0"/>
@@ -11500,15 +11037,7 @@
                   <a:srgbClr val="FF0000"/>
                 </a:solidFill>
               </a:rPr>
-              <a:t> </a:t>
-            </a:r>
-            <a:r>
-              <a:rPr lang="en-US" altLang="ja-JP" sz="2400" dirty="0" smtClean="0">
-                <a:solidFill>
-                  <a:srgbClr val="FF0000"/>
-                </a:solidFill>
-              </a:rPr>
-              <a:t>{Y -&gt; 2=1}</a:t>
+              <a:t> {Y -&gt; 2=1}</a:t>
             </a:r>
             <a:endParaRPr kumimoji="1" lang="ja-JP" altLang="en-US" sz="2400" dirty="0">
               <a:solidFill>
@@ -11566,7 +11095,7 @@
           <a:lstStyle/>
           <a:p>
             <a:r>
-              <a:rPr kumimoji="1" lang="en-US" altLang="ja-JP" dirty="0" smtClean="0"/>
+              <a:rPr kumimoji="1" lang="en-US" altLang="ja-JP" dirty="0"/>
               <a:t>Algorithm = logic + control</a:t>
             </a:r>
             <a:endParaRPr kumimoji="1" lang="ja-JP" altLang="en-US" dirty="0"/>
@@ -11596,25 +11125,25 @@
           <a:lstStyle/>
           <a:p>
             <a:r>
-              <a:rPr kumimoji="1" lang="en-US" altLang="ja-JP" sz="2800" dirty="0" smtClean="0"/>
+              <a:rPr kumimoji="1" lang="en-US" altLang="ja-JP" sz="2800" dirty="0"/>
               <a:t>Logic --- </a:t>
             </a:r>
             <a:r>
-              <a:rPr kumimoji="1" lang="ja-JP" altLang="en-US" sz="2800" dirty="0" smtClean="0"/>
+              <a:rPr kumimoji="1" lang="ja-JP" altLang="en-US" sz="2800" dirty="0"/>
               <a:t>アルゴリズムが何をするかを示す事実と規則（プログラマーが記述する）</a:t>
             </a:r>
-            <a:endParaRPr kumimoji="1" lang="en-US" altLang="ja-JP" sz="2800" dirty="0" smtClean="0"/>
-          </a:p>
-          <a:p>
-            <a:r>
-              <a:rPr lang="en-US" altLang="ja-JP" sz="2800" dirty="0" smtClean="0"/>
+            <a:endParaRPr kumimoji="1" lang="en-US" altLang="ja-JP" sz="2800" dirty="0"/>
+          </a:p>
+          <a:p>
+            <a:r>
+              <a:rPr lang="en-US" altLang="ja-JP" sz="2800" dirty="0"/>
               <a:t>Control --- </a:t>
             </a:r>
             <a:r>
-              <a:rPr lang="ja-JP" altLang="en-US" sz="2800" dirty="0" smtClean="0"/>
+              <a:rPr lang="ja-JP" altLang="en-US" sz="2800" dirty="0"/>
               <a:t>アルゴリズムがどのように実装されるか（言語が提供する）</a:t>
             </a:r>
-            <a:endParaRPr lang="en-US" altLang="ja-JP" sz="2800" dirty="0" smtClean="0"/>
+            <a:endParaRPr lang="en-US" altLang="ja-JP" sz="2800" dirty="0"/>
           </a:p>
         </p:txBody>
       </p:sp>
@@ -11640,16 +11169,12 @@
           <a:lstStyle/>
           <a:p>
             <a:r>
-              <a:rPr lang="ja-JP" altLang="en-US" sz="2400" dirty="0" smtClean="0"/>
+              <a:rPr lang="ja-JP" altLang="en-US" sz="2400" dirty="0"/>
               <a:t>（参考文献）</a:t>
             </a:r>
             <a:r>
-              <a:rPr lang="en-US" altLang="ja-JP" sz="2400" dirty="0" smtClean="0"/>
-              <a:t>R</a:t>
-            </a:r>
-            <a:r>
               <a:rPr lang="en-US" altLang="ja-JP" sz="2400" dirty="0"/>
-              <a:t>. A. Kowalski, “Algorithm = Logic + Control”. </a:t>
+              <a:t>R. A. Kowalski, “Algorithm = Logic + Control”. </a:t>
             </a:r>
             <a:r>
               <a:rPr lang="en-US" altLang="ja-JP" sz="2400" i="1" dirty="0"/>
@@ -11657,13 +11182,8 @@
             </a:r>
             <a:r>
               <a:rPr lang="en-US" altLang="ja-JP" sz="2400" dirty="0"/>
-              <a:t>, 22(7), pp. 424-</a:t>
-            </a:r>
-            <a:r>
-              <a:rPr lang="en-US" altLang="ja-JP" sz="2400" dirty="0" smtClean="0"/>
-              <a:t>436, 1979</a:t>
-            </a:r>
-            <a:endParaRPr lang="en-US" altLang="ja-JP" sz="2400" dirty="0"/>
+              <a:t>, 22(7), pp. 424-436, 1979</a:t>
+            </a:r>
           </a:p>
         </p:txBody>
       </p:sp>
@@ -11690,110 +11210,106 @@
           <a:lstStyle/>
           <a:p>
             <a:r>
-              <a:rPr kumimoji="1" lang="en-US" altLang="ja-JP" sz="2800" dirty="0" smtClean="0"/>
+              <a:rPr kumimoji="1" lang="en-US" altLang="ja-JP" sz="2800" dirty="0"/>
               <a:t>Prolog</a:t>
             </a:r>
             <a:r>
-              <a:rPr kumimoji="1" lang="ja-JP" altLang="en-US" sz="2800" dirty="0" smtClean="0"/>
+              <a:rPr kumimoji="1" lang="ja-JP" altLang="en-US" sz="2800" dirty="0"/>
               <a:t>にはさまざまな方言</a:t>
             </a:r>
             <a:r>
-              <a:rPr kumimoji="1" lang="en-US" altLang="ja-JP" sz="2800" dirty="0" smtClean="0"/>
+              <a:rPr kumimoji="1" lang="en-US" altLang="ja-JP" sz="2800" dirty="0"/>
               <a:t>(dialect)</a:t>
             </a:r>
             <a:r>
-              <a:rPr kumimoji="1" lang="ja-JP" altLang="en-US" sz="2800" dirty="0" smtClean="0"/>
+              <a:rPr kumimoji="1" lang="ja-JP" altLang="en-US" sz="2800" dirty="0"/>
               <a:t>が存在する。</a:t>
             </a:r>
-            <a:endParaRPr kumimoji="1" lang="en-US" altLang="ja-JP" sz="2800" dirty="0" smtClean="0"/>
-          </a:p>
-          <a:p>
-            <a:r>
-              <a:rPr lang="ja-JP" altLang="en-US" sz="2800" dirty="0" smtClean="0"/>
+            <a:endParaRPr kumimoji="1" lang="en-US" altLang="ja-JP" sz="2800" dirty="0"/>
+          </a:p>
+          <a:p>
+            <a:r>
+              <a:rPr lang="ja-JP" altLang="en-US" sz="2800" dirty="0"/>
               <a:t>代表的なものは</a:t>
             </a:r>
             <a:r>
-              <a:rPr lang="en-US" altLang="ja-JP" sz="2800" dirty="0" smtClean="0"/>
+              <a:rPr lang="en-US" altLang="ja-JP" sz="2800" dirty="0"/>
               <a:t>Edinburgh Prolog</a:t>
             </a:r>
             <a:r>
-              <a:rPr lang="ja-JP" altLang="en-US" sz="2800" dirty="0" smtClean="0"/>
+              <a:rPr lang="ja-JP" altLang="en-US" sz="2800" dirty="0"/>
               <a:t>。</a:t>
             </a:r>
             <a:r>
-              <a:rPr lang="en-US" altLang="ja-JP" sz="2800" dirty="0" smtClean="0"/>
+              <a:rPr lang="en-US" altLang="ja-JP" sz="2800" dirty="0"/>
               <a:t>Edinburgh Prolog</a:t>
             </a:r>
             <a:r>
-              <a:rPr lang="ja-JP" altLang="en-US" sz="2800" dirty="0" smtClean="0"/>
+              <a:rPr lang="ja-JP" altLang="en-US" sz="2800" dirty="0"/>
               <a:t>が</a:t>
             </a:r>
             <a:r>
-              <a:rPr lang="en-US" altLang="ja-JP" sz="2800" dirty="0" smtClean="0"/>
+              <a:rPr lang="en-US" altLang="ja-JP" sz="2800" dirty="0"/>
               <a:t>Prolog</a:t>
             </a:r>
             <a:r>
-              <a:rPr lang="ja-JP" altLang="en-US" sz="2800" dirty="0" smtClean="0"/>
+              <a:rPr lang="ja-JP" altLang="en-US" sz="2800" dirty="0"/>
               <a:t>の</a:t>
             </a:r>
             <a:r>
-              <a:rPr lang="en-US" altLang="ja-JP" sz="2800" dirty="0" smtClean="0"/>
+              <a:rPr lang="en-US" altLang="ja-JP" sz="2800" dirty="0"/>
               <a:t>ISO</a:t>
             </a:r>
             <a:r>
-              <a:rPr lang="ja-JP" altLang="en-US" sz="2800" dirty="0" smtClean="0"/>
+              <a:rPr lang="ja-JP" altLang="en-US" sz="2800" dirty="0"/>
               <a:t>規格に影響を与えている。</a:t>
             </a:r>
-            <a:endParaRPr kumimoji="1" lang="en-US" altLang="ja-JP" sz="2800" dirty="0" smtClean="0"/>
-          </a:p>
-          <a:p>
-            <a:r>
-              <a:rPr kumimoji="1" lang="ja-JP" altLang="en-US" sz="2800" dirty="0" smtClean="0"/>
+            <a:endParaRPr kumimoji="1" lang="en-US" altLang="ja-JP" sz="2800" dirty="0"/>
+          </a:p>
+          <a:p>
+            <a:r>
+              <a:rPr kumimoji="1" lang="ja-JP" altLang="en-US" sz="2800" dirty="0"/>
               <a:t>各方言</a:t>
             </a:r>
             <a:r>
-              <a:rPr kumimoji="1" lang="en-US" altLang="ja-JP" sz="2800" i="1" dirty="0" smtClean="0"/>
+              <a:rPr kumimoji="1" lang="en-US" altLang="ja-JP" sz="2800" i="1" dirty="0"/>
               <a:t>D</a:t>
             </a:r>
             <a:r>
-              <a:rPr kumimoji="1" lang="ja-JP" altLang="en-US" sz="2800" dirty="0" smtClean="0"/>
+              <a:rPr kumimoji="1" lang="ja-JP" altLang="en-US" sz="2800" dirty="0"/>
               <a:t>の間の構文以外の違いは次の式で表される</a:t>
             </a:r>
             <a:r>
-              <a:rPr kumimoji="1" lang="en-US" altLang="ja-JP" sz="2800" dirty="0" smtClean="0"/>
+              <a:rPr kumimoji="1" lang="en-US" altLang="ja-JP" sz="2800" dirty="0"/>
               <a:t>: </a:t>
             </a:r>
           </a:p>
           <a:p>
             <a:r>
               <a:rPr lang="en-US" altLang="ja-JP" sz="2800" dirty="0"/>
-              <a:t> </a:t>
-            </a:r>
-            <a:r>
-              <a:rPr lang="en-US" altLang="ja-JP" sz="2800" dirty="0" smtClean="0"/>
-              <a:t>     </a:t>
-            </a:r>
-            <a:r>
-              <a:rPr lang="en-US" altLang="ja-JP" sz="2800" dirty="0" err="1" smtClean="0"/>
+              <a:t>      </a:t>
+            </a:r>
+            <a:r>
+              <a:rPr lang="en-US" altLang="ja-JP" sz="2800" dirty="0" err="1"/>
               <a:t>algorithm</a:t>
             </a:r>
             <a:r>
-              <a:rPr lang="en-US" altLang="ja-JP" sz="2800" i="1" baseline="-25000" dirty="0" err="1" smtClean="0"/>
+              <a:rPr lang="en-US" altLang="ja-JP" sz="2800" i="1" baseline="-25000" dirty="0" err="1"/>
               <a:t>D</a:t>
             </a:r>
             <a:r>
-              <a:rPr lang="en-US" altLang="ja-JP" sz="2800" dirty="0" smtClean="0"/>
+              <a:rPr lang="en-US" altLang="ja-JP" sz="2800" dirty="0"/>
               <a:t> = logic  + </a:t>
             </a:r>
             <a:r>
-              <a:rPr lang="en-US" altLang="ja-JP" sz="2800" dirty="0" err="1" smtClean="0"/>
+              <a:rPr lang="en-US" altLang="ja-JP" sz="2800" dirty="0" err="1"/>
               <a:t>control</a:t>
             </a:r>
             <a:r>
-              <a:rPr lang="en-US" altLang="ja-JP" sz="2800" i="1" baseline="-25000" dirty="0" err="1" smtClean="0"/>
+              <a:rPr lang="en-US" altLang="ja-JP" sz="2800" i="1" baseline="-25000" dirty="0" err="1"/>
               <a:t>D</a:t>
             </a:r>
-            <a:endParaRPr lang="en-US" altLang="ja-JP" sz="2800" i="1" baseline="-25000" dirty="0" smtClean="0"/>
+            <a:endParaRPr lang="en-US" altLang="ja-JP" sz="2800" i="1" baseline="-25000" dirty="0"/>
           </a:p>
         </p:txBody>
       </p:sp>
@@ -11807,13 +11323,6 @@
   <p:clrMapOvr>
     <a:masterClrMapping/>
   </p:clrMapOvr>
-  <p:timing>
-    <p:tnLst>
-      <p:par>
-        <p:cTn xmlns:p14="http://schemas.microsoft.com/office/powerpoint/2010/main" id="1" dur="indefinite" restart="never" nodeType="tmRoot"/>
-      </p:par>
-    </p:tnLst>
-  </p:timing>
 </p:sld>
 </file>
 
@@ -11850,10 +11359,9 @@
           <a:lstStyle/>
           <a:p>
             <a:r>
-              <a:rPr kumimoji="1" lang="ja-JP" altLang="en-US" dirty="0" smtClean="0"/>
+              <a:rPr kumimoji="1" lang="ja-JP" altLang="en-US" dirty="0"/>
               <a:t>論理型プログラミングの概念</a:t>
             </a:r>
-            <a:endParaRPr kumimoji="1" lang="ja-JP" altLang="en-US" dirty="0"/>
           </a:p>
         </p:txBody>
       </p:sp>
@@ -11873,53 +11381,53 @@
           <a:lstStyle/>
           <a:p>
             <a:r>
-              <a:rPr lang="ja-JP" altLang="en-US" dirty="0" smtClean="0"/>
+              <a:rPr lang="ja-JP" altLang="en-US" dirty="0"/>
               <a:t>関数（</a:t>
             </a:r>
             <a:r>
-              <a:rPr lang="en-US" altLang="ja-JP" dirty="0" smtClean="0"/>
+              <a:rPr lang="en-US" altLang="ja-JP" dirty="0"/>
               <a:t>function</a:t>
             </a:r>
             <a:r>
-              <a:rPr lang="ja-JP" altLang="en-US" dirty="0" smtClean="0"/>
+              <a:rPr lang="ja-JP" altLang="en-US" dirty="0"/>
               <a:t>）ではなく関係（</a:t>
             </a:r>
             <a:r>
-              <a:rPr lang="en-US" altLang="ja-JP" dirty="0" smtClean="0"/>
+              <a:rPr lang="en-US" altLang="ja-JP" dirty="0"/>
               <a:t>relation</a:t>
             </a:r>
             <a:r>
-              <a:rPr lang="ja-JP" altLang="en-US" dirty="0" smtClean="0"/>
+              <a:rPr lang="ja-JP" altLang="en-US" dirty="0"/>
               <a:t>）を用いる</a:t>
             </a:r>
-            <a:endParaRPr lang="en-US" altLang="ja-JP" dirty="0" smtClean="0"/>
-          </a:p>
-          <a:p>
-            <a:r>
-              <a:rPr lang="en-US" altLang="ja-JP" i="1" dirty="0" smtClean="0"/>
+            <a:endParaRPr lang="en-US" altLang="ja-JP" dirty="0"/>
+          </a:p>
+          <a:p>
+            <a:r>
+              <a:rPr lang="en-US" altLang="ja-JP" i="1" dirty="0"/>
               <a:t>n</a:t>
             </a:r>
             <a:r>
-              <a:rPr kumimoji="1" lang="ja-JP" altLang="en-US" dirty="0" smtClean="0"/>
+              <a:rPr kumimoji="1" lang="ja-JP" altLang="en-US" dirty="0"/>
               <a:t>項関係は関係は</a:t>
             </a:r>
             <a:r>
-              <a:rPr kumimoji="1" lang="en-US" altLang="ja-JP" i="1" dirty="0" smtClean="0"/>
+              <a:rPr kumimoji="1" lang="en-US" altLang="ja-JP" i="1" dirty="0"/>
               <a:t>m</a:t>
             </a:r>
             <a:r>
-              <a:rPr kumimoji="1" lang="ja-JP" altLang="en-US" dirty="0" smtClean="0"/>
+              <a:rPr kumimoji="1" lang="ja-JP" altLang="en-US" dirty="0"/>
               <a:t>行</a:t>
             </a:r>
             <a:r>
-              <a:rPr kumimoji="1" lang="en-US" altLang="ja-JP" i="1" dirty="0" smtClean="0"/>
+              <a:rPr kumimoji="1" lang="en-US" altLang="ja-JP" i="1" dirty="0"/>
               <a:t>n</a:t>
             </a:r>
             <a:r>
-              <a:rPr kumimoji="1" lang="ja-JP" altLang="en-US" dirty="0" smtClean="0"/>
+              <a:rPr kumimoji="1" lang="ja-JP" altLang="en-US" dirty="0"/>
               <a:t>列（行は無限にあるかもしれない）のテーブルで表される</a:t>
             </a:r>
-            <a:endParaRPr kumimoji="1" lang="en-US" altLang="ja-JP" dirty="0" smtClean="0"/>
+            <a:endParaRPr kumimoji="1" lang="en-US" altLang="ja-JP" dirty="0"/>
           </a:p>
           <a:p>
             <a:pPr lvl="1"/>
@@ -11928,46 +11436,6 @@
               <a:t>(</a:t>
             </a:r>
             <a:r>
-              <a:rPr lang="en-US" altLang="ja-JP" i="1" dirty="0" smtClean="0"/>
-              <a:t>a</a:t>
-            </a:r>
-            <a:r>
-              <a:rPr lang="en-US" altLang="ja-JP" baseline="-25000" dirty="0" smtClean="0"/>
-              <a:t>1</a:t>
-            </a:r>
-            <a:r>
-              <a:rPr lang="en-US" altLang="ja-JP" dirty="0" smtClean="0"/>
-              <a:t>, </a:t>
-            </a:r>
-            <a:r>
-              <a:rPr lang="en-US" altLang="ja-JP" i="1" dirty="0" smtClean="0"/>
-              <a:t>a</a:t>
-            </a:r>
-            <a:r>
-              <a:rPr lang="en-US" altLang="ja-JP" baseline="-25000" dirty="0" smtClean="0"/>
-              <a:t>2</a:t>
-            </a:r>
-            <a:r>
-              <a:rPr lang="en-US" altLang="ja-JP" dirty="0" smtClean="0"/>
-              <a:t>, …, </a:t>
-            </a:r>
-            <a:r>
-              <a:rPr lang="en-US" altLang="ja-JP" i="1" dirty="0" smtClean="0"/>
-              <a:t>a</a:t>
-            </a:r>
-            <a:r>
-              <a:rPr lang="en-US" altLang="ja-JP" i="1" baseline="-25000" dirty="0" smtClean="0"/>
-              <a:t>n</a:t>
-            </a:r>
-            <a:r>
-              <a:rPr lang="en-US" altLang="ja-JP" dirty="0" smtClean="0"/>
-              <a:t>)</a:t>
-            </a:r>
-            <a:r>
-              <a:rPr lang="ja-JP" altLang="en-US" dirty="0" smtClean="0"/>
-              <a:t>がテーブル内のどこかの行の場合、</a:t>
-            </a:r>
-            <a:r>
               <a:rPr lang="en-US" altLang="ja-JP" i="1" dirty="0"/>
               <a:t>a</a:t>
             </a:r>
@@ -11992,15 +11460,55 @@
               <a:t>, …, </a:t>
             </a:r>
             <a:r>
-              <a:rPr lang="en-US" altLang="ja-JP" i="1" dirty="0" smtClean="0"/>
+              <a:rPr lang="en-US" altLang="ja-JP" i="1" dirty="0"/>
               <a:t>a</a:t>
             </a:r>
             <a:r>
-              <a:rPr lang="en-US" altLang="ja-JP" i="1" baseline="-25000" dirty="0" smtClean="0"/>
+              <a:rPr lang="en-US" altLang="ja-JP" i="1" baseline="-25000" dirty="0"/>
               <a:t>n</a:t>
             </a:r>
             <a:r>
-              <a:rPr lang="ja-JP" altLang="en-US" dirty="0" smtClean="0"/>
+              <a:rPr lang="en-US" altLang="ja-JP" dirty="0"/>
+              <a:t>)</a:t>
+            </a:r>
+            <a:r>
+              <a:rPr lang="ja-JP" altLang="en-US" dirty="0"/>
+              <a:t>がテーブル内のどこかの行の場合、</a:t>
+            </a:r>
+            <a:r>
+              <a:rPr lang="en-US" altLang="ja-JP" i="1" dirty="0"/>
+              <a:t>a</a:t>
+            </a:r>
+            <a:r>
+              <a:rPr lang="en-US" altLang="ja-JP" baseline="-25000" dirty="0"/>
+              <a:t>1</a:t>
+            </a:r>
+            <a:r>
+              <a:rPr lang="en-US" altLang="ja-JP" dirty="0"/>
+              <a:t>, </a:t>
+            </a:r>
+            <a:r>
+              <a:rPr lang="en-US" altLang="ja-JP" i="1" dirty="0"/>
+              <a:t>a</a:t>
+            </a:r>
+            <a:r>
+              <a:rPr lang="en-US" altLang="ja-JP" baseline="-25000" dirty="0"/>
+              <a:t>2</a:t>
+            </a:r>
+            <a:r>
+              <a:rPr lang="en-US" altLang="ja-JP" dirty="0"/>
+              <a:t>, …, </a:t>
+            </a:r>
+            <a:r>
+              <a:rPr lang="en-US" altLang="ja-JP" i="1" dirty="0"/>
+              <a:t>a</a:t>
+            </a:r>
+            <a:r>
+              <a:rPr lang="en-US" altLang="ja-JP" i="1" baseline="-25000" dirty="0"/>
+              <a:t>n</a:t>
+            </a:r>
+            <a:r>
+              <a:rPr lang="ja-JP" altLang="en-US" dirty="0"/>
               <a:t>はそのテーブルが表している関係にある。</a:t>
             </a:r>
             <a:endParaRPr kumimoji="1" lang="ja-JP" altLang="en-US" dirty="0"/>
@@ -12017,13 +11525,6 @@
   <p:clrMapOvr>
     <a:masterClrMapping/>
   </p:clrMapOvr>
-  <p:timing>
-    <p:tnLst>
-      <p:par>
-        <p:cTn xmlns:p14="http://schemas.microsoft.com/office/powerpoint/2010/main" id="1" dur="indefinite" restart="never" nodeType="tmRoot"/>
-      </p:par>
-    </p:tnLst>
-  </p:timing>
 </p:sld>
 </file>
 
@@ -12060,15 +11561,15 @@
           <a:lstStyle/>
           <a:p>
             <a:r>
-              <a:rPr kumimoji="1" lang="ja-JP" altLang="en-US" dirty="0" smtClean="0"/>
+              <a:rPr kumimoji="1" lang="ja-JP" altLang="en-US" dirty="0"/>
               <a:t>例</a:t>
             </a:r>
             <a:r>
-              <a:rPr kumimoji="1" lang="en-US" altLang="ja-JP" dirty="0" smtClean="0"/>
+              <a:rPr kumimoji="1" lang="en-US" altLang="ja-JP" dirty="0"/>
               <a:t>: </a:t>
             </a:r>
             <a:r>
-              <a:rPr lang="en-US" altLang="ja-JP" dirty="0" smtClean="0"/>
+              <a:rPr lang="en-US" altLang="ja-JP" dirty="0"/>
               <a:t>append</a:t>
             </a:r>
             <a:endParaRPr kumimoji="1" lang="ja-JP" altLang="en-US" dirty="0"/>
@@ -12100,9 +11601,27 @@
                 <a:tableStyleId>{5C22544A-7EE6-4342-B048-85BDC9FD1C3A}</a:tableStyleId>
               </a:tblPr>
               <a:tblGrid>
-                <a:gridCol w="2032000"/>
-                <a:gridCol w="2032000"/>
-                <a:gridCol w="2032000"/>
+                <a:gridCol w="2032000">
+                  <a:extLst>
+                    <a:ext uri="{9D8B030D-6E8A-4147-A177-3AD203B41FA5}">
+                      <a16:colId xmlns:a16="http://schemas.microsoft.com/office/drawing/2014/main" val="20000"/>
+                    </a:ext>
+                  </a:extLst>
+                </a:gridCol>
+                <a:gridCol w="2032000">
+                  <a:extLst>
+                    <a:ext uri="{9D8B030D-6E8A-4147-A177-3AD203B41FA5}">
+                      <a16:colId xmlns:a16="http://schemas.microsoft.com/office/drawing/2014/main" val="20001"/>
+                    </a:ext>
+                  </a:extLst>
+                </a:gridCol>
+                <a:gridCol w="2032000">
+                  <a:extLst>
+                    <a:ext uri="{9D8B030D-6E8A-4147-A177-3AD203B41FA5}">
+                      <a16:colId xmlns:a16="http://schemas.microsoft.com/office/drawing/2014/main" val="20002"/>
+                    </a:ext>
+                  </a:extLst>
+                </a:gridCol>
               </a:tblGrid>
               <a:tr h="370840">
                 <a:tc>
@@ -12112,7 +11631,7 @@
                     <a:p>
                       <a:pPr algn="ctr"/>
                       <a:r>
-                        <a:rPr kumimoji="1" lang="en-US" altLang="ja-JP" sz="2800" b="0" dirty="0" smtClean="0">
+                        <a:rPr kumimoji="1" lang="en-US" altLang="ja-JP" sz="2800" b="0" dirty="0">
                           <a:solidFill>
                             <a:schemeClr val="tx1"/>
                           </a:solidFill>
@@ -12181,7 +11700,7 @@
                     <a:p>
                       <a:pPr algn="ctr"/>
                       <a:r>
-                        <a:rPr kumimoji="1" lang="en-US" altLang="ja-JP" sz="2800" b="0" dirty="0" smtClean="0">
+                        <a:rPr kumimoji="1" lang="en-US" altLang="ja-JP" sz="2800" b="0" dirty="0">
                           <a:solidFill>
                             <a:schemeClr val="tx1"/>
                           </a:solidFill>
@@ -12250,7 +11769,7 @@
                     <a:p>
                       <a:pPr algn="ctr"/>
                       <a:r>
-                        <a:rPr kumimoji="1" lang="en-US" altLang="ja-JP" sz="2800" b="0" dirty="0" smtClean="0">
+                        <a:rPr kumimoji="1" lang="en-US" altLang="ja-JP" sz="2800" b="0" dirty="0">
                           <a:solidFill>
                             <a:schemeClr val="tx1"/>
                           </a:solidFill>
@@ -12312,6 +11831,11 @@
                     </a:solidFill>
                   </a:tcPr>
                 </a:tc>
+                <a:extLst>
+                  <a:ext uri="{0D108BD9-81ED-4DB2-BD59-A6C34878D82A}">
+                    <a16:rowId xmlns:a16="http://schemas.microsoft.com/office/drawing/2014/main" val="10000"/>
+                  </a:ext>
+                </a:extLst>
               </a:tr>
               <a:tr h="370840">
                 <a:tc>
@@ -12321,7 +11845,7 @@
                     <a:p>
                       <a:pPr algn="ctr"/>
                       <a:r>
-                        <a:rPr kumimoji="1" lang="en-US" altLang="ja-JP" sz="2800" dirty="0" smtClean="0">
+                        <a:rPr kumimoji="1" lang="en-US" altLang="ja-JP" sz="2800" dirty="0">
                           <a:solidFill>
                             <a:schemeClr val="tx1"/>
                           </a:solidFill>
@@ -12332,7 +11856,7 @@
                         <a:t>[</a:t>
                       </a:r>
                       <a:r>
-                        <a:rPr kumimoji="1" lang="en-US" altLang="ja-JP" sz="2800" baseline="0" dirty="0" smtClean="0">
+                        <a:rPr kumimoji="1" lang="en-US" altLang="ja-JP" sz="2800" baseline="0" dirty="0">
                           <a:solidFill>
                             <a:schemeClr val="tx1"/>
                           </a:solidFill>
@@ -12401,7 +11925,7 @@
                     <a:p>
                       <a:pPr algn="ctr"/>
                       <a:r>
-                        <a:rPr kumimoji="1" lang="en-US" altLang="ja-JP" sz="2800" dirty="0" smtClean="0">
+                        <a:rPr kumimoji="1" lang="en-US" altLang="ja-JP" sz="2800" dirty="0">
                           <a:solidFill>
                             <a:schemeClr val="tx1"/>
                           </a:solidFill>
@@ -12470,7 +11994,7 @@
                     <a:p>
                       <a:pPr algn="ctr"/>
                       <a:r>
-                        <a:rPr kumimoji="1" lang="en-US" altLang="ja-JP" sz="2800" dirty="0" smtClean="0">
+                        <a:rPr kumimoji="1" lang="en-US" altLang="ja-JP" sz="2800" dirty="0">
                           <a:solidFill>
                             <a:schemeClr val="tx1"/>
                           </a:solidFill>
@@ -12532,6 +12056,11 @@
                     </a:solidFill>
                   </a:tcPr>
                 </a:tc>
+                <a:extLst>
+                  <a:ext uri="{0D108BD9-81ED-4DB2-BD59-A6C34878D82A}">
+                    <a16:rowId xmlns:a16="http://schemas.microsoft.com/office/drawing/2014/main" val="10001"/>
+                  </a:ext>
+                </a:extLst>
               </a:tr>
               <a:tr h="370840">
                 <a:tc>
@@ -12541,7 +12070,7 @@
                     <a:p>
                       <a:pPr algn="ctr"/>
                       <a:r>
-                        <a:rPr kumimoji="1" lang="en-US" altLang="ja-JP" sz="2800" dirty="0" smtClean="0">
+                        <a:rPr kumimoji="1" lang="en-US" altLang="ja-JP" sz="2800" dirty="0">
                           <a:solidFill>
                             <a:schemeClr val="tx1"/>
                           </a:solidFill>
@@ -12610,7 +12139,7 @@
                     <a:p>
                       <a:pPr algn="ctr"/>
                       <a:r>
-                        <a:rPr kumimoji="1" lang="en-US" altLang="ja-JP" sz="2800" dirty="0" smtClean="0">
+                        <a:rPr kumimoji="1" lang="en-US" altLang="ja-JP" sz="2800" dirty="0">
                           <a:solidFill>
                             <a:schemeClr val="tx1"/>
                           </a:solidFill>
@@ -12679,7 +12208,7 @@
                     <a:p>
                       <a:pPr algn="ctr"/>
                       <a:r>
-                        <a:rPr kumimoji="1" lang="en-US" altLang="ja-JP" sz="2800" dirty="0" smtClean="0">
+                        <a:rPr kumimoji="1" lang="en-US" altLang="ja-JP" sz="2800" dirty="0">
                           <a:solidFill>
                             <a:schemeClr val="tx1"/>
                           </a:solidFill>
@@ -12741,6 +12270,11 @@
                     </a:solidFill>
                   </a:tcPr>
                 </a:tc>
+                <a:extLst>
+                  <a:ext uri="{0D108BD9-81ED-4DB2-BD59-A6C34878D82A}">
+                    <a16:rowId xmlns:a16="http://schemas.microsoft.com/office/drawing/2014/main" val="10002"/>
+                  </a:ext>
+                </a:extLst>
               </a:tr>
               <a:tr h="370840">
                 <a:tc>
@@ -12750,7 +12284,7 @@
                     <a:p>
                       <a:pPr algn="ctr"/>
                       <a:r>
-                        <a:rPr kumimoji="1" lang="en-US" altLang="ja-JP" sz="2800" dirty="0" smtClean="0">
+                        <a:rPr kumimoji="1" lang="en-US" altLang="ja-JP" sz="2800" dirty="0">
                           <a:solidFill>
                             <a:schemeClr val="tx1"/>
                           </a:solidFill>
@@ -12819,7 +12353,7 @@
                     <a:p>
                       <a:pPr algn="ctr"/>
                       <a:r>
-                        <a:rPr kumimoji="1" lang="en-US" altLang="ja-JP" sz="2800" dirty="0" smtClean="0">
+                        <a:rPr kumimoji="1" lang="en-US" altLang="ja-JP" sz="2800" dirty="0">
                           <a:solidFill>
                             <a:schemeClr val="tx1"/>
                           </a:solidFill>
@@ -12888,7 +12422,7 @@
                     <a:p>
                       <a:pPr algn="ctr"/>
                       <a:r>
-                        <a:rPr kumimoji="1" lang="en-US" altLang="ja-JP" sz="2800" dirty="0" smtClean="0">
+                        <a:rPr kumimoji="1" lang="en-US" altLang="ja-JP" sz="2800" dirty="0">
                           <a:solidFill>
                             <a:schemeClr val="tx1"/>
                           </a:solidFill>
@@ -12899,7 +12433,7 @@
                         <a:t>[</a:t>
                       </a:r>
                       <a:r>
-                        <a:rPr kumimoji="1" lang="en-US" altLang="ja-JP" sz="2800" dirty="0" err="1" smtClean="0">
+                        <a:rPr kumimoji="1" lang="en-US" altLang="ja-JP" sz="2800" dirty="0" err="1">
                           <a:solidFill>
                             <a:schemeClr val="tx1"/>
                           </a:solidFill>
@@ -12910,7 +12444,7 @@
                         <a:t>a,b</a:t>
                       </a:r>
                       <a:r>
-                        <a:rPr kumimoji="1" lang="en-US" altLang="ja-JP" sz="2800" dirty="0" smtClean="0">
+                        <a:rPr kumimoji="1" lang="en-US" altLang="ja-JP" sz="2800" dirty="0">
                           <a:solidFill>
                             <a:schemeClr val="tx1"/>
                           </a:solidFill>
@@ -12972,6 +12506,11 @@
                     </a:solidFill>
                   </a:tcPr>
                 </a:tc>
+                <a:extLst>
+                  <a:ext uri="{0D108BD9-81ED-4DB2-BD59-A6C34878D82A}">
+                    <a16:rowId xmlns:a16="http://schemas.microsoft.com/office/drawing/2014/main" val="10003"/>
+                  </a:ext>
+                </a:extLst>
               </a:tr>
               <a:tr h="370840">
                 <a:tc>
@@ -12981,7 +12520,7 @@
                     <a:p>
                       <a:pPr algn="ctr"/>
                       <a:r>
-                        <a:rPr kumimoji="1" lang="en-US" altLang="ja-JP" sz="2800" dirty="0" smtClean="0">
+                        <a:rPr kumimoji="1" lang="en-US" altLang="ja-JP" sz="2800" dirty="0">
                           <a:solidFill>
                             <a:schemeClr val="tx1"/>
                           </a:solidFill>
@@ -12992,7 +12531,7 @@
                         <a:t>[</a:t>
                       </a:r>
                       <a:r>
-                        <a:rPr kumimoji="1" lang="en-US" altLang="ja-JP" sz="2800" dirty="0" err="1" smtClean="0">
+                        <a:rPr kumimoji="1" lang="en-US" altLang="ja-JP" sz="2800" dirty="0" err="1">
                           <a:solidFill>
                             <a:schemeClr val="tx1"/>
                           </a:solidFill>
@@ -13003,7 +12542,7 @@
                         <a:t>a,b</a:t>
                       </a:r>
                       <a:r>
-                        <a:rPr kumimoji="1" lang="en-US" altLang="ja-JP" sz="2800" dirty="0" smtClean="0">
+                        <a:rPr kumimoji="1" lang="en-US" altLang="ja-JP" sz="2800" dirty="0">
                           <a:solidFill>
                             <a:schemeClr val="tx1"/>
                           </a:solidFill>
@@ -13072,7 +12611,7 @@
                     <a:p>
                       <a:pPr algn="ctr"/>
                       <a:r>
-                        <a:rPr kumimoji="1" lang="en-US" altLang="ja-JP" sz="2800" dirty="0" smtClean="0">
+                        <a:rPr kumimoji="1" lang="en-US" altLang="ja-JP" sz="2800" dirty="0">
                           <a:solidFill>
                             <a:schemeClr val="tx1"/>
                           </a:solidFill>
@@ -13083,7 +12622,7 @@
                         <a:t>[</a:t>
                       </a:r>
                       <a:r>
-                        <a:rPr kumimoji="1" lang="en-US" altLang="ja-JP" sz="2800" dirty="0" err="1" smtClean="0">
+                        <a:rPr kumimoji="1" lang="en-US" altLang="ja-JP" sz="2800" dirty="0" err="1">
                           <a:solidFill>
                             <a:schemeClr val="tx1"/>
                           </a:solidFill>
@@ -13094,7 +12633,7 @@
                         <a:t>c,d</a:t>
                       </a:r>
                       <a:r>
-                        <a:rPr kumimoji="1" lang="en-US" altLang="ja-JP" sz="2800" dirty="0" smtClean="0">
+                        <a:rPr kumimoji="1" lang="en-US" altLang="ja-JP" sz="2800" dirty="0">
                           <a:solidFill>
                             <a:schemeClr val="tx1"/>
                           </a:solidFill>
@@ -13163,7 +12702,7 @@
                     <a:p>
                       <a:pPr algn="ctr"/>
                       <a:r>
-                        <a:rPr kumimoji="1" lang="en-US" altLang="ja-JP" sz="2800" dirty="0" smtClean="0">
+                        <a:rPr kumimoji="1" lang="en-US" altLang="ja-JP" sz="2800" dirty="0">
                           <a:solidFill>
                             <a:schemeClr val="tx1"/>
                           </a:solidFill>
@@ -13174,7 +12713,7 @@
                         <a:t>[</a:t>
                       </a:r>
                       <a:r>
-                        <a:rPr kumimoji="1" lang="en-US" altLang="ja-JP" sz="2800" dirty="0" err="1" smtClean="0">
+                        <a:rPr kumimoji="1" lang="en-US" altLang="ja-JP" sz="2800" dirty="0" err="1">
                           <a:solidFill>
                             <a:schemeClr val="tx1"/>
                           </a:solidFill>
@@ -13185,7 +12724,7 @@
                         <a:t>a,b,c,d</a:t>
                       </a:r>
                       <a:r>
-                        <a:rPr kumimoji="1" lang="en-US" altLang="ja-JP" sz="2800" dirty="0" smtClean="0">
+                        <a:rPr kumimoji="1" lang="en-US" altLang="ja-JP" sz="2800" dirty="0">
                           <a:solidFill>
                             <a:schemeClr val="tx1"/>
                           </a:solidFill>
@@ -13247,6 +12786,11 @@
                     </a:solidFill>
                   </a:tcPr>
                 </a:tc>
+                <a:extLst>
+                  <a:ext uri="{0D108BD9-81ED-4DB2-BD59-A6C34878D82A}">
+                    <a16:rowId xmlns:a16="http://schemas.microsoft.com/office/drawing/2014/main" val="10004"/>
+                  </a:ext>
+                </a:extLst>
               </a:tr>
               <a:tr h="370840">
                 <a:tc>
@@ -13256,7 +12800,7 @@
                     <a:p>
                       <a:pPr algn="ctr"/>
                       <a:r>
-                        <a:rPr kumimoji="1" lang="en-US" altLang="ja-JP" sz="2800" dirty="0" smtClean="0">
+                        <a:rPr kumimoji="1" lang="en-US" altLang="ja-JP" sz="2800" dirty="0">
                           <a:solidFill>
                             <a:schemeClr val="tx1"/>
                           </a:solidFill>
@@ -13325,7 +12869,7 @@
                     <a:p>
                       <a:pPr algn="ctr"/>
                       <a:r>
-                        <a:rPr kumimoji="1" lang="en-US" altLang="ja-JP" sz="2800" dirty="0" smtClean="0">
+                        <a:rPr kumimoji="1" lang="en-US" altLang="ja-JP" sz="2800" dirty="0">
                           <a:solidFill>
                             <a:schemeClr val="tx1"/>
                           </a:solidFill>
@@ -13394,7 +12938,7 @@
                     <a:p>
                       <a:pPr algn="ctr"/>
                       <a:r>
-                        <a:rPr kumimoji="1" lang="en-US" altLang="ja-JP" sz="2800" dirty="0" smtClean="0">
+                        <a:rPr kumimoji="1" lang="en-US" altLang="ja-JP" sz="2800" dirty="0">
                           <a:solidFill>
                             <a:schemeClr val="tx1"/>
                           </a:solidFill>
@@ -13456,6 +13000,11 @@
                     </a:solidFill>
                   </a:tcPr>
                 </a:tc>
+                <a:extLst>
+                  <a:ext uri="{0D108BD9-81ED-4DB2-BD59-A6C34878D82A}">
+                    <a16:rowId xmlns:a16="http://schemas.microsoft.com/office/drawing/2014/main" val="10005"/>
+                  </a:ext>
+                </a:extLst>
               </a:tr>
             </a:tbl>
           </a:graphicData>
@@ -13487,81 +13036,81 @@
           <a:lstStyle/>
           <a:p>
             <a:r>
-              <a:rPr lang="ja-JP" altLang="en-US" sz="2800" dirty="0" smtClean="0"/>
+              <a:rPr lang="ja-JP" altLang="en-US" sz="2800" dirty="0"/>
               <a:t>関係</a:t>
             </a:r>
             <a:r>
-              <a:rPr lang="en-US" altLang="ja-JP" sz="2800" dirty="0" smtClean="0"/>
+              <a:rPr lang="en-US" altLang="ja-JP" sz="2800" dirty="0"/>
               <a:t>append</a:t>
             </a:r>
             <a:r>
-              <a:rPr lang="ja-JP" altLang="en-US" sz="2800" dirty="0" smtClean="0"/>
+              <a:rPr lang="ja-JP" altLang="en-US" sz="2800" dirty="0"/>
               <a:t>は「</a:t>
             </a:r>
             <a:r>
-              <a:rPr lang="en-US" altLang="ja-JP" sz="2800" dirty="0" smtClean="0"/>
+              <a:rPr lang="en-US" altLang="ja-JP" sz="2800" dirty="0"/>
               <a:t>X</a:t>
             </a:r>
             <a:r>
-              <a:rPr lang="ja-JP" altLang="en-US" sz="2800" dirty="0" smtClean="0"/>
+              <a:rPr lang="ja-JP" altLang="en-US" sz="2800" dirty="0"/>
               <a:t>と</a:t>
             </a:r>
             <a:r>
-              <a:rPr lang="en-US" altLang="ja-JP" sz="2800" dirty="0" smtClean="0"/>
+              <a:rPr lang="en-US" altLang="ja-JP" sz="2800" dirty="0"/>
               <a:t>Y</a:t>
             </a:r>
             <a:r>
-              <a:rPr lang="ja-JP" altLang="en-US" sz="2800" dirty="0" smtClean="0"/>
+              <a:rPr lang="ja-JP" altLang="en-US" sz="2800" dirty="0"/>
               <a:t>を連結したリストが</a:t>
             </a:r>
             <a:r>
-              <a:rPr lang="en-US" altLang="ja-JP" sz="2800" dirty="0" smtClean="0"/>
+              <a:rPr lang="en-US" altLang="ja-JP" sz="2800" dirty="0"/>
               <a:t>Z</a:t>
             </a:r>
             <a:r>
-              <a:rPr lang="ja-JP" altLang="en-US" sz="2800" dirty="0" smtClean="0"/>
+              <a:rPr lang="ja-JP" altLang="en-US" sz="2800" dirty="0"/>
               <a:t>」を満たす組</a:t>
             </a:r>
             <a:r>
-              <a:rPr lang="en-US" altLang="ja-JP" sz="2800" dirty="0" smtClean="0"/>
+              <a:rPr lang="en-US" altLang="ja-JP" sz="2800" dirty="0"/>
               <a:t>(X,Y,Z)</a:t>
             </a:r>
             <a:r>
-              <a:rPr lang="ja-JP" altLang="en-US" sz="2800" dirty="0" smtClean="0"/>
+              <a:rPr lang="ja-JP" altLang="en-US" sz="2800" dirty="0"/>
               <a:t>の集合（それを表の形にしたものが上記の表）</a:t>
             </a:r>
-            <a:endParaRPr lang="en-US" altLang="ja-JP" sz="2800" dirty="0" smtClean="0"/>
-          </a:p>
-          <a:p>
-            <a:r>
-              <a:rPr lang="ja-JP" altLang="en-US" sz="2800" dirty="0" smtClean="0"/>
+            <a:endParaRPr lang="en-US" altLang="ja-JP" sz="2800" dirty="0"/>
+          </a:p>
+          <a:p>
+            <a:r>
+              <a:rPr lang="ja-JP" altLang="en-US" sz="2800" dirty="0"/>
               <a:t>関係は述語でもある</a:t>
             </a:r>
             <a:r>
-              <a:rPr lang="en-US" altLang="ja-JP" sz="2800" dirty="0" smtClean="0"/>
+              <a:rPr lang="en-US" altLang="ja-JP" sz="2800" dirty="0"/>
               <a:t>: </a:t>
             </a:r>
             <a:r>
-              <a:rPr lang="ja-JP" altLang="en-US" sz="2800" dirty="0" smtClean="0"/>
+              <a:rPr lang="ja-JP" altLang="en-US" sz="2800" dirty="0"/>
               <a:t>「与えられた組は関係の要素か」</a:t>
             </a:r>
-            <a:endParaRPr lang="en-US" altLang="ja-JP" sz="2800" dirty="0" smtClean="0"/>
-          </a:p>
-          <a:p>
-            <a:r>
-              <a:rPr lang="ja-JP" altLang="en-US" sz="2800" dirty="0" smtClean="0"/>
+            <a:endParaRPr lang="en-US" altLang="ja-JP" sz="2800" dirty="0"/>
+          </a:p>
+          <a:p>
+            <a:r>
+              <a:rPr lang="ja-JP" altLang="en-US" sz="2800" dirty="0"/>
               <a:t>（例）</a:t>
             </a:r>
             <a:r>
-              <a:rPr lang="en-US" altLang="ja-JP" sz="2800" dirty="0" smtClean="0"/>
+              <a:rPr lang="en-US" altLang="ja-JP" sz="2800" dirty="0"/>
               <a:t> ([a],[b],[</a:t>
             </a:r>
             <a:r>
-              <a:rPr lang="en-US" altLang="ja-JP" sz="2800" dirty="0" err="1" smtClean="0"/>
+              <a:rPr lang="en-US" altLang="ja-JP" sz="2800" dirty="0" err="1"/>
               <a:t>a,b</a:t>
             </a:r>
             <a:r>
-              <a:rPr lang="en-US" altLang="ja-JP" sz="2800" dirty="0" smtClean="0"/>
+              <a:rPr lang="en-US" altLang="ja-JP" sz="2800" dirty="0"/>
               <a:t>])     append,  ([a],[b],[ ])      append</a:t>
             </a:r>
           </a:p>
@@ -13589,12 +13138,12 @@
           <a:graphicData uri="http://schemas.openxmlformats.org/presentationml/2006/ole">
             <mc:AlternateContent xmlns:mc="http://schemas.openxmlformats.org/markup-compatibility/2006">
               <mc:Choice xmlns:v="urn:schemas-microsoft-com:vml" Requires="v">
-                <p:oleObj spid="_x0000_s1528" name="数式" r:id="rId3" imgW="152400" imgH="152400" progId="Equation.3">
+                <p:oleObj name="数式" r:id="rId2" imgW="152400" imgH="152400" progId="Equation.3">
                   <p:embed/>
                 </p:oleObj>
               </mc:Choice>
               <mc:Fallback>
-                <p:oleObj name="数式" r:id="rId3" imgW="152400" imgH="152400" progId="Equation.3">
+                <p:oleObj name="数式" r:id="rId2" imgW="152400" imgH="152400" progId="Equation.3">
                   <p:embed/>
                   <p:pic>
                     <p:nvPicPr>
@@ -13603,7 +13152,7 @@
                       <p:nvPr/>
                     </p:nvPicPr>
                     <p:blipFill>
-                      <a:blip r:embed="rId4"/>
+                      <a:blip r:embed="rId3"/>
                       <a:stretch>
                         <a:fillRect/>
                       </a:stretch>
@@ -13646,12 +13195,12 @@
           <a:graphicData uri="http://schemas.openxmlformats.org/presentationml/2006/ole">
             <mc:AlternateContent xmlns:mc="http://schemas.openxmlformats.org/markup-compatibility/2006">
               <mc:Choice xmlns:v="urn:schemas-microsoft-com:vml" Requires="v">
-                <p:oleObj spid="_x0000_s1529" name="数式" r:id="rId5" imgW="152400" imgH="203200" progId="Equation.3">
+                <p:oleObj name="数式" r:id="rId4" imgW="152400" imgH="203200" progId="Equation.3">
                   <p:embed/>
                 </p:oleObj>
               </mc:Choice>
               <mc:Fallback>
-                <p:oleObj name="数式" r:id="rId5" imgW="152400" imgH="203200" progId="Equation.3">
+                <p:oleObj name="数式" r:id="rId4" imgW="152400" imgH="203200" progId="Equation.3">
                   <p:embed/>
                   <p:pic>
                     <p:nvPicPr>
@@ -13660,7 +13209,7 @@
                       <p:nvPr/>
                     </p:nvPicPr>
                     <p:blipFill>
-                      <a:blip r:embed="rId6"/>
+                      <a:blip r:embed="rId5"/>
                       <a:stretch>
                         <a:fillRect/>
                       </a:stretch>
@@ -13691,13 +13240,6 @@
   <p:clrMapOvr>
     <a:masterClrMapping/>
   </p:clrMapOvr>
-  <p:timing>
-    <p:tnLst>
-      <p:par>
-        <p:cTn xmlns:p14="http://schemas.microsoft.com/office/powerpoint/2010/main" id="1" dur="indefinite" restart="never" nodeType="tmRoot"/>
-      </p:par>
-    </p:tnLst>
-  </p:timing>
 </p:sld>
 </file>
 
@@ -13741,11 +13283,11 @@
           <a:lstStyle/>
           <a:p>
             <a:r>
-              <a:rPr lang="ja-JP" altLang="en-US" dirty="0" smtClean="0"/>
+              <a:rPr lang="ja-JP" altLang="en-US" dirty="0"/>
               <a:t>ホーン節</a:t>
             </a:r>
             <a:r>
-              <a:rPr lang="en-US" altLang="ja-JP" dirty="0" smtClean="0"/>
+              <a:rPr lang="en-US" altLang="ja-JP" dirty="0"/>
               <a:t>(Horn clause)</a:t>
             </a:r>
             <a:endParaRPr kumimoji="1" lang="ja-JP" altLang="en-US" dirty="0"/>
@@ -13774,31 +13316,31 @@
           <a:lstStyle/>
           <a:p>
             <a:r>
-              <a:rPr lang="ja-JP" altLang="en-US" sz="2800" dirty="0" smtClean="0"/>
+              <a:rPr lang="ja-JP" altLang="en-US" sz="2800" dirty="0"/>
               <a:t>関係を、</a:t>
             </a:r>
             <a:r>
-              <a:rPr lang="en-US" altLang="ja-JP" sz="2800" i="1" dirty="0" smtClean="0"/>
+              <a:rPr lang="en-US" altLang="ja-JP" sz="2800" i="1" dirty="0"/>
               <a:t>P</a:t>
             </a:r>
             <a:r>
-              <a:rPr lang="en-US" altLang="ja-JP" sz="2800" dirty="0" smtClean="0"/>
+              <a:rPr lang="en-US" altLang="ja-JP" sz="2800" dirty="0"/>
               <a:t> </a:t>
             </a:r>
             <a:r>
-              <a:rPr lang="en-US" altLang="ja-JP" sz="2800" b="1" dirty="0" smtClean="0"/>
+              <a:rPr lang="en-US" altLang="ja-JP" sz="2800" b="1" dirty="0"/>
               <a:t>:- </a:t>
             </a:r>
             <a:r>
-              <a:rPr lang="en-US" altLang="ja-JP" sz="2800" i="1" dirty="0" smtClean="0"/>
+              <a:rPr lang="en-US" altLang="ja-JP" sz="2800" i="1" dirty="0"/>
               <a:t>Q</a:t>
             </a:r>
             <a:r>
-              <a:rPr lang="en-US" altLang="ja-JP" sz="2800" baseline="-25000" dirty="0" smtClean="0"/>
+              <a:rPr lang="en-US" altLang="ja-JP" sz="2800" baseline="-25000" dirty="0"/>
               <a:t>1</a:t>
             </a:r>
             <a:r>
-              <a:rPr lang="en-US" altLang="ja-JP" sz="2800" dirty="0" smtClean="0"/>
+              <a:rPr lang="en-US" altLang="ja-JP" sz="2800" dirty="0"/>
               <a:t> ,</a:t>
             </a:r>
             <a:r>
@@ -13806,47 +13348,35 @@
               <a:t> </a:t>
             </a:r>
             <a:r>
-              <a:rPr lang="en-US" altLang="ja-JP" sz="2800" i="1" dirty="0" smtClean="0"/>
+              <a:rPr lang="en-US" altLang="ja-JP" sz="2800" i="1" dirty="0"/>
               <a:t>Q</a:t>
             </a:r>
             <a:r>
-              <a:rPr lang="en-US" altLang="ja-JP" sz="2800" baseline="-25000" dirty="0" smtClean="0"/>
+              <a:rPr lang="en-US" altLang="ja-JP" sz="2800" baseline="-25000" dirty="0"/>
               <a:t>2</a:t>
             </a:r>
             <a:r>
-              <a:rPr lang="en-US" altLang="ja-JP" sz="2800" dirty="0" smtClean="0"/>
+              <a:rPr lang="en-US" altLang="ja-JP" sz="2800" dirty="0"/>
               <a:t>, …, </a:t>
             </a:r>
             <a:r>
-              <a:rPr lang="en-US" altLang="ja-JP" sz="2800" i="1" dirty="0" err="1" smtClean="0"/>
+              <a:rPr lang="en-US" altLang="ja-JP" sz="2800" i="1" dirty="0" err="1"/>
               <a:t>Q</a:t>
             </a:r>
             <a:r>
-              <a:rPr lang="en-US" altLang="ja-JP" sz="2800" i="1" baseline="-25000" dirty="0" err="1" smtClean="0"/>
+              <a:rPr lang="en-US" altLang="ja-JP" sz="2800" i="1" baseline="-25000" dirty="0" err="1"/>
               <a:t>k</a:t>
             </a:r>
             <a:r>
-              <a:rPr lang="en-US" altLang="ja-JP" sz="2800" dirty="0" smtClean="0"/>
-              <a:t> .</a:t>
-            </a:r>
-            <a:r>
-              <a:rPr lang="en-US" altLang="ja-JP" sz="2800" dirty="0"/>
-              <a:t> </a:t>
-            </a:r>
-            <a:r>
-              <a:rPr lang="ja-JP" altLang="en-US" sz="2800" dirty="0" smtClean="0"/>
-              <a:t>のような</a:t>
+              <a:rPr lang="en-US" altLang="ja-JP" sz="2800" dirty="0"/>
+              <a:t> . </a:t>
             </a:r>
             <a:r>
               <a:rPr lang="ja-JP" altLang="en-US" sz="2800" dirty="0"/>
-              <a:t>形の規則により記述</a:t>
-            </a:r>
-            <a:r>
-              <a:rPr lang="ja-JP" altLang="en-US" sz="2800" dirty="0" smtClean="0"/>
-              <a:t>する</a:t>
-            </a:r>
-            <a:r>
-              <a:rPr lang="en-US" altLang="ja-JP" sz="2800" dirty="0" smtClean="0"/>
+              <a:t>のような形の規則により記述する</a:t>
+            </a:r>
+            <a:r>
+              <a:rPr lang="en-US" altLang="ja-JP" sz="2800" dirty="0"/>
               <a:t>(</a:t>
             </a:r>
             <a:r>
@@ -13855,25 +13385,21 @@
             </a:r>
             <a:r>
               <a:rPr lang="en-US" altLang="ja-JP" sz="2800" dirty="0"/>
-              <a:t> ≥ 0</a:t>
-            </a:r>
-            <a:r>
-              <a:rPr lang="en-US" altLang="ja-JP" sz="2800" dirty="0" smtClean="0"/>
-              <a:t>)</a:t>
-            </a:r>
-            <a:r>
-              <a:rPr lang="ja-JP" altLang="en-US" sz="2800" dirty="0" smtClean="0"/>
+              <a:t> ≥ 0)</a:t>
+            </a:r>
+            <a:r>
+              <a:rPr lang="ja-JP" altLang="en-US" sz="2800" dirty="0"/>
               <a:t>。これは以下のような論理式に対応する。</a:t>
             </a:r>
             <a:endParaRPr lang="en-US" altLang="ja-JP" sz="2800" dirty="0"/>
           </a:p>
           <a:p>
             <a:r>
-              <a:rPr lang="en-US" altLang="ja-JP" sz="2800" i="1" dirty="0" smtClean="0"/>
+              <a:rPr lang="en-US" altLang="ja-JP" sz="2800" i="1" dirty="0"/>
               <a:t>      P</a:t>
             </a:r>
             <a:r>
-              <a:rPr lang="en-US" altLang="ja-JP" sz="2800" dirty="0" smtClean="0"/>
+              <a:rPr lang="en-US" altLang="ja-JP" sz="2800" dirty="0"/>
               <a:t> </a:t>
             </a:r>
             <a:r>
@@ -13933,35 +13459,31 @@
               <a:t> </a:t>
             </a:r>
             <a:r>
-              <a:rPr lang="en-US" altLang="ja-JP" sz="2800" i="1" dirty="0" err="1" smtClean="0"/>
+              <a:rPr lang="en-US" altLang="ja-JP" sz="2800" i="1" dirty="0" err="1"/>
               <a:t>Q</a:t>
             </a:r>
             <a:r>
-              <a:rPr lang="en-US" altLang="ja-JP" sz="2800" i="1" baseline="-25000" dirty="0" err="1" smtClean="0"/>
+              <a:rPr lang="en-US" altLang="ja-JP" sz="2800" i="1" baseline="-25000" dirty="0" err="1"/>
               <a:t>k</a:t>
             </a:r>
             <a:r>
-              <a:rPr lang="en-US" altLang="ja-JP" sz="2800" dirty="0" smtClean="0"/>
-              <a:t> </a:t>
-            </a:r>
-            <a:r>
-              <a:rPr lang="en-US" altLang="ja-JP" sz="2800" dirty="0"/>
-              <a:t>.</a:t>
-            </a:r>
-            <a:r>
-              <a:rPr lang="en-US" altLang="ja-JP" sz="2800" i="1" dirty="0" smtClean="0"/>
+              <a:rPr lang="en-US" altLang="ja-JP" sz="2800" dirty="0"/>
+              <a:t> .</a:t>
+            </a:r>
+            <a:r>
+              <a:rPr lang="en-US" altLang="ja-JP" sz="2800" i="1" dirty="0"/>
               <a:t>  </a:t>
             </a:r>
             <a:r>
-              <a:rPr lang="en-US" altLang="ja-JP" sz="2800" dirty="0" smtClean="0"/>
+              <a:rPr lang="en-US" altLang="ja-JP" sz="2800" dirty="0"/>
               <a:t>(</a:t>
             </a:r>
             <a:r>
-              <a:rPr lang="en-US" altLang="ja-JP" sz="2800" i="1" dirty="0" smtClean="0"/>
+              <a:rPr lang="en-US" altLang="ja-JP" sz="2800" i="1" dirty="0"/>
               <a:t>k</a:t>
             </a:r>
             <a:r>
-              <a:rPr lang="en-US" altLang="ja-JP" sz="2800" dirty="0" smtClean="0"/>
+              <a:rPr lang="en-US" altLang="ja-JP" sz="2800" dirty="0"/>
               <a:t> ≥ 0)</a:t>
             </a:r>
           </a:p>
@@ -14007,48 +13529,44 @@
               <a:t> </a:t>
             </a:r>
             <a:r>
-              <a:rPr lang="ja-JP" altLang="en-US" sz="2800" dirty="0" smtClean="0"/>
+              <a:rPr lang="ja-JP" altLang="en-US" sz="2800" dirty="0"/>
               <a:t>が成り立つなら</a:t>
             </a:r>
             <a:r>
-              <a:rPr lang="en-US" altLang="ja-JP" sz="2800" i="1" dirty="0" smtClean="0"/>
+              <a:rPr lang="en-US" altLang="ja-JP" sz="2800" i="1" dirty="0"/>
               <a:t>P</a:t>
             </a:r>
             <a:r>
-              <a:rPr lang="ja-JP" altLang="en-US" sz="2800" dirty="0" smtClean="0"/>
+              <a:rPr lang="ja-JP" altLang="en-US" sz="2800" dirty="0"/>
               <a:t>が成り立つという意味</a:t>
             </a:r>
             <a:r>
-              <a:rPr lang="en-US" altLang="ja-JP" sz="2800" dirty="0" smtClean="0"/>
+              <a:rPr lang="en-US" altLang="ja-JP" sz="2800" dirty="0"/>
               <a:t>(declarative interpretation)</a:t>
             </a:r>
             <a:r>
-              <a:rPr lang="ja-JP" altLang="en-US" sz="2800" dirty="0" smtClean="0"/>
+              <a:rPr lang="ja-JP" altLang="en-US" sz="2800" dirty="0"/>
               <a:t>だが、</a:t>
             </a:r>
             <a:r>
-              <a:rPr lang="en-US" altLang="ja-JP" sz="2800" i="1" dirty="0" smtClean="0"/>
+              <a:rPr lang="en-US" altLang="ja-JP" sz="2800" i="1" dirty="0"/>
               <a:t>P</a:t>
             </a:r>
             <a:r>
-              <a:rPr lang="ja-JP" altLang="en-US" sz="2800" dirty="0" smtClean="0"/>
+              <a:rPr lang="ja-JP" altLang="en-US" sz="2800" dirty="0"/>
               <a:t>を成立させるには</a:t>
             </a:r>
             <a:r>
-              <a:rPr lang="en-US" altLang="ja-JP" sz="2800" i="1" dirty="0" smtClean="0"/>
+              <a:rPr lang="en-US" altLang="ja-JP" sz="2800" i="1" dirty="0"/>
               <a:t>Q</a:t>
             </a:r>
             <a:r>
-              <a:rPr lang="en-US" altLang="ja-JP" sz="2800" baseline="-25000" dirty="0" smtClean="0"/>
+              <a:rPr lang="en-US" altLang="ja-JP" sz="2800" baseline="-25000" dirty="0"/>
               <a:t>1</a:t>
             </a:r>
             <a:r>
-              <a:rPr lang="en-US" altLang="ja-JP" sz="2800" dirty="0" smtClean="0"/>
-              <a:t> </a:t>
-            </a:r>
-            <a:r>
-              <a:rPr lang="en-US" altLang="ja-JP" sz="2800" dirty="0"/>
-              <a:t>,</a:t>
+              <a:rPr lang="en-US" altLang="ja-JP" sz="2800" dirty="0"/>
+              <a:t> ,</a:t>
             </a:r>
             <a:r>
               <a:rPr lang="en-US" altLang="ja-JP" sz="2800" b="1" dirty="0"/>
@@ -14079,20 +13597,16 @@
               <a:t> </a:t>
             </a:r>
             <a:r>
-              <a:rPr lang="ja-JP" altLang="en-US" sz="2800" dirty="0" smtClean="0"/>
+              <a:rPr lang="ja-JP" altLang="en-US" sz="2800" dirty="0"/>
               <a:t>を成立させればよいというように考える</a:t>
             </a:r>
             <a:r>
-              <a:rPr lang="en-US" altLang="ja-JP" sz="2800" dirty="0" smtClean="0"/>
+              <a:rPr lang="en-US" altLang="ja-JP" sz="2800" dirty="0"/>
               <a:t>(procedural interpretation)</a:t>
             </a:r>
             <a:r>
-              <a:rPr lang="ja-JP" altLang="en-US" sz="2800" dirty="0" smtClean="0"/>
-              <a:t>。</a:t>
-            </a:r>
-            <a:r>
               <a:rPr lang="ja-JP" altLang="en-US" sz="2800" dirty="0"/>
-              <a:t>このような規則をホーン節</a:t>
+              <a:t>。このような規則をホーン節</a:t>
             </a:r>
             <a:r>
               <a:rPr lang="en-US" altLang="ja-JP" sz="2800" dirty="0"/>
@@ -14100,78 +13614,74 @@
             </a:r>
             <a:r>
               <a:rPr lang="ja-JP" altLang="en-US" sz="2800" dirty="0"/>
-              <a:t>と呼ぶ</a:t>
-            </a:r>
-            <a:r>
-              <a:rPr lang="ja-JP" altLang="en-US" sz="2800" dirty="0" smtClean="0"/>
-              <a:t>。</a:t>
-            </a:r>
-            <a:r>
-              <a:rPr lang="en-US" altLang="ja-JP" sz="2800" i="1" dirty="0" smtClean="0"/>
+              <a:t>と呼ぶ。</a:t>
+            </a:r>
+            <a:r>
+              <a:rPr lang="en-US" altLang="ja-JP" sz="2800" i="1" dirty="0"/>
               <a:t>k</a:t>
             </a:r>
             <a:r>
-              <a:rPr lang="ja-JP" altLang="en-US" sz="2800" dirty="0" smtClean="0"/>
+              <a:rPr lang="ja-JP" altLang="en-US" sz="2800" dirty="0"/>
               <a:t>が</a:t>
             </a:r>
             <a:r>
-              <a:rPr lang="en-US" altLang="ja-JP" sz="2800" dirty="0" smtClean="0"/>
+              <a:rPr lang="en-US" altLang="ja-JP" sz="2800" dirty="0"/>
               <a:t>0</a:t>
             </a:r>
             <a:r>
-              <a:rPr lang="ja-JP" altLang="en-US" sz="2800" dirty="0" smtClean="0"/>
+              <a:rPr lang="ja-JP" altLang="en-US" sz="2800" dirty="0"/>
               <a:t>のときは前提無しで成り立つ事実を表し、</a:t>
             </a:r>
             <a:r>
-              <a:rPr lang="en-US" altLang="ja-JP" sz="2800" dirty="0" smtClean="0"/>
+              <a:rPr lang="en-US" altLang="ja-JP" sz="2800" dirty="0"/>
               <a:t>:=</a:t>
             </a:r>
             <a:r>
-              <a:rPr lang="ja-JP" altLang="en-US" sz="2800" dirty="0" smtClean="0"/>
+              <a:rPr lang="ja-JP" altLang="en-US" sz="2800" dirty="0"/>
               <a:t>を省略して</a:t>
             </a:r>
             <a:r>
-              <a:rPr lang="en-US" altLang="ja-JP" sz="2800" dirty="0" smtClean="0"/>
+              <a:rPr lang="en-US" altLang="ja-JP" sz="2800" dirty="0"/>
               <a:t> </a:t>
             </a:r>
             <a:r>
-              <a:rPr lang="en-US" altLang="ja-JP" sz="2800" i="1" dirty="0" smtClean="0"/>
+              <a:rPr lang="en-US" altLang="ja-JP" sz="2800" i="1" dirty="0"/>
               <a:t>P</a:t>
             </a:r>
             <a:r>
-              <a:rPr lang="en-US" altLang="ja-JP" sz="2800" dirty="0" smtClean="0"/>
+              <a:rPr lang="en-US" altLang="ja-JP" sz="2800" dirty="0"/>
               <a:t>. </a:t>
             </a:r>
             <a:r>
-              <a:rPr lang="ja-JP" altLang="en-US" sz="2800" dirty="0" smtClean="0"/>
+              <a:rPr lang="ja-JP" altLang="en-US" sz="2800" dirty="0"/>
               <a:t>のように記述する。</a:t>
             </a:r>
-            <a:endParaRPr lang="en-US" altLang="ja-JP" sz="2800" dirty="0" smtClean="0"/>
-          </a:p>
-          <a:p>
-            <a:r>
-              <a:rPr lang="ja-JP" altLang="en-US" sz="2800" dirty="0" smtClean="0"/>
+            <a:endParaRPr lang="en-US" altLang="ja-JP" sz="2800" dirty="0"/>
+          </a:p>
+          <a:p>
+            <a:r>
+              <a:rPr lang="ja-JP" altLang="en-US" sz="2800" dirty="0"/>
               <a:t>（例）関係</a:t>
             </a:r>
             <a:r>
-              <a:rPr lang="en-US" altLang="ja-JP" sz="2800" dirty="0" smtClean="0"/>
+              <a:rPr lang="en-US" altLang="ja-JP" sz="2800" dirty="0"/>
               <a:t>append</a:t>
             </a:r>
             <a:r>
-              <a:rPr lang="ja-JP" altLang="en-US" sz="2800" dirty="0" smtClean="0"/>
+              <a:rPr lang="ja-JP" altLang="en-US" sz="2800" dirty="0"/>
               <a:t>は２つの規則で記述される。</a:t>
             </a:r>
-            <a:endParaRPr lang="en-US" altLang="ja-JP" sz="2800" dirty="0" smtClean="0"/>
-          </a:p>
-          <a:p>
-            <a:r>
-              <a:rPr lang="en-US" altLang="ja-JP" sz="2800" dirty="0" smtClean="0"/>
+            <a:endParaRPr lang="en-US" altLang="ja-JP" sz="2800" dirty="0"/>
+          </a:p>
+          <a:p>
+            <a:r>
+              <a:rPr lang="en-US" altLang="ja-JP" sz="2800" dirty="0"/>
               <a:t>    append ([ ], Y, Y).</a:t>
             </a:r>
           </a:p>
           <a:p>
             <a:r>
-              <a:rPr lang="en-US" altLang="ja-JP" sz="2800" dirty="0" smtClean="0"/>
+              <a:rPr lang="en-US" altLang="ja-JP" sz="2800" dirty="0"/>
               <a:t>    append ( [H|X], Y, [H|Z]) :- append (X,Y,Z).</a:t>
             </a:r>
           </a:p>
@@ -14200,19 +13710,19 @@
           <a:lstStyle/>
           <a:p>
             <a:r>
-              <a:rPr lang="ja-JP" altLang="en-US" sz="2400" dirty="0" smtClean="0"/>
+              <a:rPr lang="ja-JP" altLang="en-US" sz="2400" dirty="0"/>
               <a:t>（参考文献）</a:t>
             </a:r>
             <a:r>
-              <a:rPr lang="en-US" altLang="ja-JP" sz="2400" dirty="0" smtClean="0"/>
+              <a:rPr lang="en-US" altLang="ja-JP" sz="2400" dirty="0"/>
               <a:t>A. Horn, “On sentences which are true of direct unions of algebras”. </a:t>
             </a:r>
             <a:r>
-              <a:rPr lang="en-US" altLang="ja-JP" sz="2400" i="1" dirty="0" smtClean="0"/>
+              <a:rPr lang="en-US" altLang="ja-JP" sz="2400" i="1" dirty="0"/>
               <a:t>Journal of Symbolic Logic, </a:t>
             </a:r>
             <a:r>
-              <a:rPr lang="en-US" altLang="ja-JP" sz="2400" dirty="0" smtClean="0"/>
+              <a:rPr lang="en-US" altLang="ja-JP" sz="2400" dirty="0"/>
               <a:t>Vol. 16, pp. 14-21, 1951.</a:t>
             </a:r>
             <a:endParaRPr kumimoji="1" lang="ja-JP" altLang="en-US" sz="2400" dirty="0"/>
@@ -14229,13 +13739,6 @@
   <p:clrMapOvr>
     <a:masterClrMapping/>
   </p:clrMapOvr>
-  <p:timing>
-    <p:tnLst>
-      <p:par>
-        <p:cTn xmlns:p14="http://schemas.microsoft.com/office/powerpoint/2010/main" id="1" dur="indefinite" restart="never" nodeType="tmRoot"/>
-      </p:par>
-    </p:tnLst>
-  </p:timing>
 </p:sld>
 </file>
 
@@ -14277,7 +13780,7 @@
           <a:lstStyle/>
           <a:p>
             <a:r>
-              <a:rPr kumimoji="1" lang="en-US" altLang="ja-JP" dirty="0" smtClean="0"/>
+              <a:rPr kumimoji="1" lang="en-US" altLang="ja-JP" dirty="0"/>
               <a:t>Query</a:t>
             </a:r>
             <a:endParaRPr kumimoji="1" lang="ja-JP" altLang="en-US" dirty="0"/>
@@ -14307,15 +13810,15 @@
           <a:lstStyle/>
           <a:p>
             <a:r>
-              <a:rPr kumimoji="1" lang="en-US" altLang="ja-JP" sz="2800" i="1" dirty="0" smtClean="0"/>
+              <a:rPr kumimoji="1" lang="en-US" altLang="ja-JP" sz="2800" i="1" dirty="0"/>
               <a:t>?-</a:t>
             </a:r>
             <a:r>
-              <a:rPr kumimoji="1" lang="en-US" altLang="ja-JP" sz="2800" dirty="0" smtClean="0"/>
+              <a:rPr kumimoji="1" lang="en-US" altLang="ja-JP" sz="2800" dirty="0"/>
               <a:t> </a:t>
             </a:r>
             <a:r>
-              <a:rPr kumimoji="1" lang="en-US" altLang="ja-JP" sz="2800" dirty="0" smtClean="0">
+              <a:rPr kumimoji="1" lang="en-US" altLang="ja-JP" sz="2800" dirty="0">
                 <a:solidFill>
                   <a:srgbClr val="FF0000"/>
                 </a:solidFill>
@@ -14323,7 +13826,7 @@
               <a:t>append([</a:t>
             </a:r>
             <a:r>
-              <a:rPr kumimoji="1" lang="en-US" altLang="ja-JP" sz="2800" dirty="0" err="1" smtClean="0">
+              <a:rPr kumimoji="1" lang="en-US" altLang="ja-JP" sz="2800" dirty="0" err="1">
                 <a:solidFill>
                   <a:srgbClr val="FF0000"/>
                 </a:solidFill>
@@ -14331,7 +13834,7 @@
               <a:t>a,b</a:t>
             </a:r>
             <a:r>
-              <a:rPr kumimoji="1" lang="en-US" altLang="ja-JP" sz="2800" dirty="0" smtClean="0">
+              <a:rPr kumimoji="1" lang="en-US" altLang="ja-JP" sz="2800" dirty="0">
                 <a:solidFill>
                   <a:srgbClr val="FF0000"/>
                 </a:solidFill>
@@ -14339,7 +13842,7 @@
               <a:t>],[</a:t>
             </a:r>
             <a:r>
-              <a:rPr kumimoji="1" lang="en-US" altLang="ja-JP" sz="2800" dirty="0" err="1" smtClean="0">
+              <a:rPr kumimoji="1" lang="en-US" altLang="ja-JP" sz="2800" dirty="0" err="1">
                 <a:solidFill>
                   <a:srgbClr val="FF0000"/>
                 </a:solidFill>
@@ -14347,7 +13850,7 @@
               <a:t>c,d</a:t>
             </a:r>
             <a:r>
-              <a:rPr kumimoji="1" lang="en-US" altLang="ja-JP" sz="2800" dirty="0" smtClean="0">
+              <a:rPr kumimoji="1" lang="en-US" altLang="ja-JP" sz="2800" dirty="0">
                 <a:solidFill>
                   <a:srgbClr val="FF0000"/>
                 </a:solidFill>
@@ -14355,7 +13858,7 @@
               <a:t>],[</a:t>
             </a:r>
             <a:r>
-              <a:rPr kumimoji="1" lang="en-US" altLang="ja-JP" sz="2800" dirty="0" err="1" smtClean="0">
+              <a:rPr kumimoji="1" lang="en-US" altLang="ja-JP" sz="2800" dirty="0" err="1">
                 <a:solidFill>
                   <a:srgbClr val="FF0000"/>
                 </a:solidFill>
@@ -14363,7 +13866,7 @@
               <a:t>a,b,c,d</a:t>
             </a:r>
             <a:r>
-              <a:rPr kumimoji="1" lang="en-US" altLang="ja-JP" sz="2800" dirty="0" smtClean="0">
+              <a:rPr kumimoji="1" lang="en-US" altLang="ja-JP" sz="2800" dirty="0">
                 <a:solidFill>
                   <a:srgbClr val="FF0000"/>
                 </a:solidFill>
@@ -14373,25 +13876,25 @@
           </a:p>
           <a:p>
             <a:r>
-              <a:rPr lang="en-US" altLang="ja-JP" sz="2800" dirty="0" smtClean="0"/>
+              <a:rPr lang="en-US" altLang="ja-JP" sz="2800" dirty="0"/>
               <a:t>    </a:t>
             </a:r>
             <a:r>
-              <a:rPr lang="en-US" altLang="ja-JP" sz="2800" i="1" dirty="0" smtClean="0"/>
+              <a:rPr lang="en-US" altLang="ja-JP" sz="2800" i="1" dirty="0"/>
               <a:t>yes</a:t>
             </a:r>
           </a:p>
           <a:p>
             <a:r>
-              <a:rPr kumimoji="1" lang="en-US" altLang="ja-JP" sz="2800" i="1" dirty="0" smtClean="0"/>
+              <a:rPr kumimoji="1" lang="en-US" altLang="ja-JP" sz="2800" i="1" dirty="0"/>
               <a:t>?-</a:t>
             </a:r>
             <a:r>
-              <a:rPr kumimoji="1" lang="en-US" altLang="ja-JP" sz="2800" dirty="0" smtClean="0"/>
+              <a:rPr kumimoji="1" lang="en-US" altLang="ja-JP" sz="2800" dirty="0"/>
               <a:t> </a:t>
             </a:r>
             <a:r>
-              <a:rPr kumimoji="1" lang="en-US" altLang="ja-JP" sz="2800" dirty="0" smtClean="0">
+              <a:rPr kumimoji="1" lang="en-US" altLang="ja-JP" sz="2800" dirty="0">
                 <a:solidFill>
                   <a:srgbClr val="FF0000"/>
                 </a:solidFill>
@@ -14399,7 +13902,7 @@
               <a:t>append([</a:t>
             </a:r>
             <a:r>
-              <a:rPr kumimoji="1" lang="en-US" altLang="ja-JP" sz="2800" dirty="0" err="1" smtClean="0">
+              <a:rPr kumimoji="1" lang="en-US" altLang="ja-JP" sz="2800" dirty="0" err="1">
                 <a:solidFill>
                   <a:srgbClr val="FF0000"/>
                 </a:solidFill>
@@ -14407,7 +13910,7 @@
               <a:t>a,b</a:t>
             </a:r>
             <a:r>
-              <a:rPr kumimoji="1" lang="en-US" altLang="ja-JP" sz="2800" dirty="0" smtClean="0">
+              <a:rPr kumimoji="1" lang="en-US" altLang="ja-JP" sz="2800" dirty="0">
                 <a:solidFill>
                   <a:srgbClr val="FF0000"/>
                 </a:solidFill>
@@ -14415,7 +13918,7 @@
               <a:t>],[</a:t>
             </a:r>
             <a:r>
-              <a:rPr kumimoji="1" lang="en-US" altLang="ja-JP" sz="2800" dirty="0" err="1" smtClean="0">
+              <a:rPr kumimoji="1" lang="en-US" altLang="ja-JP" sz="2800" dirty="0" err="1">
                 <a:solidFill>
                   <a:srgbClr val="FF0000"/>
                 </a:solidFill>
@@ -14423,7 +13926,7 @@
               <a:t>c,d</a:t>
             </a:r>
             <a:r>
-              <a:rPr kumimoji="1" lang="en-US" altLang="ja-JP" sz="2800" dirty="0" smtClean="0">
+              <a:rPr kumimoji="1" lang="en-US" altLang="ja-JP" sz="2800" dirty="0">
                 <a:solidFill>
                   <a:srgbClr val="FF0000"/>
                 </a:solidFill>
@@ -14433,43 +13936,39 @@
           </a:p>
           <a:p>
             <a:r>
-              <a:rPr lang="en-US" altLang="ja-JP" sz="2800" dirty="0" smtClean="0"/>
+              <a:rPr lang="en-US" altLang="ja-JP" sz="2800" dirty="0"/>
               <a:t>    </a:t>
             </a:r>
             <a:r>
-              <a:rPr lang="en-US" altLang="ja-JP" sz="2800" i="1" dirty="0" smtClean="0"/>
+              <a:rPr lang="en-US" altLang="ja-JP" sz="2800" i="1" dirty="0"/>
               <a:t>Z=[</a:t>
             </a:r>
             <a:r>
-              <a:rPr lang="en-US" altLang="ja-JP" sz="2800" i="1" dirty="0" err="1" smtClean="0"/>
+              <a:rPr lang="en-US" altLang="ja-JP" sz="2800" i="1" dirty="0" err="1"/>
               <a:t>a,b,c,d</a:t>
             </a:r>
             <a:r>
-              <a:rPr lang="en-US" altLang="ja-JP" sz="2800" i="1" dirty="0" smtClean="0"/>
+              <a:rPr lang="en-US" altLang="ja-JP" sz="2800" i="1" dirty="0"/>
               <a:t>]</a:t>
             </a:r>
           </a:p>
           <a:p>
             <a:r>
               <a:rPr lang="en-US" altLang="ja-JP" sz="2800" i="1" dirty="0"/>
+              <a:t>    yes</a:t>
+            </a:r>
+          </a:p>
+          <a:p>
+            <a:r>
+              <a:rPr lang="en-US" altLang="ja-JP" sz="2800" i="1" dirty="0"/>
+              <a:t>?-</a:t>
+            </a:r>
+            <a:r>
+              <a:rPr lang="en-US" altLang="ja-JP" sz="2800" dirty="0"/>
               <a:t> </a:t>
             </a:r>
             <a:r>
-              <a:rPr lang="en-US" altLang="ja-JP" sz="2800" i="1" dirty="0" smtClean="0"/>
-              <a:t>   yes</a:t>
-            </a:r>
-          </a:p>
-          <a:p>
-            <a:r>
-              <a:rPr lang="en-US" altLang="ja-JP" sz="2800" i="1" dirty="0" smtClean="0"/>
-              <a:t>?-</a:t>
-            </a:r>
-            <a:r>
-              <a:rPr lang="en-US" altLang="ja-JP" sz="2800" dirty="0" smtClean="0"/>
-              <a:t> </a:t>
-            </a:r>
-            <a:r>
-              <a:rPr lang="en-US" altLang="ja-JP" sz="2800" dirty="0" smtClean="0">
+              <a:rPr lang="en-US" altLang="ja-JP" sz="2800" dirty="0">
                 <a:solidFill>
                   <a:srgbClr val="FF0000"/>
                 </a:solidFill>
@@ -14477,7 +13976,7 @@
               <a:t>append([</a:t>
             </a:r>
             <a:r>
-              <a:rPr lang="en-US" altLang="ja-JP" sz="2800" dirty="0" err="1" smtClean="0">
+              <a:rPr lang="en-US" altLang="ja-JP" sz="2800" dirty="0" err="1">
                 <a:solidFill>
                   <a:srgbClr val="FF0000"/>
                 </a:solidFill>
@@ -14485,7 +13984,7 @@
               <a:t>a,b</a:t>
             </a:r>
             <a:r>
-              <a:rPr lang="en-US" altLang="ja-JP" sz="2800" dirty="0" smtClean="0">
+              <a:rPr lang="en-US" altLang="ja-JP" sz="2800" dirty="0">
                 <a:solidFill>
                   <a:srgbClr val="FF0000"/>
                 </a:solidFill>
@@ -14493,7 +13992,7 @@
               <a:t>],Y,[</a:t>
             </a:r>
             <a:r>
-              <a:rPr lang="en-US" altLang="ja-JP" sz="2800" dirty="0" err="1" smtClean="0">
+              <a:rPr lang="en-US" altLang="ja-JP" sz="2800" dirty="0" err="1">
                 <a:solidFill>
                   <a:srgbClr val="FF0000"/>
                 </a:solidFill>
@@ -14501,7 +14000,7 @@
               <a:t>a,b,c,d</a:t>
             </a:r>
             <a:r>
-              <a:rPr lang="en-US" altLang="ja-JP" sz="2800" dirty="0" smtClean="0">
+              <a:rPr lang="en-US" altLang="ja-JP" sz="2800" dirty="0">
                 <a:solidFill>
                   <a:srgbClr val="FF0000"/>
                 </a:solidFill>
@@ -14511,43 +14010,39 @@
           </a:p>
           <a:p>
             <a:r>
-              <a:rPr lang="en-US" altLang="ja-JP" sz="2800" dirty="0" smtClean="0"/>
+              <a:rPr lang="en-US" altLang="ja-JP" sz="2800" dirty="0"/>
               <a:t>    </a:t>
             </a:r>
             <a:r>
-              <a:rPr lang="en-US" altLang="ja-JP" sz="2800" i="1" dirty="0" smtClean="0"/>
+              <a:rPr lang="en-US" altLang="ja-JP" sz="2800" i="1" dirty="0"/>
               <a:t>Y=[</a:t>
             </a:r>
             <a:r>
-              <a:rPr lang="en-US" altLang="ja-JP" sz="2800" i="1" dirty="0" err="1" smtClean="0"/>
+              <a:rPr lang="en-US" altLang="ja-JP" sz="2800" i="1" dirty="0" err="1"/>
               <a:t>c,d</a:t>
             </a:r>
             <a:r>
-              <a:rPr lang="en-US" altLang="ja-JP" sz="2800" i="1" dirty="0" smtClean="0"/>
+              <a:rPr lang="en-US" altLang="ja-JP" sz="2800" i="1" dirty="0"/>
               <a:t>]</a:t>
             </a:r>
           </a:p>
           <a:p>
             <a:r>
               <a:rPr lang="en-US" altLang="ja-JP" sz="2800" i="1" dirty="0"/>
+              <a:t>    yes</a:t>
+            </a:r>
+          </a:p>
+          <a:p>
+            <a:r>
+              <a:rPr lang="en-US" altLang="ja-JP" sz="2800" i="1" dirty="0"/>
+              <a:t>?-</a:t>
+            </a:r>
+            <a:r>
+              <a:rPr lang="en-US" altLang="ja-JP" sz="2800" dirty="0"/>
               <a:t> </a:t>
             </a:r>
             <a:r>
-              <a:rPr lang="en-US" altLang="ja-JP" sz="2800" i="1" dirty="0" smtClean="0"/>
-              <a:t>   yes</a:t>
-            </a:r>
-          </a:p>
-          <a:p>
-            <a:r>
-              <a:rPr lang="en-US" altLang="ja-JP" sz="2800" i="1" dirty="0" smtClean="0"/>
-              <a:t>?-</a:t>
-            </a:r>
-            <a:r>
-              <a:rPr lang="en-US" altLang="ja-JP" sz="2800" dirty="0" smtClean="0"/>
-              <a:t> </a:t>
-            </a:r>
-            <a:r>
-              <a:rPr lang="en-US" altLang="ja-JP" sz="2800" dirty="0" smtClean="0">
+              <a:rPr lang="en-US" altLang="ja-JP" sz="2800" dirty="0">
                 <a:solidFill>
                   <a:srgbClr val="FF0000"/>
                 </a:solidFill>
@@ -14555,7 +14050,7 @@
               <a:t>append(X,[</a:t>
             </a:r>
             <a:r>
-              <a:rPr lang="en-US" altLang="ja-JP" sz="2800" dirty="0" err="1" smtClean="0">
+              <a:rPr lang="en-US" altLang="ja-JP" sz="2800" dirty="0" err="1">
                 <a:solidFill>
                   <a:srgbClr val="FF0000"/>
                 </a:solidFill>
@@ -14563,7 +14058,7 @@
               <a:t>c,d</a:t>
             </a:r>
             <a:r>
-              <a:rPr lang="en-US" altLang="ja-JP" sz="2800" dirty="0" smtClean="0">
+              <a:rPr lang="en-US" altLang="ja-JP" sz="2800" dirty="0">
                 <a:solidFill>
                   <a:srgbClr val="FF0000"/>
                 </a:solidFill>
@@ -14571,7 +14066,7 @@
               <a:t>],[</a:t>
             </a:r>
             <a:r>
-              <a:rPr lang="en-US" altLang="ja-JP" sz="2800" dirty="0" err="1" smtClean="0">
+              <a:rPr lang="en-US" altLang="ja-JP" sz="2800" dirty="0" err="1">
                 <a:solidFill>
                   <a:srgbClr val="FF0000"/>
                 </a:solidFill>
@@ -14579,7 +14074,7 @@
               <a:t>a,b,c,d</a:t>
             </a:r>
             <a:r>
-              <a:rPr lang="en-US" altLang="ja-JP" sz="2800" dirty="0" smtClean="0">
+              <a:rPr lang="en-US" altLang="ja-JP" sz="2800" dirty="0">
                 <a:solidFill>
                   <a:srgbClr val="FF0000"/>
                 </a:solidFill>
@@ -14589,43 +14084,39 @@
           </a:p>
           <a:p>
             <a:r>
-              <a:rPr lang="en-US" altLang="ja-JP" sz="2800" dirty="0" smtClean="0"/>
+              <a:rPr lang="en-US" altLang="ja-JP" sz="2800" dirty="0"/>
               <a:t>    </a:t>
             </a:r>
             <a:r>
-              <a:rPr lang="en-US" altLang="ja-JP" sz="2800" i="1" dirty="0" smtClean="0"/>
+              <a:rPr lang="en-US" altLang="ja-JP" sz="2800" i="1" dirty="0"/>
               <a:t>X=[</a:t>
             </a:r>
             <a:r>
-              <a:rPr lang="en-US" altLang="ja-JP" sz="2800" i="1" dirty="0" err="1" smtClean="0"/>
+              <a:rPr lang="en-US" altLang="ja-JP" sz="2800" i="1" dirty="0" err="1"/>
               <a:t>a,b</a:t>
             </a:r>
             <a:r>
-              <a:rPr lang="en-US" altLang="ja-JP" sz="2800" i="1" dirty="0" smtClean="0"/>
+              <a:rPr lang="en-US" altLang="ja-JP" sz="2800" i="1" dirty="0"/>
               <a:t>]</a:t>
             </a:r>
           </a:p>
           <a:p>
             <a:r>
               <a:rPr lang="en-US" altLang="ja-JP" sz="2800" i="1" dirty="0"/>
+              <a:t>    yes</a:t>
+            </a:r>
+          </a:p>
+          <a:p>
+            <a:r>
+              <a:rPr lang="en-US" altLang="ja-JP" sz="2800" i="1" dirty="0"/>
+              <a:t>?-</a:t>
+            </a:r>
+            <a:r>
+              <a:rPr lang="en-US" altLang="ja-JP" sz="2800" dirty="0"/>
               <a:t> </a:t>
             </a:r>
             <a:r>
-              <a:rPr lang="en-US" altLang="ja-JP" sz="2800" i="1" dirty="0" smtClean="0"/>
-              <a:t>   yes</a:t>
-            </a:r>
-          </a:p>
-          <a:p>
-            <a:r>
-              <a:rPr lang="en-US" altLang="ja-JP" sz="2800" i="1" dirty="0" smtClean="0"/>
-              <a:t>?-</a:t>
-            </a:r>
-            <a:r>
-              <a:rPr lang="en-US" altLang="ja-JP" sz="2800" dirty="0" smtClean="0"/>
-              <a:t> </a:t>
-            </a:r>
-            <a:r>
-              <a:rPr lang="en-US" altLang="ja-JP" sz="2800" dirty="0" smtClean="0">
+              <a:rPr lang="en-US" altLang="ja-JP" sz="2800" dirty="0">
                 <a:solidFill>
                   <a:srgbClr val="FF0000"/>
                 </a:solidFill>
@@ -14633,7 +14124,7 @@
               <a:t>append(X,[</a:t>
             </a:r>
             <a:r>
-              <a:rPr lang="en-US" altLang="ja-JP" sz="2800" dirty="0" err="1" smtClean="0">
+              <a:rPr lang="en-US" altLang="ja-JP" sz="2800" dirty="0" err="1">
                 <a:solidFill>
                   <a:srgbClr val="FF0000"/>
                 </a:solidFill>
@@ -14641,7 +14132,7 @@
               <a:t>d,c</a:t>
             </a:r>
             <a:r>
-              <a:rPr lang="en-US" altLang="ja-JP" sz="2800" dirty="0" smtClean="0">
+              <a:rPr lang="en-US" altLang="ja-JP" sz="2800" dirty="0">
                 <a:solidFill>
                   <a:srgbClr val="FF0000"/>
                 </a:solidFill>
@@ -14649,7 +14140,7 @@
               <a:t>],[</a:t>
             </a:r>
             <a:r>
-              <a:rPr lang="en-US" altLang="ja-JP" sz="2800" dirty="0" err="1" smtClean="0">
+              <a:rPr lang="en-US" altLang="ja-JP" sz="2800" dirty="0" err="1">
                 <a:solidFill>
                   <a:srgbClr val="FF0000"/>
                 </a:solidFill>
@@ -14657,7 +14148,7 @@
               <a:t>a,b,c,d</a:t>
             </a:r>
             <a:r>
-              <a:rPr lang="en-US" altLang="ja-JP" sz="2800" dirty="0" smtClean="0">
+              <a:rPr lang="en-US" altLang="ja-JP" sz="2800" dirty="0">
                 <a:solidFill>
                   <a:srgbClr val="FF0000"/>
                 </a:solidFill>
@@ -14667,11 +14158,11 @@
           </a:p>
           <a:p>
             <a:r>
-              <a:rPr lang="en-US" altLang="ja-JP" sz="2800" dirty="0" smtClean="0"/>
+              <a:rPr lang="en-US" altLang="ja-JP" sz="2800" dirty="0"/>
               <a:t>    </a:t>
             </a:r>
             <a:r>
-              <a:rPr lang="en-US" altLang="ja-JP" sz="2800" i="1" dirty="0" smtClean="0"/>
+              <a:rPr lang="en-US" altLang="ja-JP" sz="2800" i="1" dirty="0"/>
               <a:t>no</a:t>
             </a:r>
           </a:p>
@@ -14700,15 +14191,15 @@
           <a:lstStyle/>
           <a:p>
             <a:r>
-              <a:rPr kumimoji="1" lang="ja-JP" altLang="en-US" sz="2800" dirty="0" smtClean="0"/>
+              <a:rPr kumimoji="1" lang="ja-JP" altLang="en-US" sz="2800" dirty="0"/>
               <a:t>論理型プログラミングにおいては（変数を含む）</a:t>
             </a:r>
             <a:r>
-              <a:rPr kumimoji="1" lang="en-US" altLang="ja-JP" sz="2800" dirty="0" smtClean="0"/>
+              <a:rPr kumimoji="1" lang="en-US" altLang="ja-JP" sz="2800" dirty="0"/>
               <a:t>query</a:t>
             </a:r>
             <a:r>
-              <a:rPr lang="ja-JP" altLang="en-US" sz="2800" dirty="0" smtClean="0"/>
+              <a:rPr lang="ja-JP" altLang="en-US" sz="2800" dirty="0"/>
               <a:t>に対する答えを見つけるのが計算。</a:t>
             </a:r>
             <a:endParaRPr kumimoji="1" lang="ja-JP" altLang="en-US" sz="2800" dirty="0"/>
@@ -14725,13 +14216,6 @@
   <p:clrMapOvr>
     <a:masterClrMapping/>
   </p:clrMapOvr>
-  <p:timing>
-    <p:tnLst>
-      <p:par>
-        <p:cTn xmlns:p14="http://schemas.microsoft.com/office/powerpoint/2010/main" id="1" dur="indefinite" restart="never" nodeType="tmRoot"/>
-      </p:par>
-    </p:tnLst>
-  </p:timing>
 </p:sld>
 </file>
 
@@ -14770,7 +14254,7 @@
           <a:lstStyle/>
           <a:p>
             <a:r>
-              <a:rPr kumimoji="1" lang="en-US" altLang="ja-JP" dirty="0" smtClean="0"/>
+              <a:rPr kumimoji="1" lang="en-US" altLang="ja-JP" dirty="0"/>
               <a:t>Term</a:t>
             </a:r>
             <a:endParaRPr kumimoji="1" lang="ja-JP" altLang="en-US" dirty="0"/>
@@ -14800,167 +14284,158 @@
           <a:lstStyle/>
           <a:p>
             <a:r>
-              <a:rPr lang="en-US" altLang="ja-JP" sz="2800" dirty="0" smtClean="0"/>
+              <a:rPr lang="en-US" altLang="ja-JP" sz="2800" dirty="0"/>
               <a:t>Simple term:</a:t>
             </a:r>
           </a:p>
           <a:p>
             <a:r>
-              <a:rPr lang="en-US" altLang="ja-JP" sz="2800" dirty="0" smtClean="0"/>
+              <a:rPr lang="en-US" altLang="ja-JP" sz="2800" dirty="0"/>
               <a:t>    </a:t>
             </a:r>
             <a:r>
-              <a:rPr lang="ja-JP" altLang="en-US" sz="2800" dirty="0" smtClean="0"/>
+              <a:rPr lang="ja-JP" altLang="en-US" sz="2800" dirty="0"/>
               <a:t>数</a:t>
             </a:r>
-            <a:endParaRPr kumimoji="1" lang="en-US" altLang="ja-JP" sz="2800" dirty="0" smtClean="0"/>
-          </a:p>
-          <a:p>
-            <a:r>
-              <a:rPr lang="en-US" altLang="ja-JP" sz="2800" dirty="0" smtClean="0"/>
+            <a:endParaRPr kumimoji="1" lang="en-US" altLang="ja-JP" sz="2800" dirty="0"/>
+          </a:p>
+          <a:p>
+            <a:r>
+              <a:rPr lang="en-US" altLang="ja-JP" sz="2800" dirty="0"/>
               <a:t>    </a:t>
             </a:r>
             <a:r>
-              <a:rPr lang="ja-JP" altLang="en-US" sz="2800" dirty="0" smtClean="0"/>
+              <a:rPr lang="ja-JP" altLang="en-US" sz="2800" dirty="0"/>
               <a:t>大文字で始まる変数</a:t>
             </a:r>
-            <a:endParaRPr lang="en-US" altLang="ja-JP" sz="2800" dirty="0" smtClean="0"/>
-          </a:p>
-          <a:p>
-            <a:r>
-              <a:rPr kumimoji="1" lang="en-US" altLang="ja-JP" sz="2800" dirty="0" smtClean="0"/>
+            <a:endParaRPr lang="en-US" altLang="ja-JP" sz="2800" dirty="0"/>
+          </a:p>
+          <a:p>
+            <a:r>
+              <a:rPr kumimoji="1" lang="en-US" altLang="ja-JP" sz="2800" dirty="0"/>
               <a:t>    </a:t>
             </a:r>
             <a:r>
-              <a:rPr kumimoji="1" lang="ja-JP" altLang="en-US" sz="2800" dirty="0" smtClean="0"/>
+              <a:rPr kumimoji="1" lang="ja-JP" altLang="en-US" sz="2800" dirty="0"/>
               <a:t>アトム</a:t>
             </a:r>
             <a:r>
-              <a:rPr kumimoji="1" lang="en-US" altLang="ja-JP" sz="2800" dirty="0" smtClean="0"/>
+              <a:rPr kumimoji="1" lang="en-US" altLang="ja-JP" sz="2800" dirty="0"/>
               <a:t>(atom)</a:t>
             </a:r>
           </a:p>
           <a:p>
             <a:r>
-              <a:rPr lang="en-US" altLang="ja-JP" sz="2800" dirty="0" smtClean="0"/>
+              <a:rPr lang="en-US" altLang="ja-JP" sz="2800" dirty="0"/>
               <a:t>    </a:t>
             </a:r>
             <a:r>
-              <a:rPr lang="ja-JP" altLang="en-US" sz="2800" dirty="0" smtClean="0"/>
+              <a:rPr lang="ja-JP" altLang="en-US" sz="2800" dirty="0"/>
               <a:t>（例）</a:t>
             </a:r>
             <a:r>
-              <a:rPr lang="en-US" altLang="ja-JP" sz="2800" dirty="0" smtClean="0"/>
+              <a:rPr lang="en-US" altLang="ja-JP" sz="2800" dirty="0"/>
               <a:t> 0  1972  X  Source  lisp  algol60</a:t>
             </a:r>
           </a:p>
           <a:p>
             <a:r>
-              <a:rPr kumimoji="1" lang="en-US" altLang="ja-JP" sz="2800" dirty="0" smtClean="0"/>
+              <a:rPr kumimoji="1" lang="en-US" altLang="ja-JP" sz="2800" dirty="0"/>
               <a:t>Compound term:</a:t>
             </a:r>
           </a:p>
           <a:p>
             <a:r>
-              <a:rPr kumimoji="1" lang="en-US" altLang="ja-JP" sz="2800" dirty="0" smtClean="0"/>
+              <a:rPr kumimoji="1" lang="en-US" altLang="ja-JP" sz="2800" dirty="0"/>
               <a:t>    </a:t>
             </a:r>
             <a:r>
-              <a:rPr kumimoji="1" lang="ja-JP" altLang="en-US" sz="2800" dirty="0" smtClean="0"/>
+              <a:rPr kumimoji="1" lang="ja-JP" altLang="en-US" sz="2800" dirty="0"/>
               <a:t>アトムの後に</a:t>
             </a:r>
             <a:r>
-              <a:rPr kumimoji="1" lang="en-US" altLang="ja-JP" sz="2800" dirty="0" smtClean="0"/>
+              <a:rPr kumimoji="1" lang="en-US" altLang="ja-JP" sz="2800" dirty="0"/>
               <a:t>term</a:t>
             </a:r>
             <a:r>
-              <a:rPr kumimoji="1" lang="ja-JP" altLang="en-US" sz="2800" dirty="0" smtClean="0"/>
+              <a:rPr kumimoji="1" lang="ja-JP" altLang="en-US" sz="2800" dirty="0"/>
               <a:t>の列を括弧で囲んだもの</a:t>
             </a:r>
-            <a:endParaRPr kumimoji="1" lang="en-US" altLang="ja-JP" sz="2800" dirty="0" smtClean="0"/>
-          </a:p>
-          <a:p>
-            <a:r>
-              <a:rPr lang="en-US" altLang="ja-JP" sz="2800" dirty="0"/>
-              <a:t> </a:t>
-            </a:r>
-            <a:r>
-              <a:rPr lang="en-US" altLang="ja-JP" sz="2800" dirty="0" smtClean="0"/>
-              <a:t>   </a:t>
-            </a:r>
-            <a:r>
-              <a:rPr lang="ja-JP" altLang="en-US" sz="2800" dirty="0" smtClean="0"/>
+            <a:endParaRPr kumimoji="1" lang="en-US" altLang="ja-JP" sz="2800" dirty="0"/>
+          </a:p>
+          <a:p>
+            <a:r>
+              <a:rPr lang="en-US" altLang="ja-JP" sz="2800" dirty="0"/>
+              <a:t>    </a:t>
+            </a:r>
+            <a:r>
+              <a:rPr lang="ja-JP" altLang="en-US" sz="2800" dirty="0"/>
               <a:t>（例）</a:t>
             </a:r>
             <a:r>
-              <a:rPr lang="en-US" altLang="ja-JP" sz="2800" dirty="0" smtClean="0"/>
+              <a:rPr lang="en-US" altLang="ja-JP" sz="2800" dirty="0"/>
               <a:t> link(</a:t>
             </a:r>
             <a:r>
-              <a:rPr lang="en-US" altLang="ja-JP" sz="2800" dirty="0" err="1" smtClean="0"/>
+              <a:rPr lang="en-US" altLang="ja-JP" sz="2800" dirty="0" err="1"/>
               <a:t>bcpl</a:t>
             </a:r>
             <a:r>
-              <a:rPr lang="en-US" altLang="ja-JP" sz="2800" dirty="0" smtClean="0"/>
+              <a:rPr lang="en-US" altLang="ja-JP" sz="2800" dirty="0"/>
               <a:t>, c)</a:t>
             </a:r>
           </a:p>
           <a:p>
             <a:r>
-              <a:rPr kumimoji="1" lang="ja-JP" altLang="en-US" sz="2800" dirty="0" smtClean="0"/>
+              <a:rPr kumimoji="1" lang="ja-JP" altLang="en-US" sz="2800" dirty="0"/>
               <a:t>中値記法が使える場合もある。</a:t>
             </a:r>
-            <a:endParaRPr kumimoji="1" lang="en-US" altLang="ja-JP" sz="2800" dirty="0" smtClean="0"/>
-          </a:p>
-          <a:p>
-            <a:r>
-              <a:rPr lang="en-US" altLang="ja-JP" sz="2800" dirty="0"/>
-              <a:t> </a:t>
-            </a:r>
-            <a:r>
-              <a:rPr lang="en-US" altLang="ja-JP" sz="2800" dirty="0" smtClean="0"/>
-              <a:t>   </a:t>
-            </a:r>
-            <a:r>
-              <a:rPr lang="ja-JP" altLang="en-US" sz="2800" dirty="0" smtClean="0"/>
+            <a:endParaRPr kumimoji="1" lang="en-US" altLang="ja-JP" sz="2800" dirty="0"/>
+          </a:p>
+          <a:p>
+            <a:r>
+              <a:rPr lang="en-US" altLang="ja-JP" sz="2800" dirty="0"/>
+              <a:t>    </a:t>
+            </a:r>
+            <a:r>
+              <a:rPr lang="ja-JP" altLang="en-US" sz="2800" dirty="0"/>
               <a:t>（例）</a:t>
             </a:r>
             <a:r>
-              <a:rPr lang="en-US" altLang="ja-JP" sz="2800" dirty="0" smtClean="0"/>
+              <a:rPr lang="en-US" altLang="ja-JP" sz="2800" dirty="0"/>
               <a:t> =(X,Y)</a:t>
             </a:r>
             <a:r>
-              <a:rPr lang="ja-JP" altLang="en-US" sz="2800" dirty="0" smtClean="0"/>
+              <a:rPr lang="ja-JP" altLang="en-US" sz="2800" dirty="0"/>
               <a:t>は</a:t>
             </a:r>
             <a:r>
-              <a:rPr lang="en-US" altLang="ja-JP" sz="2800" dirty="0" smtClean="0"/>
+              <a:rPr lang="en-US" altLang="ja-JP" sz="2800" dirty="0"/>
               <a:t>X=Y</a:t>
             </a:r>
             <a:r>
-              <a:rPr lang="ja-JP" altLang="en-US" sz="2800" dirty="0" smtClean="0"/>
+              <a:rPr lang="ja-JP" altLang="en-US" sz="2800" dirty="0"/>
               <a:t>と書いてよい。</a:t>
             </a:r>
-            <a:endParaRPr lang="en-US" altLang="ja-JP" sz="2800" dirty="0" smtClean="0"/>
-          </a:p>
-          <a:p>
-            <a:r>
-              <a:rPr kumimoji="1" lang="en-US" altLang="ja-JP" sz="2800" dirty="0" smtClean="0"/>
+            <a:endParaRPr lang="en-US" altLang="ja-JP" sz="2800" dirty="0"/>
+          </a:p>
+          <a:p>
+            <a:r>
+              <a:rPr kumimoji="1" lang="en-US" altLang="ja-JP" sz="2800" dirty="0"/>
               <a:t>_</a:t>
             </a:r>
             <a:r>
-              <a:rPr kumimoji="1" lang="ja-JP" altLang="en-US" sz="2800" dirty="0" smtClean="0"/>
+              <a:rPr kumimoji="1" lang="ja-JP" altLang="en-US" sz="2800" dirty="0"/>
               <a:t>は特別な変数で</a:t>
             </a:r>
             <a:r>
-              <a:rPr kumimoji="1" lang="en-US" altLang="ja-JP" sz="2800" dirty="0" smtClean="0"/>
+              <a:rPr kumimoji="1" lang="en-US" altLang="ja-JP" sz="2800" dirty="0"/>
               <a:t>placeholder</a:t>
             </a:r>
             <a:r>
-              <a:rPr kumimoji="1" lang="ja-JP" altLang="en-US" sz="2800" dirty="0" smtClean="0"/>
+              <a:rPr kumimoji="1" lang="ja-JP" altLang="en-US" sz="2800" dirty="0"/>
               <a:t>。</a:t>
             </a:r>
-            <a:endParaRPr kumimoji="1" lang="ja-JP" altLang="en-US" sz="2800" dirty="0"/>
           </a:p>
         </p:txBody>
       </p:sp>
@@ -14974,13 +14449,6 @@
   <p:clrMapOvr>
     <a:masterClrMapping/>
   </p:clrMapOvr>
-  <p:timing>
-    <p:tnLst>
-      <p:par>
-        <p:cTn xmlns:p14="http://schemas.microsoft.com/office/powerpoint/2010/main" id="1" dur="indefinite" restart="never" nodeType="tmRoot"/>
-      </p:par>
-    </p:tnLst>
-  </p:timing>
 </p:sld>
 </file>
 
@@ -15024,34 +14492,30 @@
           <a:lstStyle/>
           <a:p>
             <a:r>
-              <a:rPr lang="en-US" altLang="ja-JP" dirty="0" smtClean="0"/>
+              <a:rPr lang="en-US" altLang="ja-JP" dirty="0"/>
               <a:t>Fact, rule, query</a:t>
             </a:r>
             <a:r>
-              <a:rPr lang="ja-JP" altLang="en-US" dirty="0" smtClean="0"/>
+              <a:rPr lang="ja-JP" altLang="en-US" dirty="0"/>
               <a:t>の</a:t>
             </a:r>
             <a:r>
-              <a:rPr kumimoji="1" lang="ja-JP" altLang="en-US" dirty="0" smtClean="0"/>
+              <a:rPr kumimoji="1" lang="ja-JP" altLang="en-US" dirty="0"/>
               <a:t>構文</a:t>
             </a:r>
-            <a:r>
-              <a:rPr kumimoji="1" lang="en-US" altLang="ja-JP" dirty="0" smtClean="0"/>
-              <a:t/>
-            </a:r>
             <a:br>
-              <a:rPr kumimoji="1" lang="en-US" altLang="ja-JP" dirty="0" smtClean="0"/>
+              <a:rPr kumimoji="1" lang="en-US" altLang="ja-JP" dirty="0"/>
             </a:br>
             <a:r>
-              <a:rPr lang="en-US" altLang="ja-JP" dirty="0" smtClean="0"/>
+              <a:rPr lang="en-US" altLang="ja-JP" dirty="0"/>
               <a:t>(Edinburgh Prolog</a:t>
             </a:r>
             <a:r>
-              <a:rPr lang="ja-JP" altLang="en-US" dirty="0" smtClean="0"/>
+              <a:rPr lang="ja-JP" altLang="en-US" dirty="0"/>
               <a:t>の場合</a:t>
             </a:r>
             <a:r>
-              <a:rPr lang="en-US" altLang="ja-JP" dirty="0" smtClean="0"/>
+              <a:rPr lang="en-US" altLang="ja-JP" dirty="0"/>
               <a:t>)</a:t>
             </a:r>
             <a:endParaRPr kumimoji="1" lang="ja-JP" altLang="en-US" dirty="0"/>
@@ -15081,177 +14545,173 @@
           <a:lstStyle/>
           <a:p>
             <a:r>
-              <a:rPr kumimoji="1" lang="en-US" altLang="ja-JP" sz="2800" dirty="0" smtClean="0"/>
+              <a:rPr kumimoji="1" lang="en-US" altLang="ja-JP" sz="2800" dirty="0"/>
               <a:t>&lt;</a:t>
             </a:r>
             <a:r>
-              <a:rPr kumimoji="1" lang="en-US" altLang="ja-JP" sz="2800" i="1" dirty="0" smtClean="0"/>
+              <a:rPr kumimoji="1" lang="en-US" altLang="ja-JP" sz="2800" i="1" dirty="0"/>
               <a:t>fact</a:t>
             </a:r>
             <a:r>
-              <a:rPr kumimoji="1" lang="en-US" altLang="ja-JP" sz="2800" dirty="0" smtClean="0"/>
+              <a:rPr kumimoji="1" lang="en-US" altLang="ja-JP" sz="2800" dirty="0"/>
               <a:t>&gt; ::= &lt;</a:t>
             </a:r>
             <a:r>
-              <a:rPr kumimoji="1" lang="en-US" altLang="ja-JP" sz="2800" i="1" dirty="0" smtClean="0"/>
+              <a:rPr kumimoji="1" lang="en-US" altLang="ja-JP" sz="2800" i="1" dirty="0"/>
               <a:t>term</a:t>
             </a:r>
             <a:r>
-              <a:rPr kumimoji="1" lang="en-US" altLang="ja-JP" sz="2800" dirty="0" smtClean="0"/>
+              <a:rPr kumimoji="1" lang="en-US" altLang="ja-JP" sz="2800" dirty="0"/>
               <a:t>&gt; .</a:t>
             </a:r>
           </a:p>
           <a:p>
             <a:r>
-              <a:rPr lang="en-US" altLang="ja-JP" sz="2800" dirty="0" smtClean="0"/>
+              <a:rPr lang="en-US" altLang="ja-JP" sz="2800" dirty="0"/>
               <a:t>&lt;</a:t>
             </a:r>
             <a:r>
-              <a:rPr lang="en-US" altLang="ja-JP" sz="2800" i="1" dirty="0" smtClean="0"/>
+              <a:rPr lang="en-US" altLang="ja-JP" sz="2800" i="1" dirty="0"/>
               <a:t>rule</a:t>
             </a:r>
             <a:r>
-              <a:rPr lang="en-US" altLang="ja-JP" sz="2800" dirty="0" smtClean="0"/>
+              <a:rPr lang="en-US" altLang="ja-JP" sz="2800" dirty="0"/>
               <a:t>&gt; ::= &lt;</a:t>
             </a:r>
             <a:r>
-              <a:rPr lang="en-US" altLang="ja-JP" sz="2800" i="1" dirty="0" smtClean="0"/>
+              <a:rPr lang="en-US" altLang="ja-JP" sz="2800" i="1" dirty="0"/>
               <a:t>term</a:t>
             </a:r>
             <a:r>
-              <a:rPr lang="en-US" altLang="ja-JP" sz="2800" dirty="0" smtClean="0"/>
+              <a:rPr lang="en-US" altLang="ja-JP" sz="2800" dirty="0"/>
               <a:t>&gt; :- &lt;</a:t>
             </a:r>
             <a:r>
-              <a:rPr lang="en-US" altLang="ja-JP" sz="2800" i="1" dirty="0" smtClean="0"/>
+              <a:rPr lang="en-US" altLang="ja-JP" sz="2800" i="1" dirty="0"/>
               <a:t>terms</a:t>
             </a:r>
             <a:r>
-              <a:rPr lang="en-US" altLang="ja-JP" sz="2800" dirty="0" smtClean="0"/>
+              <a:rPr lang="en-US" altLang="ja-JP" sz="2800" dirty="0"/>
               <a:t>&gt; .</a:t>
             </a:r>
           </a:p>
           <a:p>
             <a:r>
-              <a:rPr kumimoji="1" lang="en-US" altLang="ja-JP" sz="2800" dirty="0" smtClean="0"/>
+              <a:rPr kumimoji="1" lang="en-US" altLang="ja-JP" sz="2800" dirty="0"/>
               <a:t>&lt;</a:t>
             </a:r>
             <a:r>
-              <a:rPr kumimoji="1" lang="en-US" altLang="ja-JP" sz="2800" i="1" dirty="0" smtClean="0"/>
+              <a:rPr kumimoji="1" lang="en-US" altLang="ja-JP" sz="2800" i="1" dirty="0"/>
               <a:t>query</a:t>
             </a:r>
             <a:r>
-              <a:rPr kumimoji="1" lang="en-US" altLang="ja-JP" sz="2800" dirty="0" smtClean="0"/>
+              <a:rPr kumimoji="1" lang="en-US" altLang="ja-JP" sz="2800" dirty="0"/>
               <a:t>&gt; ::= &lt;</a:t>
             </a:r>
             <a:r>
-              <a:rPr kumimoji="1" lang="en-US" altLang="ja-JP" sz="2800" i="1" dirty="0" smtClean="0"/>
+              <a:rPr kumimoji="1" lang="en-US" altLang="ja-JP" sz="2800" i="1" dirty="0"/>
               <a:t>terms</a:t>
             </a:r>
             <a:r>
-              <a:rPr kumimoji="1" lang="en-US" altLang="ja-JP" sz="2800" dirty="0" smtClean="0"/>
+              <a:rPr kumimoji="1" lang="en-US" altLang="ja-JP" sz="2800" dirty="0"/>
               <a:t>&gt; .</a:t>
             </a:r>
           </a:p>
           <a:p>
             <a:r>
-              <a:rPr lang="en-US" altLang="ja-JP" sz="2800" dirty="0" smtClean="0"/>
+              <a:rPr lang="en-US" altLang="ja-JP" sz="2800" dirty="0"/>
               <a:t>&lt;</a:t>
             </a:r>
             <a:r>
-              <a:rPr lang="en-US" altLang="ja-JP" sz="2800" i="1" dirty="0" smtClean="0"/>
+              <a:rPr lang="en-US" altLang="ja-JP" sz="2800" i="1" dirty="0"/>
               <a:t>term</a:t>
             </a:r>
             <a:r>
-              <a:rPr lang="en-US" altLang="ja-JP" sz="2800" dirty="0" smtClean="0"/>
+              <a:rPr lang="en-US" altLang="ja-JP" sz="2800" dirty="0"/>
               <a:t>&gt; ::= &lt;</a:t>
             </a:r>
             <a:r>
-              <a:rPr lang="en-US" altLang="ja-JP" sz="2800" i="1" dirty="0" smtClean="0"/>
+              <a:rPr lang="en-US" altLang="ja-JP" sz="2800" i="1" dirty="0"/>
               <a:t>number</a:t>
             </a:r>
             <a:r>
-              <a:rPr lang="en-US" altLang="ja-JP" sz="2800" dirty="0" smtClean="0"/>
+              <a:rPr lang="en-US" altLang="ja-JP" sz="2800" dirty="0"/>
               <a:t>&gt; | &lt;</a:t>
             </a:r>
             <a:r>
-              <a:rPr lang="en-US" altLang="ja-JP" sz="2800" i="1" dirty="0" smtClean="0"/>
+              <a:rPr lang="en-US" altLang="ja-JP" sz="2800" i="1" dirty="0"/>
               <a:t>atom</a:t>
             </a:r>
             <a:r>
-              <a:rPr lang="en-US" altLang="ja-JP" sz="2800" dirty="0" smtClean="0"/>
+              <a:rPr lang="en-US" altLang="ja-JP" sz="2800" dirty="0"/>
               <a:t>&gt; | &lt;</a:t>
             </a:r>
             <a:r>
-              <a:rPr lang="en-US" altLang="ja-JP" sz="2800" i="1" dirty="0" smtClean="0"/>
+              <a:rPr lang="en-US" altLang="ja-JP" sz="2800" i="1" dirty="0"/>
               <a:t>variable</a:t>
             </a:r>
             <a:r>
-              <a:rPr lang="en-US" altLang="ja-JP" sz="2800" dirty="0" smtClean="0"/>
+              <a:rPr lang="en-US" altLang="ja-JP" sz="2800" dirty="0"/>
               <a:t>&gt; </a:t>
             </a:r>
           </a:p>
           <a:p>
             <a:r>
               <a:rPr lang="en-US" altLang="ja-JP" sz="2800" dirty="0"/>
-              <a:t> </a:t>
-            </a:r>
-            <a:r>
-              <a:rPr lang="en-US" altLang="ja-JP" sz="2800" dirty="0" smtClean="0"/>
-              <a:t>                | &lt;</a:t>
-            </a:r>
-            <a:r>
-              <a:rPr lang="en-US" altLang="ja-JP" sz="2800" i="1" dirty="0" smtClean="0"/>
+              <a:t>                 | &lt;</a:t>
+            </a:r>
+            <a:r>
+              <a:rPr lang="en-US" altLang="ja-JP" sz="2800" i="1" dirty="0"/>
               <a:t>atom</a:t>
             </a:r>
             <a:r>
-              <a:rPr lang="en-US" altLang="ja-JP" sz="2800" dirty="0" smtClean="0"/>
+              <a:rPr lang="en-US" altLang="ja-JP" sz="2800" dirty="0"/>
               <a:t>&gt; (&lt;</a:t>
             </a:r>
             <a:r>
-              <a:rPr lang="en-US" altLang="ja-JP" sz="2800" i="1" dirty="0" smtClean="0"/>
+              <a:rPr lang="en-US" altLang="ja-JP" sz="2800" i="1" dirty="0"/>
               <a:t>terms</a:t>
             </a:r>
             <a:r>
-              <a:rPr lang="en-US" altLang="ja-JP" sz="2800" dirty="0" smtClean="0"/>
+              <a:rPr lang="en-US" altLang="ja-JP" sz="2800" dirty="0"/>
               <a:t>&gt;)</a:t>
             </a:r>
           </a:p>
           <a:p>
             <a:r>
-              <a:rPr kumimoji="1" lang="en-US" altLang="ja-JP" sz="2800" dirty="0" smtClean="0"/>
+              <a:rPr kumimoji="1" lang="en-US" altLang="ja-JP" sz="2800" dirty="0"/>
               <a:t>&lt;</a:t>
             </a:r>
             <a:r>
-              <a:rPr kumimoji="1" lang="en-US" altLang="ja-JP" sz="2800" i="1" dirty="0" smtClean="0"/>
+              <a:rPr kumimoji="1" lang="en-US" altLang="ja-JP" sz="2800" i="1" dirty="0"/>
               <a:t>terms</a:t>
             </a:r>
             <a:r>
-              <a:rPr kumimoji="1" lang="en-US" altLang="ja-JP" sz="2800" dirty="0" smtClean="0"/>
+              <a:rPr kumimoji="1" lang="en-US" altLang="ja-JP" sz="2800" dirty="0"/>
               <a:t>&gt; ::= &lt;</a:t>
             </a:r>
             <a:r>
-              <a:rPr kumimoji="1" lang="en-US" altLang="ja-JP" sz="2800" i="1" dirty="0" smtClean="0"/>
+              <a:rPr kumimoji="1" lang="en-US" altLang="ja-JP" sz="2800" i="1" dirty="0"/>
               <a:t>term</a:t>
             </a:r>
             <a:r>
-              <a:rPr kumimoji="1" lang="en-US" altLang="ja-JP" sz="2800" dirty="0" smtClean="0"/>
+              <a:rPr kumimoji="1" lang="en-US" altLang="ja-JP" sz="2800" dirty="0"/>
               <a:t>&gt; | &lt;</a:t>
             </a:r>
             <a:r>
-              <a:rPr kumimoji="1" lang="en-US" altLang="ja-JP" sz="2800" i="1" dirty="0" smtClean="0"/>
+              <a:rPr kumimoji="1" lang="en-US" altLang="ja-JP" sz="2800" i="1" dirty="0"/>
               <a:t>term</a:t>
             </a:r>
             <a:r>
-              <a:rPr kumimoji="1" lang="en-US" altLang="ja-JP" sz="2800" dirty="0" smtClean="0"/>
+              <a:rPr kumimoji="1" lang="en-US" altLang="ja-JP" sz="2800" dirty="0"/>
               <a:t>&gt;, &lt;</a:t>
             </a:r>
             <a:r>
-              <a:rPr kumimoji="1" lang="en-US" altLang="ja-JP" sz="2800" i="1" dirty="0" smtClean="0"/>
+              <a:rPr kumimoji="1" lang="en-US" altLang="ja-JP" sz="2800" i="1" dirty="0"/>
               <a:t>terms</a:t>
             </a:r>
             <a:r>
-              <a:rPr kumimoji="1" lang="en-US" altLang="ja-JP" sz="2800" dirty="0" smtClean="0"/>
+              <a:rPr kumimoji="1" lang="en-US" altLang="ja-JP" sz="2800" dirty="0"/>
               <a:t>&gt;</a:t>
             </a:r>
             <a:endParaRPr kumimoji="1" lang="ja-JP" altLang="en-US" sz="2800" dirty="0"/>
@@ -15268,13 +14728,6 @@
   <p:clrMapOvr>
     <a:masterClrMapping/>
   </p:clrMapOvr>
-  <p:timing>
-    <p:tnLst>
-      <p:par>
-        <p:cTn xmlns:p14="http://schemas.microsoft.com/office/powerpoint/2010/main" id="1" dur="indefinite" restart="never" nodeType="tmRoot"/>
-      </p:par>
-    </p:tnLst>
-  </p:timing>
 </p:sld>
 </file>
 
